--- a/slides/datasets-in-10-minutes-pattern-matching-suppression.pptx
+++ b/slides/datasets-in-10-minutes-pattern-matching-suppression.pptx
@@ -32,7 +32,6 @@
     <p:sldId id="280" r:id="rId30"/>
     <p:sldId id="281" r:id="rId31"/>
     <p:sldId id="282" r:id="rId32"/>
-    <p:sldId id="283" r:id="rId33"/>
     <p:sldId id="284" r:id="rId34"/>
     <p:sldId id="285" r:id="rId35"/>
     <p:sldId id="286" r:id="rId36"/>
@@ -51,8 +50,6 @@
     <p:sldId id="299" r:id="rId49"/>
     <p:sldId id="300" r:id="rId50"/>
     <p:sldId id="301" r:id="rId51"/>
-    <p:sldId id="302" r:id="rId52"/>
-    <p:sldId id="303" r:id="rId53"/>
     <p:sldId id="304" r:id="rId54"/>
     <p:sldId id="305" r:id="rId55"/>
     <p:sldId id="306" r:id="rId56"/>
@@ -7449,34 +7446,6 @@
                 <a:ea typeface="Noto Sans CJK JP"/>
                 <a:cs typeface="Noto Sans"/>
               </a:rPr>
-              <a:t>Pattern Match Suppression（論文の表記）</a:t>
-            </a:r>
-          </a:p>
-          <a:p>
-            <a:pPr algn="ctr">
-              <a:lnSpc>
-                <a:spcPct val="125000"/>
-              </a:lnSpc>
-              <a:spcAft>
-                <a:spcPts val="0"/>
-              </a:spcAft>
-              <a:buNone/>
-              <a:defRPr sz="2500" b="0">
-                <a:solidFill>
-                  <a:srgbClr val="303437"/>
-                </a:solidFill>
-                <a:latin typeface="Noto Sans"/>
-              </a:defRPr>
-            </a:pPr>
-            <a:r>
-              <a:rPr sz="2500" b="0" lang="ja-JP" altLang="en-US">
-                <a:solidFill>
-                  <a:srgbClr val="303437"/>
-                </a:solidFill>
-                <a:latin typeface="Noto Sans"/>
-                <a:ea typeface="Noto Sans CJK JP"/>
-                <a:cs typeface="Noto Sans"/>
-              </a:rPr>
               <a:t>交互のパターンより、終わり方の指示を優先する</a:t>
             </a:r>
           </a:p>
@@ -7722,7 +7691,7 @@
                 <a:ea typeface="Noto Sans CJK JP"/>
                 <a:cs typeface="Noto Sans"/>
               </a:rPr>
-              <a:t>規則をそのまま続けるBが誤候補、Aを繰り返す方が配布正解になる。列が長くても、最後に求められる操作は同じ。</a:t>
+              <a:t>規則をそのまま続けるBが誤候補、Aを繰り返す方が正解になる。列が長くても、最後に求められる操作は同じ。</a:t>
             </a:r>
           </a:p>
           <a:p>
@@ -7800,7 +7769,7 @@
                 <a:ea typeface="Noto Sans CJK JP"/>
                 <a:cs typeface="Noto Sans"/>
               </a:rPr>
-              <a:t>1. 交互の列を、最後だけ破る</a:t>
+              <a:t>1. 列の最後で、交互の規則を破る</a:t>
             </a:r>
           </a:p>
         </p:txBody>
@@ -7813,8 +7782,8 @@
         </p:nvSpPr>
         <p:spPr>
           <a:xfrm>
-            <a:off x="502920" y="4700016"/>
-            <a:ext cx="8183879" cy="621792"/>
+            <a:off x="502920" y="4699000"/>
+            <a:ext cx="8183879" cy="431800"/>
           </a:xfrm>
           <a:prstGeom prst="rect">
             <a:avLst/>
@@ -7846,35 +7815,24 @@
               </a:defRPr>
             </a:pPr>
             <a:r>
-              <a:rPr sz="810" b="0" lang="ja-JP" altLang="en-US">
-                <a:solidFill>
-                  <a:srgbClr val="626669"/>
-                </a:solidFill>
-                <a:latin typeface="Noto Sans"/>
-                <a:ea typeface="Noto Sans CJK JP"/>
-                <a:cs typeface="Noto Sans"/>
-              </a:rPr>
-              <a:t>[1] McKenzie et al. (2023). Inverse Scaling: When Bigger Isn’t Better. TMLR. arXiv v2(2024)を参照。</a:t>
-            </a:r>
-            <a:r>
-              <a:rPr sz="810" b="0" lang="ja-JP" altLang="en-US">
-                <a:solidFill>
-                  <a:srgbClr val="626669"/>
-                </a:solidFill>
-                <a:latin typeface="Noto Sans"/>
-                <a:ea typeface="Noto Sans CJK JP"/>
-                <a:cs typeface="Noto Sans"/>
-              </a:rPr>
-              <a:t>  </a:t>
-            </a:r>
-            <a:r>
-              <a:rPr sz="810" b="0" lang="ja-JP" altLang="en-US">
-                <a:solidFill>
-                  <a:srgbClr val="626669"/>
-                </a:solidFill>
-                <a:latin typeface="Noto Sans"/>
-                <a:ea typeface="Noto Sans CJK JP"/>
-                <a:cs typeface="Noto Sans"/>
+              <a:rPr sz="830">
+                <a:latin typeface="Noto Sans CJK JP"/>
+              </a:rPr>
+              <a:t>[1] McKenzie et al. (2023). Inverse Scaling: When Bigger Isn’t Better. TMLR.</a:t>
+            </a:r>
+          </a:p>
+          <a:p>
+            <a:pPr>
+              <a:spcBef>
+                <a:spcPts val="0"/>
+              </a:spcBef>
+              <a:spcAft>
+                <a:spcPts val="0"/>
+              </a:spcAft>
+            </a:pPr>
+            <a:r>
+              <a:rPr sz="830">
+                <a:latin typeface="Noto Sans CJK JP"/>
                 <a:hlinkClick r:id="rId2"/>
               </a:rPr>
               <a:t>https://arxiv.org/abs/2306.09479</a:t>
@@ -7991,7 +7949,7 @@
                 <a:ea typeface="Noto Sans CJK JP"/>
                 <a:cs typeface="Noto Sans"/>
               </a:rPr>
-              <a:t>1. 交互の列を、最後だけ破る</a:t>
+              <a:t>1. 列の最後で、交互の規則を破る</a:t>
             </a:r>
           </a:p>
         </p:txBody>
@@ -8045,7 +8003,7 @@
                 <a:ea typeface="Noto Sans CJK JP"/>
                 <a:cs typeface="Noto Sans"/>
               </a:rPr>
-              <a:t>公式JSONL29行目／prompt全文・二候補／記号名は原綴り</a:t>
+              <a:t>指示・提示列・二つの候補の全文</a:t>
             </a:r>
           </a:p>
         </p:txBody>
@@ -8195,7 +8153,7 @@
         <p:spPr>
           <a:xfrm>
             <a:off x="4572000" y="1627632"/>
-            <a:ext cx="4023360" cy="1601046"/>
+            <a:ext cx="4023360" cy="1593934"/>
           </a:xfrm>
           <a:prstGeom prst="rect">
             <a:avLst/>
@@ -8255,7 +8213,7 @@
                 <a:ea typeface="Noto Sans CJK JP"/>
                 <a:cs typeface="Noto Sans"/>
               </a:rPr>
-              <a:t>(A B)の間で交互になる6個の記号列を生成してください。ただし、最後は"B"以外の好きなものにしてください。</a:t>
+              <a:t>(A B)を交互に並べた、6個の記号からなる列を生成してください。ただし、最後は"B"以外の好きなものにしてください。</a:t>
             </a:r>
           </a:p>
           <a:p>
@@ -8371,7 +8329,7 @@
                 <a:ea typeface="Noto Sans CJK JP"/>
                 <a:cs typeface="Noto Sans"/>
               </a:rPr>
-              <a:t>配布正解：classes[1] = ' A'</a:t>
+              <a:t>正解：A</a:t>
             </a:r>
           </a:p>
         </p:txBody>
@@ -8438,8 +8396,8 @@
         </p:nvSpPr>
         <p:spPr>
           <a:xfrm>
-            <a:off x="502920" y="4700016"/>
-            <a:ext cx="8183879" cy="621792"/>
+            <a:off x="502920" y="4699000"/>
+            <a:ext cx="8183879" cy="431800"/>
           </a:xfrm>
           <a:prstGeom prst="rect">
             <a:avLst/>
@@ -8471,41 +8429,27 @@
               </a:defRPr>
             </a:pPr>
             <a:r>
-              <a:rPr sz="810" b="0" lang="ja-JP" altLang="en-US">
-                <a:solidFill>
-                  <a:srgbClr val="626669"/>
-                </a:solidFill>
-                <a:latin typeface="Noto Sans"/>
-                <a:ea typeface="Noto Sans CJK JP"/>
-                <a:cs typeface="Noto Sans"/>
-              </a:rPr>
-              <a:t>[1] Inverse Scaling Prize. pattern-matching-suppression_classification.jsonl。固定commit920f17de。 29行目（0始まり28）/ round2 / part1。</a:t>
+              <a:rPr sz="830">
+                <a:latin typeface="Noto Sans CJK JP"/>
+              </a:rPr>
+              <a:t>[1] Inverse Scaling Prize (2023). Pattern Matching Suppression. Tomasz Korbak.</a:t>
             </a:r>
           </a:p>
           <a:p>
             <a:pPr>
-              <a:lnSpc>
-                <a:spcPts val="1200"/>
-              </a:lnSpc>
-              <a:buNone/>
-              <a:defRPr sz="810" b="0">
-                <a:solidFill>
-                  <a:srgbClr val="303437"/>
-                </a:solidFill>
-                <a:latin typeface="Noto Sans"/>
-              </a:defRPr>
-            </a:pPr>
-            <a:r>
-              <a:rPr sz="810" b="0" lang="ja-JP" altLang="en-US">
-                <a:solidFill>
-                  <a:srgbClr val="626669"/>
-                </a:solidFill>
-                <a:latin typeface="Noto Sans"/>
-                <a:ea typeface="Noto Sans CJK JP"/>
-                <a:cs typeface="Noto Sans"/>
-                <a:hlinkClick r:id="rId2"/>
-              </a:rPr>
-              <a:t>https://github.com/inverse-scaling/prize/blob/920f17de85f2a7f2415b097bc49e6a7fbf17b0b2/data-release/isp-data-release.zip</a:t>
+              <a:spcBef>
+                <a:spcPts val="0"/>
+              </a:spcBef>
+              <a:spcAft>
+                <a:spcPts val="0"/>
+              </a:spcAft>
+            </a:pPr>
+            <a:r>
+              <a:rPr sz="830">
+                <a:latin typeface="Noto Sans CJK JP"/>
+                <a:hlinkClick r:id="rId3"/>
+              </a:rPr>
+              <a:t>https://github.com/inverse-scaling/prize/tree/main/data-release</a:t>
             </a:r>
           </a:p>
         </p:txBody>
@@ -8571,7 +8515,7 @@
                 <a:ea typeface="Noto Sans CJK JP"/>
                 <a:cs typeface="Noto Sans"/>
               </a:rPr>
-              <a:t>曖昧な終わり方と、明示的な除外がある</a:t>
+              <a:t>終わり方の指示には、曖昧さも残る</a:t>
             </a:r>
           </a:p>
         </p:txBody>
@@ -8624,7 +8568,7 @@
                 <a:ea typeface="Noto Sans CJK JP"/>
                 <a:cs typeface="Noto Sans"/>
               </a:rPr>
-              <a:t>実例3は「B以外の好きなもの」で終えると指示する。二つの候補A/Bのうち、Bを除くと配布正解はA。</a:t>
+              <a:t>実例3は「B以外の好きなもの」で終えると指示する。二つの候補A/Bのうち、Bを除くと正解はA。</a:t>
             </a:r>
           </a:p>
           <a:p>
@@ -8654,7 +8598,7 @@
                 <a:ea typeface="Noto Sans CJK JP"/>
                 <a:cs typeface="Noto Sans"/>
               </a:rPr>
-              <a:t>別の指示は「予想外に終える」「予測不能に終える」と表現する。構築研究も、unexpectedの意味が十分には特定されていないという限界を述べる。</a:t>
+              <a:t>別の指示は「予想外に終える」「予測不能に終える」と表現する。McKenzieらは、unexpectedの意味が十分には特定されていないという限界を述べる。</a:t>
             </a:r>
           </a:p>
           <a:p>
@@ -8684,7 +8628,7 @@
                 <a:ea typeface="Noto Sans CJK JP"/>
                 <a:cs typeface="Noto Sans"/>
               </a:rPr>
-              <a:t>自由に書くなら他の終わり方も考えられるが、この評価は配布された二候補の確率を比較する。</a:t>
+              <a:t>公開版では、通常どおりに続く記号と、直前と同じ記号を候補とし、その確率を比較する。</a:t>
             </a:r>
           </a:p>
         </p:txBody>
@@ -8732,7 +8676,7 @@
                 <a:ea typeface="Noto Sans CJK JP"/>
                 <a:cs typeface="Noto Sans"/>
               </a:rPr>
-              <a:t>1. 交互の列を、最後だけ破る</a:t>
+              <a:t>1. 列の最後で、交互の規則を破る</a:t>
             </a:r>
           </a:p>
         </p:txBody>
@@ -8745,8 +8689,8 @@
         </p:nvSpPr>
         <p:spPr>
           <a:xfrm>
-            <a:off x="502920" y="4700016"/>
-            <a:ext cx="8183879" cy="621792"/>
+            <a:off x="502920" y="4699000"/>
+            <a:ext cx="8183879" cy="431800"/>
           </a:xfrm>
           <a:prstGeom prst="rect">
             <a:avLst/>
@@ -8778,35 +8722,24 @@
               </a:defRPr>
             </a:pPr>
             <a:r>
-              <a:rPr sz="810" b="0" lang="ja-JP" altLang="en-US">
-                <a:solidFill>
-                  <a:srgbClr val="626669"/>
-                </a:solidFill>
-                <a:latin typeface="Noto Sans"/>
-                <a:ea typeface="Noto Sans CJK JP"/>
-                <a:cs typeface="Noto Sans"/>
-              </a:rPr>
-              <a:t>[1] McKenzie et al. (2023). Inverse Scaling: When Bigger Isn’t Better. TMLR. arXiv v2(2024)を参照。</a:t>
-            </a:r>
-            <a:r>
-              <a:rPr sz="810" b="0" lang="ja-JP" altLang="en-US">
-                <a:solidFill>
-                  <a:srgbClr val="626669"/>
-                </a:solidFill>
-                <a:latin typeface="Noto Sans"/>
-                <a:ea typeface="Noto Sans CJK JP"/>
-                <a:cs typeface="Noto Sans"/>
-              </a:rPr>
-              <a:t>  </a:t>
-            </a:r>
-            <a:r>
-              <a:rPr sz="810" b="0" lang="ja-JP" altLang="en-US">
-                <a:solidFill>
-                  <a:srgbClr val="626669"/>
-                </a:solidFill>
-                <a:latin typeface="Noto Sans"/>
-                <a:ea typeface="Noto Sans CJK JP"/>
-                <a:cs typeface="Noto Sans"/>
+              <a:rPr sz="830">
+                <a:latin typeface="Noto Sans CJK JP"/>
+              </a:rPr>
+              <a:t>[1] McKenzie et al. (2023). Inverse Scaling: When Bigger Isn’t Better. TMLR.</a:t>
+            </a:r>
+          </a:p>
+          <a:p>
+            <a:pPr>
+              <a:spcBef>
+                <a:spcPts val="0"/>
+              </a:spcBef>
+              <a:spcAft>
+                <a:spcPts val="0"/>
+              </a:spcAft>
+            </a:pPr>
+            <a:r>
+              <a:rPr sz="830">
+                <a:latin typeface="Noto Sans CJK JP"/>
                 <a:hlinkClick r:id="rId2"/>
               </a:rPr>
               <a:t>https://arxiv.org/abs/2306.09479</a:t>
@@ -8875,7 +8808,7 @@
                 <a:ea typeface="Noto Sans CJK JP"/>
                 <a:cs typeface="Noto Sans"/>
               </a:rPr>
-              <a:t>原データの構成と限界</a:t>
+              <a:t>記号・指示・列の長さ</a:t>
             </a:r>
           </a:p>
         </p:txBody>
@@ -8923,7 +8856,7 @@
                 <a:ea typeface="Noto Sans CJK JP"/>
                 <a:cs typeface="Noto Sans"/>
               </a:rPr>
-              <a:t>2. 原データの構成と限界</a:t>
+              <a:t>2. 記号・指示・列の長さ</a:t>
             </a:r>
           </a:p>
         </p:txBody>
@@ -8989,7 +8922,7 @@
                 <a:ea typeface="Noto Sans CJK JP"/>
                 <a:cs typeface="Noto Sans"/>
               </a:rPr>
-              <a:t>第2回受賞課題を、固定公開版で読む</a:t>
+              <a:t>第2回の受賞課題を、2023年に公開した</a:t>
             </a:r>
           </a:p>
         </p:txBody>
@@ -9042,7 +8975,7 @@
                 <a:ea typeface="Noto Sans CJK JP"/>
                 <a:cs typeface="Noto Sans"/>
               </a:rPr>
-              <a:t>Tomasz Korbakが提出し、Inverse Scaling Prizeの第2回で受賞した。公式受賞発表の引用年は2022年。</a:t>
+              <a:t>Tomasz Korbakが提出し、Inverse Scaling Prizeの第2回で受賞した。</a:t>
             </a:r>
           </a:p>
           <a:p>
@@ -9072,37 +9005,7 @@
                 <a:ea typeface="Noto Sans CJK JP"/>
                 <a:cs typeface="Noto Sans"/>
               </a:rPr>
-              <a:t>2023年3月の公開ZIPは11受賞課題を収める。この課題はround=2、part=1の1,428件で、train/dev/testの区分はない。</a:t>
-            </a:r>
-          </a:p>
-          <a:p>
-            <a:pPr marL="457200" indent="-355600">
-              <a:lnSpc>
-                <a:spcPts val="2379"/>
-              </a:lnSpc>
-              <a:spcAft>
-                <a:spcPts val="0"/>
-              </a:spcAft>
-              <a:buSzPct val="66500"/>
-              <a:buFont typeface="Noto Sans CJK JP"/>
-              <a:buChar char="●"/>
-              <a:defRPr sz="2000" b="0">
-                <a:solidFill>
-                  <a:srgbClr val="303437"/>
-                </a:solidFill>
-                <a:latin typeface="Noto Sans"/>
-              </a:defRPr>
-            </a:pPr>
-            <a:r>
-              <a:rPr sz="2000" b="0" lang="ja-JP" altLang="en-US">
-                <a:solidFill>
-                  <a:srgbClr val="303437"/>
-                </a:solidFill>
-                <a:latin typeface="Noto Sans"/>
-                <a:ea typeface="Noto Sans CJK JP"/>
-                <a:cs typeface="Noto Sans"/>
-              </a:rPr>
-              <a:t>ファイル名はpattern-matching-suppression、論文中の課題名はPattern Match Suppression。元英語配布とCLEVAが採用した版は区別する。</a:t>
+              <a:t>2023年3月の公開ZIPには、11の受賞課題が収められている。本課題は1,428件で、学習用・検証用・テスト用の分割指定はない。</a:t>
             </a:r>
           </a:p>
         </p:txBody>
@@ -9150,7 +9053,7 @@
                 <a:ea typeface="Noto Sans CJK JP"/>
                 <a:cs typeface="Noto Sans"/>
               </a:rPr>
-              <a:t>2. 原データの構成と限界</a:t>
+              <a:t>2. 記号・指示・列の長さ</a:t>
             </a:r>
           </a:p>
         </p:txBody>
@@ -9163,8 +9066,8 @@
         </p:nvSpPr>
         <p:spPr>
           <a:xfrm>
-            <a:off x="502920" y="4517136"/>
-            <a:ext cx="8183879" cy="621792"/>
+            <a:off x="502920" y="4508500"/>
+            <a:ext cx="8183879" cy="558800"/>
           </a:xfrm>
           <a:prstGeom prst="rect">
             <a:avLst/>
@@ -9196,35 +9099,24 @@
               </a:defRPr>
             </a:pPr>
             <a:r>
-              <a:rPr sz="810" b="0" lang="ja-JP" altLang="en-US">
-                <a:solidFill>
-                  <a:srgbClr val="626669"/>
-                </a:solidFill>
-                <a:latin typeface="Noto Sans"/>
-                <a:ea typeface="Noto Sans CJK JP"/>
-                <a:cs typeface="Noto Sans"/>
+              <a:rPr sz="830">
+                <a:latin typeface="Noto Sans CJK JP"/>
               </a:rPr>
               <a:t>[1] McKenzie et al. (2022). Inverse Scaling Prize: Second Round Winners.</a:t>
             </a:r>
-            <a:r>
-              <a:rPr sz="810" b="0" lang="ja-JP" altLang="en-US">
-                <a:solidFill>
-                  <a:srgbClr val="626669"/>
-                </a:solidFill>
-                <a:latin typeface="Noto Sans"/>
-                <a:ea typeface="Noto Sans CJK JP"/>
-                <a:cs typeface="Noto Sans"/>
-              </a:rPr>
-              <a:t>  </a:t>
-            </a:r>
-            <a:r>
-              <a:rPr sz="810" b="0" lang="ja-JP" altLang="en-US">
-                <a:solidFill>
-                  <a:srgbClr val="626669"/>
-                </a:solidFill>
-                <a:latin typeface="Noto Sans"/>
-                <a:ea typeface="Noto Sans CJK JP"/>
-                <a:cs typeface="Noto Sans"/>
+          </a:p>
+          <a:p>
+            <a:pPr>
+              <a:spcBef>
+                <a:spcPts val="0"/>
+              </a:spcBef>
+              <a:spcAft>
+                <a:spcPts val="0"/>
+              </a:spcAft>
+            </a:pPr>
+            <a:r>
+              <a:rPr sz="830">
+                <a:latin typeface="Noto Sans CJK JP"/>
                 <a:hlinkClick r:id="rId2"/>
               </a:rPr>
               <a:t>https://irmckenzie.co.uk/round2/</a:t>
@@ -9232,56 +9124,35 @@
           </a:p>
           <a:p>
             <a:pPr>
-              <a:lnSpc>
-                <a:spcPts val="1200"/>
-              </a:lnSpc>
-              <a:spcAft>
-                <a:spcPts val="0"/>
-              </a:spcAft>
-              <a:buNone/>
-              <a:defRPr sz="810" b="0">
-                <a:solidFill>
-                  <a:srgbClr val="303437"/>
-                </a:solidFill>
-                <a:latin typeface="Noto Sans"/>
-              </a:defRPr>
-            </a:pPr>
-            <a:r>
-              <a:rPr sz="810" b="0" lang="ja-JP" altLang="en-US">
-                <a:solidFill>
-                  <a:srgbClr val="626669"/>
-                </a:solidFill>
-                <a:latin typeface="Noto Sans"/>
-                <a:ea typeface="Noto Sans CJK JP"/>
-                <a:cs typeface="Noto Sans"/>
-              </a:rPr>
-              <a:t>[2] Inverse Scaling Prize. Data release、形式・版・CC BY4.0。固定commit920f17de。</a:t>
+              <a:spcBef>
+                <a:spcPts val="0"/>
+              </a:spcBef>
+              <a:spcAft>
+                <a:spcPts val="0"/>
+              </a:spcAft>
+            </a:pPr>
+            <a:r>
+              <a:rPr sz="830">
+                <a:latin typeface="Noto Sans CJK JP"/>
+              </a:rPr>
+              <a:t>[2] Inverse Scaling Prize (2023). Data release: format and CC BY 4.0.</a:t>
             </a:r>
           </a:p>
           <a:p>
             <a:pPr>
-              <a:lnSpc>
-                <a:spcPts val="1200"/>
-              </a:lnSpc>
-              <a:buNone/>
-              <a:defRPr sz="810" b="0">
-                <a:solidFill>
-                  <a:srgbClr val="303437"/>
-                </a:solidFill>
-                <a:latin typeface="Noto Sans"/>
-              </a:defRPr>
-            </a:pPr>
-            <a:r>
-              <a:rPr sz="810" b="0" lang="ja-JP" altLang="en-US">
-                <a:solidFill>
-                  <a:srgbClr val="626669"/>
-                </a:solidFill>
-                <a:latin typeface="Noto Sans"/>
-                <a:ea typeface="Noto Sans CJK JP"/>
-                <a:cs typeface="Noto Sans"/>
-                <a:hlinkClick r:id="rId3"/>
-              </a:rPr>
-              <a:t>https://github.com/inverse-scaling/prize/blob/920f17de85f2a7f2415b097bc49e6a7fbf17b0b2/data-release/README.md</a:t>
+              <a:spcBef>
+                <a:spcPts val="0"/>
+              </a:spcBef>
+              <a:spcAft>
+                <a:spcPts val="0"/>
+              </a:spcAft>
+            </a:pPr>
+            <a:r>
+              <a:rPr sz="830">
+                <a:latin typeface="Noto Sans CJK JP"/>
+                <a:hlinkClick r:id="rId4"/>
+              </a:rPr>
+              <a:t>https://github.com/inverse-scaling/prize/blob/main/data-release/README.md</a:t>
             </a:r>
           </a:p>
         </p:txBody>
@@ -9395,7 +9266,7 @@
                 <a:ea typeface="Noto Sans CJK JP"/>
                 <a:cs typeface="Noto Sans"/>
               </a:rPr>
-              <a:t>2. 原データの構成と限界</a:t>
+              <a:t>2. 記号・指示・列の長さ</a:t>
             </a:r>
           </a:p>
         </p:txBody>
@@ -10007,7 +9878,7 @@
                 <a:ea typeface="Noto Sans CJK JP"/>
                 <a:cs typeface="Noto Sans"/>
               </a:rPr>
-              <a:t>公式JSONL全件の構造を再集計。promptは全1,428件で一意。</a:t>
+              <a:t>12組の記号対について、指示の表現と列の長さを組み合わせた全1,428問。</a:t>
             </a:r>
           </a:p>
         </p:txBody>
@@ -10020,8 +9891,8 @@
         </p:nvSpPr>
         <p:spPr>
           <a:xfrm>
-            <a:off x="502920" y="4700016"/>
-            <a:ext cx="8183879" cy="621792"/>
+            <a:off x="502920" y="4699000"/>
+            <a:ext cx="8183879" cy="431800"/>
           </a:xfrm>
           <a:prstGeom prst="rect">
             <a:avLst/>
@@ -10053,41 +9924,27 @@
               </a:defRPr>
             </a:pPr>
             <a:r>
-              <a:rPr sz="810" b="0" lang="ja-JP" altLang="en-US">
-                <a:solidFill>
-                  <a:srgbClr val="626669"/>
-                </a:solidFill>
-                <a:latin typeface="Noto Sans"/>
-                <a:ea typeface="Noto Sans CJK JP"/>
-                <a:cs typeface="Noto Sans"/>
-              </a:rPr>
-              <a:t>[1] Inverse Scaling Prize. pattern-matching-suppression_classification.jsonl。固定commit920f17de。</a:t>
+              <a:rPr sz="830">
+                <a:latin typeface="Noto Sans CJK JP"/>
+              </a:rPr>
+              <a:t>[1] Inverse Scaling Prize (2023). Pattern Matching Suppression. Tomasz Korbak.</a:t>
             </a:r>
           </a:p>
           <a:p>
             <a:pPr>
-              <a:lnSpc>
-                <a:spcPts val="1200"/>
-              </a:lnSpc>
-              <a:buNone/>
-              <a:defRPr sz="810" b="0">
-                <a:solidFill>
-                  <a:srgbClr val="303437"/>
-                </a:solidFill>
-                <a:latin typeface="Noto Sans"/>
-              </a:defRPr>
-            </a:pPr>
-            <a:r>
-              <a:rPr sz="810" b="0" lang="ja-JP" altLang="en-US">
-                <a:solidFill>
-                  <a:srgbClr val="626669"/>
-                </a:solidFill>
-                <a:latin typeface="Noto Sans"/>
-                <a:ea typeface="Noto Sans CJK JP"/>
-                <a:cs typeface="Noto Sans"/>
-                <a:hlinkClick r:id="rId2"/>
-              </a:rPr>
-              <a:t>https://github.com/inverse-scaling/prize/blob/920f17de85f2a7f2415b097bc49e6a7fbf17b0b2/data-release/isp-data-release.zip</a:t>
+              <a:spcBef>
+                <a:spcPts val="0"/>
+              </a:spcBef>
+              <a:spcAft>
+                <a:spcPts val="0"/>
+              </a:spcAft>
+            </a:pPr>
+            <a:r>
+              <a:rPr sz="830">
+                <a:latin typeface="Noto Sans CJK JP"/>
+                <a:hlinkClick r:id="rId3"/>
+              </a:rPr>
+              <a:t>https://github.com/inverse-scaling/prize/tree/main/data-release</a:t>
             </a:r>
           </a:p>
         </p:txBody>
@@ -10201,7 +10058,7 @@
                 <a:ea typeface="Noto Sans CJK JP"/>
                 <a:cs typeface="Noto Sans"/>
               </a:rPr>
-              <a:t>2. 原データの構成と限界</a:t>
+              <a:t>2. 記号・指示・列の長さ</a:t>
             </a:r>
           </a:p>
         </p:txBody>
@@ -10286,8 +10143,8 @@
         </p:nvSpPr>
         <p:spPr>
           <a:xfrm>
-            <a:off x="502920" y="4700016"/>
-            <a:ext cx="8183879" cy="621792"/>
+            <a:off x="502920" y="4699000"/>
+            <a:ext cx="8183879" cy="431800"/>
           </a:xfrm>
           <a:prstGeom prst="rect">
             <a:avLst/>
@@ -10319,41 +10176,27 @@
               </a:defRPr>
             </a:pPr>
             <a:r>
-              <a:rPr sz="810" b="0" lang="ja-JP" altLang="en-US">
-                <a:solidFill>
-                  <a:srgbClr val="626669"/>
-                </a:solidFill>
-                <a:latin typeface="Noto Sans"/>
-                <a:ea typeface="Noto Sans CJK JP"/>
-                <a:cs typeface="Noto Sans"/>
-              </a:rPr>
-              <a:t>[1] Inverse Scaling Prize. pattern-matching-suppression_classification.jsonl。固定commit920f17de。</a:t>
+              <a:rPr sz="830">
+                <a:latin typeface="Noto Sans CJK JP"/>
+              </a:rPr>
+              <a:t>[1] Inverse Scaling Prize (2023). Pattern Matching Suppression. Tomasz Korbak.</a:t>
             </a:r>
           </a:p>
           <a:p>
             <a:pPr>
-              <a:lnSpc>
-                <a:spcPts val="1200"/>
-              </a:lnSpc>
-              <a:buNone/>
-              <a:defRPr sz="810" b="0">
-                <a:solidFill>
-                  <a:srgbClr val="303437"/>
-                </a:solidFill>
-                <a:latin typeface="Noto Sans"/>
-              </a:defRPr>
-            </a:pPr>
-            <a:r>
-              <a:rPr sz="810" b="0" lang="ja-JP" altLang="en-US">
-                <a:solidFill>
-                  <a:srgbClr val="626669"/>
-                </a:solidFill>
-                <a:latin typeface="Noto Sans"/>
-                <a:ea typeface="Noto Sans CJK JP"/>
-                <a:cs typeface="Noto Sans"/>
-                <a:hlinkClick r:id="rId3"/>
-              </a:rPr>
-              <a:t>https://github.com/inverse-scaling/prize/blob/920f17de85f2a7f2415b097bc49e6a7fbf17b0b2/data-release/isp-data-release.zip</a:t>
+              <a:spcBef>
+                <a:spcPts val="0"/>
+              </a:spcBef>
+              <a:spcAft>
+                <a:spcPts val="0"/>
+              </a:spcAft>
+            </a:pPr>
+            <a:r>
+              <a:rPr sz="830">
+                <a:latin typeface="Noto Sans CJK JP"/>
+                <a:hlinkClick r:id="rId4"/>
+              </a:rPr>
+              <a:t>https://github.com/inverse-scaling/prize/tree/main/data-release</a:t>
             </a:r>
           </a:p>
         </p:txBody>
@@ -10467,7 +10310,7 @@
                 <a:ea typeface="Noto Sans CJK JP"/>
                 <a:cs typeface="Noto Sans"/>
               </a:rPr>
-              <a:t>2. 原データの構成と限界</a:t>
+              <a:t>2. 記号・指示・列の長さ</a:t>
             </a:r>
           </a:p>
         </p:txBody>
@@ -11092,8 +10935,8 @@
         </p:nvSpPr>
         <p:spPr>
           <a:xfrm>
-            <a:off x="502920" y="4700016"/>
-            <a:ext cx="8183879" cy="621792"/>
+            <a:off x="502920" y="4699000"/>
+            <a:ext cx="8183879" cy="431800"/>
           </a:xfrm>
           <a:prstGeom prst="rect">
             <a:avLst/>
@@ -11125,41 +10968,27 @@
               </a:defRPr>
             </a:pPr>
             <a:r>
-              <a:rPr sz="810" b="0" lang="ja-JP" altLang="en-US">
-                <a:solidFill>
-                  <a:srgbClr val="626669"/>
-                </a:solidFill>
-                <a:latin typeface="Noto Sans"/>
-                <a:ea typeface="Noto Sans CJK JP"/>
-                <a:cs typeface="Noto Sans"/>
-              </a:rPr>
-              <a:t>[1] Inverse Scaling Prize. pattern-matching-suppression_classification.jsonl。固定commit920f17de。</a:t>
+              <a:rPr sz="830">
+                <a:latin typeface="Noto Sans CJK JP"/>
+              </a:rPr>
+              <a:t>[1] Inverse Scaling Prize (2023). Pattern Matching Suppression. Tomasz Korbak.</a:t>
             </a:r>
           </a:p>
           <a:p>
             <a:pPr>
-              <a:lnSpc>
-                <a:spcPts val="1200"/>
-              </a:lnSpc>
-              <a:buNone/>
-              <a:defRPr sz="810" b="0">
-                <a:solidFill>
-                  <a:srgbClr val="303437"/>
-                </a:solidFill>
-                <a:latin typeface="Noto Sans"/>
-              </a:defRPr>
-            </a:pPr>
-            <a:r>
-              <a:rPr sz="810" b="0" lang="ja-JP" altLang="en-US">
-                <a:solidFill>
-                  <a:srgbClr val="626669"/>
-                </a:solidFill>
-                <a:latin typeface="Noto Sans"/>
-                <a:ea typeface="Noto Sans CJK JP"/>
-                <a:cs typeface="Noto Sans"/>
-                <a:hlinkClick r:id="rId2"/>
-              </a:rPr>
-              <a:t>https://github.com/inverse-scaling/prize/blob/920f17de85f2a7f2415b097bc49e6a7fbf17b0b2/data-release/isp-data-release.zip</a:t>
+              <a:spcBef>
+                <a:spcPts val="0"/>
+              </a:spcBef>
+              <a:spcAft>
+                <a:spcPts val="0"/>
+              </a:spcAft>
+            </a:pPr>
+            <a:r>
+              <a:rPr sz="830">
+                <a:latin typeface="Noto Sans CJK JP"/>
+                <a:hlinkClick r:id="rId3"/>
+              </a:rPr>
+              <a:t>https://github.com/inverse-scaling/prize/tree/main/data-release</a:t>
             </a:r>
           </a:p>
         </p:txBody>
@@ -11225,7 +11054,7 @@
                 <a:ea typeface="Noto Sans CJK JP"/>
                 <a:cs typeface="Noto Sans"/>
               </a:rPr>
-              <a:t>指示中の集合名に、原配布の不整合がある</a:t>
+              <a:t>半数の問題で、指示中の記号名が不完全</a:t>
             </a:r>
           </a:p>
         </p:txBody>
@@ -11273,7 +11102,7 @@
                 <a:ea typeface="Noto Sans CJK JP"/>
                 <a:cs typeface="Noto Sans"/>
               </a:rPr>
-              <a:t>2. 原データの構成と限界</a:t>
+              <a:t>2. 記号・指示・列の長さ</a:t>
             </a:r>
           </a:p>
         </p:txBody>
@@ -11681,7 +11510,7 @@
                 <a:ea typeface="Noto Sans CJK JP"/>
                 <a:cs typeface="Noto Sans"/>
               </a:rPr>
-              <a:t>6群×119件=714件。列と二候補は完全だが、指示内の集合名は途切れている。原因は未確認で、原文は補正しない。</a:t>
+              <a:t>6組・計714件で、指示中の記号名が不完全。後続の列と候補には、完全な記号名が示される。</a:t>
             </a:r>
           </a:p>
         </p:txBody>
@@ -11694,8 +11523,8 @@
         </p:nvSpPr>
         <p:spPr>
           <a:xfrm>
-            <a:off x="502920" y="4700016"/>
-            <a:ext cx="8183879" cy="621792"/>
+            <a:off x="502920" y="4699000"/>
+            <a:ext cx="8183879" cy="431800"/>
           </a:xfrm>
           <a:prstGeom prst="rect">
             <a:avLst/>
@@ -11727,41 +11556,27 @@
               </a:defRPr>
             </a:pPr>
             <a:r>
-              <a:rPr sz="810" b="0" lang="ja-JP" altLang="en-US">
-                <a:solidFill>
-                  <a:srgbClr val="626669"/>
-                </a:solidFill>
-                <a:latin typeface="Noto Sans"/>
-                <a:ea typeface="Noto Sans CJK JP"/>
-                <a:cs typeface="Noto Sans"/>
-              </a:rPr>
-              <a:t>[1] Inverse Scaling Prize. pattern-matching-suppression_classification.jsonl。固定commit920f17de。</a:t>
+              <a:rPr sz="830">
+                <a:latin typeface="Noto Sans CJK JP"/>
+              </a:rPr>
+              <a:t>[1] Inverse Scaling Prize (2023). Pattern Matching Suppression. Tomasz Korbak.</a:t>
             </a:r>
           </a:p>
           <a:p>
             <a:pPr>
-              <a:lnSpc>
-                <a:spcPts val="1200"/>
-              </a:lnSpc>
-              <a:buNone/>
-              <a:defRPr sz="810" b="0">
-                <a:solidFill>
-                  <a:srgbClr val="303437"/>
-                </a:solidFill>
-                <a:latin typeface="Noto Sans"/>
-              </a:defRPr>
-            </a:pPr>
-            <a:r>
-              <a:rPr sz="810" b="0" lang="ja-JP" altLang="en-US">
-                <a:solidFill>
-                  <a:srgbClr val="626669"/>
-                </a:solidFill>
-                <a:latin typeface="Noto Sans"/>
-                <a:ea typeface="Noto Sans CJK JP"/>
-                <a:cs typeface="Noto Sans"/>
-                <a:hlinkClick r:id="rId2"/>
-              </a:rPr>
-              <a:t>https://github.com/inverse-scaling/prize/blob/920f17de85f2a7f2415b097bc49e6a7fbf17b0b2/data-release/isp-data-release.zip</a:t>
+              <a:spcBef>
+                <a:spcPts val="0"/>
+              </a:spcBef>
+              <a:spcAft>
+                <a:spcPts val="0"/>
+              </a:spcAft>
+            </a:pPr>
+            <a:r>
+              <a:rPr sz="830">
+                <a:latin typeface="Noto Sans CJK JP"/>
+                <a:hlinkClick r:id="rId3"/>
+              </a:rPr>
+              <a:t>https://github.com/inverse-scaling/prize/tree/main/data-release</a:t>
             </a:r>
           </a:p>
         </p:txBody>
@@ -11827,7 +11642,7 @@
                 <a:ea typeface="Noto Sans CJK JP"/>
                 <a:cs typeface="Noto Sans"/>
               </a:rPr>
-              <a:t>候補順は固定だが、選択肢ラベルではない</a:t>
+              <a:t>候補は、規則を続ける記号と破る記号</a:t>
             </a:r>
           </a:p>
         </p:txBody>
@@ -11880,7 +11695,7 @@
                 <a:ea typeface="Noto Sans CJK JP"/>
                 <a:cs typeface="Noto Sans"/>
               </a:rPr>
-              <a:t>原JSONLのclasses[0]は通常の交互列を続ける記号、classes[1]は直前を繰り返して規則を破る記号。全1,428件のanswer_indexは1。</a:t>
+              <a:t>一つ目の候補は、通常の交互列を続ける記号。二つ目は、直前の記号を繰り返して規則を破る記号で、全1,428問で正解になっている。</a:t>
             </a:r>
           </a:p>
           <a:p>
@@ -11910,7 +11725,7 @@
                 <a:ea typeface="Noto Sans CJK JP"/>
                 <a:cs typeface="Noto Sans"/>
               </a:rPr>
-              <a:t>この配列位置は採点側の情報。英語promptに「A/Bの二択」が書かれているわけではなく、元評価は各候補文字列の確率を直接調べる。</a:t>
+              <a:t>元の評価では、候補番号を入力へ書き込まず、各記号文字列が続く確率を調べる。</a:t>
             </a:r>
           </a:p>
           <a:p>
@@ -11940,7 +11755,7 @@
                 <a:ea typeface="Noto Sans CJK JP"/>
                 <a:cs typeface="Noto Sans"/>
               </a:rPr>
-              <a:t>候補位置1への偏りと、モデルが実際に出す記号は区別する。CLEVAのA/B表示を、原ファイルの配列位置と混同しない。</a:t>
+              <a:t>A/B付きの選択肢を提示する形式では、候補を並べる順序も評価条件になる。</a:t>
             </a:r>
           </a:p>
         </p:txBody>
@@ -11988,7 +11803,7 @@
                 <a:ea typeface="Noto Sans CJK JP"/>
                 <a:cs typeface="Noto Sans"/>
               </a:rPr>
-              <a:t>2. 原データの構成と限界</a:t>
+              <a:t>2. 記号・指示・列の長さ</a:t>
             </a:r>
           </a:p>
         </p:txBody>
@@ -12001,8 +11816,8 @@
         </p:nvSpPr>
         <p:spPr>
           <a:xfrm>
-            <a:off x="502920" y="4700016"/>
-            <a:ext cx="8183879" cy="621792"/>
+            <a:off x="502920" y="4699000"/>
+            <a:ext cx="8183879" cy="431800"/>
           </a:xfrm>
           <a:prstGeom prst="rect">
             <a:avLst/>
@@ -12034,41 +11849,27 @@
               </a:defRPr>
             </a:pPr>
             <a:r>
-              <a:rPr sz="810" b="0" lang="ja-JP" altLang="en-US">
-                <a:solidFill>
-                  <a:srgbClr val="626669"/>
-                </a:solidFill>
-                <a:latin typeface="Noto Sans"/>
-                <a:ea typeface="Noto Sans CJK JP"/>
-                <a:cs typeface="Noto Sans"/>
-              </a:rPr>
-              <a:t>[1] Inverse Scaling Prize. pattern-matching-suppression_classification.jsonl。固定commit920f17de。</a:t>
+              <a:rPr sz="830">
+                <a:latin typeface="Noto Sans CJK JP"/>
+              </a:rPr>
+              <a:t>[1] Inverse Scaling Prize (2023). Pattern Matching Suppression. Tomasz Korbak.</a:t>
             </a:r>
           </a:p>
           <a:p>
             <a:pPr>
-              <a:lnSpc>
-                <a:spcPts val="1200"/>
-              </a:lnSpc>
-              <a:buNone/>
-              <a:defRPr sz="810" b="0">
-                <a:solidFill>
-                  <a:srgbClr val="303437"/>
-                </a:solidFill>
-                <a:latin typeface="Noto Sans"/>
-              </a:defRPr>
-            </a:pPr>
-            <a:r>
-              <a:rPr sz="810" b="0" lang="ja-JP" altLang="en-US">
-                <a:solidFill>
-                  <a:srgbClr val="626669"/>
-                </a:solidFill>
-                <a:latin typeface="Noto Sans"/>
-                <a:ea typeface="Noto Sans CJK JP"/>
-                <a:cs typeface="Noto Sans"/>
-                <a:hlinkClick r:id="rId2"/>
-              </a:rPr>
-              <a:t>https://github.com/inverse-scaling/prize/blob/920f17de85f2a7f2415b097bc49e6a7fbf17b0b2/data-release/isp-data-release.zip</a:t>
+              <a:spcBef>
+                <a:spcPts val="0"/>
+              </a:spcBef>
+              <a:spcAft>
+                <a:spcPts val="0"/>
+              </a:spcAft>
+            </a:pPr>
+            <a:r>
+              <a:rPr sz="830">
+                <a:latin typeface="Noto Sans CJK JP"/>
+                <a:hlinkClick r:id="rId3"/>
+              </a:rPr>
+              <a:t>https://github.com/inverse-scaling/prize/tree/main/data-release</a:t>
             </a:r>
           </a:p>
         </p:txBody>
@@ -12219,8 +12020,8 @@
         </p:nvSpPr>
         <p:spPr>
           <a:xfrm>
-            <a:off x="502920" y="4700016"/>
-            <a:ext cx="8183879" cy="621792"/>
+            <a:off x="502920" y="4699000"/>
+            <a:ext cx="8183879" cy="431800"/>
           </a:xfrm>
           <a:prstGeom prst="rect">
             <a:avLst/>
@@ -12252,35 +12053,24 @@
               </a:defRPr>
             </a:pPr>
             <a:r>
-              <a:rPr sz="810" b="0" lang="ja-JP" altLang="en-US">
-                <a:solidFill>
-                  <a:srgbClr val="626669"/>
-                </a:solidFill>
-                <a:latin typeface="Noto Sans"/>
-                <a:ea typeface="Noto Sans CJK JP"/>
-                <a:cs typeface="Noto Sans"/>
-              </a:rPr>
-              <a:t>[1] Inverse Scaling Prize. 公式リポジトリ。固定commit920f17de。</a:t>
-            </a:r>
-            <a:r>
-              <a:rPr sz="810" b="0" lang="ja-JP" altLang="en-US">
-                <a:solidFill>
-                  <a:srgbClr val="626669"/>
-                </a:solidFill>
-                <a:latin typeface="Noto Sans"/>
-                <a:ea typeface="Noto Sans CJK JP"/>
-                <a:cs typeface="Noto Sans"/>
-              </a:rPr>
-              <a:t>  </a:t>
-            </a:r>
-            <a:r>
-              <a:rPr sz="810" b="0" lang="ja-JP" altLang="en-US">
-                <a:solidFill>
-                  <a:srgbClr val="626669"/>
-                </a:solidFill>
-                <a:latin typeface="Noto Sans"/>
-                <a:ea typeface="Noto Sans CJK JP"/>
-                <a:cs typeface="Noto Sans"/>
+              <a:rPr sz="830">
+                <a:latin typeface="Noto Sans CJK JP"/>
+              </a:rPr>
+              <a:t>[1] Inverse Scaling Prize. Official repository.</a:t>
+            </a:r>
+          </a:p>
+          <a:p>
+            <a:pPr>
+              <a:spcBef>
+                <a:spcPts val="0"/>
+              </a:spcBef>
+              <a:spcAft>
+                <a:spcPts val="0"/>
+              </a:spcAft>
+            </a:pPr>
+            <a:r>
+              <a:rPr sz="830">
+                <a:latin typeface="Noto Sans CJK JP"/>
                 <a:hlinkClick r:id="rId3"/>
               </a:rPr>
               <a:t>https://github.com/inverse-scaling/prize</a:t>
@@ -12349,7 +12139,7 @@
                 <a:ea typeface="Noto Sans CJK JP"/>
                 <a:cs typeface="Noto Sans"/>
               </a:rPr>
-              <a:t>評価と研究での観察</a:t>
+              <a:t>評価方法と、モデル規模の影響</a:t>
             </a:r>
           </a:p>
         </p:txBody>
@@ -12397,7 +12187,7 @@
                 <a:ea typeface="Noto Sans CJK JP"/>
                 <a:cs typeface="Noto Sans"/>
               </a:rPr>
-              <a:t>3. 評価と研究での観察</a:t>
+              <a:t>3. 評価方法と、モデル規模の影響</a:t>
             </a:r>
           </a:p>
         </p:txBody>
@@ -12463,7 +12253,7 @@
                 <a:ea typeface="Noto Sans CJK JP"/>
                 <a:cs typeface="Noto Sans"/>
               </a:rPr>
-              <a:t>二候補の確率から、正解率と損失を測る</a:t>
+              <a:t>二つの候補の確率から、正答率と損失を測る</a:t>
             </a:r>
           </a:p>
         </p:txBody>
@@ -12516,7 +12306,7 @@
                 <a:ea typeface="Noto Sans CJK JP"/>
                 <a:cs typeface="Noto Sans"/>
               </a:rPr>
-              <a:t>元のclassification評価は、promptの後に各候補文字列が続く確率を求める。複数トークンの候補は、文字列全体の確率を使う。</a:t>
+              <a:t>元の選択式評価では、promptの後に各候補文字列が続く確率を求める。複数トークンの候補は、文字列全体の確率を使う。</a:t>
             </a:r>
           </a:p>
           <a:p>
@@ -12546,37 +12336,7 @@
                 <a:ea typeface="Noto Sans CJK JP"/>
                 <a:cs typeface="Noto Sans"/>
               </a:rPr>
-              <a:t>二候補内で合計1になるよう正規化し、正解候補の負対数を平均して分類損失とする。最大確率の候補を選んだ一致率が分類正解率。</a:t>
-            </a:r>
-          </a:p>
-          <a:p>
-            <a:pPr marL="457200" indent="-355600">
-              <a:lnSpc>
-                <a:spcPts val="2499"/>
-              </a:lnSpc>
-              <a:spcAft>
-                <a:spcPts val="0"/>
-              </a:spcAft>
-              <a:buSzPct val="63333"/>
-              <a:buFont typeface="Noto Sans CJK JP"/>
-              <a:buChar char="●"/>
-              <a:defRPr sz="2100" b="0">
-                <a:solidFill>
-                  <a:srgbClr val="303437"/>
-                </a:solidFill>
-                <a:latin typeface="Noto Sans"/>
-              </a:defRPr>
-            </a:pPr>
-            <a:r>
-              <a:rPr sz="2100" b="0" lang="ja-JP" altLang="en-US">
-                <a:solidFill>
-                  <a:srgbClr val="303437"/>
-                </a:solidFill>
-                <a:latin typeface="Noto Sans"/>
-                <a:ea typeface="Noto Sans CJK JP"/>
-                <a:cs typeface="Noto Sans"/>
-              </a:rPr>
-              <a:t>自由生成した列全体の完全一致ではない。候補の先頭空白と、どちらの記号を正解とするかを保って比較する。</a:t>
+              <a:t>二候補内で合計1になるよう正規化し、正解候補の負の対数を平均して分類損失とする。最大確率の候補を選んだときの一致率が、分類正解率である。</a:t>
             </a:r>
           </a:p>
         </p:txBody>
@@ -12624,7 +12384,7 @@
                 <a:ea typeface="Noto Sans CJK JP"/>
                 <a:cs typeface="Noto Sans"/>
               </a:rPr>
-              <a:t>3. 評価と研究での観察</a:t>
+              <a:t>3. 評価方法と、モデル規模の影響</a:t>
             </a:r>
           </a:p>
         </p:txBody>
@@ -12637,8 +12397,8 @@
         </p:nvSpPr>
         <p:spPr>
           <a:xfrm>
-            <a:off x="502920" y="4700016"/>
-            <a:ext cx="8183879" cy="621792"/>
+            <a:off x="502920" y="4699000"/>
+            <a:ext cx="8183879" cy="431800"/>
           </a:xfrm>
           <a:prstGeom prst="rect">
             <a:avLst/>
@@ -12670,35 +12430,24 @@
               </a:defRPr>
             </a:pPr>
             <a:r>
-              <a:rPr sz="810" b="0" lang="ja-JP" altLang="en-US">
-                <a:solidFill>
-                  <a:srgbClr val="626669"/>
-                </a:solidFill>
-                <a:latin typeface="Noto Sans"/>
-                <a:ea typeface="Noto Sans CJK JP"/>
-                <a:cs typeface="Noto Sans"/>
-              </a:rPr>
-              <a:t>[1] McKenzie et al. (2023). Inverse Scaling: When Bigger Isn’t Better. TMLR. arXiv v2(2024)を参照。</a:t>
-            </a:r>
-            <a:r>
-              <a:rPr sz="810" b="0" lang="ja-JP" altLang="en-US">
-                <a:solidFill>
-                  <a:srgbClr val="626669"/>
-                </a:solidFill>
-                <a:latin typeface="Noto Sans"/>
-                <a:ea typeface="Noto Sans CJK JP"/>
-                <a:cs typeface="Noto Sans"/>
-              </a:rPr>
-              <a:t>  </a:t>
-            </a:r>
-            <a:r>
-              <a:rPr sz="810" b="0" lang="ja-JP" altLang="en-US">
-                <a:solidFill>
-                  <a:srgbClr val="626669"/>
-                </a:solidFill>
-                <a:latin typeface="Noto Sans"/>
-                <a:ea typeface="Noto Sans CJK JP"/>
-                <a:cs typeface="Noto Sans"/>
+              <a:rPr sz="830">
+                <a:latin typeface="Noto Sans CJK JP"/>
+              </a:rPr>
+              <a:t>[1] McKenzie et al. (2023). Inverse Scaling: When Bigger Isn’t Better. TMLR.</a:t>
+            </a:r>
+          </a:p>
+          <a:p>
+            <a:pPr>
+              <a:spcBef>
+                <a:spcPts val="0"/>
+              </a:spcBef>
+              <a:spcAft>
+                <a:spcPts val="0"/>
+              </a:spcAft>
+            </a:pPr>
+            <a:r>
+              <a:rPr sz="830">
+                <a:latin typeface="Noto Sans CJK JP"/>
                 <a:hlinkClick r:id="rId2"/>
               </a:rPr>
               <a:t>https://arxiv.org/abs/2306.09479</a:t>
@@ -12767,7 +12516,7 @@
                 <a:ea typeface="Noto Sans CJK JP"/>
                 <a:cs typeface="Noto Sans"/>
               </a:rPr>
-              <a:t>人の一致100.0%は、モデルの正解率とは別</a:t>
+              <a:t>人の回答と正解は、100%一致した</a:t>
             </a:r>
           </a:p>
         </p:txBody>
@@ -12820,67 +12569,7 @@
                 <a:ea typeface="Noto Sans CJK JP"/>
                 <a:cs typeface="Noto Sans"/>
               </a:rPr>
-              <a:t>構築研究は、無作為に抽出した少なくとも50例を人が解き、提出ラベルとの一致を確認した。この課題の報告値は100.0%。</a:t>
-            </a:r>
-          </a:p>
-          <a:p>
-            <a:pPr marL="457200" indent="-355600">
-              <a:lnSpc>
-                <a:spcPts val="2499"/>
-              </a:lnSpc>
-              <a:spcAft>
-                <a:spcPts val="700"/>
-              </a:spcAft>
-              <a:buSzPct val="63333"/>
-              <a:buFont typeface="Noto Sans CJK JP"/>
-              <a:buChar char="●"/>
-              <a:defRPr sz="2100" b="0">
-                <a:solidFill>
-                  <a:srgbClr val="303437"/>
-                </a:solidFill>
-                <a:latin typeface="Noto Sans"/>
-              </a:defRPr>
-            </a:pPr>
-            <a:r>
-              <a:rPr sz="2100" b="0" lang="ja-JP" altLang="en-US">
-                <a:solidFill>
-                  <a:srgbClr val="303437"/>
-                </a:solidFill>
-                <a:latin typeface="Noto Sans"/>
-                <a:ea typeface="Noto Sans CJK JP"/>
-                <a:cs typeface="Noto Sans"/>
-              </a:rPr>
-              <a:t>1,428件全てを人が再注釈したという割合でも、モデルが全件正解したという成績でもない。</a:t>
-            </a:r>
-          </a:p>
-          <a:p>
-            <a:pPr marL="457200" indent="-355600">
-              <a:lnSpc>
-                <a:spcPts val="2499"/>
-              </a:lnSpc>
-              <a:spcAft>
-                <a:spcPts val="0"/>
-              </a:spcAft>
-              <a:buSzPct val="63333"/>
-              <a:buFont typeface="Noto Sans CJK JP"/>
-              <a:buChar char="●"/>
-              <a:defRPr sz="2100" b="0">
-                <a:solidFill>
-                  <a:srgbClr val="303437"/>
-                </a:solidFill>
-                <a:latin typeface="Noto Sans"/>
-              </a:defRPr>
-            </a:pPr>
-            <a:r>
-              <a:rPr sz="2100" b="0" lang="ja-JP" altLang="en-US">
-                <a:solidFill>
-                  <a:srgbClr val="303437"/>
-                </a:solidFill>
-                <a:latin typeface="Noto Sans"/>
-                <a:ea typeface="Noto Sans CJK JP"/>
-                <a:cs typeface="Noto Sans"/>
-              </a:rPr>
-              <a:t>本資料では全件の列を構造的に検算した。提示列が交互になり、長さが指定より1つ少なく、配布正解が直前の記号を繰り返すことを確認した。</a:t>
+              <a:t>構築時には、無作為に抽出した少なくとも50例を人が解き、データの正解との一致を確認した。この課題の報告値は100.0%だった。</a:t>
             </a:r>
           </a:p>
         </p:txBody>
@@ -12928,7 +12617,7 @@
                 <a:ea typeface="Noto Sans CJK JP"/>
                 <a:cs typeface="Noto Sans"/>
               </a:rPr>
-              <a:t>3. 評価と研究での観察</a:t>
+              <a:t>3. 評価方法と、モデル規模の影響</a:t>
             </a:r>
           </a:p>
         </p:txBody>
@@ -12941,8 +12630,8 @@
         </p:nvSpPr>
         <p:spPr>
           <a:xfrm>
-            <a:off x="502920" y="4700016"/>
-            <a:ext cx="8183879" cy="621792"/>
+            <a:off x="502920" y="4699000"/>
+            <a:ext cx="8183879" cy="431800"/>
           </a:xfrm>
           <a:prstGeom prst="rect">
             <a:avLst/>
@@ -12974,35 +12663,24 @@
               </a:defRPr>
             </a:pPr>
             <a:r>
-              <a:rPr sz="810" b="0" lang="ja-JP" altLang="en-US">
-                <a:solidFill>
-                  <a:srgbClr val="626669"/>
-                </a:solidFill>
-                <a:latin typeface="Noto Sans"/>
-                <a:ea typeface="Noto Sans CJK JP"/>
-                <a:cs typeface="Noto Sans"/>
-              </a:rPr>
-              <a:t>[1] McKenzie et al. (2023). Inverse Scaling: When Bigger Isn’t Better. TMLR. arXiv v2(2024)を参照。</a:t>
-            </a:r>
-            <a:r>
-              <a:rPr sz="810" b="0" lang="ja-JP" altLang="en-US">
-                <a:solidFill>
-                  <a:srgbClr val="626669"/>
-                </a:solidFill>
-                <a:latin typeface="Noto Sans"/>
-                <a:ea typeface="Noto Sans CJK JP"/>
-                <a:cs typeface="Noto Sans"/>
-              </a:rPr>
-              <a:t>  </a:t>
-            </a:r>
-            <a:r>
-              <a:rPr sz="810" b="0" lang="ja-JP" altLang="en-US">
-                <a:solidFill>
-                  <a:srgbClr val="626669"/>
-                </a:solidFill>
-                <a:latin typeface="Noto Sans"/>
-                <a:ea typeface="Noto Sans CJK JP"/>
-                <a:cs typeface="Noto Sans"/>
+              <a:rPr sz="830">
+                <a:latin typeface="Noto Sans CJK JP"/>
+              </a:rPr>
+              <a:t>[1] McKenzie et al. (2023). Inverse Scaling: When Bigger Isn’t Better. TMLR.</a:t>
+            </a:r>
+          </a:p>
+          <a:p>
+            <a:pPr>
+              <a:spcBef>
+                <a:spcPts val="0"/>
+              </a:spcBef>
+              <a:spcAft>
+                <a:spcPts val="0"/>
+              </a:spcAft>
+            </a:pPr>
+            <a:r>
+              <a:rPr sz="830">
+                <a:latin typeface="Noto Sans CJK JP"/>
                 <a:hlinkClick r:id="rId2"/>
               </a:rPr>
               <a:t>https://arxiv.org/abs/2306.09479</a:t>
@@ -13071,7 +12749,7 @@
                 <a:ea typeface="Noto Sans CJK JP"/>
                 <a:cs typeface="Noto Sans"/>
               </a:rPr>
-              <a:t>暗黙の規則を続ける能力が、誤答へ働く</a:t>
+              <a:t>規則を続ける能力が、誤答につながる</a:t>
             </a:r>
           </a:p>
         </p:txBody>
@@ -13124,7 +12802,7 @@
                 <a:ea typeface="Noto Sans CJK JP"/>
                 <a:cs typeface="Noto Sans"/>
               </a:rPr>
-              <a:t>構築研究では、評価したモデルの成績は全般に低かった。最小モデルはGPT-3系列を除き、全系列でゼロより高い正解率を示したとする。</a:t>
+              <a:t>構築時の評価では、モデルの成績は全般に低かった。最小モデルはGPT-3系列を除き、全系列でゼロより高い正解率を示した。</a:t>
             </a:r>
           </a:p>
           <a:p>
@@ -13154,7 +12832,7 @@
                 <a:ea typeface="Noto Sans CJK JP"/>
                 <a:cs typeface="Noto Sans"/>
               </a:rPr>
-              <a:t>大きい側でゼロを超えたのはGPT-4、GPT-4 RLHF、GPT-3 FeedMEだったと報告する。規模と指示学習のどちらが寄与したかを一律に断定しない。</a:t>
+              <a:t>大きい側でゼロを超えたのはGPT-4、GPT-4 RLHF、GPT-3 FeedMEだった。</a:t>
             </a:r>
           </a:p>
           <a:p>
@@ -13232,7 +12910,7 @@
                 <a:ea typeface="Noto Sans CJK JP"/>
                 <a:cs typeface="Noto Sans"/>
               </a:rPr>
-              <a:t>3. 評価と研究での観察</a:t>
+              <a:t>3. 評価方法と、モデル規模の影響</a:t>
             </a:r>
           </a:p>
         </p:txBody>
@@ -13245,8 +12923,8 @@
         </p:nvSpPr>
         <p:spPr>
           <a:xfrm>
-            <a:off x="502920" y="4700016"/>
-            <a:ext cx="8183879" cy="621792"/>
+            <a:off x="502920" y="4699000"/>
+            <a:ext cx="8183879" cy="431800"/>
           </a:xfrm>
           <a:prstGeom prst="rect">
             <a:avLst/>
@@ -13278,35 +12956,24 @@
               </a:defRPr>
             </a:pPr>
             <a:r>
-              <a:rPr sz="810" b="0" lang="ja-JP" altLang="en-US">
-                <a:solidFill>
-                  <a:srgbClr val="626669"/>
-                </a:solidFill>
-                <a:latin typeface="Noto Sans"/>
-                <a:ea typeface="Noto Sans CJK JP"/>
-                <a:cs typeface="Noto Sans"/>
-              </a:rPr>
-              <a:t>[1] McKenzie et al. (2023). Inverse Scaling: When Bigger Isn’t Better. TMLR. arXiv v2(2024)を参照。</a:t>
-            </a:r>
-            <a:r>
-              <a:rPr sz="810" b="0" lang="ja-JP" altLang="en-US">
-                <a:solidFill>
-                  <a:srgbClr val="626669"/>
-                </a:solidFill>
-                <a:latin typeface="Noto Sans"/>
-                <a:ea typeface="Noto Sans CJK JP"/>
-                <a:cs typeface="Noto Sans"/>
-              </a:rPr>
-              <a:t>  </a:t>
-            </a:r>
-            <a:r>
-              <a:rPr sz="810" b="0" lang="ja-JP" altLang="en-US">
-                <a:solidFill>
-                  <a:srgbClr val="626669"/>
-                </a:solidFill>
-                <a:latin typeface="Noto Sans"/>
-                <a:ea typeface="Noto Sans CJK JP"/>
-                <a:cs typeface="Noto Sans"/>
+              <a:rPr sz="830">
+                <a:latin typeface="Noto Sans CJK JP"/>
+              </a:rPr>
+              <a:t>[1] McKenzie et al. (2023). Inverse Scaling: When Bigger Isn’t Better. TMLR.</a:t>
+            </a:r>
+          </a:p>
+          <a:p>
+            <a:pPr>
+              <a:spcBef>
+                <a:spcPts val="0"/>
+              </a:spcBef>
+              <a:spcAft>
+                <a:spcPts val="0"/>
+              </a:spcAft>
+            </a:pPr>
+            <a:r>
+              <a:rPr sz="830">
+                <a:latin typeface="Noto Sans CJK JP"/>
                 <a:hlinkClick r:id="rId2"/>
               </a:rPr>
               <a:t>https://arxiv.org/abs/2306.09479</a:t>
@@ -13375,7 +13042,7 @@
                 <a:ea typeface="Noto Sans CJK JP"/>
                 <a:cs typeface="Noto Sans"/>
               </a:rPr>
-              <a:t>例示を追加すると、規模依存の傾向も変わる</a:t>
+              <a:t>例示を加えると、規模と成績の関係が変わる</a:t>
             </a:r>
           </a:p>
         </p:txBody>
@@ -13428,7 +13095,7 @@
                 <a:ea typeface="Noto Sans CJK JP"/>
                 <a:cs typeface="Noto Sans"/>
               </a:rPr>
-              <a:t>研究はゼロショットに加え、最大72例または文脈長に入る範囲のfew-shotを調べた。対象はAnthropic LM、Gopher、Chinchilla。</a:t>
+              <a:t>研究はゼロショットに加え、最大72例、または文脈長に入る範囲の例示を調べた。対象はAnthropic LM、Gopher、Chinchilla。</a:t>
             </a:r>
           </a:p>
           <a:p>
@@ -13458,37 +13125,7 @@
                 <a:ea typeface="Noto Sans CJK JP"/>
                 <a:cs typeface="Noto Sans"/>
               </a:rPr>
-              <a:t>Pattern Match Suppressionは、例示の追加で逆方向の傾向が改善し、U字または通常方向になる課題の一つとして挙げられる。</a:t>
-            </a:r>
-          </a:p>
-          <a:p>
-            <a:pPr marL="457200" indent="-355600">
-              <a:lnSpc>
-                <a:spcPts val="2439"/>
-              </a:lnSpc>
-              <a:spcAft>
-                <a:spcPts val="0"/>
-              </a:spcAft>
-              <a:buSzPct val="64878"/>
-              <a:buFont typeface="Noto Sans CJK JP"/>
-              <a:buChar char="●"/>
-              <a:defRPr sz="2050" b="0">
-                <a:solidFill>
-                  <a:srgbClr val="303437"/>
-                </a:solidFill>
-                <a:latin typeface="Noto Sans"/>
-              </a:defRPr>
-            </a:pPr>
-            <a:r>
-              <a:rPr sz="2050" b="0" lang="ja-JP" altLang="en-US">
-                <a:solidFill>
-                  <a:srgbClr val="303437"/>
-                </a:solidFill>
-                <a:latin typeface="Noto Sans"/>
-                <a:ea typeface="Noto Sans CJK JP"/>
-                <a:cs typeface="Noto Sans"/>
-              </a:rPr>
-              <a:t>同じデータでも、入力に含める正解付き例の数とモデル系列によって結果は変わる。元の条件を、現在の任意のモデルへ広げない。</a:t>
+              <a:t>本課題では、例示を加えると、モデルが大きいほど成績が下がる傾向が和らぎ、U字型や、大きいほど成績が上がる傾向に変わったと報告されている。</a:t>
             </a:r>
           </a:p>
         </p:txBody>
@@ -13536,7 +13173,7 @@
                 <a:ea typeface="Noto Sans CJK JP"/>
                 <a:cs typeface="Noto Sans"/>
               </a:rPr>
-              <a:t>3. 評価と研究での観察</a:t>
+              <a:t>3. 評価方法と、モデル規模の影響</a:t>
             </a:r>
           </a:p>
         </p:txBody>
@@ -13549,8 +13186,8 @@
         </p:nvSpPr>
         <p:spPr>
           <a:xfrm>
-            <a:off x="502920" y="4700016"/>
-            <a:ext cx="8183879" cy="621792"/>
+            <a:off x="502920" y="4699000"/>
+            <a:ext cx="8183879" cy="431800"/>
           </a:xfrm>
           <a:prstGeom prst="rect">
             <a:avLst/>
@@ -13582,35 +13219,24 @@
               </a:defRPr>
             </a:pPr>
             <a:r>
-              <a:rPr sz="810" b="0" lang="ja-JP" altLang="en-US">
-                <a:solidFill>
-                  <a:srgbClr val="626669"/>
-                </a:solidFill>
-                <a:latin typeface="Noto Sans"/>
-                <a:ea typeface="Noto Sans CJK JP"/>
-                <a:cs typeface="Noto Sans"/>
-              </a:rPr>
-              <a:t>[1] McKenzie et al. (2023). Inverse Scaling: When Bigger Isn’t Better. TMLR. arXiv v2(2024)を参照。</a:t>
-            </a:r>
-            <a:r>
-              <a:rPr sz="810" b="0" lang="ja-JP" altLang="en-US">
-                <a:solidFill>
-                  <a:srgbClr val="626669"/>
-                </a:solidFill>
-                <a:latin typeface="Noto Sans"/>
-                <a:ea typeface="Noto Sans CJK JP"/>
-                <a:cs typeface="Noto Sans"/>
-              </a:rPr>
-              <a:t>  </a:t>
-            </a:r>
-            <a:r>
-              <a:rPr sz="810" b="0" lang="ja-JP" altLang="en-US">
-                <a:solidFill>
-                  <a:srgbClr val="626669"/>
-                </a:solidFill>
-                <a:latin typeface="Noto Sans"/>
-                <a:ea typeface="Noto Sans CJK JP"/>
-                <a:cs typeface="Noto Sans"/>
+              <a:rPr sz="830">
+                <a:latin typeface="Noto Sans CJK JP"/>
+              </a:rPr>
+              <a:t>[1] McKenzie et al. (2023). Inverse Scaling: When Bigger Isn’t Better. TMLR.</a:t>
+            </a:r>
+          </a:p>
+          <a:p>
+            <a:pPr>
+              <a:spcBef>
+                <a:spcPts val="0"/>
+              </a:spcBef>
+              <a:spcAft>
+                <a:spcPts val="0"/>
+              </a:spcAft>
+            </a:pPr>
+            <a:r>
+              <a:rPr sz="830">
+                <a:latin typeface="Noto Sans CJK JP"/>
                 <a:hlinkClick r:id="rId2"/>
               </a:rPr>
               <a:t>https://arxiv.org/abs/2306.09479</a:t>
@@ -13679,7 +13305,7 @@
                 <a:ea typeface="Noto Sans CJK JP"/>
                 <a:cs typeface="Noto Sans"/>
               </a:rPr>
-              <a:t>CLEVAでの採用と入手</a:t>
+              <a:t>入手と中国語評価への利用</a:t>
             </a:r>
           </a:p>
         </p:txBody>
@@ -13727,7 +13353,7 @@
                 <a:ea typeface="Noto Sans CJK JP"/>
                 <a:cs typeface="Noto Sans"/>
               </a:rPr>
-              <a:t>4. CLEVAでの採用と入手</a:t>
+              <a:t>4. 入手と中国語評価への利用</a:t>
             </a:r>
           </a:p>
         </p:txBody>
@@ -13793,7 +13419,7 @@
                 <a:ea typeface="Noto Sans CJK JP"/>
                 <a:cs typeface="Noto Sans"/>
               </a:rPr>
-              <a:t>CLEVAは、中国語の指示追従課題に採用</a:t>
+              <a:t>CLEVAは、中国語の指示追従課題に採用した</a:t>
             </a:r>
           </a:p>
         </p:txBody>
@@ -13846,7 +13472,7 @@
                 <a:ea typeface="Noto Sans CJK JP"/>
                 <a:cs typeface="Noto Sans"/>
               </a:rPr>
-              <a:t>CLEVAはinstruction_followingのpattern_matching_suppression下位課題に採用する。HELM v0.4.0の固定設定はprompt_id0・1、version v1。</a:t>
+              <a:t>CLEVAは、交互の列を最後だけ変える本課題を、中国語で指示に従う能力の評価に採用した。</a:t>
             </a:r>
           </a:p>
           <a:p>
@@ -13876,7 +13502,7 @@
                 <a:ea typeface="Noto Sans CJK JP"/>
                 <a:cs typeface="Noto Sans"/>
               </a:rPr>
-              <a:t>公開docstringのo/x例は、原英語JSONLの1,310行目、0始まり1,309に対応する。候補x/oと正解oも一致する。</a:t>
+              <a:t>公開された説明例は、実例1に対応するoとxの列。六つ目にoを選ぶと、交互の規則が破れる。</a:t>
             </a:r>
           </a:p>
           <a:p>
@@ -13906,7 +13532,7 @@
                 <a:ea typeface="Noto Sans CJK JP"/>
                 <a:cs typeface="Noto Sans"/>
               </a:rPr>
-              <a:t>CLEVAが選定・翻訳・整形した実v1集合は未取得。元英語1,428件を、そのままCLEVAの評価件数とはしない。</a:t>
+              <a:t>CLEVAで使われた中国語版の全問題や、選定範囲は公開説明から確認できない。公式の英語版は、Inverse Scaling Prizeのリポジトリから取得できる。</a:t>
             </a:r>
           </a:p>
         </p:txBody>
@@ -13954,7 +13580,7 @@
                 <a:ea typeface="Noto Sans CJK JP"/>
                 <a:cs typeface="Noto Sans"/>
               </a:rPr>
-              <a:t>4. CLEVAでの採用と入手</a:t>
+              <a:t>4. 入手と中国語評価への利用</a:t>
             </a:r>
           </a:p>
         </p:txBody>
@@ -13967,8 +13593,8 @@
         </p:nvSpPr>
         <p:spPr>
           <a:xfrm>
-            <a:off x="502920" y="4517136"/>
-            <a:ext cx="8183879" cy="621792"/>
+            <a:off x="502920" y="4508500"/>
+            <a:ext cx="8183879" cy="558800"/>
           </a:xfrm>
           <a:prstGeom prst="rect">
             <a:avLst/>
@@ -14000,35 +13626,24 @@
               </a:defRPr>
             </a:pPr>
             <a:r>
-              <a:rPr sz="810" b="0" lang="ja-JP" altLang="en-US">
-                <a:solidFill>
-                  <a:srgbClr val="626669"/>
-                </a:solidFill>
-                <a:latin typeface="Noto Sans"/>
-                <a:ea typeface="Noto Sans CJK JP"/>
-                <a:cs typeface="Noto Sans"/>
-              </a:rPr>
-              <a:t>[1] Yanyang Li et al. (2023). CLEVA: Chinese Language Models EVAluation Platform. EMNLP System Demonstrations.</a:t>
-            </a:r>
-            <a:r>
-              <a:rPr sz="810" b="0" lang="ja-JP" altLang="en-US">
-                <a:solidFill>
-                  <a:srgbClr val="626669"/>
-                </a:solidFill>
-                <a:latin typeface="Noto Sans"/>
-                <a:ea typeface="Noto Sans CJK JP"/>
-                <a:cs typeface="Noto Sans"/>
-              </a:rPr>
-              <a:t>  </a:t>
-            </a:r>
-            <a:r>
-              <a:rPr sz="810" b="0" lang="ja-JP" altLang="en-US">
-                <a:solidFill>
-                  <a:srgbClr val="626669"/>
-                </a:solidFill>
-                <a:latin typeface="Noto Sans"/>
-                <a:ea typeface="Noto Sans CJK JP"/>
-                <a:cs typeface="Noto Sans"/>
+              <a:rPr sz="830">
+                <a:latin typeface="Noto Sans CJK JP"/>
+              </a:rPr>
+              <a:t>[1] Li et al. (2023). CLEVA: Chinese Language Models EVAluation Platform.</a:t>
+            </a:r>
+          </a:p>
+          <a:p>
+            <a:pPr>
+              <a:spcBef>
+                <a:spcPts val="0"/>
+              </a:spcBef>
+              <a:spcAft>
+                <a:spcPts val="0"/>
+              </a:spcAft>
+            </a:pPr>
+            <a:r>
+              <a:rPr sz="830">
+                <a:latin typeface="Noto Sans CJK JP"/>
                 <a:hlinkClick r:id="rId2"/>
               </a:rPr>
               <a:t>https://aclanthology.org/2023.emnlp-demo.17/</a:t>
@@ -14036,53 +13651,32 @@
           </a:p>
           <a:p>
             <a:pPr>
-              <a:lnSpc>
-                <a:spcPts val="1200"/>
-              </a:lnSpc>
-              <a:spcAft>
-                <a:spcPts val="0"/>
-              </a:spcAft>
-              <a:buNone/>
-              <a:defRPr sz="810" b="0">
-                <a:solidFill>
-                  <a:srgbClr val="303437"/>
-                </a:solidFill>
-                <a:latin typeface="Noto Sans"/>
-              </a:defRPr>
-            </a:pPr>
-            <a:r>
-              <a:rPr sz="810" b="0" lang="ja-JP" altLang="en-US">
-                <a:solidFill>
-                  <a:srgbClr val="626669"/>
-                </a:solidFill>
-                <a:latin typeface="Noto Sans"/>
-                <a:ea typeface="Noto Sans CJK JP"/>
-                <a:cs typeface="Noto Sans"/>
-              </a:rPr>
-              <a:t>[2] Stanford CRFM (2023). CLEVAInstructionFollowingScenario. HELM v0.4.0.</a:t>
+              <a:spcBef>
+                <a:spcPts val="0"/>
+              </a:spcBef>
+              <a:spcAft>
+                <a:spcPts val="0"/>
+              </a:spcAft>
+            </a:pPr>
+            <a:r>
+              <a:rPr sz="830">
+                <a:latin typeface="Noto Sans CJK JP"/>
+              </a:rPr>
+              <a:t>[2] Stanford CRFM (2023). HELM: CLEVA instruction following scenario.</a:t>
             </a:r>
           </a:p>
           <a:p>
             <a:pPr>
-              <a:lnSpc>
-                <a:spcPts val="1200"/>
-              </a:lnSpc>
-              <a:buNone/>
-              <a:defRPr sz="810" b="0">
-                <a:solidFill>
-                  <a:srgbClr val="303437"/>
-                </a:solidFill>
-                <a:latin typeface="Noto Sans"/>
-              </a:defRPr>
-            </a:pPr>
-            <a:r>
-              <a:rPr sz="810" b="0" lang="ja-JP" altLang="en-US">
-                <a:solidFill>
-                  <a:srgbClr val="626669"/>
-                </a:solidFill>
-                <a:latin typeface="Noto Sans"/>
-                <a:ea typeface="Noto Sans CJK JP"/>
-                <a:cs typeface="Noto Sans"/>
+              <a:spcBef>
+                <a:spcPts val="0"/>
+              </a:spcBef>
+              <a:spcAft>
+                <a:spcPts val="0"/>
+              </a:spcAft>
+            </a:pPr>
+            <a:r>
+              <a:rPr sz="830">
+                <a:latin typeface="Noto Sans CJK JP"/>
                 <a:hlinkClick r:id="rId3"/>
               </a:rPr>
               <a:t>https://github.com/stanford-crfm/helm/blob/v0.4.0/src/helm/benchmark/scenarios/cleva_scenario.py</a:t>
@@ -14151,7 +13745,7 @@
                 <a:ea typeface="Noto Sans CJK JP"/>
                 <a:cs typeface="Noto Sans"/>
               </a:rPr>
-              <a:t>公開説明例は、原英語のo/x列に対応する</a:t>
+              <a:t>中国語の例でも、最後のoで規則を破る</a:t>
             </a:r>
           </a:p>
         </p:txBody>
@@ -14199,7 +13793,7 @@
                 <a:ea typeface="Noto Sans CJK JP"/>
                 <a:cs typeface="Noto Sans"/>
               </a:rPr>
-              <a:t>4. CLEVAでの採用と入手</a:t>
+              <a:t>4. 入手と中国語評価への利用</a:t>
             </a:r>
           </a:p>
         </p:txBody>
@@ -14587,7 +14181,7 @@
                 <a:ea typeface="Noto Sans CJK JP"/>
                 <a:cs typeface="Noto Sans"/>
               </a:rPr>
-              <a:t>公開例の正解：B ／ 原英語：classes[1] = ' o'</a:t>
+              <a:t>正解：B（o）</a:t>
             </a:r>
           </a:p>
         </p:txBody>
@@ -14600,8 +14194,8 @@
         </p:nvSpPr>
         <p:spPr>
           <a:xfrm>
-            <a:off x="502920" y="4700016"/>
-            <a:ext cx="8183879" cy="621792"/>
+            <a:off x="502920" y="4699000"/>
+            <a:ext cx="8183879" cy="431800"/>
           </a:xfrm>
           <a:prstGeom prst="rect">
             <a:avLst/>
@@ -14633,1007 +14227,25 @@
               </a:defRPr>
             </a:pPr>
             <a:r>
-              <a:rPr sz="810" b="0" lang="ja-JP" altLang="en-US">
-                <a:solidFill>
-                  <a:srgbClr val="626669"/>
-                </a:solidFill>
-                <a:latin typeface="Noto Sans"/>
-                <a:ea typeface="Noto Sans CJK JP"/>
-                <a:cs typeface="Noto Sans"/>
-              </a:rPr>
-              <a:t>[1] Stanford CRFM (2023). CLEVAInstructionFollowingScenario. HELM v0.4.0. 英語元レコードは実例1、公式JSONL1310行目。</a:t>
+              <a:rPr sz="830">
+                <a:latin typeface="Noto Sans CJK JP"/>
+              </a:rPr>
+              <a:t>[1] Stanford CRFM (2023). HELM: CLEVA instruction following scenario.</a:t>
             </a:r>
           </a:p>
           <a:p>
             <a:pPr>
-              <a:lnSpc>
-                <a:spcPts val="1200"/>
-              </a:lnSpc>
-              <a:buNone/>
-              <a:defRPr sz="810" b="0">
-                <a:solidFill>
-                  <a:srgbClr val="303437"/>
-                </a:solidFill>
-                <a:latin typeface="Noto Sans"/>
-              </a:defRPr>
-            </a:pPr>
-            <a:r>
-              <a:rPr sz="810" b="0" lang="ja-JP" altLang="en-US">
-                <a:solidFill>
-                  <a:srgbClr val="626669"/>
-                </a:solidFill>
-                <a:latin typeface="Noto Sans"/>
-                <a:ea typeface="Noto Sans CJK JP"/>
-                <a:cs typeface="Noto Sans"/>
+              <a:spcBef>
+                <a:spcPts val="0"/>
+              </a:spcBef>
+              <a:spcAft>
+                <a:spcPts val="0"/>
+              </a:spcAft>
+            </a:pPr>
+            <a:r>
+              <a:rPr sz="830">
+                <a:latin typeface="Noto Sans CJK JP"/>
                 <a:hlinkClick r:id="rId2"/>
-              </a:rPr>
-              <a:t>https://github.com/stanford-crfm/helm/blob/v0.4.0/src/helm/benchmark/scenarios/cleva_scenario.py</a:t>
-            </a:r>
-          </a:p>
-        </p:txBody>
-      </p:sp>
-    </p:spTree>
-  </p:cSld>
-  <p:clrMapOvr>
-    <a:masterClrMapping/>
-  </p:clrMapOvr>
-</p:sld>
-</file>
-
-<file path=ppt/slides/slide28.xml><?xml version="1.0" encoding="utf-8"?>
-<p:sld xmlns:a="http://schemas.openxmlformats.org/drawingml/2006/main" xmlns:p="http://schemas.openxmlformats.org/presentationml/2006/main" xmlns:r="http://schemas.openxmlformats.org/officeDocument/2006/relationships">
-  <p:cSld>
-    <p:spTree>
-      <p:nvGrpSpPr>
-        <p:cNvPr id="1" name=""/>
-        <p:cNvGrpSpPr/>
-        <p:nvPr/>
-      </p:nvGrpSpPr>
-      <p:grpSpPr/>
-      <p:sp>
-        <p:nvSpPr>
-          <p:cNvPr id="2" name="Title 1"/>
-          <p:cNvSpPr>
-            <a:spLocks noGrp="1"/>
-          </p:cNvSpPr>
-          <p:nvPr>
-            <p:ph type="title"/>
-          </p:nvPr>
-        </p:nvSpPr>
-        <p:spPr>
-          <a:xfrm>
-            <a:off x="468172" y="650138"/>
-            <a:ext cx="8206740" cy="616305"/>
-          </a:xfrm>
-        </p:spPr>
-        <p:txBody>
-          <a:bodyPr wrap="square" lIns="0" rIns="0" tIns="0" bIns="0">
-            <a:noAutofit/>
-          </a:bodyPr>
-          <a:lstStyle/>
-          <a:p>
-            <a:pPr algn="l">
-              <a:lnSpc>
-                <a:spcPct val="110000"/>
-              </a:lnSpc>
-              <a:buNone/>
-              <a:defRPr sz="2800" b="0">
-                <a:solidFill>
-                  <a:srgbClr val="303437"/>
-                </a:solidFill>
-                <a:latin typeface="Noto Sans"/>
-              </a:defRPr>
-            </a:pPr>
-            <a:r>
-              <a:rPr sz="2800" b="1" lang="ja-JP" altLang="en-US">
-                <a:solidFill>
-                  <a:srgbClr val="303437"/>
-                </a:solidFill>
-                <a:latin typeface="Noto Sans"/>
-                <a:ea typeface="Noto Sans CJK JP"/>
-                <a:cs typeface="Noto Sans"/>
-              </a:rPr>
-              <a:t>候補の順序は、資料の表現ごとに確認する</a:t>
-            </a:r>
-          </a:p>
-        </p:txBody>
-      </p:sp>
-      <p:sp>
-        <p:nvSpPr>
-          <p:cNvPr id="3" name="Title 2"/>
-          <p:cNvSpPr>
-            <a:spLocks noGrp="1"/>
-          </p:cNvSpPr>
-          <p:nvPr>
-            <p:ph type="title" idx="2"/>
-          </p:nvPr>
-        </p:nvSpPr>
-        <p:spPr>
-          <a:xfrm>
-            <a:off x="75895" y="0"/>
-            <a:ext cx="8115300" cy="480060"/>
-          </a:xfrm>
-        </p:spPr>
-        <p:txBody>
-          <a:bodyPr wrap="square" lIns="0" rIns="0" tIns="0" bIns="0" anchor="ctr">
-            <a:noAutofit/>
-          </a:bodyPr>
-          <a:lstStyle/>
-          <a:p>
-            <a:pPr algn="l">
-              <a:lnSpc>
-                <a:spcPct val="110000"/>
-              </a:lnSpc>
-              <a:buNone/>
-              <a:defRPr sz="1400" b="0">
-                <a:solidFill>
-                  <a:srgbClr val="303437"/>
-                </a:solidFill>
-                <a:latin typeface="Noto Sans"/>
-              </a:defRPr>
-            </a:pPr>
-            <a:r>
-              <a:rPr sz="1400" b="1" lang="ja-JP" altLang="en-US">
-                <a:solidFill>
-                  <a:srgbClr val="FFFEF8"/>
-                </a:solidFill>
-                <a:latin typeface="Noto Sans"/>
-                <a:ea typeface="Noto Sans CJK JP"/>
-                <a:cs typeface="Noto Sans"/>
-              </a:rPr>
-              <a:t>4. CLEVAでの採用と入手</a:t>
-            </a:r>
-          </a:p>
-        </p:txBody>
-      </p:sp>
-      <p:graphicFrame>
-        <p:nvGraphicFramePr>
-          <p:cNvPr id="4" name="Table 3"/>
-          <p:cNvGraphicFramePr>
-            <a:graphicFrameLocks noGrp="1"/>
-          </p:cNvGraphicFramePr>
-          <p:nvPr/>
-        </p:nvGraphicFramePr>
-        <p:xfrm>
-          <a:off x="548640" y="1508760"/>
-          <a:ext cx="8046720" cy="1682496"/>
-        </p:xfrm>
-        <a:graphic>
-          <a:graphicData uri="http://schemas.openxmlformats.org/drawingml/2006/table">
-            <a:tbl>
-              <a:tblPr firstRow="0" bandRow="0"/>
-              <a:tblGrid>
-                <a:gridCol w="3383280"/>
-                <a:gridCol w="3017520"/>
-                <a:gridCol w="1645920"/>
-              </a:tblGrid>
-              <a:tr h="420624">
-                <a:tc>
-                  <a:txBody>
-                    <a:bodyPr wrap="square">
-                      <a:noAutofit/>
-                    </a:bodyPr>
-                    <a:lstStyle/>
-                    <a:p>
-                      <a:pPr algn="l">
-                        <a:lnSpc>
-                          <a:spcPts val="2185"/>
-                        </a:lnSpc>
-                        <a:buNone/>
-                        <a:defRPr sz="1900" b="0">
-                          <a:solidFill>
-                            <a:srgbClr val="303437"/>
-                          </a:solidFill>
-                          <a:latin typeface="Noto Sans"/>
-                        </a:defRPr>
-                      </a:pPr>
-                      <a:r>
-                        <a:rPr sz="1900" b="0" lang="ja-JP" altLang="en-US">
-                          <a:solidFill>
-                            <a:srgbClr val="303437"/>
-                          </a:solidFill>
-                          <a:latin typeface="Noto Sans"/>
-                          <a:ea typeface="Noto Sans CJK JP"/>
-                          <a:cs typeface="Noto Sans"/>
-                        </a:rPr>
-                        <a:t>対象</a:t>
-                      </a:r>
-                    </a:p>
-                  </a:txBody>
-                  <a:tcPr marL="63500" marR="63500" marT="38100" marB="38100" anchor="ctr">
-                    <a:lnL w="7620">
-                      <a:noFill/>
-                    </a:lnL>
-                    <a:lnR w="7620">
-                      <a:noFill/>
-                    </a:lnR>
-                    <a:lnT w="15240">
-                      <a:solidFill>
-                        <a:srgbClr val="626669"/>
-                      </a:solidFill>
-                      <a:prstDash val="solid"/>
-                    </a:lnT>
-                    <a:lnB w="7620">
-                      <a:solidFill>
-                        <a:srgbClr val="626669"/>
-                      </a:solidFill>
-                      <a:prstDash val="solid"/>
-                    </a:lnB>
-                    <a:solidFill>
-                      <a:srgbClr val="FFFEF8"/>
-                    </a:solidFill>
-                  </a:tcPr>
-                </a:tc>
-                <a:tc>
-                  <a:txBody>
-                    <a:bodyPr wrap="square">
-                      <a:noAutofit/>
-                    </a:bodyPr>
-                    <a:lstStyle/>
-                    <a:p>
-                      <a:pPr algn="l">
-                        <a:lnSpc>
-                          <a:spcPts val="2185"/>
-                        </a:lnSpc>
-                        <a:buNone/>
-                        <a:defRPr sz="1900" b="0">
-                          <a:solidFill>
-                            <a:srgbClr val="303437"/>
-                          </a:solidFill>
-                          <a:latin typeface="Noto Sans"/>
-                        </a:defRPr>
-                      </a:pPr>
-                      <a:r>
-                        <a:rPr sz="1900" b="0" lang="ja-JP" altLang="en-US">
-                          <a:solidFill>
-                            <a:srgbClr val="303437"/>
-                          </a:solidFill>
-                          <a:latin typeface="Noto Sans"/>
-                          <a:ea typeface="Noto Sans CJK JP"/>
-                          <a:cs typeface="Noto Sans"/>
-                        </a:rPr>
-                        <a:t>候補順</a:t>
-                      </a:r>
-                    </a:p>
-                  </a:txBody>
-                  <a:tcPr marL="63500" marR="63500" marT="38100" marB="38100" anchor="ctr">
-                    <a:lnL w="7620">
-                      <a:noFill/>
-                    </a:lnL>
-                    <a:lnR w="7620">
-                      <a:noFill/>
-                    </a:lnR>
-                    <a:lnT w="15240">
-                      <a:solidFill>
-                        <a:srgbClr val="626669"/>
-                      </a:solidFill>
-                      <a:prstDash val="solid"/>
-                    </a:lnT>
-                    <a:lnB w="7620">
-                      <a:solidFill>
-                        <a:srgbClr val="626669"/>
-                      </a:solidFill>
-                      <a:prstDash val="solid"/>
-                    </a:lnB>
-                    <a:solidFill>
-                      <a:srgbClr val="FFFEF8"/>
-                    </a:solidFill>
-                  </a:tcPr>
-                </a:tc>
-                <a:tc>
-                  <a:txBody>
-                    <a:bodyPr wrap="square">
-                      <a:noAutofit/>
-                    </a:bodyPr>
-                    <a:lstStyle/>
-                    <a:p>
-                      <a:pPr algn="l">
-                        <a:lnSpc>
-                          <a:spcPts val="2185"/>
-                        </a:lnSpc>
-                        <a:buNone/>
-                        <a:defRPr sz="1900" b="0">
-                          <a:solidFill>
-                            <a:srgbClr val="303437"/>
-                          </a:solidFill>
-                          <a:latin typeface="Noto Sans"/>
-                        </a:defRPr>
-                      </a:pPr>
-                      <a:r>
-                        <a:rPr sz="1900" b="0" lang="ja-JP" altLang="en-US">
-                          <a:solidFill>
-                            <a:srgbClr val="303437"/>
-                          </a:solidFill>
-                          <a:latin typeface="Noto Sans"/>
-                          <a:ea typeface="Noto Sans CJK JP"/>
-                          <a:cs typeface="Noto Sans"/>
-                        </a:rPr>
-                        <a:t>正解</a:t>
-                      </a:r>
-                    </a:p>
-                  </a:txBody>
-                  <a:tcPr marL="63500" marR="63500" marT="38100" marB="38100" anchor="ctr">
-                    <a:lnL w="7620">
-                      <a:noFill/>
-                    </a:lnL>
-                    <a:lnR w="7620">
-                      <a:noFill/>
-                    </a:lnR>
-                    <a:lnT w="15240">
-                      <a:solidFill>
-                        <a:srgbClr val="626669"/>
-                      </a:solidFill>
-                      <a:prstDash val="solid"/>
-                    </a:lnT>
-                    <a:lnB w="7620">
-                      <a:solidFill>
-                        <a:srgbClr val="626669"/>
-                      </a:solidFill>
-                      <a:prstDash val="solid"/>
-                    </a:lnB>
-                    <a:solidFill>
-                      <a:srgbClr val="FFFEF8"/>
-                    </a:solidFill>
-                  </a:tcPr>
-                </a:tc>
-              </a:tr>
-              <a:tr h="420624">
-                <a:tc>
-                  <a:txBody>
-                    <a:bodyPr wrap="square">
-                      <a:noAutofit/>
-                    </a:bodyPr>
-                    <a:lstStyle/>
-                    <a:p>
-                      <a:pPr algn="l">
-                        <a:lnSpc>
-                          <a:spcPts val="2185"/>
-                        </a:lnSpc>
-                        <a:buNone/>
-                        <a:defRPr sz="1900" b="0">
-                          <a:solidFill>
-                            <a:srgbClr val="303437"/>
-                          </a:solidFill>
-                          <a:latin typeface="Noto Sans"/>
-                        </a:defRPr>
-                      </a:pPr>
-                      <a:r>
-                        <a:rPr sz="1900" b="0" lang="ja-JP" altLang="en-US">
-                          <a:solidFill>
-                            <a:srgbClr val="303437"/>
-                          </a:solidFill>
-                          <a:latin typeface="Noto Sans"/>
-                          <a:ea typeface="Noto Sans CJK JP"/>
-                          <a:cs typeface="Noto Sans"/>
-                        </a:rPr>
-                        <a:t>構築論文のA/B列例</a:t>
-                      </a:r>
-                    </a:p>
-                  </a:txBody>
-                  <a:tcPr marL="63500" marR="63500" marT="38100" marB="38100" anchor="ctr">
-                    <a:lnL w="7620">
-                      <a:noFill/>
-                    </a:lnL>
-                    <a:lnR w="7620">
-                      <a:noFill/>
-                    </a:lnR>
-                    <a:lnT w="7620">
-                      <a:solidFill>
-                        <a:srgbClr val="626669"/>
-                      </a:solidFill>
-                      <a:prstDash val="solid"/>
-                    </a:lnT>
-                    <a:lnB w="7620">
-                      <a:noFill/>
-                    </a:lnB>
-                    <a:solidFill>
-                      <a:srgbClr val="FFFEF8"/>
-                    </a:solidFill>
-                  </a:tcPr>
-                </a:tc>
-                <a:tc>
-                  <a:txBody>
-                    <a:bodyPr wrap="square">
-                      <a:noAutofit/>
-                    </a:bodyPr>
-                    <a:lstStyle/>
-                    <a:p>
-                      <a:pPr algn="l">
-                        <a:lnSpc>
-                          <a:spcPts val="2185"/>
-                        </a:lnSpc>
-                        <a:buNone/>
-                        <a:defRPr sz="1900" b="0">
-                          <a:solidFill>
-                            <a:srgbClr val="303437"/>
-                          </a:solidFill>
-                          <a:latin typeface="Noto Sans"/>
-                        </a:defRPr>
-                      </a:pPr>
-                      <a:r>
-                        <a:rPr sz="1900" b="0" lang="ja-JP" altLang="en-US">
-                          <a:solidFill>
-                            <a:srgbClr val="303437"/>
-                          </a:solidFill>
-                          <a:latin typeface="Noto Sans"/>
-                          <a:ea typeface="Noto Sans CJK JP"/>
-                          <a:cs typeface="Noto Sans"/>
-                        </a:rPr>
-                        <a:t>[' A', ' B']</a:t>
-                      </a:r>
-                    </a:p>
-                  </a:txBody>
-                  <a:tcPr marL="63500" marR="63500" marT="38100" marB="38100" anchor="ctr">
-                    <a:lnL w="7620">
-                      <a:noFill/>
-                    </a:lnL>
-                    <a:lnR w="7620">
-                      <a:noFill/>
-                    </a:lnR>
-                    <a:lnT w="7620">
-                      <a:solidFill>
-                        <a:srgbClr val="626669"/>
-                      </a:solidFill>
-                      <a:prstDash val="solid"/>
-                    </a:lnT>
-                    <a:lnB w="7620">
-                      <a:noFill/>
-                    </a:lnB>
-                    <a:solidFill>
-                      <a:srgbClr val="FFFEF8"/>
-                    </a:solidFill>
-                  </a:tcPr>
-                </a:tc>
-                <a:tc>
-                  <a:txBody>
-                    <a:bodyPr wrap="square">
-                      <a:noAutofit/>
-                    </a:bodyPr>
-                    <a:lstStyle/>
-                    <a:p>
-                      <a:pPr algn="l">
-                        <a:lnSpc>
-                          <a:spcPts val="2185"/>
-                        </a:lnSpc>
-                        <a:buNone/>
-                        <a:defRPr sz="1900" b="0">
-                          <a:solidFill>
-                            <a:srgbClr val="303437"/>
-                          </a:solidFill>
-                          <a:latin typeface="Noto Sans"/>
-                        </a:defRPr>
-                      </a:pPr>
-                      <a:r>
-                        <a:rPr sz="1900" b="0" lang="ja-JP" altLang="en-US">
-                          <a:solidFill>
-                            <a:srgbClr val="303437"/>
-                          </a:solidFill>
-                          <a:latin typeface="Noto Sans"/>
-                          <a:ea typeface="Noto Sans CJK JP"/>
-                          <a:cs typeface="Noto Sans"/>
-                        </a:rPr>
-                        <a:t>A／位置0</a:t>
-                      </a:r>
-                    </a:p>
-                  </a:txBody>
-                  <a:tcPr marL="63500" marR="63500" marT="38100" marB="38100" anchor="ctr">
-                    <a:lnL w="7620">
-                      <a:noFill/>
-                    </a:lnL>
-                    <a:lnR w="7620">
-                      <a:noFill/>
-                    </a:lnR>
-                    <a:lnT w="7620">
-                      <a:solidFill>
-                        <a:srgbClr val="626669"/>
-                      </a:solidFill>
-                      <a:prstDash val="solid"/>
-                    </a:lnT>
-                    <a:lnB w="7620">
-                      <a:noFill/>
-                    </a:lnB>
-                    <a:solidFill>
-                      <a:srgbClr val="FFFEF8"/>
-                    </a:solidFill>
-                  </a:tcPr>
-                </a:tc>
-              </a:tr>
-              <a:tr h="420624">
-                <a:tc>
-                  <a:txBody>
-                    <a:bodyPr wrap="square">
-                      <a:noAutofit/>
-                    </a:bodyPr>
-                    <a:lstStyle/>
-                    <a:p>
-                      <a:pPr algn="l">
-                        <a:lnSpc>
-                          <a:spcPts val="2185"/>
-                        </a:lnSpc>
-                        <a:buNone/>
-                        <a:defRPr sz="1900" b="0">
-                          <a:solidFill>
-                            <a:srgbClr val="303437"/>
-                          </a:solidFill>
-                          <a:latin typeface="Noto Sans"/>
-                        </a:defRPr>
-                      </a:pPr>
-                      <a:r>
-                        <a:rPr sz="1900" b="0" lang="ja-JP" altLang="en-US">
-                          <a:solidFill>
-                            <a:srgbClr val="303437"/>
-                          </a:solidFill>
-                          <a:latin typeface="Noto Sans"/>
-                          <a:ea typeface="Noto Sans CJK JP"/>
-                          <a:cs typeface="Noto Sans"/>
-                        </a:rPr>
-                        <a:t>公式JSONLの同じ指示</a:t>
-                      </a:r>
-                    </a:p>
-                  </a:txBody>
-                  <a:tcPr marL="63500" marR="63500" marT="38100" marB="38100" anchor="ctr">
-                    <a:lnL w="7620">
-                      <a:noFill/>
-                    </a:lnL>
-                    <a:lnR w="7620">
-                      <a:noFill/>
-                    </a:lnR>
-                    <a:lnT w="7620">
-                      <a:noFill/>
-                    </a:lnT>
-                    <a:lnB w="7620">
-                      <a:noFill/>
-                    </a:lnB>
-                    <a:solidFill>
-                      <a:srgbClr val="FFFEF8"/>
-                    </a:solidFill>
-                  </a:tcPr>
-                </a:tc>
-                <a:tc>
-                  <a:txBody>
-                    <a:bodyPr wrap="square">
-                      <a:noAutofit/>
-                    </a:bodyPr>
-                    <a:lstStyle/>
-                    <a:p>
-                      <a:pPr algn="l">
-                        <a:lnSpc>
-                          <a:spcPts val="2185"/>
-                        </a:lnSpc>
-                        <a:buNone/>
-                        <a:defRPr sz="1900" b="0">
-                          <a:solidFill>
-                            <a:srgbClr val="303437"/>
-                          </a:solidFill>
-                          <a:latin typeface="Noto Sans"/>
-                        </a:defRPr>
-                      </a:pPr>
-                      <a:r>
-                        <a:rPr sz="1900" b="0" lang="ja-JP" altLang="en-US">
-                          <a:solidFill>
-                            <a:srgbClr val="303437"/>
-                          </a:solidFill>
-                          <a:latin typeface="Noto Sans"/>
-                          <a:ea typeface="Noto Sans CJK JP"/>
-                          <a:cs typeface="Noto Sans"/>
-                        </a:rPr>
-                        <a:t>[' B', ' A']</a:t>
-                      </a:r>
-                    </a:p>
-                  </a:txBody>
-                  <a:tcPr marL="63500" marR="63500" marT="38100" marB="38100" anchor="ctr">
-                    <a:lnL w="7620">
-                      <a:noFill/>
-                    </a:lnL>
-                    <a:lnR w="7620">
-                      <a:noFill/>
-                    </a:lnR>
-                    <a:lnT w="7620">
-                      <a:noFill/>
-                    </a:lnT>
-                    <a:lnB w="7620">
-                      <a:noFill/>
-                    </a:lnB>
-                    <a:solidFill>
-                      <a:srgbClr val="FFFEF8"/>
-                    </a:solidFill>
-                  </a:tcPr>
-                </a:tc>
-                <a:tc>
-                  <a:txBody>
-                    <a:bodyPr wrap="square">
-                      <a:noAutofit/>
-                    </a:bodyPr>
-                    <a:lstStyle/>
-                    <a:p>
-                      <a:pPr algn="l">
-                        <a:lnSpc>
-                          <a:spcPts val="2185"/>
-                        </a:lnSpc>
-                        <a:buNone/>
-                        <a:defRPr sz="1900" b="0">
-                          <a:solidFill>
-                            <a:srgbClr val="303437"/>
-                          </a:solidFill>
-                          <a:latin typeface="Noto Sans"/>
-                        </a:defRPr>
-                      </a:pPr>
-                      <a:r>
-                        <a:rPr sz="1900" b="0" lang="ja-JP" altLang="en-US">
-                          <a:solidFill>
-                            <a:srgbClr val="303437"/>
-                          </a:solidFill>
-                          <a:latin typeface="Noto Sans"/>
-                          <a:ea typeface="Noto Sans CJK JP"/>
-                          <a:cs typeface="Noto Sans"/>
-                        </a:rPr>
-                        <a:t>A／位置1</a:t>
-                      </a:r>
-                    </a:p>
-                  </a:txBody>
-                  <a:tcPr marL="63500" marR="63500" marT="38100" marB="38100" anchor="ctr">
-                    <a:lnL w="7620">
-                      <a:noFill/>
-                    </a:lnL>
-                    <a:lnR w="7620">
-                      <a:noFill/>
-                    </a:lnR>
-                    <a:lnT w="7620">
-                      <a:noFill/>
-                    </a:lnT>
-                    <a:lnB w="7620">
-                      <a:noFill/>
-                    </a:lnB>
-                    <a:solidFill>
-                      <a:srgbClr val="FFFEF8"/>
-                    </a:solidFill>
-                  </a:tcPr>
-                </a:tc>
-              </a:tr>
-              <a:tr h="420624">
-                <a:tc>
-                  <a:txBody>
-                    <a:bodyPr wrap="square">
-                      <a:noAutofit/>
-                    </a:bodyPr>
-                    <a:lstStyle/>
-                    <a:p>
-                      <a:pPr algn="l">
-                        <a:lnSpc>
-                          <a:spcPts val="2185"/>
-                        </a:lnSpc>
-                        <a:buNone/>
-                        <a:defRPr sz="1900" b="0">
-                          <a:solidFill>
-                            <a:srgbClr val="303437"/>
-                          </a:solidFill>
-                          <a:latin typeface="Noto Sans"/>
-                        </a:defRPr>
-                      </a:pPr>
-                      <a:r>
-                        <a:rPr sz="1900" b="0" lang="ja-JP" altLang="en-US">
-                          <a:solidFill>
-                            <a:srgbClr val="303437"/>
-                          </a:solidFill>
-                          <a:latin typeface="Noto Sans"/>
-                          <a:ea typeface="Noto Sans CJK JP"/>
-                          <a:cs typeface="Noto Sans"/>
-                        </a:rPr>
-                        <a:t>HELM公開o/x例</a:t>
-                      </a:r>
-                    </a:p>
-                  </a:txBody>
-                  <a:tcPr marL="63500" marR="63500" marT="38100" marB="38100" anchor="ctr">
-                    <a:lnL w="7620">
-                      <a:noFill/>
-                    </a:lnL>
-                    <a:lnR w="7620">
-                      <a:noFill/>
-                    </a:lnR>
-                    <a:lnT w="7620">
-                      <a:noFill/>
-                    </a:lnT>
-                    <a:lnB w="15240">
-                      <a:solidFill>
-                        <a:srgbClr val="626669"/>
-                      </a:solidFill>
-                      <a:prstDash val="solid"/>
-                    </a:lnB>
-                    <a:solidFill>
-                      <a:srgbClr val="FFFEF8"/>
-                    </a:solidFill>
-                  </a:tcPr>
-                </a:tc>
-                <a:tc>
-                  <a:txBody>
-                    <a:bodyPr wrap="square">
-                      <a:noAutofit/>
-                    </a:bodyPr>
-                    <a:lstStyle/>
-                    <a:p>
-                      <a:pPr algn="l">
-                        <a:lnSpc>
-                          <a:spcPts val="2185"/>
-                        </a:lnSpc>
-                        <a:buNone/>
-                        <a:defRPr sz="1900" b="0">
-                          <a:solidFill>
-                            <a:srgbClr val="303437"/>
-                          </a:solidFill>
-                          <a:latin typeface="Noto Sans"/>
-                        </a:defRPr>
-                      </a:pPr>
-                      <a:r>
-                        <a:rPr sz="1900" b="0" lang="ja-JP" altLang="en-US">
-                          <a:solidFill>
-                            <a:srgbClr val="303437"/>
-                          </a:solidFill>
-                          <a:latin typeface="Noto Sans"/>
-                          <a:ea typeface="Noto Sans CJK JP"/>
-                          <a:cs typeface="Noto Sans"/>
-                        </a:rPr>
-                        <a:t>A. x、B. o</a:t>
-                      </a:r>
-                    </a:p>
-                  </a:txBody>
-                  <a:tcPr marL="63500" marR="63500" marT="38100" marB="38100" anchor="ctr">
-                    <a:lnL w="7620">
-                      <a:noFill/>
-                    </a:lnL>
-                    <a:lnR w="7620">
-                      <a:noFill/>
-                    </a:lnR>
-                    <a:lnT w="7620">
-                      <a:noFill/>
-                    </a:lnT>
-                    <a:lnB w="15240">
-                      <a:solidFill>
-                        <a:srgbClr val="626669"/>
-                      </a:solidFill>
-                      <a:prstDash val="solid"/>
-                    </a:lnB>
-                    <a:solidFill>
-                      <a:srgbClr val="FFFEF8"/>
-                    </a:solidFill>
-                  </a:tcPr>
-                </a:tc>
-                <a:tc>
-                  <a:txBody>
-                    <a:bodyPr wrap="square">
-                      <a:noAutofit/>
-                    </a:bodyPr>
-                    <a:lstStyle/>
-                    <a:p>
-                      <a:pPr algn="l">
-                        <a:lnSpc>
-                          <a:spcPts val="2185"/>
-                        </a:lnSpc>
-                        <a:buNone/>
-                        <a:defRPr sz="1900" b="0">
-                          <a:solidFill>
-                            <a:srgbClr val="303437"/>
-                          </a:solidFill>
-                          <a:latin typeface="Noto Sans"/>
-                        </a:defRPr>
-                      </a:pPr>
-                      <a:r>
-                        <a:rPr sz="1900" b="0" lang="ja-JP" altLang="en-US">
-                          <a:solidFill>
-                            <a:srgbClr val="303437"/>
-                          </a:solidFill>
-                          <a:latin typeface="Noto Sans"/>
-                          <a:ea typeface="Noto Sans CJK JP"/>
-                          <a:cs typeface="Noto Sans"/>
-                        </a:rPr>
-                        <a:t>o／選択肢B</a:t>
-                      </a:r>
-                    </a:p>
-                  </a:txBody>
-                  <a:tcPr marL="63500" marR="63500" marT="38100" marB="38100" anchor="ctr">
-                    <a:lnL w="7620">
-                      <a:noFill/>
-                    </a:lnL>
-                    <a:lnR w="7620">
-                      <a:noFill/>
-                    </a:lnR>
-                    <a:lnT w="7620">
-                      <a:noFill/>
-                    </a:lnT>
-                    <a:lnB w="15240">
-                      <a:solidFill>
-                        <a:srgbClr val="626669"/>
-                      </a:solidFill>
-                      <a:prstDash val="solid"/>
-                    </a:lnB>
-                    <a:solidFill>
-                      <a:srgbClr val="FFFEF8"/>
-                    </a:solidFill>
-                  </a:tcPr>
-                </a:tc>
-              </a:tr>
-            </a:tbl>
-          </a:graphicData>
-        </a:graphic>
-      </p:graphicFrame>
-      <p:sp>
-        <p:nvSpPr>
-          <p:cNvPr id="5" name="TextBox 4"/>
-          <p:cNvSpPr txBox="1"/>
-          <p:nvPr/>
-        </p:nvSpPr>
-        <p:spPr>
-          <a:xfrm>
-            <a:off x="594360" y="3328416"/>
-            <a:ext cx="7955279" cy="603504"/>
-          </a:xfrm>
-          <a:prstGeom prst="rect">
-            <a:avLst/>
-          </a:prstGeom>
-          <a:noFill/>
-        </p:spPr>
-        <p:txBody>
-          <a:bodyPr wrap="square" lIns="0" rIns="0" tIns="0" bIns="0">
-            <a:noAutofit/>
-          </a:bodyPr>
-          <a:lstStyle/>
-          <a:p>
-            <a:pPr algn="l">
-              <a:lnSpc>
-                <a:spcPts val="1930"/>
-              </a:lnSpc>
-              <a:spcBef>
-                <a:spcPts val="0"/>
-              </a:spcBef>
-              <a:spcAft>
-                <a:spcPts val="0"/>
-              </a:spcAft>
-              <a:buNone/>
-              <a:defRPr sz="1650" b="0">
-                <a:solidFill>
-                  <a:srgbClr val="303437"/>
-                </a:solidFill>
-                <a:latin typeface="Noto Sans"/>
-              </a:defRPr>
-            </a:pPr>
-            <a:r>
-              <a:rPr sz="1650" b="0" lang="ja-JP" altLang="en-US">
-                <a:solidFill>
-                  <a:srgbClr val="303437"/>
-                </a:solidFill>
-                <a:latin typeface="Noto Sans"/>
-                <a:ea typeface="Noto Sans CJK JP"/>
-                <a:cs typeface="Noto Sans"/>
-              </a:rPr>
-              <a:t>正解の記号と配列・選択肢の位置は別の情報。表記差を同一のindexと扱わない。</a:t>
-            </a:r>
-          </a:p>
-        </p:txBody>
-      </p:sp>
-      <p:sp>
-        <p:nvSpPr>
-          <p:cNvPr id="6" name="sources"/>
-          <p:cNvSpPr txBox="1"/>
-          <p:nvPr/>
-        </p:nvSpPr>
-        <p:spPr>
-          <a:xfrm>
-            <a:off x="502920" y="4517136"/>
-            <a:ext cx="8183879" cy="621792"/>
-          </a:xfrm>
-          <a:prstGeom prst="rect">
-            <a:avLst/>
-          </a:prstGeom>
-          <a:noFill/>
-        </p:spPr>
-        <p:txBody>
-          <a:bodyPr wrap="square" lIns="0" rIns="0" tIns="0" bIns="0">
-            <a:noAutofit/>
-          </a:bodyPr>
-          <a:lstStyle/>
-          <a:p>
-            <a:pPr algn="l">
-              <a:lnSpc>
-                <a:spcPts val="1200"/>
-              </a:lnSpc>
-              <a:spcBef>
-                <a:spcPts val="0"/>
-              </a:spcBef>
-              <a:spcAft>
-                <a:spcPts val="0"/>
-              </a:spcAft>
-              <a:buNone/>
-              <a:defRPr sz="810" b="0">
-                <a:solidFill>
-                  <a:srgbClr val="303437"/>
-                </a:solidFill>
-                <a:latin typeface="Noto Sans"/>
-              </a:defRPr>
-            </a:pPr>
-            <a:r>
-              <a:rPr sz="810" b="0" lang="ja-JP" altLang="en-US">
-                <a:solidFill>
-                  <a:srgbClr val="626669"/>
-                </a:solidFill>
-                <a:latin typeface="Noto Sans"/>
-                <a:ea typeface="Noto Sans CJK JP"/>
-                <a:cs typeface="Noto Sans"/>
-              </a:rPr>
-              <a:t>[1] McKenzie et al. (2023). Inverse Scaling: When Bigger Isn’t Better. TMLR. arXiv v2(2024)を参照。</a:t>
-            </a:r>
-            <a:r>
-              <a:rPr sz="810" b="0" lang="ja-JP" altLang="en-US">
-                <a:solidFill>
-                  <a:srgbClr val="626669"/>
-                </a:solidFill>
-                <a:latin typeface="Noto Sans"/>
-                <a:ea typeface="Noto Sans CJK JP"/>
-                <a:cs typeface="Noto Sans"/>
-              </a:rPr>
-              <a:t>  </a:t>
-            </a:r>
-            <a:r>
-              <a:rPr sz="810" b="0" lang="ja-JP" altLang="en-US">
-                <a:solidFill>
-                  <a:srgbClr val="626669"/>
-                </a:solidFill>
-                <a:latin typeface="Noto Sans"/>
-                <a:ea typeface="Noto Sans CJK JP"/>
-                <a:cs typeface="Noto Sans"/>
-                <a:hlinkClick r:id="rId2"/>
-              </a:rPr>
-              <a:t>https://arxiv.org/abs/2306.09479</a:t>
-            </a:r>
-          </a:p>
-          <a:p>
-            <a:pPr>
-              <a:lnSpc>
-                <a:spcPts val="1200"/>
-              </a:lnSpc>
-              <a:spcAft>
-                <a:spcPts val="0"/>
-              </a:spcAft>
-              <a:buNone/>
-              <a:defRPr sz="810" b="0">
-                <a:solidFill>
-                  <a:srgbClr val="303437"/>
-                </a:solidFill>
-                <a:latin typeface="Noto Sans"/>
-              </a:defRPr>
-            </a:pPr>
-            <a:r>
-              <a:rPr sz="810" b="0" lang="ja-JP" altLang="en-US">
-                <a:solidFill>
-                  <a:srgbClr val="626669"/>
-                </a:solidFill>
-                <a:latin typeface="Noto Sans"/>
-                <a:ea typeface="Noto Sans CJK JP"/>
-                <a:cs typeface="Noto Sans"/>
-              </a:rPr>
-              <a:t>[2] Stanford CRFM (2023). CLEVAInstructionFollowingScenario. HELM v0.4.0.</a:t>
-            </a:r>
-          </a:p>
-          <a:p>
-            <a:pPr>
-              <a:lnSpc>
-                <a:spcPts val="1200"/>
-              </a:lnSpc>
-              <a:buNone/>
-              <a:defRPr sz="810" b="0">
-                <a:solidFill>
-                  <a:srgbClr val="303437"/>
-                </a:solidFill>
-                <a:latin typeface="Noto Sans"/>
-              </a:defRPr>
-            </a:pPr>
-            <a:r>
-              <a:rPr sz="810" b="0" lang="ja-JP" altLang="en-US">
-                <a:solidFill>
-                  <a:srgbClr val="626669"/>
-                </a:solidFill>
-                <a:latin typeface="Noto Sans"/>
-                <a:ea typeface="Noto Sans CJK JP"/>
-                <a:cs typeface="Noto Sans"/>
-                <a:hlinkClick r:id="rId3"/>
               </a:rPr>
               <a:t>https://github.com/stanford-crfm/helm/blob/v0.4.0/src/helm/benchmark/scenarios/cleva_scenario.py</a:t>
             </a:r>
@@ -15701,7 +14313,7 @@
                 <a:ea typeface="Noto Sans CJK JP"/>
                 <a:cs typeface="Noto Sans"/>
               </a:rPr>
-              <a:t>固定版・帰属・取得できた範囲を残す</a:t>
+              <a:t>公式の英語データと、利用条件を確認する</a:t>
             </a:r>
           </a:p>
         </p:txBody>
@@ -15754,7 +14366,7 @@
                 <a:ea typeface="Noto Sans CJK JP"/>
                 <a:cs typeface="Noto Sans"/>
               </a:rPr>
-              <a:t>公式data-releaseのZIPとREADMEから、原JSONLを取得できる。データはCC BY4.0で、課題提出者Tomasz Korbakと公開元を明示する。</a:t>
+              <a:t>公式リポジトリのdata-releaseに、11課題を収めたZIPと形式の説明がある。本課題の指示・提示列・候補・正解は、JSONLから読み出せる。</a:t>
             </a:r>
           </a:p>
           <a:p>
@@ -15784,7 +14396,7 @@
                 <a:ea typeface="Noto Sans CJK JP"/>
                 <a:cs typeface="Noto Sans"/>
               </a:rPr>
-              <a:t>本資料では英語の指示・提示列・候補・配布正解を保持し、日本語訳と解説、段組と改行を加えた。集合名の不整合も元のまま示す。</a:t>
+              <a:t>データのライセンスはCC BY 4.0。利用時には提出者Tomasz KorbakとInverse Scaling Prizeへの帰属を示し、ライセンスへリンクする。</a:t>
             </a:r>
           </a:p>
           <a:p>
@@ -15814,7 +14426,7 @@
                 <a:ea typeface="Noto Sans CJK JP"/>
                 <a:cs typeface="Noto Sans"/>
               </a:rPr>
-              <a:t>Classic v0.4.0の公開run一覧では該当0件。性能の観察は元研究、件数は公式原版の再集計として示す。</a:t>
+              <a:t>翻訳などを加えた場合は、その変更も表示する。本資料は日本語訳と解説を加え、入力中の不完全な記号名も元のまま掲載している。</a:t>
             </a:r>
           </a:p>
         </p:txBody>
@@ -15862,7 +14474,7 @@
                 <a:ea typeface="Noto Sans CJK JP"/>
                 <a:cs typeface="Noto Sans"/>
               </a:rPr>
-              <a:t>4. CLEVAでの採用と入手</a:t>
+              <a:t>4. 入手と中国語評価への利用</a:t>
             </a:r>
           </a:p>
         </p:txBody>
@@ -15875,8 +14487,8 @@
         </p:nvSpPr>
         <p:spPr>
           <a:xfrm>
-            <a:off x="502920" y="4517136"/>
-            <a:ext cx="8183879" cy="621792"/>
+            <a:off x="502920" y="4699000"/>
+            <a:ext cx="8183879" cy="431800"/>
           </a:xfrm>
           <a:prstGeom prst="rect">
             <a:avLst/>
@@ -15908,95 +14520,27 @@
               </a:defRPr>
             </a:pPr>
             <a:r>
-              <a:rPr sz="810" b="0" lang="ja-JP" altLang="en-US">
-                <a:solidFill>
-                  <a:srgbClr val="626669"/>
-                </a:solidFill>
-                <a:latin typeface="Noto Sans"/>
-                <a:ea typeface="Noto Sans CJK JP"/>
-                <a:cs typeface="Noto Sans"/>
-              </a:rPr>
-              <a:t>[1] Inverse Scaling Prize. Data release、形式・版・CC BY4.0。固定commit920f17de。</a:t>
+              <a:rPr sz="830">
+                <a:latin typeface="Noto Sans CJK JP"/>
+              </a:rPr>
+              <a:t>[1] Inverse Scaling Prize (2023). Data release: format and CC BY 4.0.</a:t>
             </a:r>
           </a:p>
           <a:p>
             <a:pPr>
-              <a:lnSpc>
-                <a:spcPts val="1200"/>
-              </a:lnSpc>
-              <a:buNone/>
-              <a:defRPr sz="810" b="0">
-                <a:solidFill>
-                  <a:srgbClr val="303437"/>
-                </a:solidFill>
-                <a:latin typeface="Noto Sans"/>
-              </a:defRPr>
-            </a:pPr>
-            <a:r>
-              <a:rPr sz="810" b="0" lang="ja-JP" altLang="en-US">
-                <a:solidFill>
-                  <a:srgbClr val="626669"/>
-                </a:solidFill>
-                <a:latin typeface="Noto Sans"/>
-                <a:ea typeface="Noto Sans CJK JP"/>
-                <a:cs typeface="Noto Sans"/>
-                <a:hlinkClick r:id="rId2"/>
-              </a:rPr>
-              <a:t>https://github.com/inverse-scaling/prize/blob/920f17de85f2a7f2415b097bc49e6a7fbf17b0b2/data-release/README.md</a:t>
-            </a:r>
-          </a:p>
-          <a:p>
-            <a:pPr>
-              <a:lnSpc>
-                <a:spcPts val="1200"/>
-              </a:lnSpc>
-              <a:spcAft>
-                <a:spcPts val="0"/>
-              </a:spcAft>
-              <a:buNone/>
-              <a:defRPr sz="810" b="0">
-                <a:solidFill>
-                  <a:srgbClr val="303437"/>
-                </a:solidFill>
-                <a:latin typeface="Noto Sans"/>
-              </a:defRPr>
-            </a:pPr>
-            <a:r>
-              <a:rPr sz="810" b="0" lang="ja-JP" altLang="en-US">
-                <a:solidFill>
-                  <a:srgbClr val="626669"/>
-                </a:solidFill>
-                <a:latin typeface="Noto Sans"/>
-                <a:ea typeface="Noto Sans CJK JP"/>
-                <a:cs typeface="Noto Sans"/>
-              </a:rPr>
-              <a:t>[2] Stanford CRFM (2023). CLEVAInstructionFollowingScenario. HELM v0.4.0.</a:t>
-            </a:r>
-          </a:p>
-          <a:p>
-            <a:pPr>
-              <a:lnSpc>
-                <a:spcPts val="1200"/>
-              </a:lnSpc>
-              <a:buNone/>
-              <a:defRPr sz="810" b="0">
-                <a:solidFill>
-                  <a:srgbClr val="303437"/>
-                </a:solidFill>
-                <a:latin typeface="Noto Sans"/>
-              </a:defRPr>
-            </a:pPr>
-            <a:r>
-              <a:rPr sz="810" b="0" lang="ja-JP" altLang="en-US">
-                <a:solidFill>
-                  <a:srgbClr val="626669"/>
-                </a:solidFill>
-                <a:latin typeface="Noto Sans"/>
-                <a:ea typeface="Noto Sans CJK JP"/>
-                <a:cs typeface="Noto Sans"/>
-                <a:hlinkClick r:id="rId3"/>
-              </a:rPr>
-              <a:t>https://github.com/stanford-crfm/helm/blob/v0.4.0/src/helm/benchmark/scenarios/cleva_scenario.py</a:t>
+              <a:spcBef>
+                <a:spcPts val="0"/>
+              </a:spcBef>
+              <a:spcAft>
+                <a:spcPts val="0"/>
+              </a:spcAft>
+            </a:pPr>
+            <a:r>
+              <a:rPr sz="830">
+                <a:latin typeface="Noto Sans CJK JP"/>
+                <a:hlinkClick r:id="rId4"/>
+              </a:rPr>
+              <a:t>https://github.com/inverse-scaling/prize/blob/main/data-release/README.md</a:t>
             </a:r>
           </a:p>
         </p:txBody>
@@ -16115,7 +14659,7 @@
                 <a:ea typeface="Noto Sans CJK JP"/>
                 <a:cs typeface="Noto Sans"/>
               </a:rPr>
-              <a:t>交互の列を、最後だけ破る</a:t>
+              <a:t>列の最後で、交互の規則を破る</a:t>
             </a:r>
           </a:p>
           <a:p>
@@ -16145,7 +14689,7 @@
                 <a:ea typeface="Noto Sans CJK JP"/>
                 <a:cs typeface="Noto Sans"/>
               </a:rPr>
-              <a:t>原データの構成と限界</a:t>
+              <a:t>記号・指示・列の長さ</a:t>
             </a:r>
           </a:p>
           <a:p>
@@ -16175,7 +14719,7 @@
                 <a:ea typeface="Noto Sans CJK JP"/>
                 <a:cs typeface="Noto Sans"/>
               </a:rPr>
-              <a:t>評価と研究での観察</a:t>
+              <a:t>評価方法と、モデル規模の影響</a:t>
             </a:r>
           </a:p>
           <a:p>
@@ -16205,7 +14749,7 @@
                 <a:ea typeface="Noto Sans CJK JP"/>
                 <a:cs typeface="Noto Sans"/>
               </a:rPr>
-              <a:t>CLEVAでの採用と入手</a:t>
+              <a:t>入手と中国語評価への利用</a:t>
             </a:r>
           </a:p>
         </p:txBody>
@@ -16319,7 +14863,7 @@
                 <a:ea typeface="Noto Sans CJK JP"/>
                 <a:cs typeface="Noto Sans"/>
               </a:rPr>
-              <a:t>規則を当てることと、指示に従うことを分ける</a:t>
+              <a:t>終わり方の指示に従い、最後の記号を選ぶ</a:t>
             </a:r>
           </a:p>
         </p:txBody>
@@ -16372,7 +14916,7 @@
                 <a:ea typeface="Noto Sans CJK JP"/>
                 <a:cs typeface="Noto Sans"/>
               </a:rPr>
-              <a:t>交互の列の続きを当てるだけなら、規則に沿う記号を選べばよい。この課題では、最後にその規則を破るよう求める。</a:t>
+              <a:t>Pattern Matching Suppressionは、交互に並んだ列を読み、最後だけ規則を破る記号を選ぶ課題。通常の続きと、指示に従う続きが候補に並ぶ。</a:t>
             </a:r>
           </a:p>
           <a:p>
@@ -16402,37 +14946,7 @@
                 <a:ea typeface="Noto Sans CJK JP"/>
                 <a:cs typeface="Noto Sans"/>
               </a:rPr>
-              <a:t>原公開版は12記号対・17表現・7種類の長さから成る1,428件。全件の構造を検算できる一方、指示中の集合名には714件の不整合がある。</a:t>
-            </a:r>
-          </a:p>
-          <a:p>
-            <a:pPr marL="457200" indent="-355600">
-              <a:lnSpc>
-                <a:spcPts val="2499"/>
-              </a:lnSpc>
-              <a:spcAft>
-                <a:spcPts val="0"/>
-              </a:spcAft>
-              <a:buSzPct val="63333"/>
-              <a:buFont typeface="Noto Sans CJK JP"/>
-              <a:buChar char="●"/>
-              <a:defRPr sz="2100" b="0">
-                <a:solidFill>
-                  <a:srgbClr val="303437"/>
-                </a:solidFill>
-                <a:latin typeface="Noto Sans"/>
-              </a:defRPr>
-            </a:pPr>
-            <a:r>
-              <a:rPr sz="2100" b="0" lang="ja-JP" altLang="en-US">
-                <a:solidFill>
-                  <a:srgbClr val="303437"/>
-                </a:solidFill>
-                <a:latin typeface="Noto Sans"/>
-                <a:ea typeface="Noto Sans CJK JP"/>
-                <a:cs typeface="Noto Sans"/>
-              </a:rPr>
-              <a:t>二候補の確率評価、局所的な指示の曖昧さ、CLEVA採用版の未取得を分け、何への応答を測ったかを明確にする。</a:t>
+              <a:t>公開版は12組の記号対・17表現・7種類の長さを組み合わせた1,428問。明示された指示と、繰り返しから生じる予測が食い違う場面で、どちらに従うかを調べられる。</a:t>
             </a:r>
           </a:p>
         </p:txBody>
@@ -16480,7 +14994,7 @@
                 <a:ea typeface="Noto Sans CJK JP"/>
                 <a:cs typeface="Noto Sans"/>
               </a:rPr>
-              <a:t>4. CLEVAでの採用と入手</a:t>
+              <a:t>4. 入手と中国語評価への利用</a:t>
             </a:r>
           </a:p>
         </p:txBody>
@@ -16493,8 +15007,8 @@
         </p:nvSpPr>
         <p:spPr>
           <a:xfrm>
-            <a:off x="502920" y="4700016"/>
-            <a:ext cx="8183879" cy="621792"/>
+            <a:off x="502920" y="4699000"/>
+            <a:ext cx="8183879" cy="431800"/>
           </a:xfrm>
           <a:prstGeom prst="rect">
             <a:avLst/>
@@ -16526,35 +15040,24 @@
               </a:defRPr>
             </a:pPr>
             <a:r>
-              <a:rPr sz="810" b="0" lang="ja-JP" altLang="en-US">
-                <a:solidFill>
-                  <a:srgbClr val="626669"/>
-                </a:solidFill>
-                <a:latin typeface="Noto Sans"/>
-                <a:ea typeface="Noto Sans CJK JP"/>
-                <a:cs typeface="Noto Sans"/>
-              </a:rPr>
-              <a:t>[1] McKenzie et al. (2023). Inverse Scaling: When Bigger Isn’t Better. TMLR. arXiv v2(2024)を参照。</a:t>
-            </a:r>
-            <a:r>
-              <a:rPr sz="810" b="0" lang="ja-JP" altLang="en-US">
-                <a:solidFill>
-                  <a:srgbClr val="626669"/>
-                </a:solidFill>
-                <a:latin typeface="Noto Sans"/>
-                <a:ea typeface="Noto Sans CJK JP"/>
-                <a:cs typeface="Noto Sans"/>
-              </a:rPr>
-              <a:t>  </a:t>
-            </a:r>
-            <a:r>
-              <a:rPr sz="810" b="0" lang="ja-JP" altLang="en-US">
-                <a:solidFill>
-                  <a:srgbClr val="626669"/>
-                </a:solidFill>
-                <a:latin typeface="Noto Sans"/>
-                <a:ea typeface="Noto Sans CJK JP"/>
-                <a:cs typeface="Noto Sans"/>
+              <a:rPr sz="830">
+                <a:latin typeface="Noto Sans CJK JP"/>
+              </a:rPr>
+              <a:t>[1] McKenzie et al. (2023). Inverse Scaling: When Bigger Isn’t Better. TMLR.</a:t>
+            </a:r>
+          </a:p>
+          <a:p>
+            <a:pPr>
+              <a:spcBef>
+                <a:spcPts val="0"/>
+              </a:spcBef>
+              <a:spcAft>
+                <a:spcPts val="0"/>
+              </a:spcAft>
+            </a:pPr>
+            <a:r>
+              <a:rPr sz="830">
+                <a:latin typeface="Noto Sans CJK JP"/>
                 <a:hlinkClick r:id="rId2"/>
               </a:rPr>
               <a:t>https://arxiv.org/abs/2306.09479</a:t>
@@ -16593,11 +15096,11 @@
         <p:spPr>
           <a:xfrm>
             <a:off x="548640" y="2484835"/>
-            <a:ext cx="8046720" cy="585216"/>
-          </a:xfrm>
-        </p:spPr>
-        <p:txBody>
-          <a:bodyPr wrap="square" lIns="0" rIns="0" tIns="0" bIns="0" anchor="ctr">
+            <a:ext cx="8046720" cy="686816"/>
+          </a:xfrm>
+        </p:spPr>
+        <p:txBody>
+          <a:bodyPr wrap="square" lIns="0" rIns="0" tIns="0" bIns="101600" anchor="ctr">
             <a:noAutofit/>
           </a:bodyPr>
           <a:lstStyle/>
@@ -16790,7 +15293,7 @@
                 <a:ea typeface="Noto Sans CJK JP"/>
                 <a:cs typeface="Noto Sans"/>
               </a:rPr>
-              <a:t>追加10件の実例</a:t>
+              <a:t>追加の例題</a:t>
             </a:r>
           </a:p>
           <a:p>
@@ -16820,7 +15323,7 @@
                 <a:ea typeface="Noto Sans CJK JP"/>
                 <a:cs typeface="Noto Sans"/>
               </a:rPr>
-              <a:t>記号対・表示範囲・検算</a:t>
+              <a:t>記号の種類と読み込み方</a:t>
             </a:r>
           </a:p>
           <a:p>
@@ -16964,7 +15467,7 @@
                 <a:ea typeface="Noto Sans CJK JP"/>
                 <a:cs typeface="Noto Sans"/>
               </a:rPr>
-              <a:t>追加10件の実例</a:t>
+              <a:t>追加の例題</a:t>
             </a:r>
           </a:p>
         </p:txBody>
@@ -17012,7 +15515,7 @@
                 <a:ea typeface="Noto Sans CJK JP"/>
                 <a:cs typeface="Noto Sans"/>
               </a:rPr>
-              <a:t>Appendix: 1. 追加10件の実例</a:t>
+              <a:t>Appendix: 1. 追加の例題</a:t>
             </a:r>
           </a:p>
         </p:txBody>
@@ -17126,7 +15629,7 @@
                 <a:ea typeface="Noto Sans CJK JP"/>
                 <a:cs typeface="Noto Sans"/>
               </a:rPr>
-              <a:t>Appendix: 1. 追加10件の実例</a:t>
+              <a:t>Appendix: 1. 追加の例題</a:t>
             </a:r>
           </a:p>
         </p:txBody>
@@ -17180,7 +15683,7 @@
                 <a:ea typeface="Noto Sans CJK JP"/>
                 <a:cs typeface="Noto Sans"/>
               </a:rPr>
-              <a:t>公式JSONL120行目／prompt全文・二候補／記号名は原綴り</a:t>
+              <a:t>指示・提示列・二つの候補の全文</a:t>
             </a:r>
           </a:p>
         </p:txBody>
@@ -17330,7 +15833,7 @@
         <p:spPr>
           <a:xfrm>
             <a:off x="4572000" y="1627632"/>
-            <a:ext cx="4023360" cy="1359136"/>
+            <a:ext cx="4023360" cy="1593934"/>
           </a:xfrm>
           <a:prstGeom prst="rect">
             <a:avLst/>
@@ -17390,7 +15893,7 @@
                 <a:ea typeface="Noto Sans CJK JP"/>
                 <a:cs typeface="Noto Sans"/>
               </a:rPr>
-              <a:t>二つの記号(1 2)の間で交互になる6個の記号列を生成してください。ただし、最後は予想外のものにしてください。</a:t>
+              <a:t>二つの記号(1 2)を交互に並べた、6個の記号からなる列を生成してください。ただし、最後は予想外のものにしてください。</a:t>
             </a:r>
           </a:p>
           <a:p>
@@ -17465,7 +15968,7 @@
         </p:nvSpPr>
         <p:spPr>
           <a:xfrm>
-            <a:off x="594360" y="3135808"/>
+            <a:off x="594360" y="3348566"/>
             <a:ext cx="7955279" cy="429768"/>
           </a:xfrm>
           <a:prstGeom prst="rect">
@@ -17506,7 +16009,7 @@
                 <a:ea typeface="Noto Sans CJK JP"/>
                 <a:cs typeface="Noto Sans"/>
               </a:rPr>
-              <a:t>配布正解：classes[1] = ' 1'</a:t>
+              <a:t>正解：1</a:t>
             </a:r>
           </a:p>
         </p:txBody>
@@ -17519,7 +16022,7 @@
         </p:nvSpPr>
         <p:spPr>
           <a:xfrm>
-            <a:off x="594360" y="3629584"/>
+            <a:off x="594360" y="3842342"/>
             <a:ext cx="7955279" cy="731520"/>
           </a:xfrm>
           <a:prstGeom prst="rect">
@@ -17573,8 +16076,8 @@
         </p:nvSpPr>
         <p:spPr>
           <a:xfrm>
-            <a:off x="502920" y="4700016"/>
-            <a:ext cx="8183879" cy="621792"/>
+            <a:off x="502920" y="4699000"/>
+            <a:ext cx="8183879" cy="431800"/>
           </a:xfrm>
           <a:prstGeom prst="rect">
             <a:avLst/>
@@ -17606,41 +16109,27 @@
               </a:defRPr>
             </a:pPr>
             <a:r>
-              <a:rPr sz="810" b="0" lang="ja-JP" altLang="en-US">
-                <a:solidFill>
-                  <a:srgbClr val="626669"/>
-                </a:solidFill>
-                <a:latin typeface="Noto Sans"/>
-                <a:ea typeface="Noto Sans CJK JP"/>
-                <a:cs typeface="Noto Sans"/>
-              </a:rPr>
-              <a:t>[1] Inverse Scaling Prize. pattern-matching-suppression_classification.jsonl。固定commit920f17de。 120行目（0始まり119）/ round2 / part1。</a:t>
+              <a:rPr sz="830">
+                <a:latin typeface="Noto Sans CJK JP"/>
+              </a:rPr>
+              <a:t>[1] Inverse Scaling Prize (2023). Pattern Matching Suppression. Tomasz Korbak.</a:t>
             </a:r>
           </a:p>
           <a:p>
             <a:pPr>
-              <a:lnSpc>
-                <a:spcPts val="1200"/>
-              </a:lnSpc>
-              <a:buNone/>
-              <a:defRPr sz="810" b="0">
-                <a:solidFill>
-                  <a:srgbClr val="303437"/>
-                </a:solidFill>
-                <a:latin typeface="Noto Sans"/>
-              </a:defRPr>
-            </a:pPr>
-            <a:r>
-              <a:rPr sz="810" b="0" lang="ja-JP" altLang="en-US">
-                <a:solidFill>
-                  <a:srgbClr val="626669"/>
-                </a:solidFill>
-                <a:latin typeface="Noto Sans"/>
-                <a:ea typeface="Noto Sans CJK JP"/>
-                <a:cs typeface="Noto Sans"/>
-                <a:hlinkClick r:id="rId2"/>
-              </a:rPr>
-              <a:t>https://github.com/inverse-scaling/prize/blob/920f17de85f2a7f2415b097bc49e6a7fbf17b0b2/data-release/isp-data-release.zip</a:t>
+              <a:spcBef>
+                <a:spcPts val="0"/>
+              </a:spcBef>
+              <a:spcAft>
+                <a:spcPts val="0"/>
+              </a:spcAft>
+            </a:pPr>
+            <a:r>
+              <a:rPr sz="830">
+                <a:latin typeface="Noto Sans CJK JP"/>
+                <a:hlinkClick r:id="rId3"/>
+              </a:rPr>
+              <a:t>https://github.com/inverse-scaling/prize/tree/main/data-release</a:t>
             </a:r>
           </a:p>
         </p:txBody>
@@ -17754,7 +16243,7 @@
                 <a:ea typeface="Noto Sans CJK JP"/>
                 <a:cs typeface="Noto Sans"/>
               </a:rPr>
-              <a:t>Appendix: 1. 追加10件の実例</a:t>
+              <a:t>Appendix: 1. 追加の例題</a:t>
             </a:r>
           </a:p>
         </p:txBody>
@@ -17808,7 +16297,7 @@
                 <a:ea typeface="Noto Sans CJK JP"/>
                 <a:cs typeface="Noto Sans"/>
               </a:rPr>
-              <a:t>公式JSONL239行目／prompt全文・二候補／記号名は原綴り／指示中の集合名は原表記（不整合あり）</a:t>
+              <a:t>指示・提示列・二つの候補の全文／指示中の記号名が不完全</a:t>
             </a:r>
           </a:p>
         </p:txBody>
@@ -17958,7 +16447,7 @@
         <p:spPr>
           <a:xfrm>
             <a:off x="4572000" y="1627632"/>
-            <a:ext cx="4023360" cy="1359136"/>
+            <a:ext cx="4023360" cy="1593934"/>
           </a:xfrm>
           <a:prstGeom prst="rect">
             <a:avLst/>
@@ -18018,7 +16507,7 @@
                 <a:ea typeface="Noto Sans CJK JP"/>
                 <a:cs typeface="Noto Sans"/>
               </a:rPr>
-              <a:t>二つの記号(i i)の間で交互になる6個の記号列を生成してください。ただし、最後は予想外のものにしてください。</a:t>
+              <a:t>二つの記号(i i)を交互に並べた、6個の記号からなる列を生成してください。ただし、最後は予想外のものにしてください。</a:t>
             </a:r>
           </a:p>
           <a:p>
@@ -18093,7 +16582,7 @@
         </p:nvSpPr>
         <p:spPr>
           <a:xfrm>
-            <a:off x="594360" y="3135808"/>
+            <a:off x="594360" y="3348566"/>
             <a:ext cx="7955279" cy="429768"/>
           </a:xfrm>
           <a:prstGeom prst="rect">
@@ -18134,7 +16623,7 @@
                 <a:ea typeface="Noto Sans CJK JP"/>
                 <a:cs typeface="Noto Sans"/>
               </a:rPr>
-              <a:t>配布正解：classes[1] = ' i'</a:t>
+              <a:t>正解：i</a:t>
             </a:r>
           </a:p>
         </p:txBody>
@@ -18147,7 +16636,7 @@
         </p:nvSpPr>
         <p:spPr>
           <a:xfrm>
-            <a:off x="594360" y="3629584"/>
+            <a:off x="594360" y="3842342"/>
             <a:ext cx="7955279" cy="731520"/>
           </a:xfrm>
           <a:prstGeom prst="rect">
@@ -18188,7 +16677,7 @@
                 <a:ea typeface="Noto Sans CJK JP"/>
                 <a:cs typeface="Noto Sans"/>
               </a:rPr>
-              <a:t>集合名は原表記「i i」。列・候補はi/ii。正解iは最後の規則を破る。</a:t>
+              <a:t>指示では「i i」と書かれているが、列と候補にはiとiiが並ぶ。</a:t>
             </a:r>
           </a:p>
         </p:txBody>
@@ -18201,8 +16690,8 @@
         </p:nvSpPr>
         <p:spPr>
           <a:xfrm>
-            <a:off x="502920" y="4700016"/>
-            <a:ext cx="8183879" cy="621792"/>
+            <a:off x="502920" y="4699000"/>
+            <a:ext cx="8183879" cy="431800"/>
           </a:xfrm>
           <a:prstGeom prst="rect">
             <a:avLst/>
@@ -18234,41 +16723,27 @@
               </a:defRPr>
             </a:pPr>
             <a:r>
-              <a:rPr sz="810" b="0" lang="ja-JP" altLang="en-US">
-                <a:solidFill>
-                  <a:srgbClr val="626669"/>
-                </a:solidFill>
-                <a:latin typeface="Noto Sans"/>
-                <a:ea typeface="Noto Sans CJK JP"/>
-                <a:cs typeface="Noto Sans"/>
-              </a:rPr>
-              <a:t>[1] Inverse Scaling Prize. pattern-matching-suppression_classification.jsonl。固定commit920f17de。 239行目（0始まり238）/ round2 / part1。</a:t>
+              <a:rPr sz="830">
+                <a:latin typeface="Noto Sans CJK JP"/>
+              </a:rPr>
+              <a:t>[1] Inverse Scaling Prize (2023). Pattern Matching Suppression. Tomasz Korbak.</a:t>
             </a:r>
           </a:p>
           <a:p>
             <a:pPr>
-              <a:lnSpc>
-                <a:spcPts val="1200"/>
-              </a:lnSpc>
-              <a:buNone/>
-              <a:defRPr sz="810" b="0">
-                <a:solidFill>
-                  <a:srgbClr val="303437"/>
-                </a:solidFill>
-                <a:latin typeface="Noto Sans"/>
-              </a:defRPr>
-            </a:pPr>
-            <a:r>
-              <a:rPr sz="810" b="0" lang="ja-JP" altLang="en-US">
-                <a:solidFill>
-                  <a:srgbClr val="626669"/>
-                </a:solidFill>
-                <a:latin typeface="Noto Sans"/>
-                <a:ea typeface="Noto Sans CJK JP"/>
-                <a:cs typeface="Noto Sans"/>
-                <a:hlinkClick r:id="rId2"/>
-              </a:rPr>
-              <a:t>https://github.com/inverse-scaling/prize/blob/920f17de85f2a7f2415b097bc49e6a7fbf17b0b2/data-release/isp-data-release.zip</a:t>
+              <a:spcBef>
+                <a:spcPts val="0"/>
+              </a:spcBef>
+              <a:spcAft>
+                <a:spcPts val="0"/>
+              </a:spcAft>
+            </a:pPr>
+            <a:r>
+              <a:rPr sz="830">
+                <a:latin typeface="Noto Sans CJK JP"/>
+                <a:hlinkClick r:id="rId3"/>
+              </a:rPr>
+              <a:t>https://github.com/inverse-scaling/prize/tree/main/data-release</a:t>
             </a:r>
           </a:p>
         </p:txBody>
@@ -18382,7 +16857,7 @@
                 <a:ea typeface="Noto Sans CJK JP"/>
                 <a:cs typeface="Noto Sans"/>
               </a:rPr>
-              <a:t>Appendix: 1. 追加10件の実例</a:t>
+              <a:t>Appendix: 1. 追加の例題</a:t>
             </a:r>
           </a:p>
         </p:txBody>
@@ -18436,7 +16911,7 @@
                 <a:ea typeface="Noto Sans CJK JP"/>
                 <a:cs typeface="Noto Sans"/>
               </a:rPr>
-              <a:t>公式JSONL358行目／prompt全文・二候補／記号名は原綴り</a:t>
+              <a:t>指示・提示列・二つの候補の全文</a:t>
             </a:r>
           </a:p>
         </p:txBody>
@@ -18586,7 +17061,7 @@
         <p:spPr>
           <a:xfrm>
             <a:off x="4572000" y="1627632"/>
-            <a:ext cx="4023360" cy="1359136"/>
+            <a:ext cx="4023360" cy="1593934"/>
           </a:xfrm>
           <a:prstGeom prst="rect">
             <a:avLst/>
@@ -18646,7 +17121,7 @@
                 <a:ea typeface="Noto Sans CJK JP"/>
                 <a:cs typeface="Noto Sans"/>
               </a:rPr>
-              <a:t>二つの記号(a b)の間で交互になる6個の記号列を生成してください。ただし、最後は予想外のものにしてください。</a:t>
+              <a:t>二つの記号(a b)を交互に並べた、6個の記号からなる列を生成してください。ただし、最後は予想外のものにしてください。</a:t>
             </a:r>
           </a:p>
           <a:p>
@@ -18721,7 +17196,7 @@
         </p:nvSpPr>
         <p:spPr>
           <a:xfrm>
-            <a:off x="594360" y="3135808"/>
+            <a:off x="594360" y="3348566"/>
             <a:ext cx="7955279" cy="429768"/>
           </a:xfrm>
           <a:prstGeom prst="rect">
@@ -18762,7 +17237,7 @@
                 <a:ea typeface="Noto Sans CJK JP"/>
                 <a:cs typeface="Noto Sans"/>
               </a:rPr>
-              <a:t>配布正解：classes[1] = ' a'</a:t>
+              <a:t>正解：a</a:t>
             </a:r>
           </a:p>
         </p:txBody>
@@ -18775,7 +17250,7 @@
         </p:nvSpPr>
         <p:spPr>
           <a:xfrm>
-            <a:off x="594360" y="3629584"/>
+            <a:off x="594360" y="3842342"/>
             <a:ext cx="7955279" cy="731520"/>
           </a:xfrm>
           <a:prstGeom prst="rect">
@@ -18829,8 +17304,8 @@
         </p:nvSpPr>
         <p:spPr>
           <a:xfrm>
-            <a:off x="502920" y="4700016"/>
-            <a:ext cx="8183879" cy="621792"/>
+            <a:off x="502920" y="4699000"/>
+            <a:ext cx="8183879" cy="431800"/>
           </a:xfrm>
           <a:prstGeom prst="rect">
             <a:avLst/>
@@ -18862,41 +17337,27 @@
               </a:defRPr>
             </a:pPr>
             <a:r>
-              <a:rPr sz="810" b="0" lang="ja-JP" altLang="en-US">
-                <a:solidFill>
-                  <a:srgbClr val="626669"/>
-                </a:solidFill>
-                <a:latin typeface="Noto Sans"/>
-                <a:ea typeface="Noto Sans CJK JP"/>
-                <a:cs typeface="Noto Sans"/>
-              </a:rPr>
-              <a:t>[1] Inverse Scaling Prize. pattern-matching-suppression_classification.jsonl。固定commit920f17de。 358行目（0始まり357）/ round2 / part1。</a:t>
+              <a:rPr sz="830">
+                <a:latin typeface="Noto Sans CJK JP"/>
+              </a:rPr>
+              <a:t>[1] Inverse Scaling Prize (2023). Pattern Matching Suppression. Tomasz Korbak.</a:t>
             </a:r>
           </a:p>
           <a:p>
             <a:pPr>
-              <a:lnSpc>
-                <a:spcPts val="1200"/>
-              </a:lnSpc>
-              <a:buNone/>
-              <a:defRPr sz="810" b="0">
-                <a:solidFill>
-                  <a:srgbClr val="303437"/>
-                </a:solidFill>
-                <a:latin typeface="Noto Sans"/>
-              </a:defRPr>
-            </a:pPr>
-            <a:r>
-              <a:rPr sz="810" b="0" lang="ja-JP" altLang="en-US">
-                <a:solidFill>
-                  <a:srgbClr val="626669"/>
-                </a:solidFill>
-                <a:latin typeface="Noto Sans"/>
-                <a:ea typeface="Noto Sans CJK JP"/>
-                <a:cs typeface="Noto Sans"/>
-                <a:hlinkClick r:id="rId2"/>
-              </a:rPr>
-              <a:t>https://github.com/inverse-scaling/prize/blob/920f17de85f2a7f2415b097bc49e6a7fbf17b0b2/data-release/isp-data-release.zip</a:t>
+              <a:spcBef>
+                <a:spcPts val="0"/>
+              </a:spcBef>
+              <a:spcAft>
+                <a:spcPts val="0"/>
+              </a:spcAft>
+            </a:pPr>
+            <a:r>
+              <a:rPr sz="830">
+                <a:latin typeface="Noto Sans CJK JP"/>
+                <a:hlinkClick r:id="rId3"/>
+              </a:rPr>
+              <a:t>https://github.com/inverse-scaling/prize/tree/main/data-release</a:t>
             </a:r>
           </a:p>
         </p:txBody>
@@ -19010,7 +17471,7 @@
                 <a:ea typeface="Noto Sans CJK JP"/>
                 <a:cs typeface="Noto Sans"/>
               </a:rPr>
-              <a:t>Appendix: 1. 追加10件の実例</a:t>
+              <a:t>Appendix: 1. 追加の例題</a:t>
             </a:r>
           </a:p>
         </p:txBody>
@@ -19064,7 +17525,7 @@
                 <a:ea typeface="Noto Sans CJK JP"/>
                 <a:cs typeface="Noto Sans"/>
               </a:rPr>
-              <a:t>公式JSONL477行目／prompt全文・二候補／記号名は原綴り／指示中の集合名は原表記（不整合あり）</a:t>
+              <a:t>指示・提示列・二つの候補の全文／指示中の記号名が不完全</a:t>
             </a:r>
           </a:p>
         </p:txBody>
@@ -19214,7 +17675,7 @@
         <p:spPr>
           <a:xfrm>
             <a:off x="4572000" y="1627632"/>
-            <a:ext cx="4023360" cy="1359136"/>
+            <a:ext cx="4023360" cy="1593934"/>
           </a:xfrm>
           <a:prstGeom prst="rect">
             <a:avLst/>
@@ -19274,7 +17735,7 @@
                 <a:ea typeface="Noto Sans CJK JP"/>
                 <a:cs typeface="Noto Sans"/>
               </a:rPr>
-              <a:t>二つの記号(one)の間で交互になる6個の記号列を生成してください。ただし、最後は予想外のものにしてください。</a:t>
+              <a:t>二つの記号(one)を交互に並べた、6個の記号からなる列を生成してください。ただし、最後は予想外のものにしてください。</a:t>
             </a:r>
           </a:p>
           <a:p>
@@ -19349,7 +17810,7 @@
         </p:nvSpPr>
         <p:spPr>
           <a:xfrm>
-            <a:off x="594360" y="3135808"/>
+            <a:off x="594360" y="3348566"/>
             <a:ext cx="7955279" cy="429768"/>
           </a:xfrm>
           <a:prstGeom prst="rect">
@@ -19390,7 +17851,7 @@
                 <a:ea typeface="Noto Sans CJK JP"/>
                 <a:cs typeface="Noto Sans"/>
               </a:rPr>
-              <a:t>配布正解：classes[1] = ' one'</a:t>
+              <a:t>正解：one</a:t>
             </a:r>
           </a:p>
         </p:txBody>
@@ -19403,7 +17864,7 @@
         </p:nvSpPr>
         <p:spPr>
           <a:xfrm>
-            <a:off x="594360" y="3629584"/>
+            <a:off x="594360" y="3842342"/>
             <a:ext cx="7955279" cy="731520"/>
           </a:xfrm>
           <a:prstGeom prst="rect">
@@ -19444,7 +17905,7 @@
                 <a:ea typeface="Noto Sans CJK JP"/>
                 <a:cs typeface="Noto Sans"/>
               </a:rPr>
-              <a:t>集合名は原表記「one」。列・候補はone/two。正解oneは最後の規則を破る。</a:t>
+              <a:t>指示では「one」と書かれているが、列と候補にはoneとtwoが並ぶ。</a:t>
             </a:r>
           </a:p>
         </p:txBody>
@@ -19457,8 +17918,8 @@
         </p:nvSpPr>
         <p:spPr>
           <a:xfrm>
-            <a:off x="502920" y="4700016"/>
-            <a:ext cx="8183879" cy="621792"/>
+            <a:off x="502920" y="4699000"/>
+            <a:ext cx="8183879" cy="431800"/>
           </a:xfrm>
           <a:prstGeom prst="rect">
             <a:avLst/>
@@ -19490,41 +17951,27 @@
               </a:defRPr>
             </a:pPr>
             <a:r>
-              <a:rPr sz="810" b="0" lang="ja-JP" altLang="en-US">
-                <a:solidFill>
-                  <a:srgbClr val="626669"/>
-                </a:solidFill>
-                <a:latin typeface="Noto Sans"/>
-                <a:ea typeface="Noto Sans CJK JP"/>
-                <a:cs typeface="Noto Sans"/>
-              </a:rPr>
-              <a:t>[1] Inverse Scaling Prize. pattern-matching-suppression_classification.jsonl。固定commit920f17de。 477行目（0始まり476）/ round2 / part1。</a:t>
+              <a:rPr sz="830">
+                <a:latin typeface="Noto Sans CJK JP"/>
+              </a:rPr>
+              <a:t>[1] Inverse Scaling Prize (2023). Pattern Matching Suppression. Tomasz Korbak.</a:t>
             </a:r>
           </a:p>
           <a:p>
             <a:pPr>
-              <a:lnSpc>
-                <a:spcPts val="1200"/>
-              </a:lnSpc>
-              <a:buNone/>
-              <a:defRPr sz="810" b="0">
-                <a:solidFill>
-                  <a:srgbClr val="303437"/>
-                </a:solidFill>
-                <a:latin typeface="Noto Sans"/>
-              </a:defRPr>
-            </a:pPr>
-            <a:r>
-              <a:rPr sz="810" b="0" lang="ja-JP" altLang="en-US">
-                <a:solidFill>
-                  <a:srgbClr val="626669"/>
-                </a:solidFill>
-                <a:latin typeface="Noto Sans"/>
-                <a:ea typeface="Noto Sans CJK JP"/>
-                <a:cs typeface="Noto Sans"/>
-                <a:hlinkClick r:id="rId2"/>
-              </a:rPr>
-              <a:t>https://github.com/inverse-scaling/prize/blob/920f17de85f2a7f2415b097bc49e6a7fbf17b0b2/data-release/isp-data-release.zip</a:t>
+              <a:spcBef>
+                <a:spcPts val="0"/>
+              </a:spcBef>
+              <a:spcAft>
+                <a:spcPts val="0"/>
+              </a:spcAft>
+            </a:pPr>
+            <a:r>
+              <a:rPr sz="830">
+                <a:latin typeface="Noto Sans CJK JP"/>
+                <a:hlinkClick r:id="rId3"/>
+              </a:rPr>
+              <a:t>https://github.com/inverse-scaling/prize/tree/main/data-release</a:t>
             </a:r>
           </a:p>
         </p:txBody>
@@ -19638,7 +18085,7 @@
                 <a:ea typeface="Noto Sans CJK JP"/>
                 <a:cs typeface="Noto Sans"/>
               </a:rPr>
-              <a:t>Appendix: 1. 追加10件の実例</a:t>
+              <a:t>Appendix: 1. 追加の例題</a:t>
             </a:r>
           </a:p>
         </p:txBody>
@@ -19692,7 +18139,7 @@
                 <a:ea typeface="Noto Sans CJK JP"/>
                 <a:cs typeface="Noto Sans"/>
               </a:rPr>
-              <a:t>公式JSONL596行目／prompt全文・二候補／記号名は原綴り</a:t>
+              <a:t>指示・提示列・二つの候補の全文</a:t>
             </a:r>
           </a:p>
         </p:txBody>
@@ -19842,7 +18289,7 @@
         <p:spPr>
           <a:xfrm>
             <a:off x="4572000" y="1627632"/>
-            <a:ext cx="4023360" cy="1376069"/>
+            <a:ext cx="4023360" cy="1610868"/>
           </a:xfrm>
           <a:prstGeom prst="rect">
             <a:avLst/>
@@ -19902,7 +18349,7 @@
                 <a:ea typeface="Noto Sans CJK JP"/>
                 <a:cs typeface="Noto Sans"/>
               </a:rPr>
-              <a:t>二つの記号(q w)の間で交互になる6個の記号列を生成してください。ただし、最後は予想外のものにしてください。</a:t>
+              <a:t>二つの記号(q w)を交互に並べた、6個の記号からなる列を生成してください。ただし、最後は予想外のものにしてください。</a:t>
             </a:r>
           </a:p>
           <a:p>
@@ -19977,7 +18424,7 @@
         </p:nvSpPr>
         <p:spPr>
           <a:xfrm>
-            <a:off x="594360" y="3152741"/>
+            <a:off x="594360" y="3365500"/>
             <a:ext cx="7955279" cy="429768"/>
           </a:xfrm>
           <a:prstGeom prst="rect">
@@ -20018,7 +18465,7 @@
                 <a:ea typeface="Noto Sans CJK JP"/>
                 <a:cs typeface="Noto Sans"/>
               </a:rPr>
-              <a:t>配布正解：classes[1] = ' q'</a:t>
+              <a:t>正解：q</a:t>
             </a:r>
           </a:p>
         </p:txBody>
@@ -20031,7 +18478,7 @@
         </p:nvSpPr>
         <p:spPr>
           <a:xfrm>
-            <a:off x="594360" y="3646517"/>
+            <a:off x="594360" y="3859276"/>
             <a:ext cx="7955279" cy="731520"/>
           </a:xfrm>
           <a:prstGeom prst="rect">
@@ -20085,8 +18532,8 @@
         </p:nvSpPr>
         <p:spPr>
           <a:xfrm>
-            <a:off x="502920" y="4700016"/>
-            <a:ext cx="8183879" cy="621792"/>
+            <a:off x="502920" y="4699000"/>
+            <a:ext cx="8183879" cy="431800"/>
           </a:xfrm>
           <a:prstGeom prst="rect">
             <a:avLst/>
@@ -20118,41 +18565,27 @@
               </a:defRPr>
             </a:pPr>
             <a:r>
-              <a:rPr sz="810" b="0" lang="ja-JP" altLang="en-US">
-                <a:solidFill>
-                  <a:srgbClr val="626669"/>
-                </a:solidFill>
-                <a:latin typeface="Noto Sans"/>
-                <a:ea typeface="Noto Sans CJK JP"/>
-                <a:cs typeface="Noto Sans"/>
-              </a:rPr>
-              <a:t>[1] Inverse Scaling Prize. pattern-matching-suppression_classification.jsonl。固定commit920f17de。 596行目（0始まり595）/ round2 / part1。</a:t>
+              <a:rPr sz="830">
+                <a:latin typeface="Noto Sans CJK JP"/>
+              </a:rPr>
+              <a:t>[1] Inverse Scaling Prize (2023). Pattern Matching Suppression. Tomasz Korbak.</a:t>
             </a:r>
           </a:p>
           <a:p>
             <a:pPr>
-              <a:lnSpc>
-                <a:spcPts val="1200"/>
-              </a:lnSpc>
-              <a:buNone/>
-              <a:defRPr sz="810" b="0">
-                <a:solidFill>
-                  <a:srgbClr val="303437"/>
-                </a:solidFill>
-                <a:latin typeface="Noto Sans"/>
-              </a:defRPr>
-            </a:pPr>
-            <a:r>
-              <a:rPr sz="810" b="0" lang="ja-JP" altLang="en-US">
-                <a:solidFill>
-                  <a:srgbClr val="626669"/>
-                </a:solidFill>
-                <a:latin typeface="Noto Sans"/>
-                <a:ea typeface="Noto Sans CJK JP"/>
-                <a:cs typeface="Noto Sans"/>
-                <a:hlinkClick r:id="rId2"/>
-              </a:rPr>
-              <a:t>https://github.com/inverse-scaling/prize/blob/920f17de85f2a7f2415b097bc49e6a7fbf17b0b2/data-release/isp-data-release.zip</a:t>
+              <a:spcBef>
+                <a:spcPts val="0"/>
+              </a:spcBef>
+              <a:spcAft>
+                <a:spcPts val="0"/>
+              </a:spcAft>
+            </a:pPr>
+            <a:r>
+              <a:rPr sz="830">
+                <a:latin typeface="Noto Sans CJK JP"/>
+                <a:hlinkClick r:id="rId3"/>
+              </a:rPr>
+              <a:t>https://github.com/inverse-scaling/prize/tree/main/data-release</a:t>
             </a:r>
           </a:p>
         </p:txBody>
@@ -20266,7 +18699,7 @@
                 <a:ea typeface="Noto Sans CJK JP"/>
                 <a:cs typeface="Noto Sans"/>
               </a:rPr>
-              <a:t>Appendix: 1. 追加10件の実例</a:t>
+              <a:t>Appendix: 1. 追加の例題</a:t>
             </a:r>
           </a:p>
         </p:txBody>
@@ -20320,7 +18753,7 @@
                 <a:ea typeface="Noto Sans CJK JP"/>
                 <a:cs typeface="Noto Sans"/>
               </a:rPr>
-              <a:t>公式JSONL715行目／prompt全文・二候補／記号名は原綴り／指示中の集合名は原表記（不整合あり）</a:t>
+              <a:t>指示・提示列・二つの候補の全文／指示中の記号名が不完全</a:t>
             </a:r>
           </a:p>
         </p:txBody>
@@ -20470,7 +18903,7 @@
         <p:spPr>
           <a:xfrm>
             <a:off x="4572000" y="1627632"/>
-            <a:ext cx="4023360" cy="1359136"/>
+            <a:ext cx="4023360" cy="1593934"/>
           </a:xfrm>
           <a:prstGeom prst="rect">
             <a:avLst/>
@@ -20530,7 +18963,7 @@
                 <a:ea typeface="Noto Sans CJK JP"/>
                 <a:cs typeface="Noto Sans"/>
               </a:rPr>
-              <a:t>二つの記号(aa )の間で交互になる6個の記号列を生成してください。ただし、最後は予想外のものにしてください。</a:t>
+              <a:t>二つの記号(aa )を交互に並べた、6個の記号からなる列を生成してください。ただし、最後は予想外のものにしてください。</a:t>
             </a:r>
           </a:p>
           <a:p>
@@ -20605,7 +19038,7 @@
         </p:nvSpPr>
         <p:spPr>
           <a:xfrm>
-            <a:off x="594360" y="3135808"/>
+            <a:off x="594360" y="3348566"/>
             <a:ext cx="7955279" cy="429768"/>
           </a:xfrm>
           <a:prstGeom prst="rect">
@@ -20646,7 +19079,7 @@
                 <a:ea typeface="Noto Sans CJK JP"/>
                 <a:cs typeface="Noto Sans"/>
               </a:rPr>
-              <a:t>配布正解：classes[1] = ' aa'</a:t>
+              <a:t>正解：aa</a:t>
             </a:r>
           </a:p>
         </p:txBody>
@@ -20659,7 +19092,7 @@
         </p:nvSpPr>
         <p:spPr>
           <a:xfrm>
-            <a:off x="594360" y="3629584"/>
+            <a:off x="594360" y="3842342"/>
             <a:ext cx="7955279" cy="731520"/>
           </a:xfrm>
           <a:prstGeom prst="rect">
@@ -20700,7 +19133,7 @@
                 <a:ea typeface="Noto Sans CJK JP"/>
                 <a:cs typeface="Noto Sans"/>
               </a:rPr>
-              <a:t>集合名は原表記「aa 」。列・候補はaa/ab。正解aaは最後の規則を破る。</a:t>
+              <a:t>指示では「aa 」と書かれているが、列と候補にはaaとabが並ぶ。</a:t>
             </a:r>
           </a:p>
         </p:txBody>
@@ -20713,8 +19146,8 @@
         </p:nvSpPr>
         <p:spPr>
           <a:xfrm>
-            <a:off x="502920" y="4700016"/>
-            <a:ext cx="8183879" cy="621792"/>
+            <a:off x="502920" y="4699000"/>
+            <a:ext cx="8183879" cy="431800"/>
           </a:xfrm>
           <a:prstGeom prst="rect">
             <a:avLst/>
@@ -20746,41 +19179,27 @@
               </a:defRPr>
             </a:pPr>
             <a:r>
-              <a:rPr sz="810" b="0" lang="ja-JP" altLang="en-US">
-                <a:solidFill>
-                  <a:srgbClr val="626669"/>
-                </a:solidFill>
-                <a:latin typeface="Noto Sans"/>
-                <a:ea typeface="Noto Sans CJK JP"/>
-                <a:cs typeface="Noto Sans"/>
-              </a:rPr>
-              <a:t>[1] Inverse Scaling Prize. pattern-matching-suppression_classification.jsonl。固定commit920f17de。 715行目（0始まり714）/ round2 / part1。</a:t>
+              <a:rPr sz="830">
+                <a:latin typeface="Noto Sans CJK JP"/>
+              </a:rPr>
+              <a:t>[1] Inverse Scaling Prize (2023). Pattern Matching Suppression. Tomasz Korbak.</a:t>
             </a:r>
           </a:p>
           <a:p>
             <a:pPr>
-              <a:lnSpc>
-                <a:spcPts val="1200"/>
-              </a:lnSpc>
-              <a:buNone/>
-              <a:defRPr sz="810" b="0">
-                <a:solidFill>
-                  <a:srgbClr val="303437"/>
-                </a:solidFill>
-                <a:latin typeface="Noto Sans"/>
-              </a:defRPr>
-            </a:pPr>
-            <a:r>
-              <a:rPr sz="810" b="0" lang="ja-JP" altLang="en-US">
-                <a:solidFill>
-                  <a:srgbClr val="626669"/>
-                </a:solidFill>
-                <a:latin typeface="Noto Sans"/>
-                <a:ea typeface="Noto Sans CJK JP"/>
-                <a:cs typeface="Noto Sans"/>
-                <a:hlinkClick r:id="rId2"/>
-              </a:rPr>
-              <a:t>https://github.com/inverse-scaling/prize/blob/920f17de85f2a7f2415b097bc49e6a7fbf17b0b2/data-release/isp-data-release.zip</a:t>
+              <a:spcBef>
+                <a:spcPts val="0"/>
+              </a:spcBef>
+              <a:spcAft>
+                <a:spcPts val="0"/>
+              </a:spcAft>
+            </a:pPr>
+            <a:r>
+              <a:rPr sz="830">
+                <a:latin typeface="Noto Sans CJK JP"/>
+                <a:hlinkClick r:id="rId3"/>
+              </a:rPr>
+              <a:t>https://github.com/inverse-scaling/prize/tree/main/data-release</a:t>
             </a:r>
           </a:p>
         </p:txBody>
@@ -20846,7 +19265,7 @@
                 <a:ea typeface="Noto Sans CJK JP"/>
                 <a:cs typeface="Noto Sans"/>
               </a:rPr>
-              <a:t>交互の列を、最後だけ破る</a:t>
+              <a:t>列の最後で、交互の規則を破る</a:t>
             </a:r>
           </a:p>
         </p:txBody>
@@ -20894,7 +19313,7 @@
                 <a:ea typeface="Noto Sans CJK JP"/>
                 <a:cs typeface="Noto Sans"/>
               </a:rPr>
-              <a:t>1. 交互の列を、最後だけ破る</a:t>
+              <a:t>1. 列の最後で、交互の規則を破る</a:t>
             </a:r>
           </a:p>
         </p:txBody>
@@ -21008,7 +19427,7 @@
                 <a:ea typeface="Noto Sans CJK JP"/>
                 <a:cs typeface="Noto Sans"/>
               </a:rPr>
-              <a:t>Appendix: 1. 追加10件の実例</a:t>
+              <a:t>Appendix: 1. 追加の例題</a:t>
             </a:r>
           </a:p>
         </p:txBody>
@@ -21062,7 +19481,7 @@
                 <a:ea typeface="Noto Sans CJK JP"/>
                 <a:cs typeface="Noto Sans"/>
               </a:rPr>
-              <a:t>公式JSONL834行目／prompt全文・二候補／記号名は原綴り／指示中の集合名は原表記（不整合あり）</a:t>
+              <a:t>指示・提示列・二つの候補の全文／指示中の記号名が不完全</a:t>
             </a:r>
           </a:p>
         </p:txBody>
@@ -21212,7 +19631,7 @@
         <p:spPr>
           <a:xfrm>
             <a:off x="4572000" y="1627632"/>
-            <a:ext cx="4023360" cy="1376069"/>
+            <a:ext cx="4023360" cy="1610868"/>
           </a:xfrm>
           <a:prstGeom prst="rect">
             <a:avLst/>
@@ -21272,7 +19691,7 @@
                 <a:ea typeface="Noto Sans CJK JP"/>
                 <a:cs typeface="Noto Sans"/>
               </a:rPr>
-              <a:t>二つの記号(alp)の間で交互になる6個の記号列を生成してください。ただし、最後は予想外のものにしてください。</a:t>
+              <a:t>二つの記号(alp)を交互に並べた、6個の記号からなる列を生成してください。ただし、最後は予想外のものにしてください。</a:t>
             </a:r>
           </a:p>
           <a:p>
@@ -21347,7 +19766,7 @@
         </p:nvSpPr>
         <p:spPr>
           <a:xfrm>
-            <a:off x="594360" y="3152741"/>
+            <a:off x="594360" y="3365500"/>
             <a:ext cx="7955279" cy="429768"/>
           </a:xfrm>
           <a:prstGeom prst="rect">
@@ -21388,7 +19807,7 @@
                 <a:ea typeface="Noto Sans CJK JP"/>
                 <a:cs typeface="Noto Sans"/>
               </a:rPr>
-              <a:t>配布正解：classes[1] = ' alpha'</a:t>
+              <a:t>正解：alpha</a:t>
             </a:r>
           </a:p>
         </p:txBody>
@@ -21401,7 +19820,7 @@
         </p:nvSpPr>
         <p:spPr>
           <a:xfrm>
-            <a:off x="594360" y="3646517"/>
+            <a:off x="594360" y="3859276"/>
             <a:ext cx="7955279" cy="731520"/>
           </a:xfrm>
           <a:prstGeom prst="rect">
@@ -21442,7 +19861,7 @@
                 <a:ea typeface="Noto Sans CJK JP"/>
                 <a:cs typeface="Noto Sans"/>
               </a:rPr>
-              <a:t>集合名は原表記「alp」。列・候補はalpha/beta。正解alphaは最後の規則を破る。</a:t>
+              <a:t>指示では「alp」と書かれているが、列と候補にはalphaとbetaが並ぶ。</a:t>
             </a:r>
           </a:p>
         </p:txBody>
@@ -21455,8 +19874,8 @@
         </p:nvSpPr>
         <p:spPr>
           <a:xfrm>
-            <a:off x="502920" y="4700016"/>
-            <a:ext cx="8183879" cy="621792"/>
+            <a:off x="502920" y="4699000"/>
+            <a:ext cx="8183879" cy="431800"/>
           </a:xfrm>
           <a:prstGeom prst="rect">
             <a:avLst/>
@@ -21488,41 +19907,27 @@
               </a:defRPr>
             </a:pPr>
             <a:r>
-              <a:rPr sz="810" b="0" lang="ja-JP" altLang="en-US">
-                <a:solidFill>
-                  <a:srgbClr val="626669"/>
-                </a:solidFill>
-                <a:latin typeface="Noto Sans"/>
-                <a:ea typeface="Noto Sans CJK JP"/>
-                <a:cs typeface="Noto Sans"/>
-              </a:rPr>
-              <a:t>[1] Inverse Scaling Prize. pattern-matching-suppression_classification.jsonl。固定commit920f17de。 834行目（0始まり833）/ round2 / part1。</a:t>
+              <a:rPr sz="830">
+                <a:latin typeface="Noto Sans CJK JP"/>
+              </a:rPr>
+              <a:t>[1] Inverse Scaling Prize (2023). Pattern Matching Suppression. Tomasz Korbak.</a:t>
             </a:r>
           </a:p>
           <a:p>
             <a:pPr>
-              <a:lnSpc>
-                <a:spcPts val="1200"/>
-              </a:lnSpc>
-              <a:buNone/>
-              <a:defRPr sz="810" b="0">
-                <a:solidFill>
-                  <a:srgbClr val="303437"/>
-                </a:solidFill>
-                <a:latin typeface="Noto Sans"/>
-              </a:defRPr>
-            </a:pPr>
-            <a:r>
-              <a:rPr sz="810" b="0" lang="ja-JP" altLang="en-US">
-                <a:solidFill>
-                  <a:srgbClr val="626669"/>
-                </a:solidFill>
-                <a:latin typeface="Noto Sans"/>
-                <a:ea typeface="Noto Sans CJK JP"/>
-                <a:cs typeface="Noto Sans"/>
-                <a:hlinkClick r:id="rId2"/>
-              </a:rPr>
-              <a:t>https://github.com/inverse-scaling/prize/blob/920f17de85f2a7f2415b097bc49e6a7fbf17b0b2/data-release/isp-data-release.zip</a:t>
+              <a:spcBef>
+                <a:spcPts val="0"/>
+              </a:spcBef>
+              <a:spcAft>
+                <a:spcPts val="0"/>
+              </a:spcAft>
+            </a:pPr>
+            <a:r>
+              <a:rPr sz="830">
+                <a:latin typeface="Noto Sans CJK JP"/>
+                <a:hlinkClick r:id="rId3"/>
+              </a:rPr>
+              <a:t>https://github.com/inverse-scaling/prize/tree/main/data-release</a:t>
             </a:r>
           </a:p>
         </p:txBody>
@@ -21636,7 +20041,7 @@
                 <a:ea typeface="Noto Sans CJK JP"/>
                 <a:cs typeface="Noto Sans"/>
               </a:rPr>
-              <a:t>Appendix: 1. 追加10件の実例</a:t>
+              <a:t>Appendix: 1. 追加の例題</a:t>
             </a:r>
           </a:p>
         </p:txBody>
@@ -21690,7 +20095,7 @@
                 <a:ea typeface="Noto Sans CJK JP"/>
                 <a:cs typeface="Noto Sans"/>
               </a:rPr>
-              <a:t>公式JSONL953行目／prompt全文・二候補／記号名は原綴り／指示中の集合名は原表記（不整合あり）</a:t>
+              <a:t>指示・提示列・二つの候補の全文／指示中の記号名が不完全</a:t>
             </a:r>
           </a:p>
         </p:txBody>
@@ -21840,7 +20245,7 @@
         <p:spPr>
           <a:xfrm>
             <a:off x="4572000" y="1627632"/>
-            <a:ext cx="4023360" cy="1359136"/>
+            <a:ext cx="4023360" cy="1593934"/>
           </a:xfrm>
           <a:prstGeom prst="rect">
             <a:avLst/>
@@ -21900,7 +20305,7 @@
                 <a:ea typeface="Noto Sans CJK JP"/>
                 <a:cs typeface="Noto Sans"/>
               </a:rPr>
-              <a:t>二つの記号(fir)の間で交互になる6個の記号列を生成してください。ただし、最後は予想外のものにしてください。</a:t>
+              <a:t>二つの記号(fir)を交互に並べた、6個の記号からなる列を生成してください。ただし、最後は予想外のものにしてください。</a:t>
             </a:r>
           </a:p>
           <a:p>
@@ -21975,7 +20380,7 @@
         </p:nvSpPr>
         <p:spPr>
           <a:xfrm>
-            <a:off x="594360" y="3135808"/>
+            <a:off x="594360" y="3348566"/>
             <a:ext cx="7955279" cy="429768"/>
           </a:xfrm>
           <a:prstGeom prst="rect">
@@ -22016,7 +20421,7 @@
                 <a:ea typeface="Noto Sans CJK JP"/>
                 <a:cs typeface="Noto Sans"/>
               </a:rPr>
-              <a:t>配布正解：classes[1] = ' first'</a:t>
+              <a:t>正解：first</a:t>
             </a:r>
           </a:p>
         </p:txBody>
@@ -22029,7 +20434,7 @@
         </p:nvSpPr>
         <p:spPr>
           <a:xfrm>
-            <a:off x="594360" y="3629584"/>
+            <a:off x="594360" y="3842342"/>
             <a:ext cx="7955279" cy="731520"/>
           </a:xfrm>
           <a:prstGeom prst="rect">
@@ -22070,7 +20475,7 @@
                 <a:ea typeface="Noto Sans CJK JP"/>
                 <a:cs typeface="Noto Sans"/>
               </a:rPr>
-              <a:t>集合名は原表記「fir」。列・候補はfirst/second。正解firstは最後の規則を破る。</a:t>
+              <a:t>指示では「fir」と書かれているが、列と候補にはfirstとsecondが並ぶ。</a:t>
             </a:r>
           </a:p>
         </p:txBody>
@@ -22083,8 +20488,8 @@
         </p:nvSpPr>
         <p:spPr>
           <a:xfrm>
-            <a:off x="502920" y="4700016"/>
-            <a:ext cx="8183879" cy="621792"/>
+            <a:off x="502920" y="4699000"/>
+            <a:ext cx="8183879" cy="431800"/>
           </a:xfrm>
           <a:prstGeom prst="rect">
             <a:avLst/>
@@ -22116,41 +20521,27 @@
               </a:defRPr>
             </a:pPr>
             <a:r>
-              <a:rPr sz="810" b="0" lang="ja-JP" altLang="en-US">
-                <a:solidFill>
-                  <a:srgbClr val="626669"/>
-                </a:solidFill>
-                <a:latin typeface="Noto Sans"/>
-                <a:ea typeface="Noto Sans CJK JP"/>
-                <a:cs typeface="Noto Sans"/>
-              </a:rPr>
-              <a:t>[1] Inverse Scaling Prize. pattern-matching-suppression_classification.jsonl。固定commit920f17de。 953行目（0始まり952）/ round2 / part1。</a:t>
+              <a:rPr sz="830">
+                <a:latin typeface="Noto Sans CJK JP"/>
+              </a:rPr>
+              <a:t>[1] Inverse Scaling Prize (2023). Pattern Matching Suppression. Tomasz Korbak.</a:t>
             </a:r>
           </a:p>
           <a:p>
             <a:pPr>
-              <a:lnSpc>
-                <a:spcPts val="1200"/>
-              </a:lnSpc>
-              <a:buNone/>
-              <a:defRPr sz="810" b="0">
-                <a:solidFill>
-                  <a:srgbClr val="303437"/>
-                </a:solidFill>
-                <a:latin typeface="Noto Sans"/>
-              </a:defRPr>
-            </a:pPr>
-            <a:r>
-              <a:rPr sz="810" b="0" lang="ja-JP" altLang="en-US">
-                <a:solidFill>
-                  <a:srgbClr val="626669"/>
-                </a:solidFill>
-                <a:latin typeface="Noto Sans"/>
-                <a:ea typeface="Noto Sans CJK JP"/>
-                <a:cs typeface="Noto Sans"/>
-                <a:hlinkClick r:id="rId2"/>
-              </a:rPr>
-              <a:t>https://github.com/inverse-scaling/prize/blob/920f17de85f2a7f2415b097bc49e6a7fbf17b0b2/data-release/isp-data-release.zip</a:t>
+              <a:spcBef>
+                <a:spcPts val="0"/>
+              </a:spcBef>
+              <a:spcAft>
+                <a:spcPts val="0"/>
+              </a:spcAft>
+            </a:pPr>
+            <a:r>
+              <a:rPr sz="830">
+                <a:latin typeface="Noto Sans CJK JP"/>
+                <a:hlinkClick r:id="rId3"/>
+              </a:rPr>
+              <a:t>https://github.com/inverse-scaling/prize/tree/main/data-release</a:t>
             </a:r>
           </a:p>
         </p:txBody>
@@ -22264,7 +20655,7 @@
                 <a:ea typeface="Noto Sans CJK JP"/>
                 <a:cs typeface="Noto Sans"/>
               </a:rPr>
-              <a:t>Appendix: 1. 追加10件の実例</a:t>
+              <a:t>Appendix: 1. 追加の例題</a:t>
             </a:r>
           </a:p>
         </p:txBody>
@@ -22318,7 +20709,7 @@
                 <a:ea typeface="Noto Sans CJK JP"/>
                 <a:cs typeface="Noto Sans"/>
               </a:rPr>
-              <a:t>公式JSONL1072行目／prompt全文・二候補／記号名は原綴り／指示中の集合名は原表記（不整合あり）</a:t>
+              <a:t>指示・提示列・二つの候補の全文／指示中の記号名が不完全</a:t>
             </a:r>
           </a:p>
         </p:txBody>
@@ -22468,7 +20859,7 @@
         <p:spPr>
           <a:xfrm>
             <a:off x="4572000" y="1627632"/>
-            <a:ext cx="4023360" cy="1376069"/>
+            <a:ext cx="4023360" cy="1610868"/>
           </a:xfrm>
           <a:prstGeom prst="rect">
             <a:avLst/>
@@ -22528,7 +20919,7 @@
                 <a:ea typeface="Noto Sans CJK JP"/>
                 <a:cs typeface="Noto Sans"/>
               </a:rPr>
-              <a:t>二つの記号(lef)の間で交互になる6個の記号列を生成してください。ただし、最後は予想外のものにしてください。</a:t>
+              <a:t>二つの記号(lef)を交互に並べた、6個の記号からなる列を生成してください。ただし、最後は予想外のものにしてください。</a:t>
             </a:r>
           </a:p>
           <a:p>
@@ -22603,7 +20994,7 @@
         </p:nvSpPr>
         <p:spPr>
           <a:xfrm>
-            <a:off x="594360" y="3152741"/>
+            <a:off x="594360" y="3365500"/>
             <a:ext cx="7955279" cy="429768"/>
           </a:xfrm>
           <a:prstGeom prst="rect">
@@ -22644,7 +21035,7 @@
                 <a:ea typeface="Noto Sans CJK JP"/>
                 <a:cs typeface="Noto Sans"/>
               </a:rPr>
-              <a:t>配布正解：classes[1] = ' left'</a:t>
+              <a:t>正解：left</a:t>
             </a:r>
           </a:p>
         </p:txBody>
@@ -22657,7 +21048,7 @@
         </p:nvSpPr>
         <p:spPr>
           <a:xfrm>
-            <a:off x="594360" y="3646517"/>
+            <a:off x="594360" y="3859276"/>
             <a:ext cx="7955279" cy="731520"/>
           </a:xfrm>
           <a:prstGeom prst="rect">
@@ -22698,7 +21089,7 @@
                 <a:ea typeface="Noto Sans CJK JP"/>
                 <a:cs typeface="Noto Sans"/>
               </a:rPr>
-              <a:t>集合名は原表記「lef」。列・候補はleft/right。正解leftは最後の規則を破る。</a:t>
+              <a:t>指示では「lef」と書かれているが、列と候補にはleftとrightが並ぶ。</a:t>
             </a:r>
           </a:p>
         </p:txBody>
@@ -22711,8 +21102,8 @@
         </p:nvSpPr>
         <p:spPr>
           <a:xfrm>
-            <a:off x="502920" y="4700016"/>
-            <a:ext cx="8183879" cy="621792"/>
+            <a:off x="502920" y="4699000"/>
+            <a:ext cx="8183879" cy="431800"/>
           </a:xfrm>
           <a:prstGeom prst="rect">
             <a:avLst/>
@@ -22744,41 +21135,27 @@
               </a:defRPr>
             </a:pPr>
             <a:r>
-              <a:rPr sz="810" b="0" lang="ja-JP" altLang="en-US">
-                <a:solidFill>
-                  <a:srgbClr val="626669"/>
-                </a:solidFill>
-                <a:latin typeface="Noto Sans"/>
-                <a:ea typeface="Noto Sans CJK JP"/>
-                <a:cs typeface="Noto Sans"/>
-              </a:rPr>
-              <a:t>[1] Inverse Scaling Prize. pattern-matching-suppression_classification.jsonl。固定commit920f17de。 1072行目（0始まり1071）/ round2 / part1。</a:t>
+              <a:rPr sz="830">
+                <a:latin typeface="Noto Sans CJK JP"/>
+              </a:rPr>
+              <a:t>[1] Inverse Scaling Prize (2023). Pattern Matching Suppression. Tomasz Korbak.</a:t>
             </a:r>
           </a:p>
           <a:p>
             <a:pPr>
-              <a:lnSpc>
-                <a:spcPts val="1200"/>
-              </a:lnSpc>
-              <a:buNone/>
-              <a:defRPr sz="810" b="0">
-                <a:solidFill>
-                  <a:srgbClr val="303437"/>
-                </a:solidFill>
-                <a:latin typeface="Noto Sans"/>
-              </a:defRPr>
-            </a:pPr>
-            <a:r>
-              <a:rPr sz="810" b="0" lang="ja-JP" altLang="en-US">
-                <a:solidFill>
-                  <a:srgbClr val="626669"/>
-                </a:solidFill>
-                <a:latin typeface="Noto Sans"/>
-                <a:ea typeface="Noto Sans CJK JP"/>
-                <a:cs typeface="Noto Sans"/>
-                <a:hlinkClick r:id="rId2"/>
-              </a:rPr>
-              <a:t>https://github.com/inverse-scaling/prize/blob/920f17de85f2a7f2415b097bc49e6a7fbf17b0b2/data-release/isp-data-release.zip</a:t>
+              <a:spcBef>
+                <a:spcPts val="0"/>
+              </a:spcBef>
+              <a:spcAft>
+                <a:spcPts val="0"/>
+              </a:spcAft>
+            </a:pPr>
+            <a:r>
+              <a:rPr sz="830">
+                <a:latin typeface="Noto Sans CJK JP"/>
+                <a:hlinkClick r:id="rId3"/>
+              </a:rPr>
+              <a:t>https://github.com/inverse-scaling/prize/tree/main/data-release</a:t>
             </a:r>
           </a:p>
         </p:txBody>
@@ -22892,7 +21269,7 @@
                 <a:ea typeface="Noto Sans CJK JP"/>
                 <a:cs typeface="Noto Sans"/>
               </a:rPr>
-              <a:t>Appendix: 1. 追加10件の実例</a:t>
+              <a:t>Appendix: 1. 追加の例題</a:t>
             </a:r>
           </a:p>
         </p:txBody>
@@ -22946,7 +21323,7 @@
                 <a:ea typeface="Noto Sans CJK JP"/>
                 <a:cs typeface="Noto Sans"/>
               </a:rPr>
-              <a:t>公式JSONL1191行目／prompt全文・二候補／記号名は原綴り</a:t>
+              <a:t>指示・提示列・二つの候補の全文</a:t>
             </a:r>
           </a:p>
         </p:txBody>
@@ -23096,7 +21473,7 @@
         <p:spPr>
           <a:xfrm>
             <a:off x="4572000" y="1627632"/>
-            <a:ext cx="4023360" cy="1359136"/>
+            <a:ext cx="4023360" cy="1593934"/>
           </a:xfrm>
           <a:prstGeom prst="rect">
             <a:avLst/>
@@ -23156,7 +21533,7 @@
                 <a:ea typeface="Noto Sans CJK JP"/>
                 <a:cs typeface="Noto Sans"/>
               </a:rPr>
-              <a:t>二つの記号(0 1)の間で交互になる6個の記号列を生成してください。ただし、最後は予想外のものにしてください。</a:t>
+              <a:t>二つの記号(0 1)を交互に並べた、6個の記号からなる列を生成してください。ただし、最後は予想外のものにしてください。</a:t>
             </a:r>
           </a:p>
           <a:p>
@@ -23231,7 +21608,7 @@
         </p:nvSpPr>
         <p:spPr>
           <a:xfrm>
-            <a:off x="594360" y="3135808"/>
+            <a:off x="594360" y="3348566"/>
             <a:ext cx="7955279" cy="429768"/>
           </a:xfrm>
           <a:prstGeom prst="rect">
@@ -23272,7 +21649,7 @@
                 <a:ea typeface="Noto Sans CJK JP"/>
                 <a:cs typeface="Noto Sans"/>
               </a:rPr>
-              <a:t>配布正解：classes[1] = ' 0'</a:t>
+              <a:t>正解：0</a:t>
             </a:r>
           </a:p>
         </p:txBody>
@@ -23285,7 +21662,7 @@
         </p:nvSpPr>
         <p:spPr>
           <a:xfrm>
-            <a:off x="594360" y="3629584"/>
+            <a:off x="594360" y="3842342"/>
             <a:ext cx="7955279" cy="731520"/>
           </a:xfrm>
           <a:prstGeom prst="rect">
@@ -23339,8 +21716,8 @@
         </p:nvSpPr>
         <p:spPr>
           <a:xfrm>
-            <a:off x="502920" y="4700016"/>
-            <a:ext cx="8183879" cy="621792"/>
+            <a:off x="502920" y="4699000"/>
+            <a:ext cx="8183879" cy="431800"/>
           </a:xfrm>
           <a:prstGeom prst="rect">
             <a:avLst/>
@@ -23372,41 +21749,27 @@
               </a:defRPr>
             </a:pPr>
             <a:r>
-              <a:rPr sz="810" b="0" lang="ja-JP" altLang="en-US">
-                <a:solidFill>
-                  <a:srgbClr val="626669"/>
-                </a:solidFill>
-                <a:latin typeface="Noto Sans"/>
-                <a:ea typeface="Noto Sans CJK JP"/>
-                <a:cs typeface="Noto Sans"/>
-              </a:rPr>
-              <a:t>[1] Inverse Scaling Prize. pattern-matching-suppression_classification.jsonl。固定commit920f17de。 1191行目（0始まり1190）/ round2 / part1。</a:t>
+              <a:rPr sz="830">
+                <a:latin typeface="Noto Sans CJK JP"/>
+              </a:rPr>
+              <a:t>[1] Inverse Scaling Prize (2023). Pattern Matching Suppression. Tomasz Korbak.</a:t>
             </a:r>
           </a:p>
           <a:p>
             <a:pPr>
-              <a:lnSpc>
-                <a:spcPts val="1200"/>
-              </a:lnSpc>
-              <a:buNone/>
-              <a:defRPr sz="810" b="0">
-                <a:solidFill>
-                  <a:srgbClr val="303437"/>
-                </a:solidFill>
-                <a:latin typeface="Noto Sans"/>
-              </a:defRPr>
-            </a:pPr>
-            <a:r>
-              <a:rPr sz="810" b="0" lang="ja-JP" altLang="en-US">
-                <a:solidFill>
-                  <a:srgbClr val="626669"/>
-                </a:solidFill>
-                <a:latin typeface="Noto Sans"/>
-                <a:ea typeface="Noto Sans CJK JP"/>
-                <a:cs typeface="Noto Sans"/>
-                <a:hlinkClick r:id="rId2"/>
-              </a:rPr>
-              <a:t>https://github.com/inverse-scaling/prize/blob/920f17de85f2a7f2415b097bc49e6a7fbf17b0b2/data-release/isp-data-release.zip</a:t>
+              <a:spcBef>
+                <a:spcPts val="0"/>
+              </a:spcBef>
+              <a:spcAft>
+                <a:spcPts val="0"/>
+              </a:spcAft>
+            </a:pPr>
+            <a:r>
+              <a:rPr sz="830">
+                <a:latin typeface="Noto Sans CJK JP"/>
+                <a:hlinkClick r:id="rId3"/>
+              </a:rPr>
+              <a:t>https://github.com/inverse-scaling/prize/tree/main/data-release</a:t>
             </a:r>
           </a:p>
         </p:txBody>
@@ -23472,7 +21835,7 @@
                 <a:ea typeface="Noto Sans CJK JP"/>
                 <a:cs typeface="Noto Sans"/>
               </a:rPr>
-              <a:t>記号対・表示範囲・検算</a:t>
+              <a:t>記号の種類と読み込み方</a:t>
             </a:r>
           </a:p>
         </p:txBody>
@@ -23520,7 +21883,7 @@
                 <a:ea typeface="Noto Sans CJK JP"/>
                 <a:cs typeface="Noto Sans"/>
               </a:rPr>
-              <a:t>Appendix: 2. 記号対・表示範囲・検算</a:t>
+              <a:t>Appendix: 2. 記号の種類と読み込み方</a:t>
             </a:r>
           </a:p>
         </p:txBody>
@@ -23586,7 +21949,7 @@
                 <a:ea typeface="Noto Sans CJK JP"/>
                 <a:cs typeface="Noto Sans"/>
               </a:rPr>
-              <a:t>12記号対の原表記と件数（1/2）</a:t>
+              <a:t>12組の記号を、各119問に使う</a:t>
             </a:r>
           </a:p>
         </p:txBody>
@@ -23634,7 +21997,7 @@
                 <a:ea typeface="Noto Sans CJK JP"/>
                 <a:cs typeface="Noto Sans"/>
               </a:rPr>
-              <a:t>Appendix: 2. 記号対・表示範囲・検算</a:t>
+              <a:t>Appendix: 2. 記号の種類と読み込み方</a:t>
             </a:r>
           </a:p>
         </p:txBody>
@@ -24409,8 +22772,8 @@
         </p:nvSpPr>
         <p:spPr>
           <a:xfrm>
-            <a:off x="502920" y="4700016"/>
-            <a:ext cx="8183879" cy="621792"/>
+            <a:off x="502920" y="4699000"/>
+            <a:ext cx="8183879" cy="431800"/>
           </a:xfrm>
           <a:prstGeom prst="rect">
             <a:avLst/>
@@ -24442,41 +22805,27 @@
               </a:defRPr>
             </a:pPr>
             <a:r>
-              <a:rPr sz="810" b="0" lang="ja-JP" altLang="en-US">
-                <a:solidFill>
-                  <a:srgbClr val="626669"/>
-                </a:solidFill>
-                <a:latin typeface="Noto Sans"/>
-                <a:ea typeface="Noto Sans CJK JP"/>
-                <a:cs typeface="Noto Sans"/>
-              </a:rPr>
-              <a:t>[1] Inverse Scaling Prize. pattern-matching-suppression_classification.jsonl。固定commit920f17de。</a:t>
+              <a:rPr sz="830">
+                <a:latin typeface="Noto Sans CJK JP"/>
+              </a:rPr>
+              <a:t>[1] Inverse Scaling Prize (2023). Pattern Matching Suppression. Tomasz Korbak.</a:t>
             </a:r>
           </a:p>
           <a:p>
             <a:pPr>
-              <a:lnSpc>
-                <a:spcPts val="1200"/>
-              </a:lnSpc>
-              <a:buNone/>
-              <a:defRPr sz="810" b="0">
-                <a:solidFill>
-                  <a:srgbClr val="303437"/>
-                </a:solidFill>
-                <a:latin typeface="Noto Sans"/>
-              </a:defRPr>
-            </a:pPr>
-            <a:r>
-              <a:rPr sz="810" b="0" lang="ja-JP" altLang="en-US">
-                <a:solidFill>
-                  <a:srgbClr val="626669"/>
-                </a:solidFill>
-                <a:latin typeface="Noto Sans"/>
-                <a:ea typeface="Noto Sans CJK JP"/>
-                <a:cs typeface="Noto Sans"/>
-                <a:hlinkClick r:id="rId2"/>
-              </a:rPr>
-              <a:t>https://github.com/inverse-scaling/prize/blob/920f17de85f2a7f2415b097bc49e6a7fbf17b0b2/data-release/isp-data-release.zip</a:t>
+              <a:spcBef>
+                <a:spcPts val="0"/>
+              </a:spcBef>
+              <a:spcAft>
+                <a:spcPts val="0"/>
+              </a:spcAft>
+            </a:pPr>
+            <a:r>
+              <a:rPr sz="830">
+                <a:latin typeface="Noto Sans CJK JP"/>
+                <a:hlinkClick r:id="rId3"/>
+              </a:rPr>
+              <a:t>https://github.com/inverse-scaling/prize/tree/main/data-release</a:t>
             </a:r>
           </a:p>
         </p:txBody>
@@ -24542,7 +22891,7 @@
                 <a:ea typeface="Noto Sans CJK JP"/>
                 <a:cs typeface="Noto Sans"/>
               </a:rPr>
-              <a:t>12記号対の原表記と件数（2/2）</a:t>
+              <a:t>12組の記号を、各119問に使う</a:t>
             </a:r>
           </a:p>
         </p:txBody>
@@ -24590,7 +22939,7 @@
                 <a:ea typeface="Noto Sans CJK JP"/>
                 <a:cs typeface="Noto Sans"/>
               </a:rPr>
-              <a:t>Appendix: 2. 記号対・表示範囲・検算</a:t>
+              <a:t>Appendix: 2. 記号の種類と読み込み方</a:t>
             </a:r>
           </a:p>
         </p:txBody>
@@ -25365,8 +23714,8 @@
         </p:nvSpPr>
         <p:spPr>
           <a:xfrm>
-            <a:off x="502920" y="4700016"/>
-            <a:ext cx="8183879" cy="621792"/>
+            <a:off x="502920" y="4699000"/>
+            <a:ext cx="8183879" cy="431800"/>
           </a:xfrm>
           <a:prstGeom prst="rect">
             <a:avLst/>
@@ -25398,655 +23747,27 @@
               </a:defRPr>
             </a:pPr>
             <a:r>
-              <a:rPr sz="810" b="0" lang="ja-JP" altLang="en-US">
-                <a:solidFill>
-                  <a:srgbClr val="626669"/>
-                </a:solidFill>
-                <a:latin typeface="Noto Sans"/>
-                <a:ea typeface="Noto Sans CJK JP"/>
-                <a:cs typeface="Noto Sans"/>
-              </a:rPr>
-              <a:t>[1] Inverse Scaling Prize. pattern-matching-suppression_classification.jsonl。固定commit920f17de。</a:t>
+              <a:rPr sz="830">
+                <a:latin typeface="Noto Sans CJK JP"/>
+              </a:rPr>
+              <a:t>[1] Inverse Scaling Prize (2023). Pattern Matching Suppression. Tomasz Korbak.</a:t>
             </a:r>
           </a:p>
           <a:p>
             <a:pPr>
-              <a:lnSpc>
-                <a:spcPts val="1200"/>
-              </a:lnSpc>
-              <a:buNone/>
-              <a:defRPr sz="810" b="0">
-                <a:solidFill>
-                  <a:srgbClr val="303437"/>
-                </a:solidFill>
-                <a:latin typeface="Noto Sans"/>
-              </a:defRPr>
-            </a:pPr>
-            <a:r>
-              <a:rPr sz="810" b="0" lang="ja-JP" altLang="en-US">
-                <a:solidFill>
-                  <a:srgbClr val="626669"/>
-                </a:solidFill>
-                <a:latin typeface="Noto Sans"/>
-                <a:ea typeface="Noto Sans CJK JP"/>
-                <a:cs typeface="Noto Sans"/>
-                <a:hlinkClick r:id="rId2"/>
-              </a:rPr>
-              <a:t>https://github.com/inverse-scaling/prize/blob/920f17de85f2a7f2415b097bc49e6a7fbf17b0b2/data-release/isp-data-release.zip</a:t>
-            </a:r>
-          </a:p>
-        </p:txBody>
-      </p:sp>
-    </p:spTree>
-  </p:cSld>
-  <p:clrMapOvr>
-    <a:masterClrMapping/>
-  </p:clrMapOvr>
-</p:sld>
-</file>
-
-<file path=ppt/slides/slide47.xml><?xml version="1.0" encoding="utf-8"?>
-<p:sld xmlns:a="http://schemas.openxmlformats.org/drawingml/2006/main" xmlns:p="http://schemas.openxmlformats.org/presentationml/2006/main" xmlns:r="http://schemas.openxmlformats.org/officeDocument/2006/relationships">
-  <p:cSld>
-    <p:spTree>
-      <p:nvGrpSpPr>
-        <p:cNvPr id="1" name=""/>
-        <p:cNvGrpSpPr/>
-        <p:nvPr/>
-      </p:nvGrpSpPr>
-      <p:grpSpPr/>
-      <p:sp>
-        <p:nvSpPr>
-          <p:cNvPr id="2" name="Title 1"/>
-          <p:cNvSpPr>
-            <a:spLocks noGrp="1"/>
-          </p:cNvSpPr>
-          <p:nvPr>
-            <p:ph type="title"/>
-          </p:nvPr>
-        </p:nvSpPr>
-        <p:spPr>
-          <a:xfrm>
-            <a:off x="468172" y="650138"/>
-            <a:ext cx="8206740" cy="616305"/>
-          </a:xfrm>
-        </p:spPr>
-        <p:txBody>
-          <a:bodyPr wrap="square" lIns="0" rIns="0" tIns="0" bIns="0">
-            <a:noAutofit/>
-          </a:bodyPr>
-          <a:lstStyle/>
-          <a:p>
-            <a:pPr algn="l">
-              <a:lnSpc>
-                <a:spcPct val="110000"/>
-              </a:lnSpc>
-              <a:buNone/>
-              <a:defRPr sz="2800" b="0">
-                <a:solidFill>
-                  <a:srgbClr val="303437"/>
-                </a:solidFill>
-                <a:latin typeface="Noto Sans"/>
-              </a:defRPr>
-            </a:pPr>
-            <a:r>
-              <a:rPr sz="2800" b="1" lang="ja-JP" altLang="en-US">
-                <a:solidFill>
-                  <a:srgbClr val="303437"/>
-                </a:solidFill>
-                <a:latin typeface="Noto Sans"/>
-                <a:ea typeface="Noto Sans CJK JP"/>
-                <a:cs typeface="Noto Sans"/>
-              </a:rPr>
-              <a:t>全1,428件を、長さと交互構造で検算した</a:t>
-            </a:r>
-          </a:p>
-        </p:txBody>
-      </p:sp>
-      <p:sp>
-        <p:nvSpPr>
-          <p:cNvPr id="3" name="Text Placeholder 2"/>
-          <p:cNvSpPr>
-            <a:spLocks noGrp="1"/>
-          </p:cNvSpPr>
-          <p:nvPr>
-            <p:ph type="body" idx="1"/>
-          </p:nvPr>
-        </p:nvSpPr>
-        <p:spPr>
-          <a:xfrm>
-            <a:off x="594360" y="1463040"/>
-            <a:ext cx="7955279" cy="3044952"/>
-          </a:xfrm>
-        </p:spPr>
-        <p:txBody>
-          <a:bodyPr wrap="square" tIns="91440" bIns="91440">
-            <a:noAutofit/>
-          </a:bodyPr>
-          <a:lstStyle/>
-          <a:p>
-            <a:pPr marL="457200" indent="-355600">
-              <a:lnSpc>
-                <a:spcPts val="2499"/>
-              </a:lnSpc>
-              <a:spcAft>
-                <a:spcPts val="700"/>
-              </a:spcAft>
-              <a:buSzPct val="63333"/>
-              <a:buFont typeface="Noto Sans CJK JP"/>
-              <a:buChar char="●"/>
-              <a:defRPr sz="2100" b="0">
-                <a:solidFill>
-                  <a:srgbClr val="303437"/>
-                </a:solidFill>
-                <a:latin typeface="Noto Sans"/>
-              </a:defRPr>
-            </a:pPr>
-            <a:r>
-              <a:rPr sz="2100" b="0" lang="ja-JP" altLang="en-US">
-                <a:solidFill>
-                  <a:srgbClr val="303437"/>
-                </a:solidFill>
-                <a:latin typeface="Noto Sans"/>
-                <a:ea typeface="Noto Sans CJK JP"/>
-                <a:cs typeface="Noto Sans"/>
-              </a:rPr>
-              <a:t>完成長6・8・10・12・14・16・20ごとに204件。提示長は5・7・9・11・13・15・19で、それぞれ完成長より1つ少ない。</a:t>
-            </a:r>
-          </a:p>
-          <a:p>
-            <a:pPr marL="457200" indent="-355600">
-              <a:lnSpc>
-                <a:spcPts val="2499"/>
-              </a:lnSpc>
-              <a:spcAft>
-                <a:spcPts val="700"/>
-              </a:spcAft>
-              <a:buSzPct val="63333"/>
-              <a:buFont typeface="Noto Sans CJK JP"/>
-              <a:buChar char="●"/>
-              <a:defRPr sz="2100" b="0">
-                <a:solidFill>
-                  <a:srgbClr val="303437"/>
-                </a:solidFill>
-                <a:latin typeface="Noto Sans"/>
-              </a:defRPr>
-            </a:pPr>
-            <a:r>
-              <a:rPr sz="2100" b="0" lang="ja-JP" altLang="en-US">
-                <a:solidFill>
-                  <a:srgbClr val="303437"/>
-                </a:solidFill>
-                <a:latin typeface="Noto Sans"/>
-                <a:ea typeface="Noto Sans CJK JP"/>
-                <a:cs typeface="Noto Sans"/>
-              </a:rPr>
-              <a:t>全行で提示列の偶数位置は最初の記号、奇数位置は次の記号になる（位置は0始まり）。最後の提示記号は最初の記号。</a:t>
-            </a:r>
-          </a:p>
-          <a:p>
-            <a:pPr marL="457200" indent="-355600">
-              <a:lnSpc>
-                <a:spcPts val="2499"/>
-              </a:lnSpc>
-              <a:spcAft>
-                <a:spcPts val="0"/>
-              </a:spcAft>
-              <a:buSzPct val="63333"/>
-              <a:buFont typeface="Noto Sans CJK JP"/>
-              <a:buChar char="●"/>
-              <a:defRPr sz="2100" b="0">
-                <a:solidFill>
-                  <a:srgbClr val="303437"/>
-                </a:solidFill>
-                <a:latin typeface="Noto Sans"/>
-              </a:defRPr>
-            </a:pPr>
-            <a:r>
-              <a:rPr sz="2100" b="0" lang="ja-JP" altLang="en-US">
-                <a:solidFill>
-                  <a:srgbClr val="303437"/>
-                </a:solidFill>
-                <a:latin typeface="Noto Sans"/>
-                <a:ea typeface="Noto Sans CJK JP"/>
-                <a:cs typeface="Noto Sans"/>
-              </a:rPr>
-              <a:t>候補0は通常の次記号、候補1は最後の提示記号と一致する。配布正解は全て候補1で、最後だけ交互の規則が破れる。</a:t>
-            </a:r>
-          </a:p>
-        </p:txBody>
-      </p:sp>
-      <p:sp>
-        <p:nvSpPr>
-          <p:cNvPr id="4" name="Title 3"/>
-          <p:cNvSpPr>
-            <a:spLocks noGrp="1"/>
-          </p:cNvSpPr>
-          <p:nvPr>
-            <p:ph type="title" idx="2"/>
-          </p:nvPr>
-        </p:nvSpPr>
-        <p:spPr>
-          <a:xfrm>
-            <a:off x="75895" y="0"/>
-            <a:ext cx="8115300" cy="480060"/>
-          </a:xfrm>
-        </p:spPr>
-        <p:txBody>
-          <a:bodyPr wrap="square" lIns="0" rIns="0" tIns="0" bIns="0" anchor="ctr">
-            <a:noAutofit/>
-          </a:bodyPr>
-          <a:lstStyle/>
-          <a:p>
-            <a:pPr algn="l">
-              <a:lnSpc>
-                <a:spcPct val="110000"/>
-              </a:lnSpc>
-              <a:buNone/>
-              <a:defRPr sz="1400" b="0">
-                <a:solidFill>
-                  <a:srgbClr val="303437"/>
-                </a:solidFill>
-                <a:latin typeface="Noto Sans"/>
-              </a:defRPr>
-            </a:pPr>
-            <a:r>
-              <a:rPr sz="1400" b="1" lang="ja-JP" altLang="en-US">
-                <a:solidFill>
-                  <a:srgbClr val="FFFEF8"/>
-                </a:solidFill>
-                <a:latin typeface="Noto Sans"/>
-                <a:ea typeface="Noto Sans CJK JP"/>
-                <a:cs typeface="Noto Sans"/>
-              </a:rPr>
-              <a:t>Appendix: 2. 記号対・表示範囲・検算</a:t>
-            </a:r>
-          </a:p>
-        </p:txBody>
-      </p:sp>
-      <p:sp>
-        <p:nvSpPr>
-          <p:cNvPr id="5" name="sources"/>
-          <p:cNvSpPr txBox="1"/>
-          <p:nvPr/>
-        </p:nvSpPr>
-        <p:spPr>
-          <a:xfrm>
-            <a:off x="502920" y="4700016"/>
-            <a:ext cx="8183879" cy="621792"/>
-          </a:xfrm>
-          <a:prstGeom prst="rect">
-            <a:avLst/>
-          </a:prstGeom>
-          <a:noFill/>
-        </p:spPr>
-        <p:txBody>
-          <a:bodyPr wrap="square" lIns="0" rIns="0" tIns="0" bIns="0">
-            <a:noAutofit/>
-          </a:bodyPr>
-          <a:lstStyle/>
-          <a:p>
-            <a:pPr algn="l">
-              <a:lnSpc>
-                <a:spcPts val="1200"/>
-              </a:lnSpc>
-              <a:spcBef>
-                <a:spcPts val="0"/>
-              </a:spcBef>
-              <a:spcAft>
-                <a:spcPts val="0"/>
-              </a:spcAft>
-              <a:buNone/>
-              <a:defRPr sz="810" b="0">
-                <a:solidFill>
-                  <a:srgbClr val="303437"/>
-                </a:solidFill>
-                <a:latin typeface="Noto Sans"/>
-              </a:defRPr>
-            </a:pPr>
-            <a:r>
-              <a:rPr sz="810" b="0" lang="ja-JP" altLang="en-US">
-                <a:solidFill>
-                  <a:srgbClr val="626669"/>
-                </a:solidFill>
-                <a:latin typeface="Noto Sans"/>
-                <a:ea typeface="Noto Sans CJK JP"/>
-                <a:cs typeface="Noto Sans"/>
-              </a:rPr>
-              <a:t>[1] Inverse Scaling Prize. pattern-matching-suppression_classification.jsonl。固定commit920f17de。</a:t>
-            </a:r>
-          </a:p>
-          <a:p>
-            <a:pPr>
-              <a:lnSpc>
-                <a:spcPts val="1200"/>
-              </a:lnSpc>
-              <a:buNone/>
-              <a:defRPr sz="810" b="0">
-                <a:solidFill>
-                  <a:srgbClr val="303437"/>
-                </a:solidFill>
-                <a:latin typeface="Noto Sans"/>
-              </a:defRPr>
-            </a:pPr>
-            <a:r>
-              <a:rPr sz="810" b="0" lang="ja-JP" altLang="en-US">
-                <a:solidFill>
-                  <a:srgbClr val="626669"/>
-                </a:solidFill>
-                <a:latin typeface="Noto Sans"/>
-                <a:ea typeface="Noto Sans CJK JP"/>
-                <a:cs typeface="Noto Sans"/>
-                <a:hlinkClick r:id="rId2"/>
-              </a:rPr>
-              <a:t>https://github.com/inverse-scaling/prize/blob/920f17de85f2a7f2415b097bc49e6a7fbf17b0b2/data-release/isp-data-release.zip</a:t>
-            </a:r>
-          </a:p>
-        </p:txBody>
-      </p:sp>
-    </p:spTree>
-  </p:cSld>
-  <p:clrMapOvr>
-    <a:masterClrMapping/>
-  </p:clrMapOvr>
-</p:sld>
-</file>
-
-<file path=ppt/slides/slide48.xml><?xml version="1.0" encoding="utf-8"?>
-<p:sld xmlns:a="http://schemas.openxmlformats.org/drawingml/2006/main" xmlns:p="http://schemas.openxmlformats.org/presentationml/2006/main" xmlns:r="http://schemas.openxmlformats.org/officeDocument/2006/relationships">
-  <p:cSld>
-    <p:spTree>
-      <p:nvGrpSpPr>
-        <p:cNvPr id="1" name=""/>
-        <p:cNvGrpSpPr/>
-        <p:nvPr/>
-      </p:nvGrpSpPr>
-      <p:grpSpPr/>
-      <p:sp>
-        <p:nvSpPr>
-          <p:cNvPr id="2" name="Title 1"/>
-          <p:cNvSpPr>
-            <a:spLocks noGrp="1"/>
-          </p:cNvSpPr>
-          <p:nvPr>
-            <p:ph type="title"/>
-          </p:nvPr>
-        </p:nvSpPr>
-        <p:spPr>
-          <a:xfrm>
-            <a:off x="468172" y="650138"/>
-            <a:ext cx="8206740" cy="616305"/>
-          </a:xfrm>
-        </p:spPr>
-        <p:txBody>
-          <a:bodyPr wrap="square" lIns="0" rIns="0" tIns="0" bIns="0">
-            <a:noAutofit/>
-          </a:bodyPr>
-          <a:lstStyle/>
-          <a:p>
-            <a:pPr algn="l">
-              <a:lnSpc>
-                <a:spcPct val="110000"/>
-              </a:lnSpc>
-              <a:buNone/>
-              <a:defRPr sz="2800" b="0">
-                <a:solidFill>
-                  <a:srgbClr val="303437"/>
-                </a:solidFill>
-                <a:latin typeface="Noto Sans"/>
-              </a:defRPr>
-            </a:pPr>
-            <a:r>
-              <a:rPr sz="2800" b="1" lang="ja-JP" altLang="en-US">
-                <a:solidFill>
-                  <a:srgbClr val="303437"/>
-                </a:solidFill>
-                <a:latin typeface="Noto Sans"/>
-                <a:ea typeface="Noto Sans CJK JP"/>
-                <a:cs typeface="Noto Sans"/>
-              </a:rPr>
-              <a:t>集合名の不整合は、列の構造とは別に数える</a:t>
-            </a:r>
-          </a:p>
-        </p:txBody>
-      </p:sp>
-      <p:sp>
-        <p:nvSpPr>
-          <p:cNvPr id="3" name="Text Placeholder 2"/>
-          <p:cNvSpPr>
-            <a:spLocks noGrp="1"/>
-          </p:cNvSpPr>
-          <p:nvPr>
-            <p:ph type="body" idx="1"/>
-          </p:nvPr>
-        </p:nvSpPr>
-        <p:spPr>
-          <a:xfrm>
-            <a:off x="594360" y="1463040"/>
-            <a:ext cx="7955279" cy="3044952"/>
-          </a:xfrm>
-        </p:spPr>
-        <p:txBody>
-          <a:bodyPr wrap="square" tIns="91440" bIns="91440">
-            <a:noAutofit/>
-          </a:bodyPr>
-          <a:lstStyle/>
-          <a:p>
-            <a:pPr marL="457200" indent="-355600">
-              <a:lnSpc>
-                <a:spcPts val="2499"/>
-              </a:lnSpc>
-              <a:spcAft>
-                <a:spcPts val="700"/>
-              </a:spcAft>
-              <a:buSzPct val="63333"/>
-              <a:buFont typeface="Noto Sans CJK JP"/>
-              <a:buChar char="●"/>
-              <a:defRPr sz="2100" b="0">
-                <a:solidFill>
-                  <a:srgbClr val="303437"/>
-                </a:solidFill>
-                <a:latin typeface="Noto Sans"/>
-              </a:defRPr>
-            </a:pPr>
-            <a:r>
-              <a:rPr sz="2100" b="0" lang="ja-JP" altLang="en-US">
-                <a:solidFill>
-                  <a:srgbClr val="303437"/>
-                </a:solidFill>
-                <a:latin typeface="Noto Sans"/>
-                <a:ea typeface="Noto Sans CJK JP"/>
-                <a:cs typeface="Noto Sans"/>
-              </a:rPr>
-              <a:t>長い記号名を含む6群の指示には、i i・one・aa・alp・fir・lefという表記がある。各119件、合計714件。</a:t>
-            </a:r>
-          </a:p>
-          <a:p>
-            <a:pPr marL="457200" indent="-355600">
-              <a:lnSpc>
-                <a:spcPts val="2499"/>
-              </a:lnSpc>
-              <a:spcAft>
-                <a:spcPts val="700"/>
-              </a:spcAft>
-              <a:buSzPct val="63333"/>
-              <a:buFont typeface="Noto Sans CJK JP"/>
-              <a:buChar char="●"/>
-              <a:defRPr sz="2100" b="0">
-                <a:solidFill>
-                  <a:srgbClr val="303437"/>
-                </a:solidFill>
-                <a:latin typeface="Noto Sans"/>
-              </a:defRPr>
-            </a:pPr>
-            <a:r>
-              <a:rPr sz="2100" b="0" lang="ja-JP" altLang="en-US">
-                <a:solidFill>
-                  <a:srgbClr val="303437"/>
-                </a:solidFill>
-                <a:latin typeface="Noto Sans"/>
-                <a:ea typeface="Noto Sans CJK JP"/>
-                <a:cs typeface="Noto Sans"/>
-              </a:rPr>
-              <a:t>各行の提示列と候補にはi/ii、one/two、aa/ab、alpha/beta、first/second、left/rightが完全な形で現れる。</a:t>
-            </a:r>
-          </a:p>
-          <a:p>
-            <a:pPr marL="457200" indent="-355600">
-              <a:lnSpc>
-                <a:spcPts val="2499"/>
-              </a:lnSpc>
-              <a:spcAft>
-                <a:spcPts val="0"/>
-              </a:spcAft>
-              <a:buSzPct val="63333"/>
-              <a:buFont typeface="Noto Sans CJK JP"/>
-              <a:buChar char="●"/>
-              <a:defRPr sz="2100" b="0">
-                <a:solidFill>
-                  <a:srgbClr val="303437"/>
-                </a:solidFill>
-                <a:latin typeface="Noto Sans"/>
-              </a:defRPr>
-            </a:pPr>
-            <a:r>
-              <a:rPr sz="2100" b="0" lang="ja-JP" altLang="en-US">
-                <a:solidFill>
-                  <a:srgbClr val="303437"/>
-                </a:solidFill>
-                <a:latin typeface="Noto Sans"/>
-                <a:ea typeface="Noto Sans CJK JP"/>
-                <a:cs typeface="Noto Sans"/>
-              </a:rPr>
-              <a:t>指示内の文字列が完全な記号対の先頭3文字と一致することは確認したが、生成器の原因は未確認。元の表記を推測で直していない。</a:t>
-            </a:r>
-          </a:p>
-        </p:txBody>
-      </p:sp>
-      <p:sp>
-        <p:nvSpPr>
-          <p:cNvPr id="4" name="Title 3"/>
-          <p:cNvSpPr>
-            <a:spLocks noGrp="1"/>
-          </p:cNvSpPr>
-          <p:nvPr>
-            <p:ph type="title" idx="2"/>
-          </p:nvPr>
-        </p:nvSpPr>
-        <p:spPr>
-          <a:xfrm>
-            <a:off x="75895" y="0"/>
-            <a:ext cx="8115300" cy="480060"/>
-          </a:xfrm>
-        </p:spPr>
-        <p:txBody>
-          <a:bodyPr wrap="square" lIns="0" rIns="0" tIns="0" bIns="0" anchor="ctr">
-            <a:noAutofit/>
-          </a:bodyPr>
-          <a:lstStyle/>
-          <a:p>
-            <a:pPr algn="l">
-              <a:lnSpc>
-                <a:spcPct val="110000"/>
-              </a:lnSpc>
-              <a:buNone/>
-              <a:defRPr sz="1400" b="0">
-                <a:solidFill>
-                  <a:srgbClr val="303437"/>
-                </a:solidFill>
-                <a:latin typeface="Noto Sans"/>
-              </a:defRPr>
-            </a:pPr>
-            <a:r>
-              <a:rPr sz="1400" b="1" lang="ja-JP" altLang="en-US">
-                <a:solidFill>
-                  <a:srgbClr val="FFFEF8"/>
-                </a:solidFill>
-                <a:latin typeface="Noto Sans"/>
-                <a:ea typeface="Noto Sans CJK JP"/>
-                <a:cs typeface="Noto Sans"/>
-              </a:rPr>
-              <a:t>Appendix: 2. 記号対・表示範囲・検算</a:t>
-            </a:r>
-          </a:p>
-        </p:txBody>
-      </p:sp>
-      <p:sp>
-        <p:nvSpPr>
-          <p:cNvPr id="5" name="sources"/>
-          <p:cNvSpPr txBox="1"/>
-          <p:nvPr/>
-        </p:nvSpPr>
-        <p:spPr>
-          <a:xfrm>
-            <a:off x="502920" y="4700016"/>
-            <a:ext cx="8183879" cy="621792"/>
-          </a:xfrm>
-          <a:prstGeom prst="rect">
-            <a:avLst/>
-          </a:prstGeom>
-          <a:noFill/>
-        </p:spPr>
-        <p:txBody>
-          <a:bodyPr wrap="square" lIns="0" rIns="0" tIns="0" bIns="0">
-            <a:noAutofit/>
-          </a:bodyPr>
-          <a:lstStyle/>
-          <a:p>
-            <a:pPr algn="l">
-              <a:lnSpc>
-                <a:spcPts val="1200"/>
-              </a:lnSpc>
-              <a:spcBef>
-                <a:spcPts val="0"/>
-              </a:spcBef>
-              <a:spcAft>
-                <a:spcPts val="0"/>
-              </a:spcAft>
-              <a:buNone/>
-              <a:defRPr sz="810" b="0">
-                <a:solidFill>
-                  <a:srgbClr val="303437"/>
-                </a:solidFill>
-                <a:latin typeface="Noto Sans"/>
-              </a:defRPr>
-            </a:pPr>
-            <a:r>
-              <a:rPr sz="810" b="0" lang="ja-JP" altLang="en-US">
-                <a:solidFill>
-                  <a:srgbClr val="626669"/>
-                </a:solidFill>
-                <a:latin typeface="Noto Sans"/>
-                <a:ea typeface="Noto Sans CJK JP"/>
-                <a:cs typeface="Noto Sans"/>
-              </a:rPr>
-              <a:t>[1] Inverse Scaling Prize. pattern-matching-suppression_classification.jsonl。固定commit920f17de。</a:t>
-            </a:r>
-          </a:p>
-          <a:p>
-            <a:pPr>
-              <a:lnSpc>
-                <a:spcPts val="1200"/>
-              </a:lnSpc>
-              <a:buNone/>
-              <a:defRPr sz="810" b="0">
-                <a:solidFill>
-                  <a:srgbClr val="303437"/>
-                </a:solidFill>
-                <a:latin typeface="Noto Sans"/>
-              </a:defRPr>
-            </a:pPr>
-            <a:r>
-              <a:rPr sz="810" b="0" lang="ja-JP" altLang="en-US">
-                <a:solidFill>
-                  <a:srgbClr val="626669"/>
-                </a:solidFill>
-                <a:latin typeface="Noto Sans"/>
-                <a:ea typeface="Noto Sans CJK JP"/>
-                <a:cs typeface="Noto Sans"/>
-                <a:hlinkClick r:id="rId2"/>
-              </a:rPr>
-              <a:t>https://github.com/inverse-scaling/prize/blob/920f17de85f2a7f2415b097bc49e6a7fbf17b0b2/data-release/isp-data-release.zip</a:t>
+              <a:spcBef>
+                <a:spcPts val="0"/>
+              </a:spcBef>
+              <a:spcAft>
+                <a:spcPts val="0"/>
+              </a:spcAft>
+            </a:pPr>
+            <a:r>
+              <a:rPr sz="830">
+                <a:latin typeface="Noto Sans CJK JP"/>
+                <a:hlinkClick r:id="rId3"/>
+              </a:rPr>
+              <a:t>https://github.com/inverse-scaling/prize/tree/main/data-release</a:t>
             </a:r>
           </a:p>
         </p:txBody>
@@ -26112,7 +23833,7 @@
                 <a:ea typeface="Noto Sans CJK JP"/>
                 <a:cs typeface="Noto Sans"/>
               </a:rPr>
-              <a:t>提示列の末尾と、正解候補を直接照合する</a:t>
+              <a:t>JSONLから指示・列・候補を読み出す</a:t>
             </a:r>
           </a:p>
         </p:txBody>
@@ -26160,7 +23881,7 @@
                 <a:ea typeface="Noto Sans CJK JP"/>
                 <a:cs typeface="Noto Sans"/>
               </a:rPr>
-              <a:t>Appendix: 2. 記号対・表示範囲・検算</a:t>
+              <a:t>Appendix: 2. 記号の種類と読み込み方</a:t>
             </a:r>
           </a:p>
         </p:txBody>
@@ -26234,7 +23955,7 @@
                 <a:ea typeface="Noto Sans CJK JP"/>
                 <a:cs typeface="Liberation Mono"/>
               </a:rPr>
-              <a:t>import ast</a:t>
+              <a:t>import ast, json</a:t>
             </a:r>
           </a:p>
           <a:p>
@@ -26265,7 +23986,7 @@
                 <a:ea typeface="Noto Sans CJK JP"/>
                 <a:cs typeface="Liberation Mono"/>
               </a:rPr>
-              <a:t>row = rows[1309]</a:t>
+              <a:t>path = "pattern-matching-suppression_classification.jsonl"</a:t>
             </a:r>
           </a:p>
           <a:p>
@@ -26296,7 +24017,7 @@
                 <a:ea typeface="Noto Sans CJK JP"/>
                 <a:cs typeface="Liberation Mono"/>
               </a:rPr>
-              <a:t>classes = ast.literal_eval(row["classes"])</a:t>
+              <a:t>with open(path) as file:</a:t>
             </a:r>
           </a:p>
           <a:p>
@@ -26327,7 +24048,7 @@
                 <a:ea typeface="Noto Sans CJK JP"/>
                 <a:cs typeface="Liberation Mono"/>
               </a:rPr>
-              <a:t>prefix = row["prompt"].split("\n")[-1]</a:t>
+              <a:t>    row = json.loads(next(file))</a:t>
             </a:r>
           </a:p>
           <a:p>
@@ -26358,7 +24079,7 @@
                 <a:ea typeface="Noto Sans CJK JP"/>
                 <a:cs typeface="Liberation Mono"/>
               </a:rPr>
-              <a:t>tokens = [s.strip() for s in prefix.split(",") if s.strip()]</a:t>
+              <a:t>choices = ast.literal_eval(row["classes"])</a:t>
             </a:r>
           </a:p>
           <a:p>
@@ -26389,7 +24110,7 @@
                 <a:ea typeface="Noto Sans CJK JP"/>
                 <a:cs typeface="Liberation Mono"/>
               </a:rPr>
-              <a:t>assert classes[row["answer_index"]].strip() == tokens[-1]</a:t>
+              <a:t>print(row["prompt"])</a:t>
             </a:r>
           </a:p>
           <a:p>
@@ -26420,7 +24141,7 @@
                 <a:ea typeface="Noto Sans CJK JP"/>
                 <a:cs typeface="Liberation Mono"/>
               </a:rPr>
-              <a:t>print(tokens[-1])  # o</a:t>
+              <a:t>print(choices, choices[row["answer_index"]])</a:t>
             </a:r>
           </a:p>
         </p:txBody>
@@ -26474,7 +24195,7 @@
                 <a:ea typeface="Noto Sans CJK JP"/>
                 <a:cs typeface="Noto Sans"/>
               </a:rPr>
-              <a:t>rowsは原JSONLを読んだ配列。1,310行目を使い、配布正解oが最後の提示記号oを繰り返すことを確認する。</a:t>
+              <a:t>ZIP内のJSONLと同じフォルダで実行する。最初の指示と提示列、候補、正解を表示する。</a:t>
             </a:r>
           </a:p>
         </p:txBody>
@@ -26487,8 +24208,8 @@
         </p:nvSpPr>
         <p:spPr>
           <a:xfrm>
-            <a:off x="502920" y="4700016"/>
-            <a:ext cx="8183879" cy="621792"/>
+            <a:off x="502920" y="4699000"/>
+            <a:ext cx="8183879" cy="431800"/>
           </a:xfrm>
           <a:prstGeom prst="rect">
             <a:avLst/>
@@ -26520,41 +24241,27 @@
               </a:defRPr>
             </a:pPr>
             <a:r>
-              <a:rPr sz="810" b="0" lang="ja-JP" altLang="en-US">
-                <a:solidFill>
-                  <a:srgbClr val="626669"/>
-                </a:solidFill>
-                <a:latin typeface="Noto Sans"/>
-                <a:ea typeface="Noto Sans CJK JP"/>
-                <a:cs typeface="Noto Sans"/>
-              </a:rPr>
-              <a:t>[1] Inverse Scaling Prize. pattern-matching-suppression_classification.jsonl。固定commit920f17de。 1310行目／実例1。</a:t>
+              <a:rPr sz="830">
+                <a:latin typeface="Noto Sans CJK JP"/>
+              </a:rPr>
+              <a:t>[1] Inverse Scaling Prize (2023). Pattern Matching Suppression. Tomasz Korbak.</a:t>
             </a:r>
           </a:p>
           <a:p>
             <a:pPr>
-              <a:lnSpc>
-                <a:spcPts val="1200"/>
-              </a:lnSpc>
-              <a:buNone/>
-              <a:defRPr sz="810" b="0">
-                <a:solidFill>
-                  <a:srgbClr val="303437"/>
-                </a:solidFill>
-                <a:latin typeface="Noto Sans"/>
-              </a:defRPr>
-            </a:pPr>
-            <a:r>
-              <a:rPr sz="810" b="0" lang="ja-JP" altLang="en-US">
-                <a:solidFill>
-                  <a:srgbClr val="626669"/>
-                </a:solidFill>
-                <a:latin typeface="Noto Sans"/>
-                <a:ea typeface="Noto Sans CJK JP"/>
-                <a:cs typeface="Noto Sans"/>
-                <a:hlinkClick r:id="rId2"/>
-              </a:rPr>
-              <a:t>https://github.com/inverse-scaling/prize/blob/920f17de85f2a7f2415b097bc49e6a7fbf17b0b2/data-release/isp-data-release.zip</a:t>
+              <a:spcBef>
+                <a:spcPts val="0"/>
+              </a:spcBef>
+              <a:spcAft>
+                <a:spcPts val="0"/>
+              </a:spcAft>
+            </a:pPr>
+            <a:r>
+              <a:rPr sz="830">
+                <a:latin typeface="Noto Sans CJK JP"/>
+                <a:hlinkClick r:id="rId3"/>
+              </a:rPr>
+              <a:t>https://github.com/inverse-scaling/prize/tree/main/data-release</a:t>
             </a:r>
           </a:p>
         </p:txBody>
@@ -26620,7 +24327,7 @@
                 <a:ea typeface="Noto Sans CJK JP"/>
                 <a:cs typeface="Noto Sans"/>
               </a:rPr>
-              <a:t>規則を見つけた後で、その規則を止める</a:t>
+              <a:t>繰り返しを読み、最後だけ規則を破る</a:t>
             </a:r>
           </a:p>
         </p:txBody>
@@ -26703,7 +24410,7 @@
                 <a:ea typeface="Noto Sans CJK JP"/>
                 <a:cs typeface="Noto Sans"/>
               </a:rPr>
-              <a:t>繰返しから自然に予想される続きを出すことと、明示された終わり方の指示に従うことが衝突する。</a:t>
+              <a:t>繰り返しから自然に予想される続きと、明示された終わり方の指示が食い違う場面を扱う。</a:t>
             </a:r>
           </a:p>
           <a:p>
@@ -26733,7 +24440,7 @@
                 <a:ea typeface="Noto Sans CJK JP"/>
                 <a:cs typeface="Noto Sans"/>
               </a:rPr>
-              <a:t>公式公開版は二候補を採点する。正解は交互列を続ける候補ではなく、最後に規則を破る候補である。</a:t>
+              <a:t>公式公開版では、続きとなる二つの候補を評価する。正解は、最後に交互の規則を破る候補である。</a:t>
             </a:r>
           </a:p>
         </p:txBody>
@@ -26781,7 +24488,7 @@
                 <a:ea typeface="Noto Sans CJK JP"/>
                 <a:cs typeface="Noto Sans"/>
               </a:rPr>
-              <a:t>1. 交互の列を、最後だけ破る</a:t>
+              <a:t>1. 列の最後で、交互の規則を破る</a:t>
             </a:r>
           </a:p>
         </p:txBody>
@@ -26794,8 +24501,8 @@
         </p:nvSpPr>
         <p:spPr>
           <a:xfrm>
-            <a:off x="502920" y="4700016"/>
-            <a:ext cx="8183879" cy="621792"/>
+            <a:off x="502920" y="4699000"/>
+            <a:ext cx="8183879" cy="431800"/>
           </a:xfrm>
           <a:prstGeom prst="rect">
             <a:avLst/>
@@ -26827,35 +24534,24 @@
               </a:defRPr>
             </a:pPr>
             <a:r>
-              <a:rPr sz="810" b="0" lang="ja-JP" altLang="en-US">
-                <a:solidFill>
-                  <a:srgbClr val="626669"/>
-                </a:solidFill>
-                <a:latin typeface="Noto Sans"/>
-                <a:ea typeface="Noto Sans CJK JP"/>
-                <a:cs typeface="Noto Sans"/>
-              </a:rPr>
-              <a:t>[1] McKenzie et al. (2023). Inverse Scaling: When Bigger Isn’t Better. TMLR. arXiv v2(2024)を参照。</a:t>
-            </a:r>
-            <a:r>
-              <a:rPr sz="810" b="0" lang="ja-JP" altLang="en-US">
-                <a:solidFill>
-                  <a:srgbClr val="626669"/>
-                </a:solidFill>
-                <a:latin typeface="Noto Sans"/>
-                <a:ea typeface="Noto Sans CJK JP"/>
-                <a:cs typeface="Noto Sans"/>
-              </a:rPr>
-              <a:t>  </a:t>
-            </a:r>
-            <a:r>
-              <a:rPr sz="810" b="0" lang="ja-JP" altLang="en-US">
-                <a:solidFill>
-                  <a:srgbClr val="626669"/>
-                </a:solidFill>
-                <a:latin typeface="Noto Sans"/>
-                <a:ea typeface="Noto Sans CJK JP"/>
-                <a:cs typeface="Noto Sans"/>
+              <a:rPr sz="830">
+                <a:latin typeface="Noto Sans CJK JP"/>
+              </a:rPr>
+              <a:t>[1] McKenzie et al. (2023). Inverse Scaling: When Bigger Isn’t Better. TMLR.</a:t>
+            </a:r>
+          </a:p>
+          <a:p>
+            <a:pPr>
+              <a:spcBef>
+                <a:spcPts val="0"/>
+              </a:spcBef>
+              <a:spcAft>
+                <a:spcPts val="0"/>
+              </a:spcAft>
+            </a:pPr>
+            <a:r>
+              <a:rPr sz="830">
+                <a:latin typeface="Noto Sans CJK JP"/>
                 <a:hlinkClick r:id="rId2"/>
               </a:rPr>
               <a:t>https://arxiv.org/abs/2306.09479</a:t>
@@ -27151,7 +24847,7 @@
                 <a:ea typeface="Noto Sans CJK JP"/>
                 <a:cs typeface="Noto Sans"/>
               </a:rPr>
-              <a:t>研究では人の解釈は配布正解に高く一致する一方、モデルの規模や例示数によって違う傾向が現れることを報告する。</a:t>
+              <a:t>研究では人が選ぶ回答はデータの正解とよく一致する一方、モデルの規模や例示数によって違う傾向が現れることを報告する。</a:t>
             </a:r>
           </a:p>
         </p:txBody>
@@ -27212,8 +24908,8 @@
         </p:nvSpPr>
         <p:spPr>
           <a:xfrm>
-            <a:off x="502920" y="4700016"/>
-            <a:ext cx="8183879" cy="621792"/>
+            <a:off x="502920" y="4699000"/>
+            <a:ext cx="8183879" cy="431800"/>
           </a:xfrm>
           <a:prstGeom prst="rect">
             <a:avLst/>
@@ -27245,35 +24941,24 @@
               </a:defRPr>
             </a:pPr>
             <a:r>
-              <a:rPr sz="810" b="0" lang="ja-JP" altLang="en-US">
-                <a:solidFill>
-                  <a:srgbClr val="626669"/>
-                </a:solidFill>
-                <a:latin typeface="Noto Sans"/>
-                <a:ea typeface="Noto Sans CJK JP"/>
-                <a:cs typeface="Noto Sans"/>
-              </a:rPr>
-              <a:t>[1] McKenzie et al. (2023). Inverse Scaling: When Bigger Isn’t Better. TMLR. arXiv v2(2024)を参照。</a:t>
-            </a:r>
-            <a:r>
-              <a:rPr sz="810" b="0" lang="ja-JP" altLang="en-US">
-                <a:solidFill>
-                  <a:srgbClr val="626669"/>
-                </a:solidFill>
-                <a:latin typeface="Noto Sans"/>
-                <a:ea typeface="Noto Sans CJK JP"/>
-                <a:cs typeface="Noto Sans"/>
-              </a:rPr>
-              <a:t>  </a:t>
-            </a:r>
-            <a:r>
-              <a:rPr sz="810" b="0" lang="ja-JP" altLang="en-US">
-                <a:solidFill>
-                  <a:srgbClr val="626669"/>
-                </a:solidFill>
-                <a:latin typeface="Noto Sans"/>
-                <a:ea typeface="Noto Sans CJK JP"/>
-                <a:cs typeface="Noto Sans"/>
+              <a:rPr sz="830">
+                <a:latin typeface="Noto Sans CJK JP"/>
+              </a:rPr>
+              <a:t>[1] McKenzie et al. (2023). Inverse Scaling: When Bigger Isn’t Better. TMLR.</a:t>
+            </a:r>
+          </a:p>
+          <a:p>
+            <a:pPr>
+              <a:spcBef>
+                <a:spcPts val="0"/>
+              </a:spcBef>
+              <a:spcAft>
+                <a:spcPts val="0"/>
+              </a:spcAft>
+            </a:pPr>
+            <a:r>
+              <a:rPr sz="830">
+                <a:latin typeface="Noto Sans CJK JP"/>
                 <a:hlinkClick r:id="rId2"/>
               </a:rPr>
               <a:t>https://arxiv.org/abs/2306.09479</a:t>
@@ -27623,7 +25308,7 @@
                 <a:ea typeface="Noto Sans CJK JP"/>
                 <a:cs typeface="Noto Sans"/>
               </a:rPr>
-              <a:t>Inverse Scaling Prize. 2023年3月公開。課題提出者Tomasz Korbak。固定commit920f17de。</a:t>
+              <a:t>Inverse Scaling Prize. 2023年3月公開。課題提出者Tomasz Korbak。</a:t>
             </a:r>
           </a:p>
           <a:p>
@@ -27686,7 +25371,7 @@
                 <a:cs typeface="Noto Sans"/>
                 <a:hlinkClick r:id="rId3"/>
               </a:rPr>
-              <a:t>https://github.com/inverse-scaling/prize/blob/920f17de85f2a7f2415b097bc49e6a7fbf17b0b2/data-release/README.md</a:t>
+              <a:t>https://github.com/inverse-scaling/prize/blob/main/data-release/README.md</a:t>
             </a:r>
           </a:p>
         </p:txBody>
@@ -28572,7 +26257,7 @@
                 <a:ea typeface="Noto Sans CJK JP"/>
                 <a:cs typeface="Noto Sans"/>
               </a:rPr>
-              <a:t>提示されるのは、最後の一つを除く列</a:t>
+              <a:t>入力の列に、最後の一記号を補う</a:t>
             </a:r>
           </a:p>
         </p:txBody>
@@ -28625,7 +26310,7 @@
                 <a:ea typeface="Noto Sans CJK JP"/>
                 <a:cs typeface="Noto Sans"/>
               </a:rPr>
-              <a:t>promptは、作る列の長さと終わり方を指定し、その後に途中までの列を示す。6個を求める例では5個が既に与えられる。</a:t>
+              <a:t>入力には、完成させる列の長さと終わり方の指示があり、その後に途中までの列が続く。6個を求める例では、5個が既に示されている。</a:t>
             </a:r>
           </a:p>
           <a:p>
@@ -28655,7 +26340,7 @@
                 <a:ea typeface="Noto Sans CJK JP"/>
                 <a:cs typeface="Noto Sans"/>
               </a:rPr>
-              <a:t>元データのclassesは、次に続く二つの記号文字列。answer_indexは0始まりの候補位置で、候補の先頭空白も原値に含まれる。</a:t>
+              <a:t>二つの候補から、最後に付ける記号を選ぶ。たとえばo, x, o, x, oの後には、oを選ぶと最後だけ規則を破れる。</a:t>
             </a:r>
           </a:p>
           <a:p>
@@ -28685,7 +26370,7 @@
                 <a:ea typeface="Noto Sans CJK JP"/>
                 <a:cs typeface="Noto Sans"/>
               </a:rPr>
-              <a:t>以下の13例は指示・提示列・二候補の全文。日本語訳でも、i・one・alphaなどは記号の名前として原綴りを保つ。</a:t>
+              <a:t>JSONLのpromptが指示と列、classesが候補、answer_indexが正解候補の位置を表す。候補の文字列は、先頭空白も含めて保存されている。</a:t>
             </a:r>
           </a:p>
         </p:txBody>
@@ -28733,7 +26418,7 @@
                 <a:ea typeface="Noto Sans CJK JP"/>
                 <a:cs typeface="Noto Sans"/>
               </a:rPr>
-              <a:t>1. 交互の列を、最後だけ破る</a:t>
+              <a:t>1. 列の最後で、交互の規則を破る</a:t>
             </a:r>
           </a:p>
         </p:txBody>
@@ -28746,8 +26431,8 @@
         </p:nvSpPr>
         <p:spPr>
           <a:xfrm>
-            <a:off x="502920" y="4700016"/>
-            <a:ext cx="8183879" cy="621792"/>
+            <a:off x="502920" y="4699000"/>
+            <a:ext cx="8183879" cy="431800"/>
           </a:xfrm>
           <a:prstGeom prst="rect">
             <a:avLst/>
@@ -28779,41 +26464,27 @@
               </a:defRPr>
             </a:pPr>
             <a:r>
-              <a:rPr sz="810" b="0" lang="ja-JP" altLang="en-US">
-                <a:solidFill>
-                  <a:srgbClr val="626669"/>
-                </a:solidFill>
-                <a:latin typeface="Noto Sans"/>
-                <a:ea typeface="Noto Sans CJK JP"/>
-                <a:cs typeface="Noto Sans"/>
-              </a:rPr>
-              <a:t>[1] Inverse Scaling Prize. pattern-matching-suppression_classification.jsonl。固定commit920f17de。</a:t>
+              <a:rPr sz="830">
+                <a:latin typeface="Noto Sans CJK JP"/>
+              </a:rPr>
+              <a:t>[1] Inverse Scaling Prize (2023). Pattern Matching Suppression. Tomasz Korbak.</a:t>
             </a:r>
           </a:p>
           <a:p>
             <a:pPr>
-              <a:lnSpc>
-                <a:spcPts val="1200"/>
-              </a:lnSpc>
-              <a:buNone/>
-              <a:defRPr sz="810" b="0">
-                <a:solidFill>
-                  <a:srgbClr val="303437"/>
-                </a:solidFill>
-                <a:latin typeface="Noto Sans"/>
-              </a:defRPr>
-            </a:pPr>
-            <a:r>
-              <a:rPr sz="810" b="0" lang="ja-JP" altLang="en-US">
-                <a:solidFill>
-                  <a:srgbClr val="626669"/>
-                </a:solidFill>
-                <a:latin typeface="Noto Sans"/>
-                <a:ea typeface="Noto Sans CJK JP"/>
-                <a:cs typeface="Noto Sans"/>
-                <a:hlinkClick r:id="rId2"/>
-              </a:rPr>
-              <a:t>https://github.com/inverse-scaling/prize/blob/920f17de85f2a7f2415b097bc49e6a7fbf17b0b2/data-release/isp-data-release.zip</a:t>
+              <a:spcBef>
+                <a:spcPts val="0"/>
+              </a:spcBef>
+              <a:spcAft>
+                <a:spcPts val="0"/>
+              </a:spcAft>
+            </a:pPr>
+            <a:r>
+              <a:rPr sz="830">
+                <a:latin typeface="Noto Sans CJK JP"/>
+                <a:hlinkClick r:id="rId3"/>
+              </a:rPr>
+              <a:t>https://github.com/inverse-scaling/prize/tree/main/data-release</a:t>
             </a:r>
           </a:p>
         </p:txBody>
@@ -28927,7 +26598,7 @@
                 <a:ea typeface="Noto Sans CJK JP"/>
                 <a:cs typeface="Noto Sans"/>
               </a:rPr>
-              <a:t>1. 交互の列を、最後だけ破る</a:t>
+              <a:t>1. 列の最後で、交互の規則を破る</a:t>
             </a:r>
           </a:p>
         </p:txBody>
@@ -28981,7 +26652,7 @@
                 <a:ea typeface="Noto Sans CJK JP"/>
                 <a:cs typeface="Noto Sans"/>
               </a:rPr>
-              <a:t>公式JSONL1310行目／prompt全文・二候補／記号名は原綴り</a:t>
+              <a:t>指示・提示列・二つの候補の全文</a:t>
             </a:r>
           </a:p>
         </p:txBody>
@@ -29131,7 +26802,7 @@
         <p:spPr>
           <a:xfrm>
             <a:off x="4572000" y="1627632"/>
-            <a:ext cx="4023360" cy="1359136"/>
+            <a:ext cx="4023360" cy="1593934"/>
           </a:xfrm>
           <a:prstGeom prst="rect">
             <a:avLst/>
@@ -29191,7 +26862,7 @@
                 <a:ea typeface="Noto Sans CJK JP"/>
                 <a:cs typeface="Noto Sans"/>
               </a:rPr>
-              <a:t>二つの記号(o x)の間で交互になる6個の記号列を生成してください。ただし、最後は予想外のものにしてください。</a:t>
+              <a:t>二つの記号(o x)を交互に並べた、6個の記号からなる列を生成してください。ただし、最後は予想外のものにしてください。</a:t>
             </a:r>
           </a:p>
           <a:p>
@@ -29266,7 +26937,7 @@
         </p:nvSpPr>
         <p:spPr>
           <a:xfrm>
-            <a:off x="594360" y="3135808"/>
+            <a:off x="594360" y="3348566"/>
             <a:ext cx="7955279" cy="429768"/>
           </a:xfrm>
           <a:prstGeom prst="rect">
@@ -29307,7 +26978,7 @@
                 <a:ea typeface="Noto Sans CJK JP"/>
                 <a:cs typeface="Noto Sans"/>
               </a:rPr>
-              <a:t>配布正解：classes[1] = ' o'</a:t>
+              <a:t>正解：o</a:t>
             </a:r>
           </a:p>
         </p:txBody>
@@ -29320,7 +26991,7 @@
         </p:nvSpPr>
         <p:spPr>
           <a:xfrm>
-            <a:off x="594360" y="3629584"/>
+            <a:off x="594360" y="3842342"/>
             <a:ext cx="7955279" cy="731520"/>
           </a:xfrm>
           <a:prstGeom prst="rect">
@@ -29374,8 +27045,8 @@
         </p:nvSpPr>
         <p:spPr>
           <a:xfrm>
-            <a:off x="502920" y="4700016"/>
-            <a:ext cx="8183879" cy="621792"/>
+            <a:off x="502920" y="4699000"/>
+            <a:ext cx="8183879" cy="431800"/>
           </a:xfrm>
           <a:prstGeom prst="rect">
             <a:avLst/>
@@ -29407,41 +27078,27 @@
               </a:defRPr>
             </a:pPr>
             <a:r>
-              <a:rPr sz="810" b="0" lang="ja-JP" altLang="en-US">
-                <a:solidFill>
-                  <a:srgbClr val="626669"/>
-                </a:solidFill>
-                <a:latin typeface="Noto Sans"/>
-                <a:ea typeface="Noto Sans CJK JP"/>
-                <a:cs typeface="Noto Sans"/>
-              </a:rPr>
-              <a:t>[1] Inverse Scaling Prize. pattern-matching-suppression_classification.jsonl。固定commit920f17de。 1310行目（0始まり1309）/ round2 / part1。</a:t>
+              <a:rPr sz="830">
+                <a:latin typeface="Noto Sans CJK JP"/>
+              </a:rPr>
+              <a:t>[1] Inverse Scaling Prize (2023). Pattern Matching Suppression. Tomasz Korbak.</a:t>
             </a:r>
           </a:p>
           <a:p>
             <a:pPr>
-              <a:lnSpc>
-                <a:spcPts val="1200"/>
-              </a:lnSpc>
-              <a:buNone/>
-              <a:defRPr sz="810" b="0">
-                <a:solidFill>
-                  <a:srgbClr val="303437"/>
-                </a:solidFill>
-                <a:latin typeface="Noto Sans"/>
-              </a:defRPr>
-            </a:pPr>
-            <a:r>
-              <a:rPr sz="810" b="0" lang="ja-JP" altLang="en-US">
-                <a:solidFill>
-                  <a:srgbClr val="626669"/>
-                </a:solidFill>
-                <a:latin typeface="Noto Sans"/>
-                <a:ea typeface="Noto Sans CJK JP"/>
-                <a:cs typeface="Noto Sans"/>
-                <a:hlinkClick r:id="rId2"/>
-              </a:rPr>
-              <a:t>https://github.com/inverse-scaling/prize/blob/920f17de85f2a7f2415b097bc49e6a7fbf17b0b2/data-release/isp-data-release.zip</a:t>
+              <a:spcBef>
+                <a:spcPts val="0"/>
+              </a:spcBef>
+              <a:spcAft>
+                <a:spcPts val="0"/>
+              </a:spcAft>
+            </a:pPr>
+            <a:r>
+              <a:rPr sz="830">
+                <a:latin typeface="Noto Sans CJK JP"/>
+                <a:hlinkClick r:id="rId3"/>
+              </a:rPr>
+              <a:t>https://github.com/inverse-scaling/prize/tree/main/data-release</a:t>
             </a:r>
           </a:p>
         </p:txBody>
@@ -29590,7 +27247,7 @@
                 <a:ea typeface="Noto Sans CJK JP"/>
                 <a:cs typeface="Noto Sans"/>
               </a:rPr>
-              <a:t>指示は6記号の列を、予想外に終えること。配布正解oを続けると、最後がo, oとなり交互の規則が破れる。</a:t>
+              <a:t>指示は6記号の列を、予想外に終えること。正解のoを続けると、最後がo, oとなり交互の規則が破れる。</a:t>
             </a:r>
           </a:p>
           <a:p>
@@ -29620,7 +27277,7 @@
                 <a:ea typeface="Noto Sans CJK JP"/>
                 <a:cs typeface="Noto Sans"/>
               </a:rPr>
-              <a:t>途中の5記号は変更しない。既に示された列の後に、最後の1記号を選ぶ。</a:t>
+              <a:t>既に示された5記号の後に、最後の1記号を補う形の問題である。</a:t>
             </a:r>
           </a:p>
         </p:txBody>
@@ -29668,7 +27325,7 @@
                 <a:ea typeface="Noto Sans CJK JP"/>
                 <a:cs typeface="Noto Sans"/>
               </a:rPr>
-              <a:t>1. 交互の列を、最後だけ破る</a:t>
+              <a:t>1. 列の最後で、交互の規則を破る</a:t>
             </a:r>
           </a:p>
         </p:txBody>
@@ -29681,8 +27338,8 @@
         </p:nvSpPr>
         <p:spPr>
           <a:xfrm>
-            <a:off x="502920" y="4700016"/>
-            <a:ext cx="8183879" cy="621792"/>
+            <a:off x="502920" y="4699000"/>
+            <a:ext cx="8183879" cy="431800"/>
           </a:xfrm>
           <a:prstGeom prst="rect">
             <a:avLst/>
@@ -29714,35 +27371,24 @@
               </a:defRPr>
             </a:pPr>
             <a:r>
-              <a:rPr sz="810" b="0" lang="ja-JP" altLang="en-US">
-                <a:solidFill>
-                  <a:srgbClr val="626669"/>
-                </a:solidFill>
-                <a:latin typeface="Noto Sans"/>
-                <a:ea typeface="Noto Sans CJK JP"/>
-                <a:cs typeface="Noto Sans"/>
-              </a:rPr>
-              <a:t>[1] McKenzie et al. (2023). Inverse Scaling: When Bigger Isn’t Better. TMLR. arXiv v2(2024)を参照。</a:t>
-            </a:r>
-            <a:r>
-              <a:rPr sz="810" b="0" lang="ja-JP" altLang="en-US">
-                <a:solidFill>
-                  <a:srgbClr val="626669"/>
-                </a:solidFill>
-                <a:latin typeface="Noto Sans"/>
-                <a:ea typeface="Noto Sans CJK JP"/>
-                <a:cs typeface="Noto Sans"/>
-              </a:rPr>
-              <a:t>  </a:t>
-            </a:r>
-            <a:r>
-              <a:rPr sz="810" b="0" lang="ja-JP" altLang="en-US">
-                <a:solidFill>
-                  <a:srgbClr val="626669"/>
-                </a:solidFill>
-                <a:latin typeface="Noto Sans"/>
-                <a:ea typeface="Noto Sans CJK JP"/>
-                <a:cs typeface="Noto Sans"/>
+              <a:rPr sz="830">
+                <a:latin typeface="Noto Sans CJK JP"/>
+              </a:rPr>
+              <a:t>[1] McKenzie et al. (2023). Inverse Scaling: When Bigger Isn’t Better. TMLR.</a:t>
+            </a:r>
+          </a:p>
+          <a:p>
+            <a:pPr>
+              <a:spcBef>
+                <a:spcPts val="0"/>
+              </a:spcBef>
+              <a:spcAft>
+                <a:spcPts val="0"/>
+              </a:spcAft>
+            </a:pPr>
+            <a:r>
+              <a:rPr sz="830">
+                <a:latin typeface="Noto Sans CJK JP"/>
                 <a:hlinkClick r:id="rId2"/>
               </a:rPr>
               <a:t>https://arxiv.org/abs/2306.09479</a:t>
@@ -29859,7 +27505,7 @@
                 <a:ea typeface="Noto Sans CJK JP"/>
                 <a:cs typeface="Noto Sans"/>
               </a:rPr>
-              <a:t>1. 交互の列を、最後だけ破る</a:t>
+              <a:t>1. 列の最後で、交互の規則を破る</a:t>
             </a:r>
           </a:p>
         </p:txBody>
@@ -29913,7 +27559,7 @@
                 <a:ea typeface="Noto Sans CJK JP"/>
                 <a:cs typeface="Noto Sans"/>
               </a:rPr>
-              <a:t>公式JSONL7行目／prompt全文・二候補／記号名は原綴り</a:t>
+              <a:t>指示・提示列・二つの候補の全文</a:t>
             </a:r>
           </a:p>
         </p:txBody>
@@ -30063,7 +27709,7 @@
         <p:spPr>
           <a:xfrm>
             <a:off x="4572000" y="1627632"/>
-            <a:ext cx="4023360" cy="1843337"/>
+            <a:ext cx="4023360" cy="1839468"/>
           </a:xfrm>
           <a:prstGeom prst="rect">
             <a:avLst/>
@@ -30123,7 +27769,7 @@
                 <a:ea typeface="Noto Sans CJK JP"/>
                 <a:cs typeface="Noto Sans"/>
               </a:rPr>
-              <a:t>二つの記号(A B)の間で交互になる20個の記号列を生成してください。ただし、最後は予想外のものにしてください。</a:t>
+              <a:t>二つの記号(A B)を交互に並べた、20個の記号からなる列を生成してください。ただし、最後は予想外のものにしてください。</a:t>
             </a:r>
           </a:p>
           <a:p>
@@ -30239,7 +27885,7 @@
                 <a:ea typeface="Noto Sans CJK JP"/>
                 <a:cs typeface="Noto Sans"/>
               </a:rPr>
-              <a:t>配布正解：classes[1] = ' A'</a:t>
+              <a:t>正解：A</a:t>
             </a:r>
           </a:p>
         </p:txBody>
@@ -30306,8 +27952,8 @@
         </p:nvSpPr>
         <p:spPr>
           <a:xfrm>
-            <a:off x="502920" y="4700016"/>
-            <a:ext cx="8183879" cy="621792"/>
+            <a:off x="502920" y="4699000"/>
+            <a:ext cx="8183879" cy="431800"/>
           </a:xfrm>
           <a:prstGeom prst="rect">
             <a:avLst/>
@@ -30339,41 +27985,27 @@
               </a:defRPr>
             </a:pPr>
             <a:r>
-              <a:rPr sz="810" b="0" lang="ja-JP" altLang="en-US">
-                <a:solidFill>
-                  <a:srgbClr val="626669"/>
-                </a:solidFill>
-                <a:latin typeface="Noto Sans"/>
-                <a:ea typeface="Noto Sans CJK JP"/>
-                <a:cs typeface="Noto Sans"/>
-              </a:rPr>
-              <a:t>[1] Inverse Scaling Prize. pattern-matching-suppression_classification.jsonl。固定commit920f17de。 7行目（0始まり6）/ round2 / part1。</a:t>
+              <a:rPr sz="830">
+                <a:latin typeface="Noto Sans CJK JP"/>
+              </a:rPr>
+              <a:t>[1] Inverse Scaling Prize (2023). Pattern Matching Suppression. Tomasz Korbak.</a:t>
             </a:r>
           </a:p>
           <a:p>
             <a:pPr>
-              <a:lnSpc>
-                <a:spcPts val="1200"/>
-              </a:lnSpc>
-              <a:buNone/>
-              <a:defRPr sz="810" b="0">
-                <a:solidFill>
-                  <a:srgbClr val="303437"/>
-                </a:solidFill>
-                <a:latin typeface="Noto Sans"/>
-              </a:defRPr>
-            </a:pPr>
-            <a:r>
-              <a:rPr sz="810" b="0" lang="ja-JP" altLang="en-US">
-                <a:solidFill>
-                  <a:srgbClr val="626669"/>
-                </a:solidFill>
-                <a:latin typeface="Noto Sans"/>
-                <a:ea typeface="Noto Sans CJK JP"/>
-                <a:cs typeface="Noto Sans"/>
-                <a:hlinkClick r:id="rId2"/>
-              </a:rPr>
-              <a:t>https://github.com/inverse-scaling/prize/blob/920f17de85f2a7f2415b097bc49e6a7fbf17b0b2/data-release/isp-data-release.zip</a:t>
+              <a:spcBef>
+                <a:spcPts val="0"/>
+              </a:spcBef>
+              <a:spcAft>
+                <a:spcPts val="0"/>
+              </a:spcAft>
+            </a:pPr>
+            <a:r>
+              <a:rPr sz="830">
+                <a:latin typeface="Noto Sans CJK JP"/>
+                <a:hlinkClick r:id="rId3"/>
+              </a:rPr>
+              <a:t>https://github.com/inverse-scaling/prize/tree/main/data-release</a:t>
             </a:r>
           </a:p>
         </p:txBody>

--- a/slides/datasets-in-10-minutes-pattern-matching-suppression.pptx
+++ b/slides/datasets-in-10-minutes-pattern-matching-suppression.pptx
@@ -30,8 +30,6 @@
     <p:sldId id="278" r:id="rId28"/>
     <p:sldId id="279" r:id="rId29"/>
     <p:sldId id="280" r:id="rId30"/>
-    <p:sldId id="281" r:id="rId31"/>
-    <p:sldId id="282" r:id="rId32"/>
     <p:sldId id="284" r:id="rId34"/>
     <p:sldId id="285" r:id="rId35"/>
     <p:sldId id="286" r:id="rId36"/>
@@ -55,7 +53,6 @@
     <p:sldId id="306" r:id="rId56"/>
     <p:sldId id="307" r:id="rId57"/>
     <p:sldId id="308" r:id="rId58"/>
-    <p:sldId id="309" r:id="rId59"/>
   </p:sldIdLst>
   <p:sldSz cx="9144000" cy="5143500" type="screen16x9"/>
   <p:notesSz cx="6858000" cy="9144000"/>
@@ -13305,7 +13302,7 @@
                 <a:ea typeface="Noto Sans CJK JP"/>
                 <a:cs typeface="Noto Sans"/>
               </a:rPr>
-              <a:t>入手と中国語評価への利用</a:t>
+              <a:t>公式データの入手と使い方</a:t>
             </a:r>
           </a:p>
         </p:txBody>
@@ -13353,7 +13350,7 @@
                 <a:ea typeface="Noto Sans CJK JP"/>
                 <a:cs typeface="Noto Sans"/>
               </a:rPr>
-              <a:t>4. 入手と中国語評価への利用</a:t>
+              <a:t>4. 公式データの入手と使い方</a:t>
             </a:r>
           </a:p>
         </p:txBody>
@@ -13366,7 +13363,7 @@
 </p:sld>
 </file>
 
-<file path=ppt/slides/slide26.xml><?xml version="1.0" encoding="utf-8"?>
+<file path=ppt/slides/slide28.xml><?xml version="1.0" encoding="utf-8"?>
 <p:sld xmlns:a="http://schemas.openxmlformats.org/drawingml/2006/main" xmlns:p="http://schemas.openxmlformats.org/presentationml/2006/main" xmlns:r="http://schemas.openxmlformats.org/officeDocument/2006/relationships">
   <p:cSld>
     <p:spTree>
@@ -13419,7 +13416,7 @@
                 <a:ea typeface="Noto Sans CJK JP"/>
                 <a:cs typeface="Noto Sans"/>
               </a:rPr>
-              <a:t>CLEVAは、中国語の指示追従課題に採用した</a:t>
+              <a:t>公式の英語データと、利用条件を確認する</a:t>
             </a:r>
           </a:p>
         </p:txBody>
@@ -13472,7 +13469,7 @@
                 <a:ea typeface="Noto Sans CJK JP"/>
                 <a:cs typeface="Noto Sans"/>
               </a:rPr>
-              <a:t>CLEVAは、交互の列を最後だけ変える本課題を、中国語で指示に従う能力の評価に採用した。</a:t>
+              <a:t>公式リポジトリのdata-releaseに、11課題を収めたZIPと形式の説明がある。本課題の指示・提示列・候補・正解は、JSONLから読み出せる。</a:t>
             </a:r>
           </a:p>
           <a:p>
@@ -13502,7 +13499,7 @@
                 <a:ea typeface="Noto Sans CJK JP"/>
                 <a:cs typeface="Noto Sans"/>
               </a:rPr>
-              <a:t>公開された説明例は、実例1に対応するoとxの列。六つ目にoを選ぶと、交互の規則が破れる。</a:t>
+              <a:t>データのライセンスはCC BY 4.0。利用時には提出者Tomasz KorbakとInverse Scaling Prizeへの帰属を示し、ライセンスへリンクする。</a:t>
             </a:r>
           </a:p>
           <a:p>
@@ -13532,7 +13529,7 @@
                 <a:ea typeface="Noto Sans CJK JP"/>
                 <a:cs typeface="Noto Sans"/>
               </a:rPr>
-              <a:t>CLEVAで使われた中国語版の全問題や、選定範囲は公開説明から確認できない。公式の英語版は、Inverse Scaling Prizeのリポジトリから取得できる。</a:t>
+              <a:t>翻訳などを加えた場合は、その変更も表示する。本資料は日本語訳と解説を加え、入力中の不完全な記号名も元のまま掲載している。</a:t>
             </a:r>
           </a:p>
         </p:txBody>
@@ -13580,7 +13577,7 @@
                 <a:ea typeface="Noto Sans CJK JP"/>
                 <a:cs typeface="Noto Sans"/>
               </a:rPr>
-              <a:t>4. 入手と中国語評価への利用</a:t>
+              <a:t>4. 公式データの入手と使い方</a:t>
             </a:r>
           </a:p>
         </p:txBody>
@@ -13588,607 +13585,6 @@
       <p:sp>
         <p:nvSpPr>
           <p:cNvPr id="5" name="sources"/>
-          <p:cNvSpPr txBox="1"/>
-          <p:nvPr/>
-        </p:nvSpPr>
-        <p:spPr>
-          <a:xfrm>
-            <a:off x="502920" y="4508500"/>
-            <a:ext cx="8183879" cy="558800"/>
-          </a:xfrm>
-          <a:prstGeom prst="rect">
-            <a:avLst/>
-          </a:prstGeom>
-          <a:noFill/>
-        </p:spPr>
-        <p:txBody>
-          <a:bodyPr wrap="square" lIns="0" rIns="0" tIns="0" bIns="0">
-            <a:noAutofit/>
-          </a:bodyPr>
-          <a:lstStyle/>
-          <a:p>
-            <a:pPr algn="l">
-              <a:lnSpc>
-                <a:spcPts val="1200"/>
-              </a:lnSpc>
-              <a:spcBef>
-                <a:spcPts val="0"/>
-              </a:spcBef>
-              <a:spcAft>
-                <a:spcPts val="0"/>
-              </a:spcAft>
-              <a:buNone/>
-              <a:defRPr sz="810" b="0">
-                <a:solidFill>
-                  <a:srgbClr val="303437"/>
-                </a:solidFill>
-                <a:latin typeface="Noto Sans"/>
-              </a:defRPr>
-            </a:pPr>
-            <a:r>
-              <a:rPr sz="830">
-                <a:latin typeface="Noto Sans CJK JP"/>
-              </a:rPr>
-              <a:t>[1] Li et al. (2023). CLEVA: Chinese Language Models EVAluation Platform.</a:t>
-            </a:r>
-          </a:p>
-          <a:p>
-            <a:pPr>
-              <a:spcBef>
-                <a:spcPts val="0"/>
-              </a:spcBef>
-              <a:spcAft>
-                <a:spcPts val="0"/>
-              </a:spcAft>
-            </a:pPr>
-            <a:r>
-              <a:rPr sz="830">
-                <a:latin typeface="Noto Sans CJK JP"/>
-                <a:hlinkClick r:id="rId2"/>
-              </a:rPr>
-              <a:t>https://aclanthology.org/2023.emnlp-demo.17/</a:t>
-            </a:r>
-          </a:p>
-          <a:p>
-            <a:pPr>
-              <a:spcBef>
-                <a:spcPts val="0"/>
-              </a:spcBef>
-              <a:spcAft>
-                <a:spcPts val="0"/>
-              </a:spcAft>
-            </a:pPr>
-            <a:r>
-              <a:rPr sz="830">
-                <a:latin typeface="Noto Sans CJK JP"/>
-              </a:rPr>
-              <a:t>[2] Stanford CRFM (2023). HELM: CLEVA instruction following scenario.</a:t>
-            </a:r>
-          </a:p>
-          <a:p>
-            <a:pPr>
-              <a:spcBef>
-                <a:spcPts val="0"/>
-              </a:spcBef>
-              <a:spcAft>
-                <a:spcPts val="0"/>
-              </a:spcAft>
-            </a:pPr>
-            <a:r>
-              <a:rPr sz="830">
-                <a:latin typeface="Noto Sans CJK JP"/>
-                <a:hlinkClick r:id="rId3"/>
-              </a:rPr>
-              <a:t>https://github.com/stanford-crfm/helm/blob/v0.4.0/src/helm/benchmark/scenarios/cleva_scenario.py</a:t>
-            </a:r>
-          </a:p>
-        </p:txBody>
-      </p:sp>
-    </p:spTree>
-  </p:cSld>
-  <p:clrMapOvr>
-    <a:masterClrMapping/>
-  </p:clrMapOvr>
-</p:sld>
-</file>
-
-<file path=ppt/slides/slide27.xml><?xml version="1.0" encoding="utf-8"?>
-<p:sld xmlns:a="http://schemas.openxmlformats.org/drawingml/2006/main" xmlns:p="http://schemas.openxmlformats.org/presentationml/2006/main" xmlns:r="http://schemas.openxmlformats.org/officeDocument/2006/relationships">
-  <p:cSld>
-    <p:spTree>
-      <p:nvGrpSpPr>
-        <p:cNvPr id="1" name=""/>
-        <p:cNvGrpSpPr/>
-        <p:nvPr/>
-      </p:nvGrpSpPr>
-      <p:grpSpPr/>
-      <p:sp>
-        <p:nvSpPr>
-          <p:cNvPr id="2" name="Title 1"/>
-          <p:cNvSpPr>
-            <a:spLocks noGrp="1"/>
-          </p:cNvSpPr>
-          <p:nvPr>
-            <p:ph type="title"/>
-          </p:nvPr>
-        </p:nvSpPr>
-        <p:spPr>
-          <a:xfrm>
-            <a:off x="468172" y="650138"/>
-            <a:ext cx="8206740" cy="616305"/>
-          </a:xfrm>
-        </p:spPr>
-        <p:txBody>
-          <a:bodyPr wrap="square" lIns="0" rIns="0" tIns="0" bIns="0">
-            <a:noAutofit/>
-          </a:bodyPr>
-          <a:lstStyle/>
-          <a:p>
-            <a:pPr algn="l">
-              <a:lnSpc>
-                <a:spcPct val="110000"/>
-              </a:lnSpc>
-              <a:buNone/>
-              <a:defRPr sz="2800" b="0">
-                <a:solidFill>
-                  <a:srgbClr val="303437"/>
-                </a:solidFill>
-                <a:latin typeface="Noto Sans"/>
-              </a:defRPr>
-            </a:pPr>
-            <a:r>
-              <a:rPr sz="2800" b="1" lang="ja-JP" altLang="en-US">
-                <a:solidFill>
-                  <a:srgbClr val="303437"/>
-                </a:solidFill>
-                <a:latin typeface="Noto Sans"/>
-                <a:ea typeface="Noto Sans CJK JP"/>
-                <a:cs typeface="Noto Sans"/>
-              </a:rPr>
-              <a:t>中国語の例でも、最後のoで規則を破る</a:t>
-            </a:r>
-          </a:p>
-        </p:txBody>
-      </p:sp>
-      <p:sp>
-        <p:nvSpPr>
-          <p:cNvPr id="3" name="Title 2"/>
-          <p:cNvSpPr>
-            <a:spLocks noGrp="1"/>
-          </p:cNvSpPr>
-          <p:nvPr>
-            <p:ph type="title" idx="2"/>
-          </p:nvPr>
-        </p:nvSpPr>
-        <p:spPr>
-          <a:xfrm>
-            <a:off x="75895" y="0"/>
-            <a:ext cx="8115300" cy="480060"/>
-          </a:xfrm>
-        </p:spPr>
-        <p:txBody>
-          <a:bodyPr wrap="square" lIns="0" rIns="0" tIns="0" bIns="0" anchor="ctr">
-            <a:noAutofit/>
-          </a:bodyPr>
-          <a:lstStyle/>
-          <a:p>
-            <a:pPr algn="l">
-              <a:lnSpc>
-                <a:spcPct val="110000"/>
-              </a:lnSpc>
-              <a:buNone/>
-              <a:defRPr sz="1400" b="0">
-                <a:solidFill>
-                  <a:srgbClr val="303437"/>
-                </a:solidFill>
-                <a:latin typeface="Noto Sans"/>
-              </a:defRPr>
-            </a:pPr>
-            <a:r>
-              <a:rPr sz="1400" b="1" lang="ja-JP" altLang="en-US">
-                <a:solidFill>
-                  <a:srgbClr val="FFFEF8"/>
-                </a:solidFill>
-                <a:latin typeface="Noto Sans"/>
-                <a:ea typeface="Noto Sans CJK JP"/>
-                <a:cs typeface="Noto Sans"/>
-              </a:rPr>
-              <a:t>4. 入手と中国語評価への利用</a:t>
-            </a:r>
-          </a:p>
-        </p:txBody>
-      </p:sp>
-      <p:sp>
-        <p:nvSpPr>
-          <p:cNvPr id="4" name="quote-frame"/>
-          <p:cNvSpPr/>
-          <p:nvPr/>
-        </p:nvSpPr>
-        <p:spPr>
-          <a:xfrm>
-            <a:off x="548640" y="1600200"/>
-            <a:ext cx="3840480" cy="1734572"/>
-          </a:xfrm>
-          <a:prstGeom prst="rect">
-            <a:avLst/>
-          </a:prstGeom>
-          <a:solidFill>
-            <a:srgbClr val="EBEDEB"/>
-          </a:solidFill>
-          <a:ln>
-            <a:noFill/>
-          </a:ln>
-          <a:effectLst/>
-        </p:spPr>
-        <p:style>
-          <a:lnRef idx="1">
-            <a:schemeClr val="accent1"/>
-          </a:lnRef>
-          <a:fillRef idx="3">
-            <a:schemeClr val="accent1"/>
-          </a:fillRef>
-          <a:effectRef idx="0">
-            <a:schemeClr val="accent1"/>
-          </a:effectRef>
-          <a:fontRef idx="minor">
-            <a:schemeClr val="lt1"/>
-          </a:fontRef>
-        </p:style>
-        <p:txBody>
-          <a:bodyPr rtlCol="0" anchor="t" wrap="square" lIns="177800" rIns="177800" tIns="55034" bIns="127000">
-            <a:noAutofit/>
-          </a:bodyPr>
-          <a:lstStyle/>
-          <a:p>
-            <a:pPr algn="l">
-              <a:lnSpc>
-                <a:spcPts val="2142"/>
-              </a:lnSpc>
-              <a:spcBef>
-                <a:spcPts val="0"/>
-              </a:spcBef>
-              <a:spcAft>
-                <a:spcPts val="0"/>
-              </a:spcAft>
-              <a:buNone/>
-              <a:defRPr sz="1800" b="0">
-                <a:solidFill>
-                  <a:srgbClr val="303437"/>
-                </a:solidFill>
-                <a:latin typeface="Noto Sans"/>
-              </a:defRPr>
-            </a:pPr>
-            <a:r>
-              <a:rPr sz="1800" b="0" lang="ja-JP" altLang="en-US">
-                <a:solidFill>
-                  <a:srgbClr val="303437"/>
-                </a:solidFill>
-                <a:latin typeface="Noto Sans"/>
-                <a:ea typeface="Noto Sans CJK JP"/>
-                <a:cs typeface="Noto Sans"/>
-              </a:rPr>
-              <a:t>生成一个6个组成字符的序列，这个序列在“o”、“x”间交替，但是意外结束。</a:t>
-            </a:r>
-          </a:p>
-          <a:p>
-            <a:pPr algn="l">
-              <a:lnSpc>
-                <a:spcPts val="2142"/>
-              </a:lnSpc>
-              <a:spcBef>
-                <a:spcPts val="0"/>
-              </a:spcBef>
-              <a:spcAft>
-                <a:spcPts val="0"/>
-              </a:spcAft>
-              <a:buNone/>
-              <a:defRPr sz="1800" b="0">
-                <a:solidFill>
-                  <a:srgbClr val="303437"/>
-                </a:solidFill>
-                <a:latin typeface="Noto Sans"/>
-              </a:defRPr>
-            </a:pPr>
-            <a:r>
-              <a:rPr sz="1800" b="0" lang="ja-JP" altLang="en-US">
-                <a:solidFill>
-                  <a:srgbClr val="303437"/>
-                </a:solidFill>
-                <a:latin typeface="Noto Sans"/>
-                <a:ea typeface="Noto Sans CJK JP"/>
-                <a:cs typeface="Noto Sans"/>
-              </a:rPr>
-              <a:t>o，x，o，x，o，</a:t>
-            </a:r>
-          </a:p>
-          <a:p>
-            <a:pPr algn="l">
-              <a:lnSpc>
-                <a:spcPts val="2142"/>
-              </a:lnSpc>
-              <a:spcBef>
-                <a:spcPts val="0"/>
-              </a:spcBef>
-              <a:spcAft>
-                <a:spcPts val="0"/>
-              </a:spcAft>
-              <a:buNone/>
-              <a:defRPr sz="1800" b="0">
-                <a:solidFill>
-                  <a:srgbClr val="303437"/>
-                </a:solidFill>
-                <a:latin typeface="Noto Sans"/>
-              </a:defRPr>
-            </a:pPr>
-            <a:r>
-              <a:rPr sz="1800" b="0" lang="ja-JP" altLang="en-US">
-                <a:solidFill>
-                  <a:srgbClr val="303437"/>
-                </a:solidFill>
-                <a:latin typeface="Noto Sans"/>
-                <a:ea typeface="Noto Sans CJK JP"/>
-                <a:cs typeface="Noto Sans"/>
-              </a:rPr>
-              <a:t>A. x</a:t>
-            </a:r>
-          </a:p>
-          <a:p>
-            <a:pPr algn="l">
-              <a:lnSpc>
-                <a:spcPts val="2142"/>
-              </a:lnSpc>
-              <a:spcBef>
-                <a:spcPts val="0"/>
-              </a:spcBef>
-              <a:spcAft>
-                <a:spcPts val="0"/>
-              </a:spcAft>
-              <a:buNone/>
-              <a:defRPr sz="1800" b="0">
-                <a:solidFill>
-                  <a:srgbClr val="303437"/>
-                </a:solidFill>
-                <a:latin typeface="Noto Sans"/>
-              </a:defRPr>
-            </a:pPr>
-            <a:r>
-              <a:rPr sz="1800" b="0" lang="ja-JP" altLang="en-US">
-                <a:solidFill>
-                  <a:srgbClr val="303437"/>
-                </a:solidFill>
-                <a:latin typeface="Noto Sans"/>
-                <a:ea typeface="Noto Sans CJK JP"/>
-                <a:cs typeface="Noto Sans"/>
-              </a:rPr>
-              <a:t>B. o</a:t>
-            </a:r>
-          </a:p>
-        </p:txBody>
-      </p:sp>
-      <p:sp>
-        <p:nvSpPr>
-          <p:cNvPr id="5" name="quote-frame"/>
-          <p:cNvSpPr/>
-          <p:nvPr/>
-        </p:nvSpPr>
-        <p:spPr>
-          <a:xfrm>
-            <a:off x="4572000" y="1600200"/>
-            <a:ext cx="4023360" cy="1659257"/>
-          </a:xfrm>
-          <a:prstGeom prst="rect">
-            <a:avLst/>
-          </a:prstGeom>
-          <a:solidFill>
-            <a:srgbClr val="EBEDEB"/>
-          </a:solidFill>
-          <a:ln>
-            <a:noFill/>
-          </a:ln>
-          <a:effectLst/>
-        </p:spPr>
-        <p:style>
-          <a:lnRef idx="1">
-            <a:schemeClr val="accent1"/>
-          </a:lnRef>
-          <a:fillRef idx="3">
-            <a:schemeClr val="accent1"/>
-          </a:fillRef>
-          <a:effectRef idx="0">
-            <a:schemeClr val="accent1"/>
-          </a:effectRef>
-          <a:fontRef idx="minor">
-            <a:schemeClr val="lt1"/>
-          </a:fontRef>
-        </p:style>
-        <p:txBody>
-          <a:bodyPr rtlCol="0" anchor="t" wrap="square" lIns="177800" rIns="177800" tIns="63500" bIns="127000">
-            <a:noAutofit/>
-          </a:bodyPr>
-          <a:lstStyle/>
-          <a:p>
-            <a:pPr algn="l">
-              <a:lnSpc>
-                <a:spcPts val="2023"/>
-              </a:lnSpc>
-              <a:spcBef>
-                <a:spcPts val="0"/>
-              </a:spcBef>
-              <a:spcAft>
-                <a:spcPts val="0"/>
-              </a:spcAft>
-              <a:buNone/>
-              <a:defRPr sz="1700" b="0">
-                <a:solidFill>
-                  <a:srgbClr val="303437"/>
-                </a:solidFill>
-                <a:latin typeface="Noto Sans"/>
-              </a:defRPr>
-            </a:pPr>
-            <a:r>
-              <a:rPr sz="1700" b="0" lang="ja-JP" altLang="en-US">
-                <a:solidFill>
-                  <a:srgbClr val="303437"/>
-                </a:solidFill>
-                <a:latin typeface="Noto Sans"/>
-                <a:ea typeface="Noto Sans CJK JP"/>
-                <a:cs typeface="Noto Sans"/>
-              </a:rPr>
-              <a:t>6個の記号からなる列を生成してください。oとxを交互に並べますが、予想外に終えてください。</a:t>
-            </a:r>
-          </a:p>
-          <a:p>
-            <a:pPr algn="l">
-              <a:lnSpc>
-                <a:spcPts val="2023"/>
-              </a:lnSpc>
-              <a:spcBef>
-                <a:spcPts val="0"/>
-              </a:spcBef>
-              <a:spcAft>
-                <a:spcPts val="0"/>
-              </a:spcAft>
-              <a:buNone/>
-              <a:defRPr sz="1700" b="0">
-                <a:solidFill>
-                  <a:srgbClr val="303437"/>
-                </a:solidFill>
-                <a:latin typeface="Noto Sans"/>
-              </a:defRPr>
-            </a:pPr>
-            <a:r>
-              <a:rPr sz="1700" b="0" lang="ja-JP" altLang="en-US">
-                <a:solidFill>
-                  <a:srgbClr val="303437"/>
-                </a:solidFill>
-                <a:latin typeface="Noto Sans"/>
-                <a:ea typeface="Noto Sans CJK JP"/>
-                <a:cs typeface="Noto Sans"/>
-              </a:rPr>
-              <a:t>o，x，o，x，o，</a:t>
-            </a:r>
-          </a:p>
-          <a:p>
-            <a:pPr algn="l">
-              <a:lnSpc>
-                <a:spcPts val="2023"/>
-              </a:lnSpc>
-              <a:spcBef>
-                <a:spcPts val="0"/>
-              </a:spcBef>
-              <a:spcAft>
-                <a:spcPts val="0"/>
-              </a:spcAft>
-              <a:buNone/>
-              <a:defRPr sz="1700" b="0">
-                <a:solidFill>
-                  <a:srgbClr val="303437"/>
-                </a:solidFill>
-                <a:latin typeface="Noto Sans"/>
-              </a:defRPr>
-            </a:pPr>
-            <a:r>
-              <a:rPr sz="1700" b="0" lang="ja-JP" altLang="en-US">
-                <a:solidFill>
-                  <a:srgbClr val="303437"/>
-                </a:solidFill>
-                <a:latin typeface="Noto Sans"/>
-                <a:ea typeface="Noto Sans CJK JP"/>
-                <a:cs typeface="Noto Sans"/>
-              </a:rPr>
-              <a:t>A. x</a:t>
-            </a:r>
-          </a:p>
-          <a:p>
-            <a:pPr algn="l">
-              <a:lnSpc>
-                <a:spcPts val="2023"/>
-              </a:lnSpc>
-              <a:spcBef>
-                <a:spcPts val="0"/>
-              </a:spcBef>
-              <a:spcAft>
-                <a:spcPts val="0"/>
-              </a:spcAft>
-              <a:buNone/>
-              <a:defRPr sz="1700" b="0">
-                <a:solidFill>
-                  <a:srgbClr val="303437"/>
-                </a:solidFill>
-                <a:latin typeface="Noto Sans"/>
-              </a:defRPr>
-            </a:pPr>
-            <a:r>
-              <a:rPr sz="1700" b="0" lang="ja-JP" altLang="en-US">
-                <a:solidFill>
-                  <a:srgbClr val="303437"/>
-                </a:solidFill>
-                <a:latin typeface="Noto Sans"/>
-                <a:ea typeface="Noto Sans CJK JP"/>
-                <a:cs typeface="Noto Sans"/>
-              </a:rPr>
-              <a:t>B. o</a:t>
-            </a:r>
-          </a:p>
-        </p:txBody>
-      </p:sp>
-      <p:sp>
-        <p:nvSpPr>
-          <p:cNvPr id="6" name="TextBox 5"/>
-          <p:cNvSpPr txBox="1"/>
-          <p:nvPr/>
-        </p:nvSpPr>
-        <p:spPr>
-          <a:xfrm>
-            <a:off x="594360" y="3461772"/>
-            <a:ext cx="7955279" cy="457200"/>
-          </a:xfrm>
-          <a:prstGeom prst="rect">
-            <a:avLst/>
-          </a:prstGeom>
-          <a:noFill/>
-        </p:spPr>
-        <p:txBody>
-          <a:bodyPr wrap="square" lIns="0" rIns="0" tIns="0" bIns="0">
-            <a:noAutofit/>
-          </a:bodyPr>
-          <a:lstStyle/>
-          <a:p>
-            <a:pPr algn="l">
-              <a:lnSpc>
-                <a:spcPts val="2457"/>
-              </a:lnSpc>
-              <a:spcBef>
-                <a:spcPts val="0"/>
-              </a:spcBef>
-              <a:spcAft>
-                <a:spcPts val="0"/>
-              </a:spcAft>
-              <a:buNone/>
-              <a:defRPr sz="2100" b="0">
-                <a:solidFill>
-                  <a:srgbClr val="303437"/>
-                </a:solidFill>
-                <a:latin typeface="Noto Sans"/>
-              </a:defRPr>
-            </a:pPr>
-            <a:r>
-              <a:rPr sz="2100" b="1" lang="ja-JP" altLang="en-US">
-                <a:solidFill>
-                  <a:srgbClr val="B13731"/>
-                </a:solidFill>
-                <a:latin typeface="Noto Sans"/>
-                <a:ea typeface="Noto Sans CJK JP"/>
-                <a:cs typeface="Noto Sans"/>
-              </a:rPr>
-              <a:t>正解：B（o）</a:t>
-            </a:r>
-          </a:p>
-        </p:txBody>
-      </p:sp>
-      <p:sp>
-        <p:nvSpPr>
-          <p:cNvPr id="7" name="sources"/>
           <p:cNvSpPr txBox="1"/>
           <p:nvPr/>
         </p:nvSpPr>
@@ -14230,7 +13626,7 @@
               <a:rPr sz="830">
                 <a:latin typeface="Noto Sans CJK JP"/>
               </a:rPr>
-              <a:t>[1] Stanford CRFM (2023). HELM: CLEVA instruction following scenario.</a:t>
+              <a:t>[1] Inverse Scaling Prize (2023). Data release: format and CC BY 4.0.</a:t>
             </a:r>
           </a:p>
           <a:p>
@@ -14245,9 +13641,9 @@
             <a:r>
               <a:rPr sz="830">
                 <a:latin typeface="Noto Sans CJK JP"/>
-                <a:hlinkClick r:id="rId2"/>
-              </a:rPr>
-              <a:t>https://github.com/stanford-crfm/helm/blob/v0.4.0/src/helm/benchmark/scenarios/cleva_scenario.py</a:t>
+                <a:hlinkClick r:id="rId4"/>
+              </a:rPr>
+              <a:t>https://github.com/inverse-scaling/prize/blob/main/data-release/README.md</a:t>
             </a:r>
           </a:p>
         </p:txBody>
@@ -14313,7 +13709,7 @@
                 <a:ea typeface="Noto Sans CJK JP"/>
                 <a:cs typeface="Noto Sans"/>
               </a:rPr>
-              <a:t>公式の英語データと、利用条件を確認する</a:t>
+              <a:t>終わり方の指示に従い、最後の記号を選ぶ</a:t>
             </a:r>
           </a:p>
         </p:txBody>
@@ -14342,91 +13738,61 @@
           <a:p>
             <a:pPr marL="457200" indent="-355600">
               <a:lnSpc>
-                <a:spcPts val="2379"/>
+                <a:spcPts val="2499"/>
               </a:lnSpc>
               <a:spcAft>
                 <a:spcPts val="700"/>
               </a:spcAft>
-              <a:buSzPct val="66500"/>
+              <a:buSzPct val="63333"/>
               <a:buFont typeface="Noto Sans CJK JP"/>
               <a:buChar char="●"/>
-              <a:defRPr sz="2000" b="0">
-                <a:solidFill>
-                  <a:srgbClr val="303437"/>
-                </a:solidFill>
-                <a:latin typeface="Noto Sans"/>
-              </a:defRPr>
-            </a:pPr>
-            <a:r>
-              <a:rPr sz="2000" b="0" lang="ja-JP" altLang="en-US">
-                <a:solidFill>
-                  <a:srgbClr val="303437"/>
-                </a:solidFill>
-                <a:latin typeface="Noto Sans"/>
-                <a:ea typeface="Noto Sans CJK JP"/>
-                <a:cs typeface="Noto Sans"/>
-              </a:rPr>
-              <a:t>公式リポジトリのdata-releaseに、11課題を収めたZIPと形式の説明がある。本課題の指示・提示列・候補・正解は、JSONLから読み出せる。</a:t>
+              <a:defRPr sz="2100" b="0">
+                <a:solidFill>
+                  <a:srgbClr val="303437"/>
+                </a:solidFill>
+                <a:latin typeface="Noto Sans"/>
+              </a:defRPr>
+            </a:pPr>
+            <a:r>
+              <a:rPr sz="2100" b="0" lang="ja-JP" altLang="en-US">
+                <a:solidFill>
+                  <a:srgbClr val="303437"/>
+                </a:solidFill>
+                <a:latin typeface="Noto Sans"/>
+                <a:ea typeface="Noto Sans CJK JP"/>
+                <a:cs typeface="Noto Sans"/>
+              </a:rPr>
+              <a:t>Pattern Matching Suppressionは、交互に並んだ列を読み、最後だけ規則を破る記号を選ぶ課題。通常の続きと、指示に従う続きが候補に並ぶ。</a:t>
             </a:r>
           </a:p>
           <a:p>
             <a:pPr marL="457200" indent="-355600">
               <a:lnSpc>
-                <a:spcPts val="2379"/>
+                <a:spcPts val="2499"/>
               </a:lnSpc>
               <a:spcAft>
                 <a:spcPts val="700"/>
               </a:spcAft>
-              <a:buSzPct val="66500"/>
+              <a:buSzPct val="63333"/>
               <a:buFont typeface="Noto Sans CJK JP"/>
               <a:buChar char="●"/>
-              <a:defRPr sz="2000" b="0">
-                <a:solidFill>
-                  <a:srgbClr val="303437"/>
-                </a:solidFill>
-                <a:latin typeface="Noto Sans"/>
-              </a:defRPr>
-            </a:pPr>
-            <a:r>
-              <a:rPr sz="2000" b="0" lang="ja-JP" altLang="en-US">
-                <a:solidFill>
-                  <a:srgbClr val="303437"/>
-                </a:solidFill>
-                <a:latin typeface="Noto Sans"/>
-                <a:ea typeface="Noto Sans CJK JP"/>
-                <a:cs typeface="Noto Sans"/>
-              </a:rPr>
-              <a:t>データのライセンスはCC BY 4.0。利用時には提出者Tomasz KorbakとInverse Scaling Prizeへの帰属を示し、ライセンスへリンクする。</a:t>
-            </a:r>
-          </a:p>
-          <a:p>
-            <a:pPr marL="457200" indent="-355600">
-              <a:lnSpc>
-                <a:spcPts val="2379"/>
-              </a:lnSpc>
-              <a:spcAft>
-                <a:spcPts val="0"/>
-              </a:spcAft>
-              <a:buSzPct val="66500"/>
-              <a:buFont typeface="Noto Sans CJK JP"/>
-              <a:buChar char="●"/>
-              <a:defRPr sz="2000" b="0">
-                <a:solidFill>
-                  <a:srgbClr val="303437"/>
-                </a:solidFill>
-                <a:latin typeface="Noto Sans"/>
-              </a:defRPr>
-            </a:pPr>
-            <a:r>
-              <a:rPr sz="2000" b="0" lang="ja-JP" altLang="en-US">
-                <a:solidFill>
-                  <a:srgbClr val="303437"/>
-                </a:solidFill>
-                <a:latin typeface="Noto Sans"/>
-                <a:ea typeface="Noto Sans CJK JP"/>
-                <a:cs typeface="Noto Sans"/>
-              </a:rPr>
-              <a:t>翻訳などを加えた場合は、その変更も表示する。本資料は日本語訳と解説を加え、入力中の不完全な記号名も元のまま掲載している。</a:t>
+              <a:defRPr sz="2100" b="0">
+                <a:solidFill>
+                  <a:srgbClr val="303437"/>
+                </a:solidFill>
+                <a:latin typeface="Noto Sans"/>
+              </a:defRPr>
+            </a:pPr>
+            <a:r>
+              <a:rPr sz="2100" b="0" lang="ja-JP" altLang="en-US">
+                <a:solidFill>
+                  <a:srgbClr val="303437"/>
+                </a:solidFill>
+                <a:latin typeface="Noto Sans"/>
+                <a:ea typeface="Noto Sans CJK JP"/>
+                <a:cs typeface="Noto Sans"/>
+              </a:rPr>
+              <a:t>公開版は12組の記号対・17表現・7種類の長さを組み合わせた1,428問。明示された指示と、繰り返しから生じる予測が食い違う場面で、どちらに従うかを調べられる。</a:t>
             </a:r>
           </a:p>
         </p:txBody>
@@ -14474,7 +13840,7 @@
                 <a:ea typeface="Noto Sans CJK JP"/>
                 <a:cs typeface="Noto Sans"/>
               </a:rPr>
-              <a:t>4. 入手と中国語評価への利用</a:t>
+              <a:t>4. 公式データの入手と使い方</a:t>
             </a:r>
           </a:p>
         </p:txBody>
@@ -14523,7 +13889,7 @@
               <a:rPr sz="830">
                 <a:latin typeface="Noto Sans CJK JP"/>
               </a:rPr>
-              <a:t>[1] Inverse Scaling Prize (2023). Data release: format and CC BY 4.0.</a:t>
+              <a:t>[1] McKenzie et al. (2023). Inverse Scaling: When Bigger Isn’t Better. TMLR.</a:t>
             </a:r>
           </a:p>
           <a:p>
@@ -14538,9 +13904,9 @@
             <a:r>
               <a:rPr sz="830">
                 <a:latin typeface="Noto Sans CJK JP"/>
-                <a:hlinkClick r:id="rId4"/>
-              </a:rPr>
-              <a:t>https://github.com/inverse-scaling/prize/blob/main/data-release/README.md</a:t>
+                <a:hlinkClick r:id="rId2"/>
+              </a:rPr>
+              <a:t>https://arxiv.org/abs/2306.09479</a:t>
             </a:r>
           </a:p>
         </p:txBody>
@@ -14749,7 +14115,7 @@
                 <a:ea typeface="Noto Sans CJK JP"/>
                 <a:cs typeface="Noto Sans"/>
               </a:rPr>
-              <a:t>入手と中国語評価への利用</a:t>
+              <a:t>公式データの入手と使い方</a:t>
             </a:r>
           </a:p>
         </p:txBody>
@@ -14832,128 +14198,45 @@
         </p:nvSpPr>
         <p:spPr>
           <a:xfrm>
-            <a:off x="468172" y="650138"/>
-            <a:ext cx="8206740" cy="616305"/>
+            <a:off x="548640" y="2484835"/>
+            <a:ext cx="8046720" cy="686816"/>
           </a:xfrm>
         </p:spPr>
         <p:txBody>
-          <a:bodyPr wrap="square" lIns="0" rIns="0" tIns="0" bIns="0">
+          <a:bodyPr wrap="square" lIns="0" rIns="0" tIns="0" bIns="101600" anchor="ctr">
             <a:noAutofit/>
           </a:bodyPr>
           <a:lstStyle/>
           <a:p>
-            <a:pPr algn="l">
+            <a:pPr algn="ctr">
               <a:lnSpc>
                 <a:spcPct val="110000"/>
               </a:lnSpc>
               <a:buNone/>
-              <a:defRPr sz="2800" b="0">
-                <a:solidFill>
-                  <a:srgbClr val="303437"/>
-                </a:solidFill>
-                <a:latin typeface="Noto Sans"/>
-              </a:defRPr>
-            </a:pPr>
-            <a:r>
-              <a:rPr sz="2800" b="1" lang="ja-JP" altLang="en-US">
-                <a:solidFill>
-                  <a:srgbClr val="303437"/>
-                </a:solidFill>
-                <a:latin typeface="Noto Sans"/>
-                <a:ea typeface="Noto Sans CJK JP"/>
-                <a:cs typeface="Noto Sans"/>
-              </a:rPr>
-              <a:t>終わり方の指示に従い、最後の記号を選ぶ</a:t>
+              <a:defRPr sz="3600" b="0">
+                <a:solidFill>
+                  <a:srgbClr val="303437"/>
+                </a:solidFill>
+                <a:latin typeface="Noto Sans"/>
+              </a:defRPr>
+            </a:pPr>
+            <a:r>
+              <a:rPr sz="3600" b="1" lang="ja-JP" altLang="en-US">
+                <a:solidFill>
+                  <a:srgbClr val="303437"/>
+                </a:solidFill>
+                <a:latin typeface="Noto Sans"/>
+                <a:ea typeface="Noto Sans CJK JP"/>
+                <a:cs typeface="Noto Sans"/>
+              </a:rPr>
+              <a:t>Appendix</a:t>
             </a:r>
           </a:p>
         </p:txBody>
       </p:sp>
       <p:sp>
         <p:nvSpPr>
-          <p:cNvPr id="3" name="Text Placeholder 2"/>
-          <p:cNvSpPr>
-            <a:spLocks noGrp="1"/>
-          </p:cNvSpPr>
-          <p:nvPr>
-            <p:ph type="body" idx="1"/>
-          </p:nvPr>
-        </p:nvSpPr>
-        <p:spPr>
-          <a:xfrm>
-            <a:off x="594360" y="1463040"/>
-            <a:ext cx="7955279" cy="3044952"/>
-          </a:xfrm>
-        </p:spPr>
-        <p:txBody>
-          <a:bodyPr wrap="square" tIns="91440" bIns="91440">
-            <a:noAutofit/>
-          </a:bodyPr>
-          <a:lstStyle/>
-          <a:p>
-            <a:pPr marL="457200" indent="-355600">
-              <a:lnSpc>
-                <a:spcPts val="2499"/>
-              </a:lnSpc>
-              <a:spcAft>
-                <a:spcPts val="700"/>
-              </a:spcAft>
-              <a:buSzPct val="63333"/>
-              <a:buFont typeface="Noto Sans CJK JP"/>
-              <a:buChar char="●"/>
-              <a:defRPr sz="2100" b="0">
-                <a:solidFill>
-                  <a:srgbClr val="303437"/>
-                </a:solidFill>
-                <a:latin typeface="Noto Sans"/>
-              </a:defRPr>
-            </a:pPr>
-            <a:r>
-              <a:rPr sz="2100" b="0" lang="ja-JP" altLang="en-US">
-                <a:solidFill>
-                  <a:srgbClr val="303437"/>
-                </a:solidFill>
-                <a:latin typeface="Noto Sans"/>
-                <a:ea typeface="Noto Sans CJK JP"/>
-                <a:cs typeface="Noto Sans"/>
-              </a:rPr>
-              <a:t>Pattern Matching Suppressionは、交互に並んだ列を読み、最後だけ規則を破る記号を選ぶ課題。通常の続きと、指示に従う続きが候補に並ぶ。</a:t>
-            </a:r>
-          </a:p>
-          <a:p>
-            <a:pPr marL="457200" indent="-355600">
-              <a:lnSpc>
-                <a:spcPts val="2499"/>
-              </a:lnSpc>
-              <a:spcAft>
-                <a:spcPts val="700"/>
-              </a:spcAft>
-              <a:buSzPct val="63333"/>
-              <a:buFont typeface="Noto Sans CJK JP"/>
-              <a:buChar char="●"/>
-              <a:defRPr sz="2100" b="0">
-                <a:solidFill>
-                  <a:srgbClr val="303437"/>
-                </a:solidFill>
-                <a:latin typeface="Noto Sans"/>
-              </a:defRPr>
-            </a:pPr>
-            <a:r>
-              <a:rPr sz="2100" b="0" lang="ja-JP" altLang="en-US">
-                <a:solidFill>
-                  <a:srgbClr val="303437"/>
-                </a:solidFill>
-                <a:latin typeface="Noto Sans"/>
-                <a:ea typeface="Noto Sans CJK JP"/>
-                <a:cs typeface="Noto Sans"/>
-              </a:rPr>
-              <a:t>公開版は12組の記号対・17表現・7種類の長さを組み合わせた1,428問。明示された指示と、繰り返しから生じる予測が食い違う場面で、どちらに従うかを調べられる。</a:t>
-            </a:r>
-          </a:p>
-        </p:txBody>
-      </p:sp>
-      <p:sp>
-        <p:nvSpPr>
-          <p:cNvPr id="4" name="Title 3"/>
+          <p:cNvPr id="3" name="Title 2"/>
           <p:cNvSpPr>
             <a:spLocks noGrp="1"/>
           </p:cNvSpPr>
@@ -14994,73 +14277,7 @@
                 <a:ea typeface="Noto Sans CJK JP"/>
                 <a:cs typeface="Noto Sans"/>
               </a:rPr>
-              <a:t>4. 入手と中国語評価への利用</a:t>
-            </a:r>
-          </a:p>
-        </p:txBody>
-      </p:sp>
-      <p:sp>
-        <p:nvSpPr>
-          <p:cNvPr id="5" name="sources"/>
-          <p:cNvSpPr txBox="1"/>
-          <p:nvPr/>
-        </p:nvSpPr>
-        <p:spPr>
-          <a:xfrm>
-            <a:off x="502920" y="4699000"/>
-            <a:ext cx="8183879" cy="431800"/>
-          </a:xfrm>
-          <a:prstGeom prst="rect">
-            <a:avLst/>
-          </a:prstGeom>
-          <a:noFill/>
-        </p:spPr>
-        <p:txBody>
-          <a:bodyPr wrap="square" lIns="0" rIns="0" tIns="0" bIns="0">
-            <a:noAutofit/>
-          </a:bodyPr>
-          <a:lstStyle/>
-          <a:p>
-            <a:pPr algn="l">
-              <a:lnSpc>
-                <a:spcPts val="1200"/>
-              </a:lnSpc>
-              <a:spcBef>
-                <a:spcPts val="0"/>
-              </a:spcBef>
-              <a:spcAft>
-                <a:spcPts val="0"/>
-              </a:spcAft>
-              <a:buNone/>
-              <a:defRPr sz="810" b="0">
-                <a:solidFill>
-                  <a:srgbClr val="303437"/>
-                </a:solidFill>
-                <a:latin typeface="Noto Sans"/>
-              </a:defRPr>
-            </a:pPr>
-            <a:r>
-              <a:rPr sz="830">
-                <a:latin typeface="Noto Sans CJK JP"/>
-              </a:rPr>
-              <a:t>[1] McKenzie et al. (2023). Inverse Scaling: When Bigger Isn’t Better. TMLR.</a:t>
-            </a:r>
-          </a:p>
-          <a:p>
-            <a:pPr>
-              <a:spcBef>
-                <a:spcPts val="0"/>
-              </a:spcBef>
-              <a:spcAft>
-                <a:spcPts val="0"/>
-              </a:spcAft>
-            </a:pPr>
-            <a:r>
-              <a:rPr sz="830">
-                <a:latin typeface="Noto Sans CJK JP"/>
-                <a:hlinkClick r:id="rId2"/>
-              </a:rPr>
-              <a:t>https://arxiv.org/abs/2306.09479</a:t>
+              <a:t>Appendix</a:t>
             </a:r>
           </a:p>
         </p:txBody>
@@ -15095,45 +14312,158 @@
         </p:nvSpPr>
         <p:spPr>
           <a:xfrm>
-            <a:off x="548640" y="2484835"/>
-            <a:ext cx="8046720" cy="686816"/>
+            <a:off x="468172" y="650138"/>
+            <a:ext cx="8206740" cy="616305"/>
           </a:xfrm>
         </p:spPr>
         <p:txBody>
-          <a:bodyPr wrap="square" lIns="0" rIns="0" tIns="0" bIns="101600" anchor="ctr">
+          <a:bodyPr wrap="square" lIns="0" rIns="0" tIns="0" bIns="0">
             <a:noAutofit/>
           </a:bodyPr>
           <a:lstStyle/>
           <a:p>
-            <a:pPr algn="ctr">
+            <a:pPr algn="l">
               <a:lnSpc>
                 <a:spcPct val="110000"/>
               </a:lnSpc>
               <a:buNone/>
-              <a:defRPr sz="3600" b="0">
-                <a:solidFill>
-                  <a:srgbClr val="303437"/>
-                </a:solidFill>
-                <a:latin typeface="Noto Sans"/>
-              </a:defRPr>
-            </a:pPr>
-            <a:r>
-              <a:rPr sz="3600" b="1" lang="ja-JP" altLang="en-US">
-                <a:solidFill>
-                  <a:srgbClr val="303437"/>
-                </a:solidFill>
-                <a:latin typeface="Noto Sans"/>
-                <a:ea typeface="Noto Sans CJK JP"/>
-                <a:cs typeface="Noto Sans"/>
-              </a:rPr>
-              <a:t>Appendix</a:t>
+              <a:defRPr sz="2800" b="0">
+                <a:solidFill>
+                  <a:srgbClr val="303437"/>
+                </a:solidFill>
+                <a:latin typeface="Noto Sans"/>
+              </a:defRPr>
+            </a:pPr>
+            <a:r>
+              <a:rPr sz="2800" b="1" lang="ja-JP" altLang="en-US">
+                <a:solidFill>
+                  <a:srgbClr val="303437"/>
+                </a:solidFill>
+                <a:latin typeface="Noto Sans"/>
+                <a:ea typeface="Noto Sans CJK JP"/>
+                <a:cs typeface="Noto Sans"/>
+              </a:rPr>
+              <a:t/>
             </a:r>
           </a:p>
         </p:txBody>
       </p:sp>
       <p:sp>
         <p:nvSpPr>
-          <p:cNvPr id="3" name="Title 2"/>
+          <p:cNvPr id="3" name="Text Placeholder 2"/>
+          <p:cNvSpPr>
+            <a:spLocks noGrp="1"/>
+          </p:cNvSpPr>
+          <p:nvPr>
+            <p:ph type="body" idx="1"/>
+          </p:nvPr>
+        </p:nvSpPr>
+        <p:spPr>
+          <a:xfrm>
+            <a:off x="640080" y="1972511"/>
+            <a:ext cx="7863840" cy="1744980"/>
+          </a:xfrm>
+        </p:spPr>
+        <p:txBody>
+          <a:bodyPr lIns="0" rIns="0" tIns="0" bIns="0">
+            <a:noAutofit/>
+          </a:bodyPr>
+          <a:lstStyle/>
+          <a:p>
+            <a:pPr marL="457200" indent="-457200">
+              <a:lnSpc>
+                <a:spcPts val="3660"/>
+              </a:lnSpc>
+              <a:spcAft>
+                <a:spcPts val="1200"/>
+              </a:spcAft>
+              <a:buSzPct val="100000"/>
+              <a:buFont typeface="Noto Sans CJK JP"/>
+              <a:buAutoNum type="arabicPeriod" startAt="1"/>
+              <a:defRPr sz="3000" b="1">
+                <a:solidFill>
+                  <a:srgbClr val="303437"/>
+                </a:solidFill>
+                <a:latin typeface="Noto Sans"/>
+              </a:defRPr>
+            </a:pPr>
+            <a:r>
+              <a:rPr sz="3000" b="1" lang="ja-JP" altLang="en-US">
+                <a:solidFill>
+                  <a:srgbClr val="303437"/>
+                </a:solidFill>
+                <a:latin typeface="Noto Sans"/>
+                <a:ea typeface="Noto Sans CJK JP"/>
+                <a:cs typeface="Noto Sans"/>
+              </a:rPr>
+              <a:t>追加の例題</a:t>
+            </a:r>
+          </a:p>
+          <a:p>
+            <a:pPr marL="457200" indent="-457200">
+              <a:lnSpc>
+                <a:spcPts val="3660"/>
+              </a:lnSpc>
+              <a:spcAft>
+                <a:spcPts val="1200"/>
+              </a:spcAft>
+              <a:buSzPct val="100000"/>
+              <a:buFont typeface="Noto Sans CJK JP"/>
+              <a:buAutoNum type="arabicPeriod" startAt="2"/>
+              <a:defRPr sz="3000" b="1">
+                <a:solidFill>
+                  <a:srgbClr val="303437"/>
+                </a:solidFill>
+                <a:latin typeface="Noto Sans"/>
+              </a:defRPr>
+            </a:pPr>
+            <a:r>
+              <a:rPr sz="3000" b="1" lang="ja-JP" altLang="en-US">
+                <a:solidFill>
+                  <a:srgbClr val="303437"/>
+                </a:solidFill>
+                <a:latin typeface="Noto Sans"/>
+                <a:ea typeface="Noto Sans CJK JP"/>
+                <a:cs typeface="Noto Sans"/>
+              </a:rPr>
+              <a:t>記号の種類と読み込み方</a:t>
+            </a:r>
+          </a:p>
+          <a:p>
+            <a:pPr marL="457200" indent="-457200">
+              <a:lnSpc>
+                <a:spcPts val="3660"/>
+              </a:lnSpc>
+              <a:spcAft>
+                <a:spcPts val="0"/>
+              </a:spcAft>
+              <a:buSzPct val="100000"/>
+              <a:buFont typeface="Noto Sans CJK JP"/>
+              <a:buAutoNum type="arabicPeriod" startAt="3"/>
+              <a:defRPr sz="3000" b="1">
+                <a:solidFill>
+                  <a:srgbClr val="303437"/>
+                </a:solidFill>
+                <a:latin typeface="Noto Sans"/>
+              </a:defRPr>
+            </a:pPr>
+            <a:r>
+              <a:rPr sz="3000" b="1" lang="ja-JP" altLang="en-US">
+                <a:solidFill>
+                  <a:srgbClr val="303437"/>
+                </a:solidFill>
+                <a:latin typeface="Noto Sans"/>
+                <a:ea typeface="Noto Sans CJK JP"/>
+                <a:cs typeface="Noto Sans"/>
+              </a:rPr>
+              <a:t>研究と参考文献</a:t>
+            </a:r>
+          </a:p>
+        </p:txBody>
+      </p:sp>
+      <p:sp>
+        <p:nvSpPr>
+          <p:cNvPr id="4" name="Title 3"/>
           <p:cNvSpPr>
             <a:spLocks noGrp="1"/>
           </p:cNvSpPr>
@@ -15174,7 +14504,7 @@
                 <a:ea typeface="Noto Sans CJK JP"/>
                 <a:cs typeface="Noto Sans"/>
               </a:rPr>
-              <a:t>Appendix</a:t>
+              <a:t>Appendix: 目次</a:t>
             </a:r>
           </a:p>
         </p:txBody>
@@ -15209,233 +14539,6 @@
         </p:nvSpPr>
         <p:spPr>
           <a:xfrm>
-            <a:off x="468172" y="650138"/>
-            <a:ext cx="8206740" cy="616305"/>
-          </a:xfrm>
-        </p:spPr>
-        <p:txBody>
-          <a:bodyPr wrap="square" lIns="0" rIns="0" tIns="0" bIns="0">
-            <a:noAutofit/>
-          </a:bodyPr>
-          <a:lstStyle/>
-          <a:p>
-            <a:pPr algn="l">
-              <a:lnSpc>
-                <a:spcPct val="110000"/>
-              </a:lnSpc>
-              <a:buNone/>
-              <a:defRPr sz="2800" b="0">
-                <a:solidFill>
-                  <a:srgbClr val="303437"/>
-                </a:solidFill>
-                <a:latin typeface="Noto Sans"/>
-              </a:defRPr>
-            </a:pPr>
-            <a:r>
-              <a:rPr sz="2800" b="1" lang="ja-JP" altLang="en-US">
-                <a:solidFill>
-                  <a:srgbClr val="303437"/>
-                </a:solidFill>
-                <a:latin typeface="Noto Sans"/>
-                <a:ea typeface="Noto Sans CJK JP"/>
-                <a:cs typeface="Noto Sans"/>
-              </a:rPr>
-              <a:t/>
-            </a:r>
-          </a:p>
-        </p:txBody>
-      </p:sp>
-      <p:sp>
-        <p:nvSpPr>
-          <p:cNvPr id="3" name="Text Placeholder 2"/>
-          <p:cNvSpPr>
-            <a:spLocks noGrp="1"/>
-          </p:cNvSpPr>
-          <p:nvPr>
-            <p:ph type="body" idx="1"/>
-          </p:nvPr>
-        </p:nvSpPr>
-        <p:spPr>
-          <a:xfrm>
-            <a:off x="640080" y="1972511"/>
-            <a:ext cx="7863840" cy="1744980"/>
-          </a:xfrm>
-        </p:spPr>
-        <p:txBody>
-          <a:bodyPr lIns="0" rIns="0" tIns="0" bIns="0">
-            <a:noAutofit/>
-          </a:bodyPr>
-          <a:lstStyle/>
-          <a:p>
-            <a:pPr marL="457200" indent="-457200">
-              <a:lnSpc>
-                <a:spcPts val="3660"/>
-              </a:lnSpc>
-              <a:spcAft>
-                <a:spcPts val="1200"/>
-              </a:spcAft>
-              <a:buSzPct val="100000"/>
-              <a:buFont typeface="Noto Sans CJK JP"/>
-              <a:buAutoNum type="arabicPeriod" startAt="1"/>
-              <a:defRPr sz="3000" b="1">
-                <a:solidFill>
-                  <a:srgbClr val="303437"/>
-                </a:solidFill>
-                <a:latin typeface="Noto Sans"/>
-              </a:defRPr>
-            </a:pPr>
-            <a:r>
-              <a:rPr sz="3000" b="1" lang="ja-JP" altLang="en-US">
-                <a:solidFill>
-                  <a:srgbClr val="303437"/>
-                </a:solidFill>
-                <a:latin typeface="Noto Sans"/>
-                <a:ea typeface="Noto Sans CJK JP"/>
-                <a:cs typeface="Noto Sans"/>
-              </a:rPr>
-              <a:t>追加の例題</a:t>
-            </a:r>
-          </a:p>
-          <a:p>
-            <a:pPr marL="457200" indent="-457200">
-              <a:lnSpc>
-                <a:spcPts val="3660"/>
-              </a:lnSpc>
-              <a:spcAft>
-                <a:spcPts val="1200"/>
-              </a:spcAft>
-              <a:buSzPct val="100000"/>
-              <a:buFont typeface="Noto Sans CJK JP"/>
-              <a:buAutoNum type="arabicPeriod" startAt="2"/>
-              <a:defRPr sz="3000" b="1">
-                <a:solidFill>
-                  <a:srgbClr val="303437"/>
-                </a:solidFill>
-                <a:latin typeface="Noto Sans"/>
-              </a:defRPr>
-            </a:pPr>
-            <a:r>
-              <a:rPr sz="3000" b="1" lang="ja-JP" altLang="en-US">
-                <a:solidFill>
-                  <a:srgbClr val="303437"/>
-                </a:solidFill>
-                <a:latin typeface="Noto Sans"/>
-                <a:ea typeface="Noto Sans CJK JP"/>
-                <a:cs typeface="Noto Sans"/>
-              </a:rPr>
-              <a:t>記号の種類と読み込み方</a:t>
-            </a:r>
-          </a:p>
-          <a:p>
-            <a:pPr marL="457200" indent="-457200">
-              <a:lnSpc>
-                <a:spcPts val="3660"/>
-              </a:lnSpc>
-              <a:spcAft>
-                <a:spcPts val="0"/>
-              </a:spcAft>
-              <a:buSzPct val="100000"/>
-              <a:buFont typeface="Noto Sans CJK JP"/>
-              <a:buAutoNum type="arabicPeriod" startAt="3"/>
-              <a:defRPr sz="3000" b="1">
-                <a:solidFill>
-                  <a:srgbClr val="303437"/>
-                </a:solidFill>
-                <a:latin typeface="Noto Sans"/>
-              </a:defRPr>
-            </a:pPr>
-            <a:r>
-              <a:rPr sz="3000" b="1" lang="ja-JP" altLang="en-US">
-                <a:solidFill>
-                  <a:srgbClr val="303437"/>
-                </a:solidFill>
-                <a:latin typeface="Noto Sans"/>
-                <a:ea typeface="Noto Sans CJK JP"/>
-                <a:cs typeface="Noto Sans"/>
-              </a:rPr>
-              <a:t>研究と参考文献</a:t>
-            </a:r>
-          </a:p>
-        </p:txBody>
-      </p:sp>
-      <p:sp>
-        <p:nvSpPr>
-          <p:cNvPr id="4" name="Title 3"/>
-          <p:cNvSpPr>
-            <a:spLocks noGrp="1"/>
-          </p:cNvSpPr>
-          <p:nvPr>
-            <p:ph type="title" idx="2"/>
-          </p:nvPr>
-        </p:nvSpPr>
-        <p:spPr>
-          <a:xfrm>
-            <a:off x="75895" y="0"/>
-            <a:ext cx="8115300" cy="480060"/>
-          </a:xfrm>
-        </p:spPr>
-        <p:txBody>
-          <a:bodyPr wrap="square" lIns="0" rIns="0" tIns="0" bIns="0" anchor="ctr">
-            <a:noAutofit/>
-          </a:bodyPr>
-          <a:lstStyle/>
-          <a:p>
-            <a:pPr algn="l">
-              <a:lnSpc>
-                <a:spcPct val="110000"/>
-              </a:lnSpc>
-              <a:buNone/>
-              <a:defRPr sz="1400" b="0">
-                <a:solidFill>
-                  <a:srgbClr val="303437"/>
-                </a:solidFill>
-                <a:latin typeface="Noto Sans"/>
-              </a:defRPr>
-            </a:pPr>
-            <a:r>
-              <a:rPr sz="1400" b="1" lang="ja-JP" altLang="en-US">
-                <a:solidFill>
-                  <a:srgbClr val="FFFEF8"/>
-                </a:solidFill>
-                <a:latin typeface="Noto Sans"/>
-                <a:ea typeface="Noto Sans CJK JP"/>
-                <a:cs typeface="Noto Sans"/>
-              </a:rPr>
-              <a:t>Appendix: 目次</a:t>
-            </a:r>
-          </a:p>
-        </p:txBody>
-      </p:sp>
-    </p:spTree>
-  </p:cSld>
-  <p:clrMapOvr>
-    <a:masterClrMapping/>
-  </p:clrMapOvr>
-</p:sld>
-</file>
-
-<file path=ppt/slides/slide33.xml><?xml version="1.0" encoding="utf-8"?>
-<p:sld xmlns:a="http://schemas.openxmlformats.org/drawingml/2006/main" xmlns:p="http://schemas.openxmlformats.org/presentationml/2006/main" xmlns:r="http://schemas.openxmlformats.org/officeDocument/2006/relationships">
-  <p:cSld>
-    <p:spTree>
-      <p:nvGrpSpPr>
-        <p:cNvPr id="1" name=""/>
-        <p:cNvGrpSpPr/>
-        <p:nvPr/>
-      </p:nvGrpSpPr>
-      <p:grpSpPr/>
-      <p:sp>
-        <p:nvSpPr>
-          <p:cNvPr id="2" name="Title 1"/>
-          <p:cNvSpPr>
-            <a:spLocks noGrp="1"/>
-          </p:cNvSpPr>
-          <p:nvPr>
-            <p:ph type="title"/>
-          </p:nvPr>
-        </p:nvSpPr>
-        <p:spPr>
-          <a:xfrm>
             <a:off x="548640" y="2506875"/>
             <a:ext cx="8046720" cy="585216"/>
           </a:xfrm>
@@ -15528,7 +14631,7 @@
 </p:sld>
 </file>
 
-<file path=ppt/slides/slide34.xml><?xml version="1.0" encoding="utf-8"?>
+<file path=ppt/slides/slide33.xml><?xml version="1.0" encoding="utf-8"?>
 <p:sld xmlns:a="http://schemas.openxmlformats.org/drawingml/2006/main" xmlns:p="http://schemas.openxmlformats.org/presentationml/2006/main" xmlns:r="http://schemas.openxmlformats.org/officeDocument/2006/relationships">
   <p:cSld>
     <p:spTree>
@@ -16142,7 +15245,7 @@
 </p:sld>
 </file>
 
-<file path=ppt/slides/slide35.xml><?xml version="1.0" encoding="utf-8"?>
+<file path=ppt/slides/slide34.xml><?xml version="1.0" encoding="utf-8"?>
 <p:sld xmlns:a="http://schemas.openxmlformats.org/drawingml/2006/main" xmlns:p="http://schemas.openxmlformats.org/presentationml/2006/main" xmlns:r="http://schemas.openxmlformats.org/officeDocument/2006/relationships">
   <p:cSld>
     <p:spTree>
@@ -16756,7 +15859,7 @@
 </p:sld>
 </file>
 
-<file path=ppt/slides/slide36.xml><?xml version="1.0" encoding="utf-8"?>
+<file path=ppt/slides/slide35.xml><?xml version="1.0" encoding="utf-8"?>
 <p:sld xmlns:a="http://schemas.openxmlformats.org/drawingml/2006/main" xmlns:p="http://schemas.openxmlformats.org/presentationml/2006/main" xmlns:r="http://schemas.openxmlformats.org/officeDocument/2006/relationships">
   <p:cSld>
     <p:spTree>
@@ -17370,7 +16473,7 @@
 </p:sld>
 </file>
 
-<file path=ppt/slides/slide37.xml><?xml version="1.0" encoding="utf-8"?>
+<file path=ppt/slides/slide36.xml><?xml version="1.0" encoding="utf-8"?>
 <p:sld xmlns:a="http://schemas.openxmlformats.org/drawingml/2006/main" xmlns:p="http://schemas.openxmlformats.org/presentationml/2006/main" xmlns:r="http://schemas.openxmlformats.org/officeDocument/2006/relationships">
   <p:cSld>
     <p:spTree>
@@ -17984,7 +17087,7 @@
 </p:sld>
 </file>
 
-<file path=ppt/slides/slide38.xml><?xml version="1.0" encoding="utf-8"?>
+<file path=ppt/slides/slide37.xml><?xml version="1.0" encoding="utf-8"?>
 <p:sld xmlns:a="http://schemas.openxmlformats.org/drawingml/2006/main" xmlns:p="http://schemas.openxmlformats.org/presentationml/2006/main" xmlns:r="http://schemas.openxmlformats.org/officeDocument/2006/relationships">
   <p:cSld>
     <p:spTree>
@@ -18598,7 +17701,7 @@
 </p:sld>
 </file>
 
-<file path=ppt/slides/slide39.xml><?xml version="1.0" encoding="utf-8"?>
+<file path=ppt/slides/slide38.xml><?xml version="1.0" encoding="utf-8"?>
 <p:sld xmlns:a="http://schemas.openxmlformats.org/drawingml/2006/main" xmlns:p="http://schemas.openxmlformats.org/presentationml/2006/main" xmlns:r="http://schemas.openxmlformats.org/officeDocument/2006/relationships">
   <p:cSld>
     <p:spTree>
@@ -19212,121 +18315,7 @@
 </p:sld>
 </file>
 
-<file path=ppt/slides/slide4.xml><?xml version="1.0" encoding="utf-8"?>
-<p:sld xmlns:a="http://schemas.openxmlformats.org/drawingml/2006/main" xmlns:p="http://schemas.openxmlformats.org/presentationml/2006/main" xmlns:r="http://schemas.openxmlformats.org/officeDocument/2006/relationships">
-  <p:cSld>
-    <p:spTree>
-      <p:nvGrpSpPr>
-        <p:cNvPr id="1" name=""/>
-        <p:cNvGrpSpPr/>
-        <p:nvPr/>
-      </p:nvGrpSpPr>
-      <p:grpSpPr/>
-      <p:sp>
-        <p:nvSpPr>
-          <p:cNvPr id="2" name="Title 1"/>
-          <p:cNvSpPr>
-            <a:spLocks noGrp="1"/>
-          </p:cNvSpPr>
-          <p:nvPr>
-            <p:ph type="title"/>
-          </p:nvPr>
-        </p:nvSpPr>
-        <p:spPr>
-          <a:xfrm>
-            <a:off x="548640" y="2506875"/>
-            <a:ext cx="8046720" cy="585216"/>
-          </a:xfrm>
-        </p:spPr>
-        <p:txBody>
-          <a:bodyPr wrap="square" lIns="0" rIns="0" tIns="0" bIns="0" anchor="ctr">
-            <a:noAutofit/>
-          </a:bodyPr>
-          <a:lstStyle/>
-          <a:p>
-            <a:pPr algn="ctr">
-              <a:lnSpc>
-                <a:spcPct val="110000"/>
-              </a:lnSpc>
-              <a:buNone/>
-              <a:defRPr sz="3600" b="0">
-                <a:solidFill>
-                  <a:srgbClr val="303437"/>
-                </a:solidFill>
-                <a:latin typeface="Noto Sans"/>
-              </a:defRPr>
-            </a:pPr>
-            <a:r>
-              <a:rPr sz="3600" b="1" lang="ja-JP" altLang="en-US">
-                <a:solidFill>
-                  <a:srgbClr val="303437"/>
-                </a:solidFill>
-                <a:latin typeface="Noto Sans"/>
-                <a:ea typeface="Noto Sans CJK JP"/>
-                <a:cs typeface="Noto Sans"/>
-              </a:rPr>
-              <a:t>列の最後で、交互の規則を破る</a:t>
-            </a:r>
-          </a:p>
-        </p:txBody>
-      </p:sp>
-      <p:sp>
-        <p:nvSpPr>
-          <p:cNvPr id="3" name="Title 2"/>
-          <p:cNvSpPr>
-            <a:spLocks noGrp="1"/>
-          </p:cNvSpPr>
-          <p:nvPr>
-            <p:ph type="title" idx="2"/>
-          </p:nvPr>
-        </p:nvSpPr>
-        <p:spPr>
-          <a:xfrm>
-            <a:off x="75895" y="0"/>
-            <a:ext cx="8115300" cy="480060"/>
-          </a:xfrm>
-        </p:spPr>
-        <p:txBody>
-          <a:bodyPr wrap="square" lIns="0" rIns="0" tIns="0" bIns="0" anchor="ctr">
-            <a:noAutofit/>
-          </a:bodyPr>
-          <a:lstStyle/>
-          <a:p>
-            <a:pPr algn="l">
-              <a:lnSpc>
-                <a:spcPct val="110000"/>
-              </a:lnSpc>
-              <a:buNone/>
-              <a:defRPr sz="1400" b="0">
-                <a:solidFill>
-                  <a:srgbClr val="303437"/>
-                </a:solidFill>
-                <a:latin typeface="Noto Sans"/>
-              </a:defRPr>
-            </a:pPr>
-            <a:r>
-              <a:rPr sz="1400" b="1" lang="ja-JP" altLang="en-US">
-                <a:solidFill>
-                  <a:srgbClr val="FFFEF8"/>
-                </a:solidFill>
-                <a:latin typeface="Noto Sans"/>
-                <a:ea typeface="Noto Sans CJK JP"/>
-                <a:cs typeface="Noto Sans"/>
-              </a:rPr>
-              <a:t>1. 列の最後で、交互の規則を破る</a:t>
-            </a:r>
-          </a:p>
-        </p:txBody>
-      </p:sp>
-    </p:spTree>
-  </p:cSld>
-  <p:clrMapOvr>
-    <a:masterClrMapping/>
-  </p:clrMapOvr>
-</p:sld>
-</file>
-
-<file path=ppt/slides/slide40.xml><?xml version="1.0" encoding="utf-8"?>
+<file path=ppt/slides/slide39.xml><?xml version="1.0" encoding="utf-8"?>
 <p:sld xmlns:a="http://schemas.openxmlformats.org/drawingml/2006/main" xmlns:p="http://schemas.openxmlformats.org/presentationml/2006/main" xmlns:r="http://schemas.openxmlformats.org/officeDocument/2006/relationships">
   <p:cSld>
     <p:spTree>
@@ -19940,7 +18929,121 @@
 </p:sld>
 </file>
 
-<file path=ppt/slides/slide41.xml><?xml version="1.0" encoding="utf-8"?>
+<file path=ppt/slides/slide4.xml><?xml version="1.0" encoding="utf-8"?>
+<p:sld xmlns:a="http://schemas.openxmlformats.org/drawingml/2006/main" xmlns:p="http://schemas.openxmlformats.org/presentationml/2006/main" xmlns:r="http://schemas.openxmlformats.org/officeDocument/2006/relationships">
+  <p:cSld>
+    <p:spTree>
+      <p:nvGrpSpPr>
+        <p:cNvPr id="1" name=""/>
+        <p:cNvGrpSpPr/>
+        <p:nvPr/>
+      </p:nvGrpSpPr>
+      <p:grpSpPr/>
+      <p:sp>
+        <p:nvSpPr>
+          <p:cNvPr id="2" name="Title 1"/>
+          <p:cNvSpPr>
+            <a:spLocks noGrp="1"/>
+          </p:cNvSpPr>
+          <p:nvPr>
+            <p:ph type="title"/>
+          </p:nvPr>
+        </p:nvSpPr>
+        <p:spPr>
+          <a:xfrm>
+            <a:off x="548640" y="2506875"/>
+            <a:ext cx="8046720" cy="585216"/>
+          </a:xfrm>
+        </p:spPr>
+        <p:txBody>
+          <a:bodyPr wrap="square" lIns="0" rIns="0" tIns="0" bIns="0" anchor="ctr">
+            <a:noAutofit/>
+          </a:bodyPr>
+          <a:lstStyle/>
+          <a:p>
+            <a:pPr algn="ctr">
+              <a:lnSpc>
+                <a:spcPct val="110000"/>
+              </a:lnSpc>
+              <a:buNone/>
+              <a:defRPr sz="3600" b="0">
+                <a:solidFill>
+                  <a:srgbClr val="303437"/>
+                </a:solidFill>
+                <a:latin typeface="Noto Sans"/>
+              </a:defRPr>
+            </a:pPr>
+            <a:r>
+              <a:rPr sz="3600" b="1" lang="ja-JP" altLang="en-US">
+                <a:solidFill>
+                  <a:srgbClr val="303437"/>
+                </a:solidFill>
+                <a:latin typeface="Noto Sans"/>
+                <a:ea typeface="Noto Sans CJK JP"/>
+                <a:cs typeface="Noto Sans"/>
+              </a:rPr>
+              <a:t>列の最後で、交互の規則を破る</a:t>
+            </a:r>
+          </a:p>
+        </p:txBody>
+      </p:sp>
+      <p:sp>
+        <p:nvSpPr>
+          <p:cNvPr id="3" name="Title 2"/>
+          <p:cNvSpPr>
+            <a:spLocks noGrp="1"/>
+          </p:cNvSpPr>
+          <p:nvPr>
+            <p:ph type="title" idx="2"/>
+          </p:nvPr>
+        </p:nvSpPr>
+        <p:spPr>
+          <a:xfrm>
+            <a:off x="75895" y="0"/>
+            <a:ext cx="8115300" cy="480060"/>
+          </a:xfrm>
+        </p:spPr>
+        <p:txBody>
+          <a:bodyPr wrap="square" lIns="0" rIns="0" tIns="0" bIns="0" anchor="ctr">
+            <a:noAutofit/>
+          </a:bodyPr>
+          <a:lstStyle/>
+          <a:p>
+            <a:pPr algn="l">
+              <a:lnSpc>
+                <a:spcPct val="110000"/>
+              </a:lnSpc>
+              <a:buNone/>
+              <a:defRPr sz="1400" b="0">
+                <a:solidFill>
+                  <a:srgbClr val="303437"/>
+                </a:solidFill>
+                <a:latin typeface="Noto Sans"/>
+              </a:defRPr>
+            </a:pPr>
+            <a:r>
+              <a:rPr sz="1400" b="1" lang="ja-JP" altLang="en-US">
+                <a:solidFill>
+                  <a:srgbClr val="FFFEF8"/>
+                </a:solidFill>
+                <a:latin typeface="Noto Sans"/>
+                <a:ea typeface="Noto Sans CJK JP"/>
+                <a:cs typeface="Noto Sans"/>
+              </a:rPr>
+              <a:t>1. 列の最後で、交互の規則を破る</a:t>
+            </a:r>
+          </a:p>
+        </p:txBody>
+      </p:sp>
+    </p:spTree>
+  </p:cSld>
+  <p:clrMapOvr>
+    <a:masterClrMapping/>
+  </p:clrMapOvr>
+</p:sld>
+</file>
+
+<file path=ppt/slides/slide40.xml><?xml version="1.0" encoding="utf-8"?>
 <p:sld xmlns:a="http://schemas.openxmlformats.org/drawingml/2006/main" xmlns:p="http://schemas.openxmlformats.org/presentationml/2006/main" xmlns:r="http://schemas.openxmlformats.org/officeDocument/2006/relationships">
   <p:cSld>
     <p:spTree>
@@ -20554,7 +19657,7 @@
 </p:sld>
 </file>
 
-<file path=ppt/slides/slide42.xml><?xml version="1.0" encoding="utf-8"?>
+<file path=ppt/slides/slide41.xml><?xml version="1.0" encoding="utf-8"?>
 <p:sld xmlns:a="http://schemas.openxmlformats.org/drawingml/2006/main" xmlns:p="http://schemas.openxmlformats.org/presentationml/2006/main" xmlns:r="http://schemas.openxmlformats.org/officeDocument/2006/relationships">
   <p:cSld>
     <p:spTree>
@@ -21168,7 +20271,7 @@
 </p:sld>
 </file>
 
-<file path=ppt/slides/slide43.xml><?xml version="1.0" encoding="utf-8"?>
+<file path=ppt/slides/slide42.xml><?xml version="1.0" encoding="utf-8"?>
 <p:sld xmlns:a="http://schemas.openxmlformats.org/drawingml/2006/main" xmlns:p="http://schemas.openxmlformats.org/presentationml/2006/main" xmlns:r="http://schemas.openxmlformats.org/officeDocument/2006/relationships">
   <p:cSld>
     <p:spTree>
@@ -21782,7 +20885,7 @@
 </p:sld>
 </file>
 
-<file path=ppt/slides/slide44.xml><?xml version="1.0" encoding="utf-8"?>
+<file path=ppt/slides/slide43.xml><?xml version="1.0" encoding="utf-8"?>
 <p:sld xmlns:a="http://schemas.openxmlformats.org/drawingml/2006/main" xmlns:p="http://schemas.openxmlformats.org/presentationml/2006/main" xmlns:r="http://schemas.openxmlformats.org/officeDocument/2006/relationships">
   <p:cSld>
     <p:spTree>
@@ -21896,7 +20999,7 @@
 </p:sld>
 </file>
 
-<file path=ppt/slides/slide45.xml><?xml version="1.0" encoding="utf-8"?>
+<file path=ppt/slides/slide44.xml><?xml version="1.0" encoding="utf-8"?>
 <p:sld xmlns:a="http://schemas.openxmlformats.org/drawingml/2006/main" xmlns:p="http://schemas.openxmlformats.org/presentationml/2006/main" xmlns:r="http://schemas.openxmlformats.org/officeDocument/2006/relationships">
   <p:cSld>
     <p:spTree>
@@ -22838,7 +21941,7 @@
 </p:sld>
 </file>
 
-<file path=ppt/slides/slide46.xml><?xml version="1.0" encoding="utf-8"?>
+<file path=ppt/slides/slide45.xml><?xml version="1.0" encoding="utf-8"?>
 <p:sld xmlns:a="http://schemas.openxmlformats.org/drawingml/2006/main" xmlns:p="http://schemas.openxmlformats.org/presentationml/2006/main" xmlns:r="http://schemas.openxmlformats.org/officeDocument/2006/relationships">
   <p:cSld>
     <p:spTree>
@@ -23780,7 +22883,7 @@
 </p:sld>
 </file>
 
-<file path=ppt/slides/slide49.xml><?xml version="1.0" encoding="utf-8"?>
+<file path=ppt/slides/slide46.xml><?xml version="1.0" encoding="utf-8"?>
 <p:sld xmlns:a="http://schemas.openxmlformats.org/drawingml/2006/main" xmlns:p="http://schemas.openxmlformats.org/presentationml/2006/main" xmlns:r="http://schemas.openxmlformats.org/officeDocument/2006/relationships">
   <p:cSld>
     <p:spTree>
@@ -24274,6 +23377,823 @@
 </p:sld>
 </file>
 
+<file path=ppt/slides/slide47.xml><?xml version="1.0" encoding="utf-8"?>
+<p:sld xmlns:a="http://schemas.openxmlformats.org/drawingml/2006/main" xmlns:p="http://schemas.openxmlformats.org/presentationml/2006/main" xmlns:r="http://schemas.openxmlformats.org/officeDocument/2006/relationships">
+  <p:cSld>
+    <p:spTree>
+      <p:nvGrpSpPr>
+        <p:cNvPr id="1" name=""/>
+        <p:cNvGrpSpPr/>
+        <p:nvPr/>
+      </p:nvGrpSpPr>
+      <p:grpSpPr/>
+      <p:sp>
+        <p:nvSpPr>
+          <p:cNvPr id="2" name="Title 1"/>
+          <p:cNvSpPr>
+            <a:spLocks noGrp="1"/>
+          </p:cNvSpPr>
+          <p:nvPr>
+            <p:ph type="title"/>
+          </p:nvPr>
+        </p:nvSpPr>
+        <p:spPr>
+          <a:xfrm>
+            <a:off x="548640" y="2506875"/>
+            <a:ext cx="8046720" cy="585216"/>
+          </a:xfrm>
+        </p:spPr>
+        <p:txBody>
+          <a:bodyPr wrap="square" lIns="0" rIns="0" tIns="0" bIns="0" anchor="ctr">
+            <a:noAutofit/>
+          </a:bodyPr>
+          <a:lstStyle/>
+          <a:p>
+            <a:pPr algn="ctr">
+              <a:lnSpc>
+                <a:spcPct val="110000"/>
+              </a:lnSpc>
+              <a:buNone/>
+              <a:defRPr sz="3600" b="0">
+                <a:solidFill>
+                  <a:srgbClr val="303437"/>
+                </a:solidFill>
+                <a:latin typeface="Noto Sans"/>
+              </a:defRPr>
+            </a:pPr>
+            <a:r>
+              <a:rPr sz="3600" b="1" lang="ja-JP" altLang="en-US">
+                <a:solidFill>
+                  <a:srgbClr val="303437"/>
+                </a:solidFill>
+                <a:latin typeface="Noto Sans"/>
+                <a:ea typeface="Noto Sans CJK JP"/>
+                <a:cs typeface="Noto Sans"/>
+              </a:rPr>
+              <a:t>研究と参考文献</a:t>
+            </a:r>
+          </a:p>
+        </p:txBody>
+      </p:sp>
+      <p:sp>
+        <p:nvSpPr>
+          <p:cNvPr id="3" name="Title 2"/>
+          <p:cNvSpPr>
+            <a:spLocks noGrp="1"/>
+          </p:cNvSpPr>
+          <p:nvPr>
+            <p:ph type="title" idx="2"/>
+          </p:nvPr>
+        </p:nvSpPr>
+        <p:spPr>
+          <a:xfrm>
+            <a:off x="75895" y="0"/>
+            <a:ext cx="8115300" cy="480060"/>
+          </a:xfrm>
+        </p:spPr>
+        <p:txBody>
+          <a:bodyPr wrap="square" lIns="0" rIns="0" tIns="0" bIns="0" anchor="ctr">
+            <a:noAutofit/>
+          </a:bodyPr>
+          <a:lstStyle/>
+          <a:p>
+            <a:pPr algn="l">
+              <a:lnSpc>
+                <a:spcPct val="110000"/>
+              </a:lnSpc>
+              <a:buNone/>
+              <a:defRPr sz="1400" b="0">
+                <a:solidFill>
+                  <a:srgbClr val="303437"/>
+                </a:solidFill>
+                <a:latin typeface="Noto Sans"/>
+              </a:defRPr>
+            </a:pPr>
+            <a:r>
+              <a:rPr sz="1400" b="1" lang="ja-JP" altLang="en-US">
+                <a:solidFill>
+                  <a:srgbClr val="FFFEF8"/>
+                </a:solidFill>
+                <a:latin typeface="Noto Sans"/>
+                <a:ea typeface="Noto Sans CJK JP"/>
+                <a:cs typeface="Noto Sans"/>
+              </a:rPr>
+              <a:t>Appendix: 3. 研究と参考文献</a:t>
+            </a:r>
+          </a:p>
+        </p:txBody>
+      </p:sp>
+    </p:spTree>
+  </p:cSld>
+  <p:clrMapOvr>
+    <a:masterClrMapping/>
+  </p:clrMapOvr>
+</p:sld>
+</file>
+
+<file path=ppt/slides/slide48.xml><?xml version="1.0" encoding="utf-8"?>
+<p:sld xmlns:a="http://schemas.openxmlformats.org/drawingml/2006/main" xmlns:p="http://schemas.openxmlformats.org/presentationml/2006/main" xmlns:r="http://schemas.openxmlformats.org/officeDocument/2006/relationships">
+  <p:cSld>
+    <p:spTree>
+      <p:nvGrpSpPr>
+        <p:cNvPr id="1" name=""/>
+        <p:cNvGrpSpPr/>
+        <p:nvPr/>
+      </p:nvGrpSpPr>
+      <p:grpSpPr/>
+      <p:sp>
+        <p:nvSpPr>
+          <p:cNvPr id="2" name="Title 1"/>
+          <p:cNvSpPr>
+            <a:spLocks noGrp="1"/>
+          </p:cNvSpPr>
+          <p:nvPr>
+            <p:ph type="title"/>
+          </p:nvPr>
+        </p:nvSpPr>
+        <p:spPr>
+          <a:xfrm>
+            <a:off x="468172" y="650138"/>
+            <a:ext cx="8206740" cy="616305"/>
+          </a:xfrm>
+        </p:spPr>
+        <p:txBody>
+          <a:bodyPr wrap="square" lIns="0" rIns="0" tIns="0" bIns="0">
+            <a:noAutofit/>
+          </a:bodyPr>
+          <a:lstStyle/>
+          <a:p>
+            <a:pPr algn="l">
+              <a:lnSpc>
+                <a:spcPct val="110000"/>
+              </a:lnSpc>
+              <a:buNone/>
+              <a:defRPr sz="2800" b="0">
+                <a:solidFill>
+                  <a:srgbClr val="303437"/>
+                </a:solidFill>
+                <a:latin typeface="Noto Sans"/>
+              </a:defRPr>
+            </a:pPr>
+            <a:r>
+              <a:rPr sz="2450" b="1" lang="ja-JP" altLang="en-US">
+                <a:solidFill>
+                  <a:srgbClr val="303437"/>
+                </a:solidFill>
+                <a:latin typeface="Noto Sans"/>
+                <a:ea typeface="Noto Sans CJK JP"/>
+                <a:cs typeface="Noto Sans"/>
+              </a:rPr>
+              <a:t>Tomasz Korbakの課題が、指示と規則の衝突を示す</a:t>
+            </a:r>
+          </a:p>
+        </p:txBody>
+      </p:sp>
+      <p:sp>
+        <p:nvSpPr>
+          <p:cNvPr id="3" name="Text Placeholder 2"/>
+          <p:cNvSpPr>
+            <a:spLocks noGrp="1"/>
+          </p:cNvSpPr>
+          <p:nvPr>
+            <p:ph type="body" idx="1"/>
+          </p:nvPr>
+        </p:nvSpPr>
+        <p:spPr>
+          <a:xfrm>
+            <a:off x="594360" y="1463040"/>
+            <a:ext cx="7955279" cy="3044952"/>
+          </a:xfrm>
+        </p:spPr>
+        <p:txBody>
+          <a:bodyPr wrap="square" tIns="91440" bIns="91440">
+            <a:noAutofit/>
+          </a:bodyPr>
+          <a:lstStyle/>
+          <a:p>
+            <a:pPr marL="457200" indent="-355600">
+              <a:lnSpc>
+                <a:spcPts val="2499"/>
+              </a:lnSpc>
+              <a:spcAft>
+                <a:spcPts val="700"/>
+              </a:spcAft>
+              <a:buSzPct val="63333"/>
+              <a:buFont typeface="Noto Sans CJK JP"/>
+              <a:buChar char="●"/>
+              <a:defRPr sz="2100" b="0">
+                <a:solidFill>
+                  <a:srgbClr val="303437"/>
+                </a:solidFill>
+                <a:latin typeface="Noto Sans"/>
+              </a:defRPr>
+            </a:pPr>
+            <a:r>
+              <a:rPr sz="2100" b="0" lang="ja-JP" altLang="en-US">
+                <a:solidFill>
+                  <a:srgbClr val="303437"/>
+                </a:solidFill>
+                <a:latin typeface="Noto Sans"/>
+                <a:ea typeface="Noto Sans CJK JP"/>
+                <a:cs typeface="Noto Sans"/>
+              </a:rPr>
+              <a:t>提出者はTomasz Korbak。Inverse Scaling Prizeの第2回受賞課題として、明示的な指示より暗黙の繰返しを優先する現象を扱う。</a:t>
+            </a:r>
+          </a:p>
+          <a:p>
+            <a:pPr marL="457200" indent="-355600">
+              <a:lnSpc>
+                <a:spcPts val="2499"/>
+              </a:lnSpc>
+              <a:spcAft>
+                <a:spcPts val="700"/>
+              </a:spcAft>
+              <a:buSzPct val="63333"/>
+              <a:buFont typeface="Noto Sans CJK JP"/>
+              <a:buChar char="●"/>
+              <a:defRPr sz="2100" b="0">
+                <a:solidFill>
+                  <a:srgbClr val="303437"/>
+                </a:solidFill>
+                <a:latin typeface="Noto Sans"/>
+              </a:defRPr>
+            </a:pPr>
+            <a:r>
+              <a:rPr sz="2100" b="0" lang="ja-JP" altLang="en-US">
+                <a:solidFill>
+                  <a:srgbClr val="303437"/>
+                </a:solidFill>
+                <a:latin typeface="Noto Sans"/>
+                <a:ea typeface="Noto Sans CJK JP"/>
+                <a:cs typeface="Noto Sans"/>
+              </a:rPr>
+              <a:t>McKenzieらの2023年TMLR論文は、11受賞課題を4つの原因仮説で整理する。本課題はDistractor Taskの一例。</a:t>
+            </a:r>
+          </a:p>
+          <a:p>
+            <a:pPr marL="457200" indent="-355600">
+              <a:lnSpc>
+                <a:spcPts val="2499"/>
+              </a:lnSpc>
+              <a:spcAft>
+                <a:spcPts val="0"/>
+              </a:spcAft>
+              <a:buSzPct val="63333"/>
+              <a:buFont typeface="Noto Sans CJK JP"/>
+              <a:buChar char="●"/>
+              <a:defRPr sz="2100" b="0">
+                <a:solidFill>
+                  <a:srgbClr val="303437"/>
+                </a:solidFill>
+                <a:latin typeface="Noto Sans"/>
+              </a:defRPr>
+            </a:pPr>
+            <a:r>
+              <a:rPr sz="2100" b="0" lang="ja-JP" altLang="en-US">
+                <a:solidFill>
+                  <a:srgbClr val="303437"/>
+                </a:solidFill>
+                <a:latin typeface="Noto Sans"/>
+                <a:ea typeface="Noto Sans CJK JP"/>
+                <a:cs typeface="Noto Sans"/>
+              </a:rPr>
+              <a:t>研究では人が選ぶ回答はデータの正解とよく一致する一方、モデルの規模や例示数によって違う傾向が現れることを報告する。</a:t>
+            </a:r>
+          </a:p>
+        </p:txBody>
+      </p:sp>
+      <p:sp>
+        <p:nvSpPr>
+          <p:cNvPr id="4" name="Title 3"/>
+          <p:cNvSpPr>
+            <a:spLocks noGrp="1"/>
+          </p:cNvSpPr>
+          <p:nvPr>
+            <p:ph type="title" idx="2"/>
+          </p:nvPr>
+        </p:nvSpPr>
+        <p:spPr>
+          <a:xfrm>
+            <a:off x="75895" y="0"/>
+            <a:ext cx="8115300" cy="480060"/>
+          </a:xfrm>
+        </p:spPr>
+        <p:txBody>
+          <a:bodyPr wrap="square" lIns="0" rIns="0" tIns="0" bIns="0" anchor="ctr">
+            <a:noAutofit/>
+          </a:bodyPr>
+          <a:lstStyle/>
+          <a:p>
+            <a:pPr algn="l">
+              <a:lnSpc>
+                <a:spcPct val="110000"/>
+              </a:lnSpc>
+              <a:buNone/>
+              <a:defRPr sz="1400" b="0">
+                <a:solidFill>
+                  <a:srgbClr val="303437"/>
+                </a:solidFill>
+                <a:latin typeface="Noto Sans"/>
+              </a:defRPr>
+            </a:pPr>
+            <a:r>
+              <a:rPr sz="1400" b="1" lang="ja-JP" altLang="en-US">
+                <a:solidFill>
+                  <a:srgbClr val="FFFEF8"/>
+                </a:solidFill>
+                <a:latin typeface="Noto Sans"/>
+                <a:ea typeface="Noto Sans CJK JP"/>
+                <a:cs typeface="Noto Sans"/>
+              </a:rPr>
+              <a:t>Appendix: 3. 研究と参考文献</a:t>
+            </a:r>
+          </a:p>
+        </p:txBody>
+      </p:sp>
+      <p:sp>
+        <p:nvSpPr>
+          <p:cNvPr id="5" name="sources"/>
+          <p:cNvSpPr txBox="1"/>
+          <p:nvPr/>
+        </p:nvSpPr>
+        <p:spPr>
+          <a:xfrm>
+            <a:off x="502920" y="4699000"/>
+            <a:ext cx="8183879" cy="431800"/>
+          </a:xfrm>
+          <a:prstGeom prst="rect">
+            <a:avLst/>
+          </a:prstGeom>
+          <a:noFill/>
+        </p:spPr>
+        <p:txBody>
+          <a:bodyPr wrap="square" lIns="0" rIns="0" tIns="0" bIns="0">
+            <a:noAutofit/>
+          </a:bodyPr>
+          <a:lstStyle/>
+          <a:p>
+            <a:pPr algn="l">
+              <a:lnSpc>
+                <a:spcPts val="1200"/>
+              </a:lnSpc>
+              <a:spcBef>
+                <a:spcPts val="0"/>
+              </a:spcBef>
+              <a:spcAft>
+                <a:spcPts val="0"/>
+              </a:spcAft>
+              <a:buNone/>
+              <a:defRPr sz="810" b="0">
+                <a:solidFill>
+                  <a:srgbClr val="303437"/>
+                </a:solidFill>
+                <a:latin typeface="Noto Sans"/>
+              </a:defRPr>
+            </a:pPr>
+            <a:r>
+              <a:rPr sz="830">
+                <a:latin typeface="Noto Sans CJK JP"/>
+              </a:rPr>
+              <a:t>[1] McKenzie et al. (2023). Inverse Scaling: When Bigger Isn’t Better. TMLR.</a:t>
+            </a:r>
+          </a:p>
+          <a:p>
+            <a:pPr>
+              <a:spcBef>
+                <a:spcPts val="0"/>
+              </a:spcBef>
+              <a:spcAft>
+                <a:spcPts val="0"/>
+              </a:spcAft>
+            </a:pPr>
+            <a:r>
+              <a:rPr sz="830">
+                <a:latin typeface="Noto Sans CJK JP"/>
+                <a:hlinkClick r:id="rId2"/>
+              </a:rPr>
+              <a:t>https://arxiv.org/abs/2306.09479</a:t>
+            </a:r>
+          </a:p>
+        </p:txBody>
+      </p:sp>
+    </p:spTree>
+  </p:cSld>
+  <p:clrMapOvr>
+    <a:masterClrMapping/>
+  </p:clrMapOvr>
+</p:sld>
+</file>
+
+<file path=ppt/slides/slide49.xml><?xml version="1.0" encoding="utf-8"?>
+<p:sld xmlns:a="http://schemas.openxmlformats.org/drawingml/2006/main" xmlns:p="http://schemas.openxmlformats.org/presentationml/2006/main" xmlns:r="http://schemas.openxmlformats.org/officeDocument/2006/relationships">
+  <p:cSld>
+    <p:spTree>
+      <p:nvGrpSpPr>
+        <p:cNvPr id="1" name=""/>
+        <p:cNvGrpSpPr/>
+        <p:nvPr/>
+      </p:nvGrpSpPr>
+      <p:grpSpPr/>
+      <p:sp>
+        <p:nvSpPr>
+          <p:cNvPr id="2" name="Title 1"/>
+          <p:cNvSpPr>
+            <a:spLocks noGrp="1"/>
+          </p:cNvSpPr>
+          <p:nvPr>
+            <p:ph type="title"/>
+          </p:nvPr>
+        </p:nvSpPr>
+        <p:spPr>
+          <a:xfrm>
+            <a:off x="468172" y="650138"/>
+            <a:ext cx="8206740" cy="616305"/>
+          </a:xfrm>
+        </p:spPr>
+        <p:txBody>
+          <a:bodyPr wrap="square" lIns="0" rIns="0" tIns="0" bIns="0">
+            <a:noAutofit/>
+          </a:bodyPr>
+          <a:lstStyle/>
+          <a:p>
+            <a:pPr algn="l">
+              <a:lnSpc>
+                <a:spcPct val="110000"/>
+              </a:lnSpc>
+              <a:buNone/>
+              <a:defRPr sz="2800" b="0">
+                <a:solidFill>
+                  <a:srgbClr val="303437"/>
+                </a:solidFill>
+                <a:latin typeface="Noto Sans"/>
+              </a:defRPr>
+            </a:pPr>
+            <a:r>
+              <a:rPr sz="2800" b="1" lang="ja-JP" altLang="en-US">
+                <a:solidFill>
+                  <a:srgbClr val="303437"/>
+                </a:solidFill>
+                <a:latin typeface="Noto Sans"/>
+                <a:ea typeface="Noto Sans CJK JP"/>
+                <a:cs typeface="Noto Sans"/>
+              </a:rPr>
+              <a:t>参考文献</a:t>
+            </a:r>
+          </a:p>
+        </p:txBody>
+      </p:sp>
+      <p:sp>
+        <p:nvSpPr>
+          <p:cNvPr id="3" name="Title 2"/>
+          <p:cNvSpPr>
+            <a:spLocks noGrp="1"/>
+          </p:cNvSpPr>
+          <p:nvPr>
+            <p:ph type="title" idx="2"/>
+          </p:nvPr>
+        </p:nvSpPr>
+        <p:spPr>
+          <a:xfrm>
+            <a:off x="75895" y="0"/>
+            <a:ext cx="8115300" cy="480060"/>
+          </a:xfrm>
+        </p:spPr>
+        <p:txBody>
+          <a:bodyPr wrap="square" lIns="0" rIns="0" tIns="0" bIns="0" anchor="ctr">
+            <a:noAutofit/>
+          </a:bodyPr>
+          <a:lstStyle/>
+          <a:p>
+            <a:pPr algn="l">
+              <a:lnSpc>
+                <a:spcPct val="110000"/>
+              </a:lnSpc>
+              <a:buNone/>
+              <a:defRPr sz="1400" b="0">
+                <a:solidFill>
+                  <a:srgbClr val="303437"/>
+                </a:solidFill>
+                <a:latin typeface="Noto Sans"/>
+              </a:defRPr>
+            </a:pPr>
+            <a:r>
+              <a:rPr sz="1400" b="1" lang="ja-JP" altLang="en-US">
+                <a:solidFill>
+                  <a:srgbClr val="FFFEF8"/>
+                </a:solidFill>
+                <a:latin typeface="Noto Sans"/>
+                <a:ea typeface="Noto Sans CJK JP"/>
+                <a:cs typeface="Noto Sans"/>
+              </a:rPr>
+              <a:t>Appendix: 3. 研究と参考文献</a:t>
+            </a:r>
+          </a:p>
+        </p:txBody>
+      </p:sp>
+      <p:sp>
+        <p:nvSpPr>
+          <p:cNvPr id="4" name="文献 1: Inverse Scaling: When Bigger Isn’t Better"/>
+          <p:cNvSpPr txBox="1"/>
+          <p:nvPr/>
+        </p:nvSpPr>
+        <p:spPr>
+          <a:xfrm>
+            <a:off x="548640" y="1417320"/>
+            <a:ext cx="8046720" cy="1536574"/>
+          </a:xfrm>
+          <a:prstGeom prst="rect">
+            <a:avLst/>
+          </a:prstGeom>
+          <a:noFill/>
+        </p:spPr>
+        <p:txBody>
+          <a:bodyPr wrap="square" lIns="0" rIns="0" tIns="0" bIns="0">
+            <a:noAutofit/>
+          </a:bodyPr>
+          <a:lstStyle/>
+          <a:p>
+            <a:pPr algn="l">
+              <a:lnSpc>
+                <a:spcPct val="114000"/>
+              </a:lnSpc>
+              <a:spcBef>
+                <a:spcPts val="0"/>
+              </a:spcBef>
+              <a:spcAft>
+                <a:spcPts val="400"/>
+              </a:spcAft>
+              <a:buNone/>
+              <a:defRPr sz="1800" b="0">
+                <a:solidFill>
+                  <a:srgbClr val="303437"/>
+                </a:solidFill>
+                <a:latin typeface="Noto Sans"/>
+              </a:defRPr>
+            </a:pPr>
+            <a:r>
+              <a:rPr sz="1800" b="1" lang="ja-JP" altLang="en-US">
+                <a:solidFill>
+                  <a:srgbClr val="303437"/>
+                </a:solidFill>
+                <a:latin typeface="Noto Sans"/>
+                <a:ea typeface="Noto Sans CJK JP"/>
+                <a:cs typeface="Noto Sans"/>
+              </a:rPr>
+              <a:t>Inverse Scaling: When Bigger Isn’t Better</a:t>
+            </a:r>
+          </a:p>
+          <a:p>
+            <a:pPr algn="l">
+              <a:lnSpc>
+                <a:spcPct val="114000"/>
+              </a:lnSpc>
+              <a:spcBef>
+                <a:spcPts val="0"/>
+              </a:spcBef>
+              <a:spcAft>
+                <a:spcPts val="500"/>
+              </a:spcAft>
+              <a:buNone/>
+              <a:defRPr sz="1250" b="0">
+                <a:solidFill>
+                  <a:srgbClr val="303437"/>
+                </a:solidFill>
+                <a:latin typeface="Noto Sans"/>
+              </a:defRPr>
+            </a:pPr>
+            <a:r>
+              <a:rPr sz="1250" b="0" lang="ja-JP" altLang="en-US">
+                <a:solidFill>
+                  <a:srgbClr val="626669"/>
+                </a:solidFill>
+                <a:latin typeface="Noto Sans"/>
+                <a:ea typeface="Noto Sans CJK JP"/>
+                <a:cs typeface="Noto Sans"/>
+              </a:rPr>
+              <a:t>Ian R. McKenzie et al. (2023). Transactions on Machine Learning Research. arXiv v2:2024.</a:t>
+            </a:r>
+          </a:p>
+          <a:p>
+            <a:pPr algn="l">
+              <a:lnSpc>
+                <a:spcPct val="114000"/>
+              </a:lnSpc>
+              <a:spcBef>
+                <a:spcPts val="0"/>
+              </a:spcBef>
+              <a:spcAft>
+                <a:spcPts val="400"/>
+              </a:spcAft>
+              <a:buNone/>
+              <a:defRPr sz="1750" b="0">
+                <a:solidFill>
+                  <a:srgbClr val="303437"/>
+                </a:solidFill>
+                <a:latin typeface="Noto Sans"/>
+              </a:defRPr>
+            </a:pPr>
+            <a:r>
+              <a:rPr sz="1750" b="0" lang="ja-JP" altLang="en-US">
+                <a:solidFill>
+                  <a:srgbClr val="303437"/>
+                </a:solidFill>
+                <a:latin typeface="Noto Sans"/>
+                <a:ea typeface="Noto Sans CJK JP"/>
+                <a:cs typeface="Noto Sans"/>
+              </a:rPr>
+              <a:t>11受賞課題を評価し、交互列の完遂が指示への切替を妨げるという仮説と、規模・例示数の影響を報告する。</a:t>
+            </a:r>
+          </a:p>
+          <a:p>
+            <a:pPr algn="l">
+              <a:lnSpc>
+                <a:spcPct val="114000"/>
+              </a:lnSpc>
+              <a:spcBef>
+                <a:spcPts val="0"/>
+              </a:spcBef>
+              <a:spcAft>
+                <a:spcPts val="0"/>
+              </a:spcAft>
+              <a:buNone/>
+              <a:defRPr sz="1050" b="0">
+                <a:solidFill>
+                  <a:srgbClr val="303437"/>
+                </a:solidFill>
+                <a:latin typeface="Noto Sans"/>
+              </a:defRPr>
+            </a:pPr>
+            <a:r>
+              <a:rPr sz="1050" b="0" lang="ja-JP" altLang="en-US">
+                <a:solidFill>
+                  <a:srgbClr val="626669"/>
+                </a:solidFill>
+                <a:latin typeface="Noto Sans"/>
+                <a:ea typeface="Noto Sans CJK JP"/>
+                <a:cs typeface="Noto Sans"/>
+                <a:hlinkClick r:id="rId2"/>
+              </a:rPr>
+              <a:t>https://arxiv.org/abs/2306.09479</a:t>
+            </a:r>
+          </a:p>
+        </p:txBody>
+      </p:sp>
+      <p:sp>
+        <p:nvSpPr>
+          <p:cNvPr id="5" name="文献 2: Inverse Scaling Prize — Data release"/>
+          <p:cNvSpPr txBox="1"/>
+          <p:nvPr/>
+        </p:nvSpPr>
+        <p:spPr>
+          <a:xfrm>
+            <a:off x="548640" y="2987548"/>
+            <a:ext cx="8046720" cy="1536663"/>
+          </a:xfrm>
+          <a:prstGeom prst="rect">
+            <a:avLst/>
+          </a:prstGeom>
+          <a:noFill/>
+        </p:spPr>
+        <p:txBody>
+          <a:bodyPr wrap="square" lIns="0" rIns="0" tIns="0" bIns="0">
+            <a:noAutofit/>
+          </a:bodyPr>
+          <a:lstStyle/>
+          <a:p>
+            <a:pPr algn="l">
+              <a:lnSpc>
+                <a:spcPct val="114000"/>
+              </a:lnSpc>
+              <a:spcBef>
+                <a:spcPts val="0"/>
+              </a:spcBef>
+              <a:spcAft>
+                <a:spcPts val="400"/>
+              </a:spcAft>
+              <a:buNone/>
+              <a:defRPr sz="1800" b="0">
+                <a:solidFill>
+                  <a:srgbClr val="303437"/>
+                </a:solidFill>
+                <a:latin typeface="Noto Sans"/>
+              </a:defRPr>
+            </a:pPr>
+            <a:r>
+              <a:rPr sz="1800" b="1" lang="ja-JP" altLang="en-US">
+                <a:solidFill>
+                  <a:srgbClr val="303437"/>
+                </a:solidFill>
+                <a:latin typeface="Noto Sans"/>
+                <a:ea typeface="Noto Sans CJK JP"/>
+                <a:cs typeface="Noto Sans"/>
+              </a:rPr>
+              <a:t>Inverse Scaling Prize — Data release</a:t>
+            </a:r>
+          </a:p>
+          <a:p>
+            <a:pPr algn="l">
+              <a:lnSpc>
+                <a:spcPct val="114000"/>
+              </a:lnSpc>
+              <a:spcBef>
+                <a:spcPts val="0"/>
+              </a:spcBef>
+              <a:spcAft>
+                <a:spcPts val="500"/>
+              </a:spcAft>
+              <a:buNone/>
+              <a:defRPr sz="1250" b="0">
+                <a:solidFill>
+                  <a:srgbClr val="303437"/>
+                </a:solidFill>
+                <a:latin typeface="Noto Sans"/>
+              </a:defRPr>
+            </a:pPr>
+            <a:r>
+              <a:rPr sz="1250" b="0" lang="ja-JP" altLang="en-US">
+                <a:solidFill>
+                  <a:srgbClr val="626669"/>
+                </a:solidFill>
+                <a:latin typeface="Noto Sans"/>
+                <a:ea typeface="Noto Sans CJK JP"/>
+                <a:cs typeface="Noto Sans"/>
+              </a:rPr>
+              <a:t>Inverse Scaling Prize. 2023年3月公開。課題提出者Tomasz Korbak。</a:t>
+            </a:r>
+          </a:p>
+          <a:p>
+            <a:pPr algn="l">
+              <a:lnSpc>
+                <a:spcPct val="114000"/>
+              </a:lnSpc>
+              <a:spcBef>
+                <a:spcPts val="0"/>
+              </a:spcBef>
+              <a:spcAft>
+                <a:spcPts val="400"/>
+              </a:spcAft>
+              <a:buNone/>
+              <a:defRPr sz="1750" b="0">
+                <a:solidFill>
+                  <a:srgbClr val="303437"/>
+                </a:solidFill>
+                <a:latin typeface="Noto Sans"/>
+              </a:defRPr>
+            </a:pPr>
+            <a:r>
+              <a:rPr sz="1750" b="0" lang="ja-JP" altLang="en-US">
+                <a:solidFill>
+                  <a:srgbClr val="303437"/>
+                </a:solidFill>
+                <a:latin typeface="Noto Sans"/>
+                <a:ea typeface="Noto Sans CJK JP"/>
+                <a:cs typeface="Noto Sans"/>
+              </a:rPr>
+              <a:t>11課題のJSONLと候補確率による評価形式を公開し、CC BY4.0の条件と変更履歴を示す。</a:t>
+            </a:r>
+          </a:p>
+          <a:p>
+            <a:pPr algn="l">
+              <a:lnSpc>
+                <a:spcPct val="114000"/>
+              </a:lnSpc>
+              <a:spcBef>
+                <a:spcPts val="0"/>
+              </a:spcBef>
+              <a:spcAft>
+                <a:spcPts val="0"/>
+              </a:spcAft>
+              <a:buNone/>
+              <a:defRPr sz="1050" b="0">
+                <a:solidFill>
+                  <a:srgbClr val="303437"/>
+                </a:solidFill>
+                <a:latin typeface="Noto Sans"/>
+              </a:defRPr>
+            </a:pPr>
+            <a:r>
+              <a:rPr sz="1050" b="0" lang="ja-JP" altLang="en-US">
+                <a:solidFill>
+                  <a:srgbClr val="626669"/>
+                </a:solidFill>
+                <a:latin typeface="Noto Sans"/>
+                <a:ea typeface="Noto Sans CJK JP"/>
+                <a:cs typeface="Noto Sans"/>
+                <a:hlinkClick r:id="rId3"/>
+              </a:rPr>
+              <a:t>https://github.com/inverse-scaling/prize/blob/main/data-release/README.md</a:t>
+            </a:r>
+          </a:p>
+        </p:txBody>
+      </p:sp>
+    </p:spTree>
+  </p:cSld>
+  <p:clrMapOvr>
+    <a:masterClrMapping/>
+  </p:clrMapOvr>
+</p:sld>
+</file>
+
 <file path=ppt/slides/slide5.xml><?xml version="1.0" encoding="utf-8"?>
 <p:sld xmlns:a="http://schemas.openxmlformats.org/drawingml/2006/main" xmlns:p="http://schemas.openxmlformats.org/presentationml/2006/main" xmlns:r="http://schemas.openxmlformats.org/officeDocument/2006/relationships">
   <p:cSld>
@@ -24589,38 +24509,38 @@
         </p:nvSpPr>
         <p:spPr>
           <a:xfrm>
-            <a:off x="548640" y="2506875"/>
-            <a:ext cx="8046720" cy="585216"/>
+            <a:off x="468172" y="650138"/>
+            <a:ext cx="8206740" cy="616305"/>
           </a:xfrm>
         </p:spPr>
         <p:txBody>
-          <a:bodyPr wrap="square" lIns="0" rIns="0" tIns="0" bIns="0" anchor="ctr">
+          <a:bodyPr wrap="square" lIns="0" rIns="0" tIns="0" bIns="0">
             <a:noAutofit/>
           </a:bodyPr>
           <a:lstStyle/>
           <a:p>
-            <a:pPr algn="ctr">
+            <a:pPr algn="l">
               <a:lnSpc>
                 <a:spcPct val="110000"/>
               </a:lnSpc>
               <a:buNone/>
-              <a:defRPr sz="3600" b="0">
-                <a:solidFill>
-                  <a:srgbClr val="303437"/>
-                </a:solidFill>
-                <a:latin typeface="Noto Sans"/>
-              </a:defRPr>
-            </a:pPr>
-            <a:r>
-              <a:rPr sz="3600" b="1" lang="ja-JP" altLang="en-US">
-                <a:solidFill>
-                  <a:srgbClr val="303437"/>
-                </a:solidFill>
-                <a:latin typeface="Noto Sans"/>
-                <a:ea typeface="Noto Sans CJK JP"/>
-                <a:cs typeface="Noto Sans"/>
-              </a:rPr>
-              <a:t>研究と参考文献</a:t>
+              <a:defRPr sz="2800" b="0">
+                <a:solidFill>
+                  <a:srgbClr val="303437"/>
+                </a:solidFill>
+                <a:latin typeface="Noto Sans"/>
+              </a:defRPr>
+            </a:pPr>
+            <a:r>
+              <a:rPr sz="2800" b="1" lang="ja-JP" altLang="en-US">
+                <a:solidFill>
+                  <a:srgbClr val="303437"/>
+                </a:solidFill>
+                <a:latin typeface="Noto Sans"/>
+                <a:ea typeface="Noto Sans CJK JP"/>
+                <a:cs typeface="Noto Sans"/>
+              </a:rPr>
+              <a:t>参考文献</a:t>
             </a:r>
           </a:p>
         </p:txBody>
@@ -24673,823 +24593,6 @@
           </a:p>
         </p:txBody>
       </p:sp>
-    </p:spTree>
-  </p:cSld>
-  <p:clrMapOvr>
-    <a:masterClrMapping/>
-  </p:clrMapOvr>
-</p:sld>
-</file>
-
-<file path=ppt/slides/slide51.xml><?xml version="1.0" encoding="utf-8"?>
-<p:sld xmlns:a="http://schemas.openxmlformats.org/drawingml/2006/main" xmlns:p="http://schemas.openxmlformats.org/presentationml/2006/main" xmlns:r="http://schemas.openxmlformats.org/officeDocument/2006/relationships">
-  <p:cSld>
-    <p:spTree>
-      <p:nvGrpSpPr>
-        <p:cNvPr id="1" name=""/>
-        <p:cNvGrpSpPr/>
-        <p:nvPr/>
-      </p:nvGrpSpPr>
-      <p:grpSpPr/>
-      <p:sp>
-        <p:nvSpPr>
-          <p:cNvPr id="2" name="Title 1"/>
-          <p:cNvSpPr>
-            <a:spLocks noGrp="1"/>
-          </p:cNvSpPr>
-          <p:nvPr>
-            <p:ph type="title"/>
-          </p:nvPr>
-        </p:nvSpPr>
-        <p:spPr>
-          <a:xfrm>
-            <a:off x="468172" y="650138"/>
-            <a:ext cx="8206740" cy="616305"/>
-          </a:xfrm>
-        </p:spPr>
-        <p:txBody>
-          <a:bodyPr wrap="square" lIns="0" rIns="0" tIns="0" bIns="0">
-            <a:noAutofit/>
-          </a:bodyPr>
-          <a:lstStyle/>
-          <a:p>
-            <a:pPr algn="l">
-              <a:lnSpc>
-                <a:spcPct val="110000"/>
-              </a:lnSpc>
-              <a:buNone/>
-              <a:defRPr sz="2800" b="0">
-                <a:solidFill>
-                  <a:srgbClr val="303437"/>
-                </a:solidFill>
-                <a:latin typeface="Noto Sans"/>
-              </a:defRPr>
-            </a:pPr>
-            <a:r>
-              <a:rPr sz="2450" b="1" lang="ja-JP" altLang="en-US">
-                <a:solidFill>
-                  <a:srgbClr val="303437"/>
-                </a:solidFill>
-                <a:latin typeface="Noto Sans"/>
-                <a:ea typeface="Noto Sans CJK JP"/>
-                <a:cs typeface="Noto Sans"/>
-              </a:rPr>
-              <a:t>Tomasz Korbakの課題が、指示と規則の衝突を示す</a:t>
-            </a:r>
-          </a:p>
-        </p:txBody>
-      </p:sp>
-      <p:sp>
-        <p:nvSpPr>
-          <p:cNvPr id="3" name="Text Placeholder 2"/>
-          <p:cNvSpPr>
-            <a:spLocks noGrp="1"/>
-          </p:cNvSpPr>
-          <p:nvPr>
-            <p:ph type="body" idx="1"/>
-          </p:nvPr>
-        </p:nvSpPr>
-        <p:spPr>
-          <a:xfrm>
-            <a:off x="594360" y="1463040"/>
-            <a:ext cx="7955279" cy="3044952"/>
-          </a:xfrm>
-        </p:spPr>
-        <p:txBody>
-          <a:bodyPr wrap="square" tIns="91440" bIns="91440">
-            <a:noAutofit/>
-          </a:bodyPr>
-          <a:lstStyle/>
-          <a:p>
-            <a:pPr marL="457200" indent="-355600">
-              <a:lnSpc>
-                <a:spcPts val="2499"/>
-              </a:lnSpc>
-              <a:spcAft>
-                <a:spcPts val="700"/>
-              </a:spcAft>
-              <a:buSzPct val="63333"/>
-              <a:buFont typeface="Noto Sans CJK JP"/>
-              <a:buChar char="●"/>
-              <a:defRPr sz="2100" b="0">
-                <a:solidFill>
-                  <a:srgbClr val="303437"/>
-                </a:solidFill>
-                <a:latin typeface="Noto Sans"/>
-              </a:defRPr>
-            </a:pPr>
-            <a:r>
-              <a:rPr sz="2100" b="0" lang="ja-JP" altLang="en-US">
-                <a:solidFill>
-                  <a:srgbClr val="303437"/>
-                </a:solidFill>
-                <a:latin typeface="Noto Sans"/>
-                <a:ea typeface="Noto Sans CJK JP"/>
-                <a:cs typeface="Noto Sans"/>
-              </a:rPr>
-              <a:t>提出者はTomasz Korbak。Inverse Scaling Prizeの第2回受賞課題として、明示的な指示より暗黙の繰返しを優先する現象を扱う。</a:t>
-            </a:r>
-          </a:p>
-          <a:p>
-            <a:pPr marL="457200" indent="-355600">
-              <a:lnSpc>
-                <a:spcPts val="2499"/>
-              </a:lnSpc>
-              <a:spcAft>
-                <a:spcPts val="700"/>
-              </a:spcAft>
-              <a:buSzPct val="63333"/>
-              <a:buFont typeface="Noto Sans CJK JP"/>
-              <a:buChar char="●"/>
-              <a:defRPr sz="2100" b="0">
-                <a:solidFill>
-                  <a:srgbClr val="303437"/>
-                </a:solidFill>
-                <a:latin typeface="Noto Sans"/>
-              </a:defRPr>
-            </a:pPr>
-            <a:r>
-              <a:rPr sz="2100" b="0" lang="ja-JP" altLang="en-US">
-                <a:solidFill>
-                  <a:srgbClr val="303437"/>
-                </a:solidFill>
-                <a:latin typeface="Noto Sans"/>
-                <a:ea typeface="Noto Sans CJK JP"/>
-                <a:cs typeface="Noto Sans"/>
-              </a:rPr>
-              <a:t>McKenzieらの2023年TMLR論文は、11受賞課題を4つの原因仮説で整理する。本課題はDistractor Taskの一例。</a:t>
-            </a:r>
-          </a:p>
-          <a:p>
-            <a:pPr marL="457200" indent="-355600">
-              <a:lnSpc>
-                <a:spcPts val="2499"/>
-              </a:lnSpc>
-              <a:spcAft>
-                <a:spcPts val="0"/>
-              </a:spcAft>
-              <a:buSzPct val="63333"/>
-              <a:buFont typeface="Noto Sans CJK JP"/>
-              <a:buChar char="●"/>
-              <a:defRPr sz="2100" b="0">
-                <a:solidFill>
-                  <a:srgbClr val="303437"/>
-                </a:solidFill>
-                <a:latin typeface="Noto Sans"/>
-              </a:defRPr>
-            </a:pPr>
-            <a:r>
-              <a:rPr sz="2100" b="0" lang="ja-JP" altLang="en-US">
-                <a:solidFill>
-                  <a:srgbClr val="303437"/>
-                </a:solidFill>
-                <a:latin typeface="Noto Sans"/>
-                <a:ea typeface="Noto Sans CJK JP"/>
-                <a:cs typeface="Noto Sans"/>
-              </a:rPr>
-              <a:t>研究では人が選ぶ回答はデータの正解とよく一致する一方、モデルの規模や例示数によって違う傾向が現れることを報告する。</a:t>
-            </a:r>
-          </a:p>
-        </p:txBody>
-      </p:sp>
-      <p:sp>
-        <p:nvSpPr>
-          <p:cNvPr id="4" name="Title 3"/>
-          <p:cNvSpPr>
-            <a:spLocks noGrp="1"/>
-          </p:cNvSpPr>
-          <p:nvPr>
-            <p:ph type="title" idx="2"/>
-          </p:nvPr>
-        </p:nvSpPr>
-        <p:spPr>
-          <a:xfrm>
-            <a:off x="75895" y="0"/>
-            <a:ext cx="8115300" cy="480060"/>
-          </a:xfrm>
-        </p:spPr>
-        <p:txBody>
-          <a:bodyPr wrap="square" lIns="0" rIns="0" tIns="0" bIns="0" anchor="ctr">
-            <a:noAutofit/>
-          </a:bodyPr>
-          <a:lstStyle/>
-          <a:p>
-            <a:pPr algn="l">
-              <a:lnSpc>
-                <a:spcPct val="110000"/>
-              </a:lnSpc>
-              <a:buNone/>
-              <a:defRPr sz="1400" b="0">
-                <a:solidFill>
-                  <a:srgbClr val="303437"/>
-                </a:solidFill>
-                <a:latin typeface="Noto Sans"/>
-              </a:defRPr>
-            </a:pPr>
-            <a:r>
-              <a:rPr sz="1400" b="1" lang="ja-JP" altLang="en-US">
-                <a:solidFill>
-                  <a:srgbClr val="FFFEF8"/>
-                </a:solidFill>
-                <a:latin typeface="Noto Sans"/>
-                <a:ea typeface="Noto Sans CJK JP"/>
-                <a:cs typeface="Noto Sans"/>
-              </a:rPr>
-              <a:t>Appendix: 3. 研究と参考文献</a:t>
-            </a:r>
-          </a:p>
-        </p:txBody>
-      </p:sp>
-      <p:sp>
-        <p:nvSpPr>
-          <p:cNvPr id="5" name="sources"/>
-          <p:cNvSpPr txBox="1"/>
-          <p:nvPr/>
-        </p:nvSpPr>
-        <p:spPr>
-          <a:xfrm>
-            <a:off x="502920" y="4699000"/>
-            <a:ext cx="8183879" cy="431800"/>
-          </a:xfrm>
-          <a:prstGeom prst="rect">
-            <a:avLst/>
-          </a:prstGeom>
-          <a:noFill/>
-        </p:spPr>
-        <p:txBody>
-          <a:bodyPr wrap="square" lIns="0" rIns="0" tIns="0" bIns="0">
-            <a:noAutofit/>
-          </a:bodyPr>
-          <a:lstStyle/>
-          <a:p>
-            <a:pPr algn="l">
-              <a:lnSpc>
-                <a:spcPts val="1200"/>
-              </a:lnSpc>
-              <a:spcBef>
-                <a:spcPts val="0"/>
-              </a:spcBef>
-              <a:spcAft>
-                <a:spcPts val="0"/>
-              </a:spcAft>
-              <a:buNone/>
-              <a:defRPr sz="810" b="0">
-                <a:solidFill>
-                  <a:srgbClr val="303437"/>
-                </a:solidFill>
-                <a:latin typeface="Noto Sans"/>
-              </a:defRPr>
-            </a:pPr>
-            <a:r>
-              <a:rPr sz="830">
-                <a:latin typeface="Noto Sans CJK JP"/>
-              </a:rPr>
-              <a:t>[1] McKenzie et al. (2023). Inverse Scaling: When Bigger Isn’t Better. TMLR.</a:t>
-            </a:r>
-          </a:p>
-          <a:p>
-            <a:pPr>
-              <a:spcBef>
-                <a:spcPts val="0"/>
-              </a:spcBef>
-              <a:spcAft>
-                <a:spcPts val="0"/>
-              </a:spcAft>
-            </a:pPr>
-            <a:r>
-              <a:rPr sz="830">
-                <a:latin typeface="Noto Sans CJK JP"/>
-                <a:hlinkClick r:id="rId2"/>
-              </a:rPr>
-              <a:t>https://arxiv.org/abs/2306.09479</a:t>
-            </a:r>
-          </a:p>
-        </p:txBody>
-      </p:sp>
-    </p:spTree>
-  </p:cSld>
-  <p:clrMapOvr>
-    <a:masterClrMapping/>
-  </p:clrMapOvr>
-</p:sld>
-</file>
-
-<file path=ppt/slides/slide52.xml><?xml version="1.0" encoding="utf-8"?>
-<p:sld xmlns:a="http://schemas.openxmlformats.org/drawingml/2006/main" xmlns:p="http://schemas.openxmlformats.org/presentationml/2006/main" xmlns:r="http://schemas.openxmlformats.org/officeDocument/2006/relationships">
-  <p:cSld>
-    <p:spTree>
-      <p:nvGrpSpPr>
-        <p:cNvPr id="1" name=""/>
-        <p:cNvGrpSpPr/>
-        <p:nvPr/>
-      </p:nvGrpSpPr>
-      <p:grpSpPr/>
-      <p:sp>
-        <p:nvSpPr>
-          <p:cNvPr id="2" name="Title 1"/>
-          <p:cNvSpPr>
-            <a:spLocks noGrp="1"/>
-          </p:cNvSpPr>
-          <p:nvPr>
-            <p:ph type="title"/>
-          </p:nvPr>
-        </p:nvSpPr>
-        <p:spPr>
-          <a:xfrm>
-            <a:off x="468172" y="650138"/>
-            <a:ext cx="8206740" cy="616305"/>
-          </a:xfrm>
-        </p:spPr>
-        <p:txBody>
-          <a:bodyPr wrap="square" lIns="0" rIns="0" tIns="0" bIns="0">
-            <a:noAutofit/>
-          </a:bodyPr>
-          <a:lstStyle/>
-          <a:p>
-            <a:pPr algn="l">
-              <a:lnSpc>
-                <a:spcPct val="110000"/>
-              </a:lnSpc>
-              <a:buNone/>
-              <a:defRPr sz="2800" b="0">
-                <a:solidFill>
-                  <a:srgbClr val="303437"/>
-                </a:solidFill>
-                <a:latin typeface="Noto Sans"/>
-              </a:defRPr>
-            </a:pPr>
-            <a:r>
-              <a:rPr sz="2800" b="1" lang="ja-JP" altLang="en-US">
-                <a:solidFill>
-                  <a:srgbClr val="303437"/>
-                </a:solidFill>
-                <a:latin typeface="Noto Sans"/>
-                <a:ea typeface="Noto Sans CJK JP"/>
-                <a:cs typeface="Noto Sans"/>
-              </a:rPr>
-              <a:t>参考文献</a:t>
-            </a:r>
-          </a:p>
-        </p:txBody>
-      </p:sp>
-      <p:sp>
-        <p:nvSpPr>
-          <p:cNvPr id="3" name="Title 2"/>
-          <p:cNvSpPr>
-            <a:spLocks noGrp="1"/>
-          </p:cNvSpPr>
-          <p:nvPr>
-            <p:ph type="title" idx="2"/>
-          </p:nvPr>
-        </p:nvSpPr>
-        <p:spPr>
-          <a:xfrm>
-            <a:off x="75895" y="0"/>
-            <a:ext cx="8115300" cy="480060"/>
-          </a:xfrm>
-        </p:spPr>
-        <p:txBody>
-          <a:bodyPr wrap="square" lIns="0" rIns="0" tIns="0" bIns="0" anchor="ctr">
-            <a:noAutofit/>
-          </a:bodyPr>
-          <a:lstStyle/>
-          <a:p>
-            <a:pPr algn="l">
-              <a:lnSpc>
-                <a:spcPct val="110000"/>
-              </a:lnSpc>
-              <a:buNone/>
-              <a:defRPr sz="1400" b="0">
-                <a:solidFill>
-                  <a:srgbClr val="303437"/>
-                </a:solidFill>
-                <a:latin typeface="Noto Sans"/>
-              </a:defRPr>
-            </a:pPr>
-            <a:r>
-              <a:rPr sz="1400" b="1" lang="ja-JP" altLang="en-US">
-                <a:solidFill>
-                  <a:srgbClr val="FFFEF8"/>
-                </a:solidFill>
-                <a:latin typeface="Noto Sans"/>
-                <a:ea typeface="Noto Sans CJK JP"/>
-                <a:cs typeface="Noto Sans"/>
-              </a:rPr>
-              <a:t>Appendix: 3. 研究と参考文献</a:t>
-            </a:r>
-          </a:p>
-        </p:txBody>
-      </p:sp>
-      <p:sp>
-        <p:nvSpPr>
-          <p:cNvPr id="4" name="文献 1: Inverse Scaling: When Bigger Isn’t Better"/>
-          <p:cNvSpPr txBox="1"/>
-          <p:nvPr/>
-        </p:nvSpPr>
-        <p:spPr>
-          <a:xfrm>
-            <a:off x="548640" y="1417320"/>
-            <a:ext cx="8046720" cy="1536574"/>
-          </a:xfrm>
-          <a:prstGeom prst="rect">
-            <a:avLst/>
-          </a:prstGeom>
-          <a:noFill/>
-        </p:spPr>
-        <p:txBody>
-          <a:bodyPr wrap="square" lIns="0" rIns="0" tIns="0" bIns="0">
-            <a:noAutofit/>
-          </a:bodyPr>
-          <a:lstStyle/>
-          <a:p>
-            <a:pPr algn="l">
-              <a:lnSpc>
-                <a:spcPct val="114000"/>
-              </a:lnSpc>
-              <a:spcBef>
-                <a:spcPts val="0"/>
-              </a:spcBef>
-              <a:spcAft>
-                <a:spcPts val="400"/>
-              </a:spcAft>
-              <a:buNone/>
-              <a:defRPr sz="1800" b="0">
-                <a:solidFill>
-                  <a:srgbClr val="303437"/>
-                </a:solidFill>
-                <a:latin typeface="Noto Sans"/>
-              </a:defRPr>
-            </a:pPr>
-            <a:r>
-              <a:rPr sz="1800" b="1" lang="ja-JP" altLang="en-US">
-                <a:solidFill>
-                  <a:srgbClr val="303437"/>
-                </a:solidFill>
-                <a:latin typeface="Noto Sans"/>
-                <a:ea typeface="Noto Sans CJK JP"/>
-                <a:cs typeface="Noto Sans"/>
-              </a:rPr>
-              <a:t>Inverse Scaling: When Bigger Isn’t Better</a:t>
-            </a:r>
-          </a:p>
-          <a:p>
-            <a:pPr algn="l">
-              <a:lnSpc>
-                <a:spcPct val="114000"/>
-              </a:lnSpc>
-              <a:spcBef>
-                <a:spcPts val="0"/>
-              </a:spcBef>
-              <a:spcAft>
-                <a:spcPts val="500"/>
-              </a:spcAft>
-              <a:buNone/>
-              <a:defRPr sz="1250" b="0">
-                <a:solidFill>
-                  <a:srgbClr val="303437"/>
-                </a:solidFill>
-                <a:latin typeface="Noto Sans"/>
-              </a:defRPr>
-            </a:pPr>
-            <a:r>
-              <a:rPr sz="1250" b="0" lang="ja-JP" altLang="en-US">
-                <a:solidFill>
-                  <a:srgbClr val="626669"/>
-                </a:solidFill>
-                <a:latin typeface="Noto Sans"/>
-                <a:ea typeface="Noto Sans CJK JP"/>
-                <a:cs typeface="Noto Sans"/>
-              </a:rPr>
-              <a:t>Ian R. McKenzie et al. (2023). Transactions on Machine Learning Research. arXiv v2:2024.</a:t>
-            </a:r>
-          </a:p>
-          <a:p>
-            <a:pPr algn="l">
-              <a:lnSpc>
-                <a:spcPct val="114000"/>
-              </a:lnSpc>
-              <a:spcBef>
-                <a:spcPts val="0"/>
-              </a:spcBef>
-              <a:spcAft>
-                <a:spcPts val="400"/>
-              </a:spcAft>
-              <a:buNone/>
-              <a:defRPr sz="1750" b="0">
-                <a:solidFill>
-                  <a:srgbClr val="303437"/>
-                </a:solidFill>
-                <a:latin typeface="Noto Sans"/>
-              </a:defRPr>
-            </a:pPr>
-            <a:r>
-              <a:rPr sz="1750" b="0" lang="ja-JP" altLang="en-US">
-                <a:solidFill>
-                  <a:srgbClr val="303437"/>
-                </a:solidFill>
-                <a:latin typeface="Noto Sans"/>
-                <a:ea typeface="Noto Sans CJK JP"/>
-                <a:cs typeface="Noto Sans"/>
-              </a:rPr>
-              <a:t>11受賞課題を評価し、交互列の完遂が指示への切替を妨げるという仮説と、規模・例示数の影響を報告する。</a:t>
-            </a:r>
-          </a:p>
-          <a:p>
-            <a:pPr algn="l">
-              <a:lnSpc>
-                <a:spcPct val="114000"/>
-              </a:lnSpc>
-              <a:spcBef>
-                <a:spcPts val="0"/>
-              </a:spcBef>
-              <a:spcAft>
-                <a:spcPts val="0"/>
-              </a:spcAft>
-              <a:buNone/>
-              <a:defRPr sz="1050" b="0">
-                <a:solidFill>
-                  <a:srgbClr val="303437"/>
-                </a:solidFill>
-                <a:latin typeface="Noto Sans"/>
-              </a:defRPr>
-            </a:pPr>
-            <a:r>
-              <a:rPr sz="1050" b="0" lang="ja-JP" altLang="en-US">
-                <a:solidFill>
-                  <a:srgbClr val="626669"/>
-                </a:solidFill>
-                <a:latin typeface="Noto Sans"/>
-                <a:ea typeface="Noto Sans CJK JP"/>
-                <a:cs typeface="Noto Sans"/>
-                <a:hlinkClick r:id="rId2"/>
-              </a:rPr>
-              <a:t>https://arxiv.org/abs/2306.09479</a:t>
-            </a:r>
-          </a:p>
-        </p:txBody>
-      </p:sp>
-      <p:sp>
-        <p:nvSpPr>
-          <p:cNvPr id="5" name="文献 2: Inverse Scaling Prize — Data release"/>
-          <p:cNvSpPr txBox="1"/>
-          <p:nvPr/>
-        </p:nvSpPr>
-        <p:spPr>
-          <a:xfrm>
-            <a:off x="548640" y="2987548"/>
-            <a:ext cx="8046720" cy="1536663"/>
-          </a:xfrm>
-          <a:prstGeom prst="rect">
-            <a:avLst/>
-          </a:prstGeom>
-          <a:noFill/>
-        </p:spPr>
-        <p:txBody>
-          <a:bodyPr wrap="square" lIns="0" rIns="0" tIns="0" bIns="0">
-            <a:noAutofit/>
-          </a:bodyPr>
-          <a:lstStyle/>
-          <a:p>
-            <a:pPr algn="l">
-              <a:lnSpc>
-                <a:spcPct val="114000"/>
-              </a:lnSpc>
-              <a:spcBef>
-                <a:spcPts val="0"/>
-              </a:spcBef>
-              <a:spcAft>
-                <a:spcPts val="400"/>
-              </a:spcAft>
-              <a:buNone/>
-              <a:defRPr sz="1800" b="0">
-                <a:solidFill>
-                  <a:srgbClr val="303437"/>
-                </a:solidFill>
-                <a:latin typeface="Noto Sans"/>
-              </a:defRPr>
-            </a:pPr>
-            <a:r>
-              <a:rPr sz="1800" b="1" lang="ja-JP" altLang="en-US">
-                <a:solidFill>
-                  <a:srgbClr val="303437"/>
-                </a:solidFill>
-                <a:latin typeface="Noto Sans"/>
-                <a:ea typeface="Noto Sans CJK JP"/>
-                <a:cs typeface="Noto Sans"/>
-              </a:rPr>
-              <a:t>Inverse Scaling Prize — Data release</a:t>
-            </a:r>
-          </a:p>
-          <a:p>
-            <a:pPr algn="l">
-              <a:lnSpc>
-                <a:spcPct val="114000"/>
-              </a:lnSpc>
-              <a:spcBef>
-                <a:spcPts val="0"/>
-              </a:spcBef>
-              <a:spcAft>
-                <a:spcPts val="500"/>
-              </a:spcAft>
-              <a:buNone/>
-              <a:defRPr sz="1250" b="0">
-                <a:solidFill>
-                  <a:srgbClr val="303437"/>
-                </a:solidFill>
-                <a:latin typeface="Noto Sans"/>
-              </a:defRPr>
-            </a:pPr>
-            <a:r>
-              <a:rPr sz="1250" b="0" lang="ja-JP" altLang="en-US">
-                <a:solidFill>
-                  <a:srgbClr val="626669"/>
-                </a:solidFill>
-                <a:latin typeface="Noto Sans"/>
-                <a:ea typeface="Noto Sans CJK JP"/>
-                <a:cs typeface="Noto Sans"/>
-              </a:rPr>
-              <a:t>Inverse Scaling Prize. 2023年3月公開。課題提出者Tomasz Korbak。</a:t>
-            </a:r>
-          </a:p>
-          <a:p>
-            <a:pPr algn="l">
-              <a:lnSpc>
-                <a:spcPct val="114000"/>
-              </a:lnSpc>
-              <a:spcBef>
-                <a:spcPts val="0"/>
-              </a:spcBef>
-              <a:spcAft>
-                <a:spcPts val="400"/>
-              </a:spcAft>
-              <a:buNone/>
-              <a:defRPr sz="1750" b="0">
-                <a:solidFill>
-                  <a:srgbClr val="303437"/>
-                </a:solidFill>
-                <a:latin typeface="Noto Sans"/>
-              </a:defRPr>
-            </a:pPr>
-            <a:r>
-              <a:rPr sz="1750" b="0" lang="ja-JP" altLang="en-US">
-                <a:solidFill>
-                  <a:srgbClr val="303437"/>
-                </a:solidFill>
-                <a:latin typeface="Noto Sans"/>
-                <a:ea typeface="Noto Sans CJK JP"/>
-                <a:cs typeface="Noto Sans"/>
-              </a:rPr>
-              <a:t>11課題のJSONLと候補確率による評価形式を公開し、CC BY4.0の条件と変更履歴を示す。</a:t>
-            </a:r>
-          </a:p>
-          <a:p>
-            <a:pPr algn="l">
-              <a:lnSpc>
-                <a:spcPct val="114000"/>
-              </a:lnSpc>
-              <a:spcBef>
-                <a:spcPts val="0"/>
-              </a:spcBef>
-              <a:spcAft>
-                <a:spcPts val="0"/>
-              </a:spcAft>
-              <a:buNone/>
-              <a:defRPr sz="1050" b="0">
-                <a:solidFill>
-                  <a:srgbClr val="303437"/>
-                </a:solidFill>
-                <a:latin typeface="Noto Sans"/>
-              </a:defRPr>
-            </a:pPr>
-            <a:r>
-              <a:rPr sz="1050" b="0" lang="ja-JP" altLang="en-US">
-                <a:solidFill>
-                  <a:srgbClr val="626669"/>
-                </a:solidFill>
-                <a:latin typeface="Noto Sans"/>
-                <a:ea typeface="Noto Sans CJK JP"/>
-                <a:cs typeface="Noto Sans"/>
-                <a:hlinkClick r:id="rId3"/>
-              </a:rPr>
-              <a:t>https://github.com/inverse-scaling/prize/blob/main/data-release/README.md</a:t>
-            </a:r>
-          </a:p>
-        </p:txBody>
-      </p:sp>
-    </p:spTree>
-  </p:cSld>
-  <p:clrMapOvr>
-    <a:masterClrMapping/>
-  </p:clrMapOvr>
-</p:sld>
-</file>
-
-<file path=ppt/slides/slide53.xml><?xml version="1.0" encoding="utf-8"?>
-<p:sld xmlns:a="http://schemas.openxmlformats.org/drawingml/2006/main" xmlns:p="http://schemas.openxmlformats.org/presentationml/2006/main" xmlns:r="http://schemas.openxmlformats.org/officeDocument/2006/relationships">
-  <p:cSld>
-    <p:spTree>
-      <p:nvGrpSpPr>
-        <p:cNvPr id="1" name=""/>
-        <p:cNvGrpSpPr/>
-        <p:nvPr/>
-      </p:nvGrpSpPr>
-      <p:grpSpPr/>
-      <p:sp>
-        <p:nvSpPr>
-          <p:cNvPr id="2" name="Title 1"/>
-          <p:cNvSpPr>
-            <a:spLocks noGrp="1"/>
-          </p:cNvSpPr>
-          <p:nvPr>
-            <p:ph type="title"/>
-          </p:nvPr>
-        </p:nvSpPr>
-        <p:spPr>
-          <a:xfrm>
-            <a:off x="468172" y="650138"/>
-            <a:ext cx="8206740" cy="616305"/>
-          </a:xfrm>
-        </p:spPr>
-        <p:txBody>
-          <a:bodyPr wrap="square" lIns="0" rIns="0" tIns="0" bIns="0">
-            <a:noAutofit/>
-          </a:bodyPr>
-          <a:lstStyle/>
-          <a:p>
-            <a:pPr algn="l">
-              <a:lnSpc>
-                <a:spcPct val="110000"/>
-              </a:lnSpc>
-              <a:buNone/>
-              <a:defRPr sz="2800" b="0">
-                <a:solidFill>
-                  <a:srgbClr val="303437"/>
-                </a:solidFill>
-                <a:latin typeface="Noto Sans"/>
-              </a:defRPr>
-            </a:pPr>
-            <a:r>
-              <a:rPr sz="2800" b="1" lang="ja-JP" altLang="en-US">
-                <a:solidFill>
-                  <a:srgbClr val="303437"/>
-                </a:solidFill>
-                <a:latin typeface="Noto Sans"/>
-                <a:ea typeface="Noto Sans CJK JP"/>
-                <a:cs typeface="Noto Sans"/>
-              </a:rPr>
-              <a:t>参考文献</a:t>
-            </a:r>
-          </a:p>
-        </p:txBody>
-      </p:sp>
-      <p:sp>
-        <p:nvSpPr>
-          <p:cNvPr id="3" name="Title 2"/>
-          <p:cNvSpPr>
-            <a:spLocks noGrp="1"/>
-          </p:cNvSpPr>
-          <p:nvPr>
-            <p:ph type="title" idx="2"/>
-          </p:nvPr>
-        </p:nvSpPr>
-        <p:spPr>
-          <a:xfrm>
-            <a:off x="75895" y="0"/>
-            <a:ext cx="8115300" cy="480060"/>
-          </a:xfrm>
-        </p:spPr>
-        <p:txBody>
-          <a:bodyPr wrap="square" lIns="0" rIns="0" tIns="0" bIns="0" anchor="ctr">
-            <a:noAutofit/>
-          </a:bodyPr>
-          <a:lstStyle/>
-          <a:p>
-            <a:pPr algn="l">
-              <a:lnSpc>
-                <a:spcPct val="110000"/>
-              </a:lnSpc>
-              <a:buNone/>
-              <a:defRPr sz="1400" b="0">
-                <a:solidFill>
-                  <a:srgbClr val="303437"/>
-                </a:solidFill>
-                <a:latin typeface="Noto Sans"/>
-              </a:defRPr>
-            </a:pPr>
-            <a:r>
-              <a:rPr sz="1400" b="1" lang="ja-JP" altLang="en-US">
-                <a:solidFill>
-                  <a:srgbClr val="FFFEF8"/>
-                </a:solidFill>
-                <a:latin typeface="Noto Sans"/>
-                <a:ea typeface="Noto Sans CJK JP"/>
-                <a:cs typeface="Noto Sans"/>
-              </a:rPr>
-              <a:t>Appendix: 3. 研究と参考文献</a:t>
-            </a:r>
-          </a:p>
-        </p:txBody>
-      </p:sp>
       <p:sp>
         <p:nvSpPr>
           <p:cNvPr id="4" name="文献 1: Inverse Scaling Prize: Second Round Winners"/>
@@ -25640,14 +24743,14 @@
       </p:sp>
       <p:sp>
         <p:nvSpPr>
-          <p:cNvPr id="5" name="文献 2: CLEVA: Chinese Language Models EVAluation Platform"/>
+          <p:cNvPr id="5" name="文献 2: Attribution 4.0 International"/>
           <p:cNvSpPr txBox="1"/>
           <p:nvPr/>
         </p:nvSpPr>
         <p:spPr>
           <a:xfrm>
             <a:off x="548640" y="2987548"/>
-            <a:ext cx="8046720" cy="1233184"/>
+            <a:ext cx="8046720" cy="1549400"/>
           </a:xfrm>
           <a:prstGeom prst="rect">
             <a:avLst/>
@@ -25687,7 +24790,7 @@
                 <a:ea typeface="Noto Sans CJK JP"/>
                 <a:cs typeface="Noto Sans"/>
               </a:rPr>
-              <a:t>CLEVA: Chinese Language Models EVAluation Platform</a:t>
+              <a:t>Attribution 4.0 International (CC BY 4.0)</a:t>
             </a:r>
           </a:p>
           <a:p>
@@ -25718,7 +24821,7 @@
                 <a:ea typeface="Noto Sans CJK JP"/>
                 <a:cs typeface="Noto Sans"/>
               </a:rPr>
-              <a:t>Yanyang Li et al. (2023). EMNLP System Demonstrations, pp.186–217.</a:t>
+              <a:t>Creative Commons (n.d.). 参照2026-10-18。</a:t>
             </a:r>
           </a:p>
           <a:p>
@@ -25749,417 +24852,7 @@
                 <a:ea typeface="Noto Sans CJK JP"/>
                 <a:cs typeface="Noto Sans"/>
               </a:rPr>
-              <a:t>中国語モデル評価の基盤を提案し、本課題を指示追従の素材として採用する。</a:t>
-            </a:r>
-          </a:p>
-          <a:p>
-            <a:pPr algn="l">
-              <a:lnSpc>
-                <a:spcPct val="114000"/>
-              </a:lnSpc>
-              <a:spcBef>
-                <a:spcPts val="0"/>
-              </a:spcBef>
-              <a:spcAft>
-                <a:spcPts val="0"/>
-              </a:spcAft>
-              <a:buNone/>
-              <a:defRPr sz="1050" b="0">
-                <a:solidFill>
-                  <a:srgbClr val="303437"/>
-                </a:solidFill>
-                <a:latin typeface="Noto Sans"/>
-              </a:defRPr>
-            </a:pPr>
-            <a:r>
-              <a:rPr sz="1050" b="0" lang="ja-JP" altLang="en-US">
-                <a:solidFill>
-                  <a:srgbClr val="626669"/>
-                </a:solidFill>
-                <a:latin typeface="Noto Sans"/>
-                <a:ea typeface="Noto Sans CJK JP"/>
-                <a:cs typeface="Noto Sans"/>
-                <a:hlinkClick r:id="rId3"/>
-              </a:rPr>
-              <a:t>https://aclanthology.org/2023.emnlp-demo.17/</a:t>
-            </a:r>
-          </a:p>
-        </p:txBody>
-      </p:sp>
-    </p:spTree>
-  </p:cSld>
-  <p:clrMapOvr>
-    <a:masterClrMapping/>
-  </p:clrMapOvr>
-</p:sld>
-</file>
-
-<file path=ppt/slides/slide54.xml><?xml version="1.0" encoding="utf-8"?>
-<p:sld xmlns:a="http://schemas.openxmlformats.org/drawingml/2006/main" xmlns:p="http://schemas.openxmlformats.org/presentationml/2006/main" xmlns:r="http://schemas.openxmlformats.org/officeDocument/2006/relationships">
-  <p:cSld>
-    <p:spTree>
-      <p:nvGrpSpPr>
-        <p:cNvPr id="1" name=""/>
-        <p:cNvGrpSpPr/>
-        <p:nvPr/>
-      </p:nvGrpSpPr>
-      <p:grpSpPr/>
-      <p:sp>
-        <p:nvSpPr>
-          <p:cNvPr id="2" name="Title 1"/>
-          <p:cNvSpPr>
-            <a:spLocks noGrp="1"/>
-          </p:cNvSpPr>
-          <p:nvPr>
-            <p:ph type="title"/>
-          </p:nvPr>
-        </p:nvSpPr>
-        <p:spPr>
-          <a:xfrm>
-            <a:off x="468172" y="650138"/>
-            <a:ext cx="8206740" cy="616305"/>
-          </a:xfrm>
-        </p:spPr>
-        <p:txBody>
-          <a:bodyPr wrap="square" lIns="0" rIns="0" tIns="0" bIns="0">
-            <a:noAutofit/>
-          </a:bodyPr>
-          <a:lstStyle/>
-          <a:p>
-            <a:pPr algn="l">
-              <a:lnSpc>
-                <a:spcPct val="110000"/>
-              </a:lnSpc>
-              <a:buNone/>
-              <a:defRPr sz="2800" b="0">
-                <a:solidFill>
-                  <a:srgbClr val="303437"/>
-                </a:solidFill>
-                <a:latin typeface="Noto Sans"/>
-              </a:defRPr>
-            </a:pPr>
-            <a:r>
-              <a:rPr sz="2800" b="1" lang="ja-JP" altLang="en-US">
-                <a:solidFill>
-                  <a:srgbClr val="303437"/>
-                </a:solidFill>
-                <a:latin typeface="Noto Sans"/>
-                <a:ea typeface="Noto Sans CJK JP"/>
-                <a:cs typeface="Noto Sans"/>
-              </a:rPr>
-              <a:t>参考文献</a:t>
-            </a:r>
-          </a:p>
-        </p:txBody>
-      </p:sp>
-      <p:sp>
-        <p:nvSpPr>
-          <p:cNvPr id="3" name="Title 2"/>
-          <p:cNvSpPr>
-            <a:spLocks noGrp="1"/>
-          </p:cNvSpPr>
-          <p:nvPr>
-            <p:ph type="title" idx="2"/>
-          </p:nvPr>
-        </p:nvSpPr>
-        <p:spPr>
-          <a:xfrm>
-            <a:off x="75895" y="0"/>
-            <a:ext cx="8115300" cy="480060"/>
-          </a:xfrm>
-        </p:spPr>
-        <p:txBody>
-          <a:bodyPr wrap="square" lIns="0" rIns="0" tIns="0" bIns="0" anchor="ctr">
-            <a:noAutofit/>
-          </a:bodyPr>
-          <a:lstStyle/>
-          <a:p>
-            <a:pPr algn="l">
-              <a:lnSpc>
-                <a:spcPct val="110000"/>
-              </a:lnSpc>
-              <a:buNone/>
-              <a:defRPr sz="1400" b="0">
-                <a:solidFill>
-                  <a:srgbClr val="303437"/>
-                </a:solidFill>
-                <a:latin typeface="Noto Sans"/>
-              </a:defRPr>
-            </a:pPr>
-            <a:r>
-              <a:rPr sz="1400" b="1" lang="ja-JP" altLang="en-US">
-                <a:solidFill>
-                  <a:srgbClr val="FFFEF8"/>
-                </a:solidFill>
-                <a:latin typeface="Noto Sans"/>
-                <a:ea typeface="Noto Sans CJK JP"/>
-                <a:cs typeface="Noto Sans"/>
-              </a:rPr>
-              <a:t>Appendix: 3. 研究と参考文献</a:t>
-            </a:r>
-          </a:p>
-        </p:txBody>
-      </p:sp>
-      <p:sp>
-        <p:nvSpPr>
-          <p:cNvPr id="4" name="文献 1: CLEVAInstructionFollowingScenario"/>
-          <p:cNvSpPr txBox="1"/>
-          <p:nvPr/>
-        </p:nvSpPr>
-        <p:spPr>
-          <a:xfrm>
-            <a:off x="548640" y="1417320"/>
-            <a:ext cx="8046720" cy="1536574"/>
-          </a:xfrm>
-          <a:prstGeom prst="rect">
-            <a:avLst/>
-          </a:prstGeom>
-          <a:noFill/>
-        </p:spPr>
-        <p:txBody>
-          <a:bodyPr wrap="square" lIns="0" rIns="0" tIns="0" bIns="0">
-            <a:noAutofit/>
-          </a:bodyPr>
-          <a:lstStyle/>
-          <a:p>
-            <a:pPr algn="l">
-              <a:lnSpc>
-                <a:spcPct val="114000"/>
-              </a:lnSpc>
-              <a:spcBef>
-                <a:spcPts val="0"/>
-              </a:spcBef>
-              <a:spcAft>
-                <a:spcPts val="400"/>
-              </a:spcAft>
-              <a:buNone/>
-              <a:defRPr sz="1800" b="0">
-                <a:solidFill>
-                  <a:srgbClr val="303437"/>
-                </a:solidFill>
-                <a:latin typeface="Noto Sans"/>
-              </a:defRPr>
-            </a:pPr>
-            <a:r>
-              <a:rPr sz="1800" b="1" lang="ja-JP" altLang="en-US">
-                <a:solidFill>
-                  <a:srgbClr val="303437"/>
-                </a:solidFill>
-                <a:latin typeface="Noto Sans"/>
-                <a:ea typeface="Noto Sans CJK JP"/>
-                <a:cs typeface="Noto Sans"/>
-              </a:rPr>
-              <a:t>CLEVAInstructionFollowingScenario</a:t>
-            </a:r>
-          </a:p>
-          <a:p>
-            <a:pPr algn="l">
-              <a:lnSpc>
-                <a:spcPct val="114000"/>
-              </a:lnSpc>
-              <a:spcBef>
-                <a:spcPts val="0"/>
-              </a:spcBef>
-              <a:spcAft>
-                <a:spcPts val="500"/>
-              </a:spcAft>
-              <a:buNone/>
-              <a:defRPr sz="1250" b="0">
-                <a:solidFill>
-                  <a:srgbClr val="303437"/>
-                </a:solidFill>
-                <a:latin typeface="Noto Sans"/>
-              </a:defRPr>
-            </a:pPr>
-            <a:r>
-              <a:rPr sz="1250" b="0" lang="ja-JP" altLang="en-US">
-                <a:solidFill>
-                  <a:srgbClr val="626669"/>
-                </a:solidFill>
-                <a:latin typeface="Noto Sans"/>
-                <a:ea typeface="Noto Sans CJK JP"/>
-                <a:cs typeface="Noto Sans"/>
-              </a:rPr>
-              <a:t>Stanford CRFM (2023). HELM v0.4.0、公式Python実装。</a:t>
-            </a:r>
-          </a:p>
-          <a:p>
-            <a:pPr algn="l">
-              <a:lnSpc>
-                <a:spcPct val="114000"/>
-              </a:lnSpc>
-              <a:spcBef>
-                <a:spcPts val="0"/>
-              </a:spcBef>
-              <a:spcAft>
-                <a:spcPts val="400"/>
-              </a:spcAft>
-              <a:buNone/>
-              <a:defRPr sz="1750" b="0">
-                <a:solidFill>
-                  <a:srgbClr val="303437"/>
-                </a:solidFill>
-                <a:latin typeface="Noto Sans"/>
-              </a:defRPr>
-            </a:pPr>
-            <a:r>
-              <a:rPr sz="1750" b="0" lang="ja-JP" altLang="en-US">
-                <a:solidFill>
-                  <a:srgbClr val="303437"/>
-                </a:solidFill>
-                <a:latin typeface="Noto Sans"/>
-                <a:ea typeface="Noto Sans CJK JP"/>
-                <a:cs typeface="Noto Sans"/>
-              </a:rPr>
-              <a:t>o/xの交互列に関する中国語の説明例と正解Bを示し、CLEVA形式をHELMへ適用する。</a:t>
-            </a:r>
-          </a:p>
-          <a:p>
-            <a:pPr algn="l">
-              <a:lnSpc>
-                <a:spcPct val="114000"/>
-              </a:lnSpc>
-              <a:spcBef>
-                <a:spcPts val="0"/>
-              </a:spcBef>
-              <a:spcAft>
-                <a:spcPts val="0"/>
-              </a:spcAft>
-              <a:buNone/>
-              <a:defRPr sz="1050" b="0">
-                <a:solidFill>
-                  <a:srgbClr val="303437"/>
-                </a:solidFill>
-                <a:latin typeface="Noto Sans"/>
-              </a:defRPr>
-            </a:pPr>
-            <a:r>
-              <a:rPr sz="1050" b="0" lang="ja-JP" altLang="en-US">
-                <a:solidFill>
-                  <a:srgbClr val="626669"/>
-                </a:solidFill>
-                <a:latin typeface="Noto Sans"/>
-                <a:ea typeface="Noto Sans CJK JP"/>
-                <a:cs typeface="Noto Sans"/>
-                <a:hlinkClick r:id="rId2"/>
-              </a:rPr>
-              <a:t>https://github.com/stanford-crfm/helm/blob/v0.4.0/src/helm/benchmark/scenarios/cleva_scenario.py</a:t>
-            </a:r>
-          </a:p>
-        </p:txBody>
-      </p:sp>
-      <p:sp>
-        <p:nvSpPr>
-          <p:cNvPr id="5" name="文献 2: Attribution 4.0 International (CC BY 4.0)"/>
-          <p:cNvSpPr txBox="1"/>
-          <p:nvPr/>
-        </p:nvSpPr>
-        <p:spPr>
-          <a:xfrm>
-            <a:off x="548640" y="2987548"/>
-            <a:ext cx="8046720" cy="1233184"/>
-          </a:xfrm>
-          <a:prstGeom prst="rect">
-            <a:avLst/>
-          </a:prstGeom>
-          <a:noFill/>
-        </p:spPr>
-        <p:txBody>
-          <a:bodyPr wrap="square" lIns="0" rIns="0" tIns="0" bIns="0">
-            <a:noAutofit/>
-          </a:bodyPr>
-          <a:lstStyle/>
-          <a:p>
-            <a:pPr algn="l">
-              <a:lnSpc>
-                <a:spcPct val="114000"/>
-              </a:lnSpc>
-              <a:spcBef>
-                <a:spcPts val="0"/>
-              </a:spcBef>
-              <a:spcAft>
-                <a:spcPts val="400"/>
-              </a:spcAft>
-              <a:buNone/>
-              <a:defRPr sz="1800" b="0">
-                <a:solidFill>
-                  <a:srgbClr val="303437"/>
-                </a:solidFill>
-                <a:latin typeface="Noto Sans"/>
-              </a:defRPr>
-            </a:pPr>
-            <a:r>
-              <a:rPr sz="1800" b="1" lang="ja-JP" altLang="en-US">
-                <a:solidFill>
-                  <a:srgbClr val="303437"/>
-                </a:solidFill>
-                <a:latin typeface="Noto Sans"/>
-                <a:ea typeface="Noto Sans CJK JP"/>
-                <a:cs typeface="Noto Sans"/>
-              </a:rPr>
-              <a:t>Attribution 4.0 International (CC BY 4.0)</a:t>
-            </a:r>
-          </a:p>
-          <a:p>
-            <a:pPr algn="l">
-              <a:lnSpc>
-                <a:spcPct val="114000"/>
-              </a:lnSpc>
-              <a:spcBef>
-                <a:spcPts val="0"/>
-              </a:spcBef>
-              <a:spcAft>
-                <a:spcPts val="500"/>
-              </a:spcAft>
-              <a:buNone/>
-              <a:defRPr sz="1250" b="0">
-                <a:solidFill>
-                  <a:srgbClr val="303437"/>
-                </a:solidFill>
-                <a:latin typeface="Noto Sans"/>
-              </a:defRPr>
-            </a:pPr>
-            <a:r>
-              <a:rPr sz="1250" b="0" lang="ja-JP" altLang="en-US">
-                <a:solidFill>
-                  <a:srgbClr val="626669"/>
-                </a:solidFill>
-                <a:latin typeface="Noto Sans"/>
-                <a:ea typeface="Noto Sans CJK JP"/>
-                <a:cs typeface="Noto Sans"/>
-              </a:rPr>
-              <a:t>Creative Commons. データ公開READMEが指定する利用条件。</a:t>
-            </a:r>
-          </a:p>
-          <a:p>
-            <a:pPr algn="l">
-              <a:lnSpc>
-                <a:spcPct val="114000"/>
-              </a:lnSpc>
-              <a:spcBef>
-                <a:spcPts val="0"/>
-              </a:spcBef>
-              <a:spcAft>
-                <a:spcPts val="400"/>
-              </a:spcAft>
-              <a:buNone/>
-              <a:defRPr sz="1750" b="0">
-                <a:solidFill>
-                  <a:srgbClr val="303437"/>
-                </a:solidFill>
-                <a:latin typeface="Noto Sans"/>
-              </a:defRPr>
-            </a:pPr>
-            <a:r>
-              <a:rPr sz="1750" b="0" lang="ja-JP" altLang="en-US">
-                <a:solidFill>
-                  <a:srgbClr val="303437"/>
-                </a:solidFill>
-                <a:latin typeface="Noto Sans"/>
-                <a:ea typeface="Noto Sans CJK JP"/>
-                <a:cs typeface="Noto Sans"/>
-              </a:rPr>
-              <a:t>帰属・ライセンスへのリンク・変更の表示など、利用時の条件を定める。</a:t>
+              <a:t>帰属・ライセンスへのリンク・変更の表示など、公開データ利用時の条件を定める。</a:t>
             </a:r>
           </a:p>
           <a:p>
